--- a/docs/plots/carbo/jx_carbo_linsubhr_ratio_anyhosp.pptx
+++ b/docs/plots/carbo/jx_carbo_linsubhr_ratio_anyhosp.pptx
@@ -3003,539 +3003,536 @@
           <p:spPr>
             <a:xfrm>
               <a:off x="817517" y="1896563"/>
-              <a:ext cx="7370972" cy="3594376"/>
+              <a:ext cx="7370972" cy="3598546"/>
             </a:xfrm>
             <a:custGeom>
               <a:avLst/>
               <a:pathLst>
-                <a:path w="7370972" h="3594376">
+                <a:path w="7370972" h="3598546">
                   <a:moveTo>
-                    <a:pt x="1271090" y="0"/>
+                    <a:pt x="1327421" y="0"/>
                   </a:moveTo>
                   <a:lnTo>
-                    <a:pt x="1315517" y="109637"/>
-                  </a:lnTo>
-                  <a:lnTo>
-                    <a:pt x="1393151" y="291393"/>
-                  </a:lnTo>
-                  <a:lnTo>
-                    <a:pt x="1470785" y="463826"/>
-                  </a:lnTo>
-                  <a:lnTo>
-                    <a:pt x="1548419" y="627412"/>
-                  </a:lnTo>
-                  <a:lnTo>
-                    <a:pt x="1626053" y="782607"/>
-                  </a:lnTo>
-                  <a:lnTo>
-                    <a:pt x="1703687" y="929840"/>
-                  </a:lnTo>
-                  <a:lnTo>
-                    <a:pt x="1781321" y="1069520"/>
-                  </a:lnTo>
-                  <a:lnTo>
-                    <a:pt x="1858955" y="1202034"/>
-                  </a:lnTo>
-                  <a:lnTo>
-                    <a:pt x="1936589" y="1327751"/>
-                  </a:lnTo>
-                  <a:lnTo>
-                    <a:pt x="2014223" y="1447018"/>
-                  </a:lnTo>
-                  <a:lnTo>
-                    <a:pt x="2091857" y="1560167"/>
-                  </a:lnTo>
-                  <a:lnTo>
-                    <a:pt x="2169491" y="1667511"/>
-                  </a:lnTo>
-                  <a:lnTo>
-                    <a:pt x="2247125" y="1769348"/>
-                  </a:lnTo>
-                  <a:lnTo>
-                    <a:pt x="2324759" y="1865962"/>
-                  </a:lnTo>
-                  <a:lnTo>
-                    <a:pt x="2402393" y="1957619"/>
-                  </a:lnTo>
-                  <a:lnTo>
-                    <a:pt x="2480027" y="2044573"/>
-                  </a:lnTo>
-                  <a:lnTo>
-                    <a:pt x="2557661" y="2127068"/>
-                  </a:lnTo>
-                  <a:lnTo>
-                    <a:pt x="2635295" y="2205330"/>
-                  </a:lnTo>
-                  <a:lnTo>
-                    <a:pt x="2712930" y="2279577"/>
-                  </a:lnTo>
-                  <a:lnTo>
-                    <a:pt x="2790564" y="2350015"/>
-                  </a:lnTo>
-                  <a:lnTo>
-                    <a:pt x="2868198" y="2416840"/>
-                  </a:lnTo>
-                  <a:lnTo>
-                    <a:pt x="2945832" y="2480237"/>
-                  </a:lnTo>
-                  <a:lnTo>
-                    <a:pt x="3023466" y="2540382"/>
-                  </a:lnTo>
-                  <a:lnTo>
-                    <a:pt x="3101100" y="2597441"/>
-                  </a:lnTo>
-                  <a:lnTo>
-                    <a:pt x="3178734" y="2651573"/>
-                  </a:lnTo>
-                  <a:lnTo>
-                    <a:pt x="3256368" y="2702928"/>
-                  </a:lnTo>
-                  <a:lnTo>
-                    <a:pt x="3334002" y="2751648"/>
-                  </a:lnTo>
-                  <a:lnTo>
-                    <a:pt x="3411636" y="2786859"/>
-                  </a:lnTo>
-                  <a:lnTo>
-                    <a:pt x="3489270" y="2798613"/>
-                  </a:lnTo>
-                  <a:lnTo>
-                    <a:pt x="3566904" y="2810207"/>
-                  </a:lnTo>
-                  <a:lnTo>
-                    <a:pt x="3644538" y="2821643"/>
-                  </a:lnTo>
-                  <a:lnTo>
-                    <a:pt x="3722172" y="2832924"/>
-                  </a:lnTo>
-                  <a:lnTo>
-                    <a:pt x="3799806" y="2844052"/>
-                  </a:lnTo>
-                  <a:lnTo>
-                    <a:pt x="3877440" y="2855029"/>
-                  </a:lnTo>
-                  <a:lnTo>
-                    <a:pt x="3955074" y="2865858"/>
-                  </a:lnTo>
-                  <a:lnTo>
-                    <a:pt x="4032708" y="2876539"/>
-                  </a:lnTo>
-                  <a:lnTo>
-                    <a:pt x="4110342" y="2887075"/>
-                  </a:lnTo>
-                  <a:lnTo>
-                    <a:pt x="4187976" y="2897468"/>
-                  </a:lnTo>
-                  <a:lnTo>
-                    <a:pt x="4265610" y="2907720"/>
-                  </a:lnTo>
-                  <a:lnTo>
-                    <a:pt x="4343244" y="2917832"/>
-                  </a:lnTo>
-                  <a:lnTo>
-                    <a:pt x="4420879" y="2927808"/>
-                  </a:lnTo>
-                  <a:lnTo>
-                    <a:pt x="4498513" y="2937648"/>
-                  </a:lnTo>
-                  <a:lnTo>
-                    <a:pt x="4576147" y="2947354"/>
-                  </a:lnTo>
-                  <a:lnTo>
-                    <a:pt x="4653781" y="2956929"/>
-                  </a:lnTo>
-                  <a:lnTo>
-                    <a:pt x="4731415" y="2966374"/>
-                  </a:lnTo>
-                  <a:lnTo>
-                    <a:pt x="4809049" y="2975690"/>
-                  </a:lnTo>
-                  <a:lnTo>
-                    <a:pt x="4886683" y="2984880"/>
-                  </a:lnTo>
-                  <a:lnTo>
-                    <a:pt x="4964317" y="2993945"/>
-                  </a:lnTo>
-                  <a:lnTo>
-                    <a:pt x="5041951" y="3002887"/>
-                  </a:lnTo>
-                  <a:lnTo>
-                    <a:pt x="5119585" y="3011708"/>
-                  </a:lnTo>
-                  <a:lnTo>
-                    <a:pt x="5197219" y="3020409"/>
-                  </a:lnTo>
-                  <a:lnTo>
-                    <a:pt x="5274853" y="3028992"/>
-                  </a:lnTo>
-                  <a:lnTo>
-                    <a:pt x="5352487" y="3037459"/>
-                  </a:lnTo>
-                  <a:lnTo>
-                    <a:pt x="5430121" y="3045810"/>
-                  </a:lnTo>
-                  <a:lnTo>
-                    <a:pt x="5507755" y="3054048"/>
-                  </a:lnTo>
-                  <a:lnTo>
-                    <a:pt x="5585389" y="3062174"/>
-                  </a:lnTo>
-                  <a:lnTo>
-                    <a:pt x="5663023" y="3070190"/>
-                  </a:lnTo>
-                  <a:lnTo>
-                    <a:pt x="5740657" y="3078097"/>
-                  </a:lnTo>
-                  <a:lnTo>
-                    <a:pt x="5818291" y="3085897"/>
-                  </a:lnTo>
-                  <a:lnTo>
-                    <a:pt x="5895925" y="3093591"/>
-                  </a:lnTo>
-                  <a:lnTo>
-                    <a:pt x="5973559" y="3101180"/>
-                  </a:lnTo>
-                  <a:lnTo>
-                    <a:pt x="6051193" y="3108667"/>
-                  </a:lnTo>
-                  <a:lnTo>
-                    <a:pt x="6128827" y="3116052"/>
-                  </a:lnTo>
-                  <a:lnTo>
-                    <a:pt x="6206462" y="3123336"/>
-                  </a:lnTo>
-                  <a:lnTo>
-                    <a:pt x="6284096" y="3130522"/>
-                  </a:lnTo>
-                  <a:lnTo>
-                    <a:pt x="6361730" y="3137610"/>
-                  </a:lnTo>
-                  <a:lnTo>
-                    <a:pt x="6439364" y="3144602"/>
-                  </a:lnTo>
-                  <a:lnTo>
-                    <a:pt x="6516998" y="3151499"/>
-                  </a:lnTo>
-                  <a:lnTo>
-                    <a:pt x="6594632" y="3158302"/>
-                  </a:lnTo>
-                  <a:lnTo>
-                    <a:pt x="6672266" y="3165013"/>
-                  </a:lnTo>
-                  <a:lnTo>
-                    <a:pt x="6749900" y="3171633"/>
-                  </a:lnTo>
-                  <a:lnTo>
-                    <a:pt x="6827534" y="3178163"/>
-                  </a:lnTo>
-                  <a:lnTo>
-                    <a:pt x="6905168" y="3184604"/>
-                  </a:lnTo>
-                  <a:lnTo>
-                    <a:pt x="6982802" y="3190958"/>
-                  </a:lnTo>
-                  <a:lnTo>
-                    <a:pt x="7060436" y="3197226"/>
-                  </a:lnTo>
-                  <a:lnTo>
-                    <a:pt x="7138070" y="3203408"/>
-                  </a:lnTo>
-                  <a:lnTo>
-                    <a:pt x="7215704" y="3209507"/>
-                  </a:lnTo>
-                  <a:lnTo>
-                    <a:pt x="7293338" y="3215523"/>
-                  </a:lnTo>
-                  <a:lnTo>
-                    <a:pt x="7370972" y="3221457"/>
-                  </a:lnTo>
-                  <a:lnTo>
-                    <a:pt x="7370972" y="3594376"/>
-                  </a:lnTo>
-                  <a:lnTo>
-                    <a:pt x="7293338" y="3591225"/>
-                  </a:lnTo>
-                  <a:lnTo>
-                    <a:pt x="7215704" y="3587904"/>
-                  </a:lnTo>
-                  <a:lnTo>
-                    <a:pt x="7138070" y="3584404"/>
-                  </a:lnTo>
-                  <a:lnTo>
-                    <a:pt x="7060436" y="3580714"/>
-                  </a:lnTo>
-                  <a:lnTo>
-                    <a:pt x="6982802" y="3576824"/>
-                  </a:lnTo>
-                  <a:lnTo>
-                    <a:pt x="6905168" y="3572724"/>
-                  </a:lnTo>
-                  <a:lnTo>
-                    <a:pt x="6827534" y="3568403"/>
-                  </a:lnTo>
-                  <a:lnTo>
-                    <a:pt x="6749900" y="3563848"/>
-                  </a:lnTo>
-                  <a:lnTo>
-                    <a:pt x="6672266" y="3559046"/>
-                  </a:lnTo>
-                  <a:lnTo>
-                    <a:pt x="6594632" y="3553985"/>
-                  </a:lnTo>
-                  <a:lnTo>
-                    <a:pt x="6516998" y="3548650"/>
-                  </a:lnTo>
-                  <a:lnTo>
-                    <a:pt x="6439364" y="3543027"/>
-                  </a:lnTo>
-                  <a:lnTo>
-                    <a:pt x="6361730" y="3537099"/>
-                  </a:lnTo>
-                  <a:lnTo>
-                    <a:pt x="6284096" y="3530851"/>
-                  </a:lnTo>
-                  <a:lnTo>
-                    <a:pt x="6206462" y="3524265"/>
-                  </a:lnTo>
-                  <a:lnTo>
-                    <a:pt x="6128827" y="3517323"/>
-                  </a:lnTo>
-                  <a:lnTo>
-                    <a:pt x="6051193" y="3510006"/>
-                  </a:lnTo>
-                  <a:lnTo>
-                    <a:pt x="5973559" y="3502293"/>
-                  </a:lnTo>
-                  <a:lnTo>
-                    <a:pt x="5895925" y="3494163"/>
-                  </a:lnTo>
-                  <a:lnTo>
-                    <a:pt x="5818291" y="3485593"/>
-                  </a:lnTo>
-                  <a:lnTo>
-                    <a:pt x="5740657" y="3476560"/>
-                  </a:lnTo>
-                  <a:lnTo>
-                    <a:pt x="5663023" y="3467039"/>
-                  </a:lnTo>
-                  <a:lnTo>
-                    <a:pt x="5585389" y="3457003"/>
-                  </a:lnTo>
-                  <a:lnTo>
-                    <a:pt x="5507755" y="3446423"/>
-                  </a:lnTo>
-                  <a:lnTo>
-                    <a:pt x="5430121" y="3435272"/>
-                  </a:lnTo>
-                  <a:lnTo>
-                    <a:pt x="5352487" y="3423518"/>
-                  </a:lnTo>
-                  <a:lnTo>
-                    <a:pt x="5274853" y="3411128"/>
-                  </a:lnTo>
-                  <a:lnTo>
-                    <a:pt x="5197219" y="3398069"/>
-                  </a:lnTo>
-                  <a:lnTo>
-                    <a:pt x="5119585" y="3384303"/>
-                  </a:lnTo>
-                  <a:lnTo>
-                    <a:pt x="5041951" y="3369793"/>
-                  </a:lnTo>
-                  <a:lnTo>
-                    <a:pt x="4964317" y="3354498"/>
-                  </a:lnTo>
-                  <a:lnTo>
-                    <a:pt x="4886683" y="3338376"/>
-                  </a:lnTo>
-                  <a:lnTo>
-                    <a:pt x="4809049" y="3321382"/>
-                  </a:lnTo>
-                  <a:lnTo>
-                    <a:pt x="4731415" y="3303469"/>
-                  </a:lnTo>
-                  <a:lnTo>
-                    <a:pt x="4653781" y="3284588"/>
-                  </a:lnTo>
-                  <a:lnTo>
-                    <a:pt x="4576147" y="3264686"/>
-                  </a:lnTo>
-                  <a:lnTo>
-                    <a:pt x="4498513" y="3243707"/>
-                  </a:lnTo>
-                  <a:lnTo>
-                    <a:pt x="4420879" y="3221594"/>
-                  </a:lnTo>
-                  <a:lnTo>
-                    <a:pt x="4343244" y="3198286"/>
-                  </a:lnTo>
-                  <a:lnTo>
-                    <a:pt x="4265610" y="3173717"/>
-                  </a:lnTo>
-                  <a:lnTo>
-                    <a:pt x="4187976" y="3147819"/>
-                  </a:lnTo>
-                  <a:lnTo>
-                    <a:pt x="4110342" y="3120522"/>
-                  </a:lnTo>
-                  <a:lnTo>
-                    <a:pt x="4032708" y="3091748"/>
-                  </a:lnTo>
-                  <a:lnTo>
-                    <a:pt x="3955074" y="3061418"/>
-                  </a:lnTo>
-                  <a:lnTo>
-                    <a:pt x="3877440" y="3029448"/>
-                  </a:lnTo>
-                  <a:lnTo>
-                    <a:pt x="3799806" y="2995749"/>
-                  </a:lnTo>
-                  <a:lnTo>
-                    <a:pt x="3722172" y="2960228"/>
-                  </a:lnTo>
-                  <a:lnTo>
-                    <a:pt x="3644538" y="2922786"/>
-                  </a:lnTo>
-                  <a:lnTo>
-                    <a:pt x="3566904" y="2883320"/>
-                  </a:lnTo>
-                  <a:lnTo>
-                    <a:pt x="3489270" y="2841719"/>
-                  </a:lnTo>
-                  <a:lnTo>
-                    <a:pt x="3411636" y="2797869"/>
-                  </a:lnTo>
-                  <a:lnTo>
-                    <a:pt x="3334002" y="2774944"/>
-                  </a:lnTo>
-                  <a:lnTo>
-                    <a:pt x="3256368" y="2762865"/>
-                  </a:lnTo>
-                  <a:lnTo>
-                    <a:pt x="3178734" y="2750619"/>
-                  </a:lnTo>
-                  <a:lnTo>
-                    <a:pt x="3101100" y="2738205"/>
-                  </a:lnTo>
-                  <a:lnTo>
-                    <a:pt x="3023466" y="2725620"/>
-                  </a:lnTo>
-                  <a:lnTo>
-                    <a:pt x="2945832" y="2712862"/>
-                  </a:lnTo>
-                  <a:lnTo>
-                    <a:pt x="2868198" y="2699929"/>
-                  </a:lnTo>
-                  <a:lnTo>
-                    <a:pt x="2790564" y="2686817"/>
-                  </a:lnTo>
-                  <a:lnTo>
-                    <a:pt x="2712930" y="2673525"/>
-                  </a:lnTo>
-                  <a:lnTo>
-                    <a:pt x="2635295" y="2660050"/>
-                  </a:lnTo>
-                  <a:lnTo>
-                    <a:pt x="2557661" y="2646390"/>
-                  </a:lnTo>
-                  <a:lnTo>
-                    <a:pt x="2480027" y="2632541"/>
-                  </a:lnTo>
-                  <a:lnTo>
-                    <a:pt x="2402393" y="2618502"/>
-                  </a:lnTo>
-                  <a:lnTo>
-                    <a:pt x="2324759" y="2604270"/>
-                  </a:lnTo>
-                  <a:lnTo>
-                    <a:pt x="2247125" y="2589842"/>
-                  </a:lnTo>
-                  <a:lnTo>
-                    <a:pt x="2169491" y="2575215"/>
-                  </a:lnTo>
-                  <a:lnTo>
-                    <a:pt x="2091857" y="2560387"/>
-                  </a:lnTo>
-                  <a:lnTo>
-                    <a:pt x="2014223" y="2545355"/>
-                  </a:lnTo>
-                  <a:lnTo>
-                    <a:pt x="1936589" y="2530116"/>
-                  </a:lnTo>
-                  <a:lnTo>
-                    <a:pt x="1858955" y="2514668"/>
-                  </a:lnTo>
-                  <a:lnTo>
-                    <a:pt x="1781321" y="2499006"/>
-                  </a:lnTo>
-                  <a:lnTo>
-                    <a:pt x="1703687" y="2483130"/>
-                  </a:lnTo>
-                  <a:lnTo>
-                    <a:pt x="1626053" y="2467034"/>
-                  </a:lnTo>
-                  <a:lnTo>
-                    <a:pt x="1548419" y="2450718"/>
-                  </a:lnTo>
-                  <a:lnTo>
-                    <a:pt x="1470785" y="2434176"/>
-                  </a:lnTo>
-                  <a:lnTo>
-                    <a:pt x="1393151" y="2417407"/>
-                  </a:lnTo>
-                  <a:lnTo>
-                    <a:pt x="1315517" y="2400408"/>
-                  </a:lnTo>
-                  <a:lnTo>
-                    <a:pt x="1237883" y="2383174"/>
-                  </a:lnTo>
-                  <a:lnTo>
-                    <a:pt x="1160249" y="2365703"/>
-                  </a:lnTo>
-                  <a:lnTo>
-                    <a:pt x="1082615" y="2347992"/>
-                  </a:lnTo>
-                  <a:lnTo>
-                    <a:pt x="1004981" y="2330036"/>
-                  </a:lnTo>
-                  <a:lnTo>
-                    <a:pt x="927346" y="2311834"/>
-                  </a:lnTo>
-                  <a:lnTo>
-                    <a:pt x="849712" y="2293382"/>
-                  </a:lnTo>
-                  <a:lnTo>
-                    <a:pt x="772078" y="2274675"/>
-                  </a:lnTo>
-                  <a:lnTo>
-                    <a:pt x="694444" y="2255711"/>
-                  </a:lnTo>
-                  <a:lnTo>
-                    <a:pt x="616810" y="2236486"/>
-                  </a:lnTo>
-                  <a:lnTo>
-                    <a:pt x="539176" y="2216996"/>
-                  </a:lnTo>
-                  <a:lnTo>
-                    <a:pt x="461542" y="2197238"/>
-                  </a:lnTo>
-                  <a:lnTo>
-                    <a:pt x="383908" y="2177208"/>
-                  </a:lnTo>
-                  <a:lnTo>
-                    <a:pt x="306274" y="2156903"/>
-                  </a:lnTo>
-                  <a:lnTo>
-                    <a:pt x="228640" y="2136318"/>
-                  </a:lnTo>
-                  <a:lnTo>
-                    <a:pt x="151006" y="2115450"/>
-                  </a:lnTo>
-                  <a:lnTo>
-                    <a:pt x="73372" y="2094294"/>
-                  </a:lnTo>
-                  <a:lnTo>
-                    <a:pt x="0" y="2074025"/>
+                    <a:pt x="1393151" y="164215"/>
+                  </a:lnTo>
+                  <a:lnTo>
+                    <a:pt x="1470785" y="347956"/>
+                  </a:lnTo>
+                  <a:lnTo>
+                    <a:pt x="1548419" y="522019"/>
+                  </a:lnTo>
+                  <a:lnTo>
+                    <a:pt x="1626053" y="686914"/>
+                  </a:lnTo>
+                  <a:lnTo>
+                    <a:pt x="1703687" y="843123"/>
+                  </a:lnTo>
+                  <a:lnTo>
+                    <a:pt x="1781321" y="991105"/>
+                  </a:lnTo>
+                  <a:lnTo>
+                    <a:pt x="1858955" y="1131292"/>
+                  </a:lnTo>
+                  <a:lnTo>
+                    <a:pt x="1936589" y="1264096"/>
+                  </a:lnTo>
+                  <a:lnTo>
+                    <a:pt x="2014223" y="1389904"/>
+                  </a:lnTo>
+                  <a:lnTo>
+                    <a:pt x="2091857" y="1509086"/>
+                  </a:lnTo>
+                  <a:lnTo>
+                    <a:pt x="2169491" y="1621991"/>
+                  </a:lnTo>
+                  <a:lnTo>
+                    <a:pt x="2247125" y="1728948"/>
+                  </a:lnTo>
+                  <a:lnTo>
+                    <a:pt x="2324759" y="1830272"/>
+                  </a:lnTo>
+                  <a:lnTo>
+                    <a:pt x="2402393" y="1926259"/>
+                  </a:lnTo>
+                  <a:lnTo>
+                    <a:pt x="2480027" y="2017191"/>
+                  </a:lnTo>
+                  <a:lnTo>
+                    <a:pt x="2557661" y="2103332"/>
+                  </a:lnTo>
+                  <a:lnTo>
+                    <a:pt x="2635295" y="2184937"/>
+                  </a:lnTo>
+                  <a:lnTo>
+                    <a:pt x="2712930" y="2262243"/>
+                  </a:lnTo>
+                  <a:lnTo>
+                    <a:pt x="2790564" y="2335478"/>
+                  </a:lnTo>
+                  <a:lnTo>
+                    <a:pt x="2868198" y="2404855"/>
+                  </a:lnTo>
+                  <a:lnTo>
+                    <a:pt x="2945832" y="2470578"/>
+                  </a:lnTo>
+                  <a:lnTo>
+                    <a:pt x="3023466" y="2532839"/>
+                  </a:lnTo>
+                  <a:lnTo>
+                    <a:pt x="3101100" y="2591821"/>
+                  </a:lnTo>
+                  <a:lnTo>
+                    <a:pt x="3178734" y="2647696"/>
+                  </a:lnTo>
+                  <a:lnTo>
+                    <a:pt x="3256368" y="2700628"/>
+                  </a:lnTo>
+                  <a:lnTo>
+                    <a:pt x="3334002" y="2750772"/>
+                  </a:lnTo>
+                  <a:lnTo>
+                    <a:pt x="3411636" y="2786986"/>
+                  </a:lnTo>
+                  <a:lnTo>
+                    <a:pt x="3489270" y="2799121"/>
+                  </a:lnTo>
+                  <a:lnTo>
+                    <a:pt x="3566904" y="2811085"/>
+                  </a:lnTo>
+                  <a:lnTo>
+                    <a:pt x="3644538" y="2822881"/>
+                  </a:lnTo>
+                  <a:lnTo>
+                    <a:pt x="3722172" y="2834512"/>
+                  </a:lnTo>
+                  <a:lnTo>
+                    <a:pt x="3799806" y="2845980"/>
+                  </a:lnTo>
+                  <a:lnTo>
+                    <a:pt x="3877440" y="2857288"/>
+                  </a:lnTo>
+                  <a:lnTo>
+                    <a:pt x="3955074" y="2868437"/>
+                  </a:lnTo>
+                  <a:lnTo>
+                    <a:pt x="4032708" y="2879429"/>
+                  </a:lnTo>
+                  <a:lnTo>
+                    <a:pt x="4110342" y="2890268"/>
+                  </a:lnTo>
+                  <a:lnTo>
+                    <a:pt x="4187976" y="2900954"/>
+                  </a:lnTo>
+                  <a:lnTo>
+                    <a:pt x="4265610" y="2911491"/>
+                  </a:lnTo>
+                  <a:lnTo>
+                    <a:pt x="4343244" y="2921880"/>
+                  </a:lnTo>
+                  <a:lnTo>
+                    <a:pt x="4420879" y="2932123"/>
+                  </a:lnTo>
+                  <a:lnTo>
+                    <a:pt x="4498513" y="2942223"/>
+                  </a:lnTo>
+                  <a:lnTo>
+                    <a:pt x="4576147" y="2952181"/>
+                  </a:lnTo>
+                  <a:lnTo>
+                    <a:pt x="4653781" y="2962000"/>
+                  </a:lnTo>
+                  <a:lnTo>
+                    <a:pt x="4731415" y="2971681"/>
+                  </a:lnTo>
+                  <a:lnTo>
+                    <a:pt x="4809049" y="2981226"/>
+                  </a:lnTo>
+                  <a:lnTo>
+                    <a:pt x="4886683" y="2990638"/>
+                  </a:lnTo>
+                  <a:lnTo>
+                    <a:pt x="4964317" y="2999917"/>
+                  </a:lnTo>
+                  <a:lnTo>
+                    <a:pt x="5041951" y="3009067"/>
+                  </a:lnTo>
+                  <a:lnTo>
+                    <a:pt x="5119585" y="3018088"/>
+                  </a:lnTo>
+                  <a:lnTo>
+                    <a:pt x="5197219" y="3026983"/>
+                  </a:lnTo>
+                  <a:lnTo>
+                    <a:pt x="5274853" y="3035753"/>
+                  </a:lnTo>
+                  <a:lnTo>
+                    <a:pt x="5352487" y="3044400"/>
+                  </a:lnTo>
+                  <a:lnTo>
+                    <a:pt x="5430121" y="3052926"/>
+                  </a:lnTo>
+                  <a:lnTo>
+                    <a:pt x="5507755" y="3061333"/>
+                  </a:lnTo>
+                  <a:lnTo>
+                    <a:pt x="5585389" y="3069621"/>
+                  </a:lnTo>
+                  <a:lnTo>
+                    <a:pt x="5663023" y="3077794"/>
+                  </a:lnTo>
+                  <a:lnTo>
+                    <a:pt x="5740657" y="3085852"/>
+                  </a:lnTo>
+                  <a:lnTo>
+                    <a:pt x="5818291" y="3093797"/>
+                  </a:lnTo>
+                  <a:lnTo>
+                    <a:pt x="5895925" y="3101630"/>
+                  </a:lnTo>
+                  <a:lnTo>
+                    <a:pt x="5973559" y="3109354"/>
+                  </a:lnTo>
+                  <a:lnTo>
+                    <a:pt x="6051193" y="3116969"/>
+                  </a:lnTo>
+                  <a:lnTo>
+                    <a:pt x="6128827" y="3124478"/>
+                  </a:lnTo>
+                  <a:lnTo>
+                    <a:pt x="6206462" y="3131882"/>
+                  </a:lnTo>
+                  <a:lnTo>
+                    <a:pt x="6284096" y="3139181"/>
+                  </a:lnTo>
+                  <a:lnTo>
+                    <a:pt x="6361730" y="3146379"/>
+                  </a:lnTo>
+                  <a:lnTo>
+                    <a:pt x="6439364" y="3153475"/>
+                  </a:lnTo>
+                  <a:lnTo>
+                    <a:pt x="6516998" y="3160472"/>
+                  </a:lnTo>
+                  <a:lnTo>
+                    <a:pt x="6594632" y="3167371"/>
+                  </a:lnTo>
+                  <a:lnTo>
+                    <a:pt x="6672266" y="3174173"/>
+                  </a:lnTo>
+                  <a:lnTo>
+                    <a:pt x="6749900" y="3180880"/>
+                  </a:lnTo>
+                  <a:lnTo>
+                    <a:pt x="6827534" y="3187493"/>
+                  </a:lnTo>
+                  <a:lnTo>
+                    <a:pt x="6905168" y="3194013"/>
+                  </a:lnTo>
+                  <a:lnTo>
+                    <a:pt x="6982802" y="3200442"/>
+                  </a:lnTo>
+                  <a:lnTo>
+                    <a:pt x="7060436" y="3206781"/>
+                  </a:lnTo>
+                  <a:lnTo>
+                    <a:pt x="7138070" y="3213031"/>
+                  </a:lnTo>
+                  <a:lnTo>
+                    <a:pt x="7215704" y="3219193"/>
+                  </a:lnTo>
+                  <a:lnTo>
+                    <a:pt x="7293338" y="3225269"/>
+                  </a:lnTo>
+                  <a:lnTo>
+                    <a:pt x="7370972" y="3231259"/>
+                  </a:lnTo>
+                  <a:lnTo>
+                    <a:pt x="7370972" y="3598546"/>
+                  </a:lnTo>
+                  <a:lnTo>
+                    <a:pt x="7293338" y="3595538"/>
+                  </a:lnTo>
+                  <a:lnTo>
+                    <a:pt x="7215704" y="3592363"/>
+                  </a:lnTo>
+                  <a:lnTo>
+                    <a:pt x="7138070" y="3589012"/>
+                  </a:lnTo>
+                  <a:lnTo>
+                    <a:pt x="7060436" y="3585474"/>
+                  </a:lnTo>
+                  <a:lnTo>
+                    <a:pt x="6982802" y="3581739"/>
+                  </a:lnTo>
+                  <a:lnTo>
+                    <a:pt x="6905168" y="3577797"/>
+                  </a:lnTo>
+                  <a:lnTo>
+                    <a:pt x="6827534" y="3573635"/>
+                  </a:lnTo>
+                  <a:lnTo>
+                    <a:pt x="6749900" y="3569242"/>
+                  </a:lnTo>
+                  <a:lnTo>
+                    <a:pt x="6672266" y="3564605"/>
+                  </a:lnTo>
+                  <a:lnTo>
+                    <a:pt x="6594632" y="3559710"/>
+                  </a:lnTo>
+                  <a:lnTo>
+                    <a:pt x="6516998" y="3554543"/>
+                  </a:lnTo>
+                  <a:lnTo>
+                    <a:pt x="6439364" y="3549089"/>
+                  </a:lnTo>
+                  <a:lnTo>
+                    <a:pt x="6361730" y="3543331"/>
+                  </a:lnTo>
+                  <a:lnTo>
+                    <a:pt x="6284096" y="3537254"/>
+                  </a:lnTo>
+                  <a:lnTo>
+                    <a:pt x="6206462" y="3530838"/>
+                  </a:lnTo>
+                  <a:lnTo>
+                    <a:pt x="6128827" y="3524066"/>
+                  </a:lnTo>
+                  <a:lnTo>
+                    <a:pt x="6051193" y="3516917"/>
+                  </a:lnTo>
+                  <a:lnTo>
+                    <a:pt x="5973559" y="3509370"/>
+                  </a:lnTo>
+                  <a:lnTo>
+                    <a:pt x="5895925" y="3501404"/>
+                  </a:lnTo>
+                  <a:lnTo>
+                    <a:pt x="5818291" y="3492995"/>
+                  </a:lnTo>
+                  <a:lnTo>
+                    <a:pt x="5740657" y="3484119"/>
+                  </a:lnTo>
+                  <a:lnTo>
+                    <a:pt x="5663023" y="3474749"/>
+                  </a:lnTo>
+                  <a:lnTo>
+                    <a:pt x="5585389" y="3464858"/>
+                  </a:lnTo>
+                  <a:lnTo>
+                    <a:pt x="5507755" y="3454417"/>
+                  </a:lnTo>
+                  <a:lnTo>
+                    <a:pt x="5430121" y="3443396"/>
+                  </a:lnTo>
+                  <a:lnTo>
+                    <a:pt x="5352487" y="3431762"/>
+                  </a:lnTo>
+                  <a:lnTo>
+                    <a:pt x="5274853" y="3419481"/>
+                  </a:lnTo>
+                  <a:lnTo>
+                    <a:pt x="5197219" y="3406517"/>
+                  </a:lnTo>
+                  <a:lnTo>
+                    <a:pt x="5119585" y="3392832"/>
+                  </a:lnTo>
+                  <a:lnTo>
+                    <a:pt x="5041951" y="3378387"/>
+                  </a:lnTo>
+                  <a:lnTo>
+                    <a:pt x="4964317" y="3363138"/>
+                  </a:lnTo>
+                  <a:lnTo>
+                    <a:pt x="4886683" y="3347041"/>
+                  </a:lnTo>
+                  <a:lnTo>
+                    <a:pt x="4809049" y="3330050"/>
+                  </a:lnTo>
+                  <a:lnTo>
+                    <a:pt x="4731415" y="3312114"/>
+                  </a:lnTo>
+                  <a:lnTo>
+                    <a:pt x="4653781" y="3293180"/>
+                  </a:lnTo>
+                  <a:lnTo>
+                    <a:pt x="4576147" y="3273194"/>
+                  </a:lnTo>
+                  <a:lnTo>
+                    <a:pt x="4498513" y="3252097"/>
+                  </a:lnTo>
+                  <a:lnTo>
+                    <a:pt x="4420879" y="3229826"/>
+                  </a:lnTo>
+                  <a:lnTo>
+                    <a:pt x="4343244" y="3206317"/>
+                  </a:lnTo>
+                  <a:lnTo>
+                    <a:pt x="4265610" y="3181502"/>
+                  </a:lnTo>
+                  <a:lnTo>
+                    <a:pt x="4187976" y="3155306"/>
+                  </a:lnTo>
+                  <a:lnTo>
+                    <a:pt x="4110342" y="3127654"/>
+                  </a:lnTo>
+                  <a:lnTo>
+                    <a:pt x="4032708" y="3098465"/>
+                  </a:lnTo>
+                  <a:lnTo>
+                    <a:pt x="3955074" y="3067652"/>
+                  </a:lnTo>
+                  <a:lnTo>
+                    <a:pt x="3877440" y="3035127"/>
+                  </a:lnTo>
+                  <a:lnTo>
+                    <a:pt x="3799806" y="3000793"/>
+                  </a:lnTo>
+                  <a:lnTo>
+                    <a:pt x="3722172" y="2964550"/>
+                  </a:lnTo>
+                  <a:lnTo>
+                    <a:pt x="3644538" y="2926292"/>
+                  </a:lnTo>
+                  <a:lnTo>
+                    <a:pt x="3566904" y="2885907"/>
+                  </a:lnTo>
+                  <a:lnTo>
+                    <a:pt x="3489270" y="2843276"/>
+                  </a:lnTo>
+                  <a:lnTo>
+                    <a:pt x="3411636" y="2798275"/>
+                  </a:lnTo>
+                  <a:lnTo>
+                    <a:pt x="3334002" y="2774680"/>
+                  </a:lnTo>
+                  <a:lnTo>
+                    <a:pt x="3256368" y="2762198"/>
+                  </a:lnTo>
+                  <a:lnTo>
+                    <a:pt x="3178734" y="2749539"/>
+                  </a:lnTo>
+                  <a:lnTo>
+                    <a:pt x="3101100" y="2736700"/>
+                  </a:lnTo>
+                  <a:lnTo>
+                    <a:pt x="3023466" y="2723678"/>
+                  </a:lnTo>
+                  <a:lnTo>
+                    <a:pt x="2945832" y="2710471"/>
+                  </a:lnTo>
+                  <a:lnTo>
+                    <a:pt x="2868198" y="2697077"/>
+                  </a:lnTo>
+                  <a:lnTo>
+                    <a:pt x="2790564" y="2683492"/>
+                  </a:lnTo>
+                  <a:lnTo>
+                    <a:pt x="2712930" y="2669714"/>
+                  </a:lnTo>
+                  <a:lnTo>
+                    <a:pt x="2635295" y="2655740"/>
+                  </a:lnTo>
+                  <a:lnTo>
+                    <a:pt x="2557661" y="2641567"/>
+                  </a:lnTo>
+                  <a:lnTo>
+                    <a:pt x="2480027" y="2627193"/>
+                  </a:lnTo>
+                  <a:lnTo>
+                    <a:pt x="2402393" y="2612614"/>
+                  </a:lnTo>
+                  <a:lnTo>
+                    <a:pt x="2324759" y="2597829"/>
+                  </a:lnTo>
+                  <a:lnTo>
+                    <a:pt x="2247125" y="2582833"/>
+                  </a:lnTo>
+                  <a:lnTo>
+                    <a:pt x="2169491" y="2567623"/>
+                  </a:lnTo>
+                  <a:lnTo>
+                    <a:pt x="2091857" y="2552198"/>
+                  </a:lnTo>
+                  <a:lnTo>
+                    <a:pt x="2014223" y="2536553"/>
+                  </a:lnTo>
+                  <a:lnTo>
+                    <a:pt x="1936589" y="2520686"/>
+                  </a:lnTo>
+                  <a:lnTo>
+                    <a:pt x="1858955" y="2504594"/>
+                  </a:lnTo>
+                  <a:lnTo>
+                    <a:pt x="1781321" y="2488272"/>
+                  </a:lnTo>
+                  <a:lnTo>
+                    <a:pt x="1703687" y="2471719"/>
+                  </a:lnTo>
+                  <a:lnTo>
+                    <a:pt x="1626053" y="2454930"/>
+                  </a:lnTo>
+                  <a:lnTo>
+                    <a:pt x="1548419" y="2437902"/>
+                  </a:lnTo>
+                  <a:lnTo>
+                    <a:pt x="1470785" y="2420633"/>
+                  </a:lnTo>
+                  <a:lnTo>
+                    <a:pt x="1393151" y="2403118"/>
+                  </a:lnTo>
+                  <a:lnTo>
+                    <a:pt x="1315517" y="2385354"/>
+                  </a:lnTo>
+                  <a:lnTo>
+                    <a:pt x="1237883" y="2367337"/>
+                  </a:lnTo>
+                  <a:lnTo>
+                    <a:pt x="1160249" y="2349064"/>
+                  </a:lnTo>
+                  <a:lnTo>
+                    <a:pt x="1082615" y="2330532"/>
+                  </a:lnTo>
+                  <a:lnTo>
+                    <a:pt x="1004981" y="2311736"/>
+                  </a:lnTo>
+                  <a:lnTo>
+                    <a:pt x="927346" y="2292672"/>
+                  </a:lnTo>
+                  <a:lnTo>
+                    <a:pt x="849712" y="2273338"/>
+                  </a:lnTo>
+                  <a:lnTo>
+                    <a:pt x="772078" y="2253729"/>
+                  </a:lnTo>
+                  <a:lnTo>
+                    <a:pt x="694444" y="2233841"/>
+                  </a:lnTo>
+                  <a:lnTo>
+                    <a:pt x="616810" y="2213671"/>
+                  </a:lnTo>
+                  <a:lnTo>
+                    <a:pt x="539176" y="2193213"/>
+                  </a:lnTo>
+                  <a:lnTo>
+                    <a:pt x="461542" y="2172465"/>
+                  </a:lnTo>
+                  <a:lnTo>
+                    <a:pt x="383908" y="2151422"/>
+                  </a:lnTo>
+                  <a:lnTo>
+                    <a:pt x="306274" y="2130079"/>
+                  </a:lnTo>
+                  <a:lnTo>
+                    <a:pt x="228640" y="2108434"/>
+                  </a:lnTo>
+                  <a:lnTo>
+                    <a:pt x="151006" y="2086480"/>
+                  </a:lnTo>
+                  <a:lnTo>
+                    <a:pt x="73372" y="2064214"/>
+                  </a:lnTo>
+                  <a:lnTo>
+                    <a:pt x="0" y="2042872"/>
                   </a:lnTo>
                   <a:close/>
                 </a:path>
@@ -3561,252 +3558,249 @@
           </p:nvSpPr>
           <p:spPr>
             <a:xfrm>
-              <a:off x="2088607" y="1896563"/>
-              <a:ext cx="6099882" cy="3221457"/>
+              <a:off x="2144939" y="1896563"/>
+              <a:ext cx="6043551" cy="3231259"/>
             </a:xfrm>
             <a:custGeom>
               <a:avLst/>
               <a:pathLst>
-                <a:path w="6099882" h="3221457">
+                <a:path w="6043551" h="3231259">
                   <a:moveTo>
                     <a:pt x="0" y="0"/>
                   </a:moveTo>
                   <a:lnTo>
-                    <a:pt x="44427" y="109637"/>
-                  </a:lnTo>
-                  <a:lnTo>
-                    <a:pt x="122061" y="291393"/>
-                  </a:lnTo>
-                  <a:lnTo>
-                    <a:pt x="199695" y="463826"/>
-                  </a:lnTo>
-                  <a:lnTo>
-                    <a:pt x="277329" y="627412"/>
-                  </a:lnTo>
-                  <a:lnTo>
-                    <a:pt x="354963" y="782607"/>
-                  </a:lnTo>
-                  <a:lnTo>
-                    <a:pt x="432597" y="929840"/>
-                  </a:lnTo>
-                  <a:lnTo>
-                    <a:pt x="510231" y="1069520"/>
-                  </a:lnTo>
-                  <a:lnTo>
-                    <a:pt x="587865" y="1202034"/>
-                  </a:lnTo>
-                  <a:lnTo>
-                    <a:pt x="665499" y="1327751"/>
-                  </a:lnTo>
-                  <a:lnTo>
-                    <a:pt x="743133" y="1447018"/>
-                  </a:lnTo>
-                  <a:lnTo>
-                    <a:pt x="820767" y="1560167"/>
-                  </a:lnTo>
-                  <a:lnTo>
-                    <a:pt x="898401" y="1667511"/>
-                  </a:lnTo>
-                  <a:lnTo>
-                    <a:pt x="976035" y="1769348"/>
-                  </a:lnTo>
-                  <a:lnTo>
-                    <a:pt x="1053669" y="1865962"/>
-                  </a:lnTo>
-                  <a:lnTo>
-                    <a:pt x="1131303" y="1957619"/>
-                  </a:lnTo>
-                  <a:lnTo>
-                    <a:pt x="1208937" y="2044573"/>
-                  </a:lnTo>
-                  <a:lnTo>
-                    <a:pt x="1286571" y="2127068"/>
-                  </a:lnTo>
-                  <a:lnTo>
-                    <a:pt x="1364205" y="2205330"/>
-                  </a:lnTo>
-                  <a:lnTo>
-                    <a:pt x="1441839" y="2279577"/>
-                  </a:lnTo>
-                  <a:lnTo>
-                    <a:pt x="1519473" y="2350015"/>
-                  </a:lnTo>
-                  <a:lnTo>
-                    <a:pt x="1597108" y="2416840"/>
-                  </a:lnTo>
-                  <a:lnTo>
-                    <a:pt x="1674742" y="2480237"/>
-                  </a:lnTo>
-                  <a:lnTo>
-                    <a:pt x="1752376" y="2540382"/>
-                  </a:lnTo>
-                  <a:lnTo>
-                    <a:pt x="1830010" y="2597441"/>
-                  </a:lnTo>
-                  <a:lnTo>
-                    <a:pt x="1907644" y="2651573"/>
-                  </a:lnTo>
-                  <a:lnTo>
-                    <a:pt x="1985278" y="2702928"/>
-                  </a:lnTo>
-                  <a:lnTo>
-                    <a:pt x="2062912" y="2751648"/>
-                  </a:lnTo>
-                  <a:lnTo>
-                    <a:pt x="2140546" y="2786859"/>
-                  </a:lnTo>
-                  <a:lnTo>
-                    <a:pt x="2218180" y="2798613"/>
-                  </a:lnTo>
-                  <a:lnTo>
-                    <a:pt x="2295814" y="2810207"/>
-                  </a:lnTo>
-                  <a:lnTo>
-                    <a:pt x="2373448" y="2821643"/>
-                  </a:lnTo>
-                  <a:lnTo>
-                    <a:pt x="2451082" y="2832924"/>
-                  </a:lnTo>
-                  <a:lnTo>
-                    <a:pt x="2528716" y="2844052"/>
-                  </a:lnTo>
-                  <a:lnTo>
-                    <a:pt x="2606350" y="2855029"/>
-                  </a:lnTo>
-                  <a:lnTo>
-                    <a:pt x="2683984" y="2865858"/>
-                  </a:lnTo>
-                  <a:lnTo>
-                    <a:pt x="2761618" y="2876539"/>
-                  </a:lnTo>
-                  <a:lnTo>
-                    <a:pt x="2839252" y="2887075"/>
-                  </a:lnTo>
-                  <a:lnTo>
-                    <a:pt x="2916886" y="2897468"/>
-                  </a:lnTo>
-                  <a:lnTo>
-                    <a:pt x="2994520" y="2907720"/>
-                  </a:lnTo>
-                  <a:lnTo>
-                    <a:pt x="3072154" y="2917832"/>
-                  </a:lnTo>
-                  <a:lnTo>
-                    <a:pt x="3149788" y="2927808"/>
-                  </a:lnTo>
-                  <a:lnTo>
-                    <a:pt x="3227422" y="2937648"/>
-                  </a:lnTo>
-                  <a:lnTo>
-                    <a:pt x="3305057" y="2947354"/>
-                  </a:lnTo>
-                  <a:lnTo>
-                    <a:pt x="3382691" y="2956929"/>
-                  </a:lnTo>
-                  <a:lnTo>
-                    <a:pt x="3460325" y="2966374"/>
-                  </a:lnTo>
-                  <a:lnTo>
-                    <a:pt x="3537959" y="2975690"/>
-                  </a:lnTo>
-                  <a:lnTo>
-                    <a:pt x="3615593" y="2984880"/>
-                  </a:lnTo>
-                  <a:lnTo>
-                    <a:pt x="3693227" y="2993945"/>
-                  </a:lnTo>
-                  <a:lnTo>
-                    <a:pt x="3770861" y="3002887"/>
-                  </a:lnTo>
-                  <a:lnTo>
-                    <a:pt x="3848495" y="3011708"/>
-                  </a:lnTo>
-                  <a:lnTo>
-                    <a:pt x="3926129" y="3020409"/>
-                  </a:lnTo>
-                  <a:lnTo>
-                    <a:pt x="4003763" y="3028992"/>
-                  </a:lnTo>
-                  <a:lnTo>
-                    <a:pt x="4081397" y="3037459"/>
-                  </a:lnTo>
-                  <a:lnTo>
-                    <a:pt x="4159031" y="3045810"/>
-                  </a:lnTo>
-                  <a:lnTo>
-                    <a:pt x="4236665" y="3054048"/>
-                  </a:lnTo>
-                  <a:lnTo>
-                    <a:pt x="4314299" y="3062174"/>
-                  </a:lnTo>
-                  <a:lnTo>
-                    <a:pt x="4391933" y="3070190"/>
-                  </a:lnTo>
-                  <a:lnTo>
-                    <a:pt x="4469567" y="3078097"/>
-                  </a:lnTo>
-                  <a:lnTo>
-                    <a:pt x="4547201" y="3085897"/>
-                  </a:lnTo>
-                  <a:lnTo>
-                    <a:pt x="4624835" y="3093591"/>
-                  </a:lnTo>
-                  <a:lnTo>
-                    <a:pt x="4702469" y="3101180"/>
-                  </a:lnTo>
-                  <a:lnTo>
-                    <a:pt x="4780103" y="3108667"/>
-                  </a:lnTo>
-                  <a:lnTo>
-                    <a:pt x="4857737" y="3116052"/>
-                  </a:lnTo>
-                  <a:lnTo>
-                    <a:pt x="4935371" y="3123336"/>
-                  </a:lnTo>
-                  <a:lnTo>
-                    <a:pt x="5013006" y="3130522"/>
-                  </a:lnTo>
-                  <a:lnTo>
-                    <a:pt x="5090640" y="3137610"/>
-                  </a:lnTo>
-                  <a:lnTo>
-                    <a:pt x="5168274" y="3144602"/>
-                  </a:lnTo>
-                  <a:lnTo>
-                    <a:pt x="5245908" y="3151499"/>
-                  </a:lnTo>
-                  <a:lnTo>
-                    <a:pt x="5323542" y="3158302"/>
-                  </a:lnTo>
-                  <a:lnTo>
-                    <a:pt x="5401176" y="3165013"/>
-                  </a:lnTo>
-                  <a:lnTo>
-                    <a:pt x="5478810" y="3171633"/>
-                  </a:lnTo>
-                  <a:lnTo>
-                    <a:pt x="5556444" y="3178163"/>
-                  </a:lnTo>
-                  <a:lnTo>
-                    <a:pt x="5634078" y="3184604"/>
-                  </a:lnTo>
-                  <a:lnTo>
-                    <a:pt x="5711712" y="3190958"/>
-                  </a:lnTo>
-                  <a:lnTo>
-                    <a:pt x="5789346" y="3197226"/>
-                  </a:lnTo>
-                  <a:lnTo>
-                    <a:pt x="5866980" y="3203408"/>
-                  </a:lnTo>
-                  <a:lnTo>
-                    <a:pt x="5944614" y="3209507"/>
-                  </a:lnTo>
-                  <a:lnTo>
-                    <a:pt x="6022248" y="3215523"/>
-                  </a:lnTo>
-                  <a:lnTo>
-                    <a:pt x="6099882" y="3221457"/>
+                    <a:pt x="65729" y="164215"/>
+                  </a:lnTo>
+                  <a:lnTo>
+                    <a:pt x="143363" y="347956"/>
+                  </a:lnTo>
+                  <a:lnTo>
+                    <a:pt x="220997" y="522019"/>
+                  </a:lnTo>
+                  <a:lnTo>
+                    <a:pt x="298631" y="686914"/>
+                  </a:lnTo>
+                  <a:lnTo>
+                    <a:pt x="376265" y="843123"/>
+                  </a:lnTo>
+                  <a:lnTo>
+                    <a:pt x="453899" y="991105"/>
+                  </a:lnTo>
+                  <a:lnTo>
+                    <a:pt x="531533" y="1131292"/>
+                  </a:lnTo>
+                  <a:lnTo>
+                    <a:pt x="609167" y="1264096"/>
+                  </a:lnTo>
+                  <a:lnTo>
+                    <a:pt x="686801" y="1389904"/>
+                  </a:lnTo>
+                  <a:lnTo>
+                    <a:pt x="764436" y="1509086"/>
+                  </a:lnTo>
+                  <a:lnTo>
+                    <a:pt x="842070" y="1621991"/>
+                  </a:lnTo>
+                  <a:lnTo>
+                    <a:pt x="919704" y="1728948"/>
+                  </a:lnTo>
+                  <a:lnTo>
+                    <a:pt x="997338" y="1830272"/>
+                  </a:lnTo>
+                  <a:lnTo>
+                    <a:pt x="1074972" y="1926259"/>
+                  </a:lnTo>
+                  <a:lnTo>
+                    <a:pt x="1152606" y="2017191"/>
+                  </a:lnTo>
+                  <a:lnTo>
+                    <a:pt x="1230240" y="2103332"/>
+                  </a:lnTo>
+                  <a:lnTo>
+                    <a:pt x="1307874" y="2184937"/>
+                  </a:lnTo>
+                  <a:lnTo>
+                    <a:pt x="1385508" y="2262243"/>
+                  </a:lnTo>
+                  <a:lnTo>
+                    <a:pt x="1463142" y="2335478"/>
+                  </a:lnTo>
+                  <a:lnTo>
+                    <a:pt x="1540776" y="2404855"/>
+                  </a:lnTo>
+                  <a:lnTo>
+                    <a:pt x="1618410" y="2470578"/>
+                  </a:lnTo>
+                  <a:lnTo>
+                    <a:pt x="1696044" y="2532839"/>
+                  </a:lnTo>
+                  <a:lnTo>
+                    <a:pt x="1773678" y="2591821"/>
+                  </a:lnTo>
+                  <a:lnTo>
+                    <a:pt x="1851312" y="2647696"/>
+                  </a:lnTo>
+                  <a:lnTo>
+                    <a:pt x="1928946" y="2700628"/>
+                  </a:lnTo>
+                  <a:lnTo>
+                    <a:pt x="2006580" y="2750772"/>
+                  </a:lnTo>
+                  <a:lnTo>
+                    <a:pt x="2084214" y="2786986"/>
+                  </a:lnTo>
+                  <a:lnTo>
+                    <a:pt x="2161848" y="2799121"/>
+                  </a:lnTo>
+                  <a:lnTo>
+                    <a:pt x="2239482" y="2811085"/>
+                  </a:lnTo>
+                  <a:lnTo>
+                    <a:pt x="2317116" y="2822881"/>
+                  </a:lnTo>
+                  <a:lnTo>
+                    <a:pt x="2394750" y="2834512"/>
+                  </a:lnTo>
+                  <a:lnTo>
+                    <a:pt x="2472385" y="2845980"/>
+                  </a:lnTo>
+                  <a:lnTo>
+                    <a:pt x="2550019" y="2857288"/>
+                  </a:lnTo>
+                  <a:lnTo>
+                    <a:pt x="2627653" y="2868437"/>
+                  </a:lnTo>
+                  <a:lnTo>
+                    <a:pt x="2705287" y="2879429"/>
+                  </a:lnTo>
+                  <a:lnTo>
+                    <a:pt x="2782921" y="2890268"/>
+                  </a:lnTo>
+                  <a:lnTo>
+                    <a:pt x="2860555" y="2900954"/>
+                  </a:lnTo>
+                  <a:lnTo>
+                    <a:pt x="2938189" y="2911491"/>
+                  </a:lnTo>
+                  <a:lnTo>
+                    <a:pt x="3015823" y="2921880"/>
+                  </a:lnTo>
+                  <a:lnTo>
+                    <a:pt x="3093457" y="2932123"/>
+                  </a:lnTo>
+                  <a:lnTo>
+                    <a:pt x="3171091" y="2942223"/>
+                  </a:lnTo>
+                  <a:lnTo>
+                    <a:pt x="3248725" y="2952181"/>
+                  </a:lnTo>
+                  <a:lnTo>
+                    <a:pt x="3326359" y="2962000"/>
+                  </a:lnTo>
+                  <a:lnTo>
+                    <a:pt x="3403993" y="2971681"/>
+                  </a:lnTo>
+                  <a:lnTo>
+                    <a:pt x="3481627" y="2981226"/>
+                  </a:lnTo>
+                  <a:lnTo>
+                    <a:pt x="3559261" y="2990638"/>
+                  </a:lnTo>
+                  <a:lnTo>
+                    <a:pt x="3636895" y="2999917"/>
+                  </a:lnTo>
+                  <a:lnTo>
+                    <a:pt x="3714529" y="3009067"/>
+                  </a:lnTo>
+                  <a:lnTo>
+                    <a:pt x="3792163" y="3018088"/>
+                  </a:lnTo>
+                  <a:lnTo>
+                    <a:pt x="3869797" y="3026983"/>
+                  </a:lnTo>
+                  <a:lnTo>
+                    <a:pt x="3947431" y="3035753"/>
+                  </a:lnTo>
+                  <a:lnTo>
+                    <a:pt x="4025065" y="3044400"/>
+                  </a:lnTo>
+                  <a:lnTo>
+                    <a:pt x="4102699" y="3052926"/>
+                  </a:lnTo>
+                  <a:lnTo>
+                    <a:pt x="4180334" y="3061333"/>
+                  </a:lnTo>
+                  <a:lnTo>
+                    <a:pt x="4257968" y="3069621"/>
+                  </a:lnTo>
+                  <a:lnTo>
+                    <a:pt x="4335602" y="3077794"/>
+                  </a:lnTo>
+                  <a:lnTo>
+                    <a:pt x="4413236" y="3085852"/>
+                  </a:lnTo>
+                  <a:lnTo>
+                    <a:pt x="4490870" y="3093797"/>
+                  </a:lnTo>
+                  <a:lnTo>
+                    <a:pt x="4568504" y="3101630"/>
+                  </a:lnTo>
+                  <a:lnTo>
+                    <a:pt x="4646138" y="3109354"/>
+                  </a:lnTo>
+                  <a:lnTo>
+                    <a:pt x="4723772" y="3116969"/>
+                  </a:lnTo>
+                  <a:lnTo>
+                    <a:pt x="4801406" y="3124478"/>
+                  </a:lnTo>
+                  <a:lnTo>
+                    <a:pt x="4879040" y="3131882"/>
+                  </a:lnTo>
+                  <a:lnTo>
+                    <a:pt x="4956674" y="3139181"/>
+                  </a:lnTo>
+                  <a:lnTo>
+                    <a:pt x="5034308" y="3146379"/>
+                  </a:lnTo>
+                  <a:lnTo>
+                    <a:pt x="5111942" y="3153475"/>
+                  </a:lnTo>
+                  <a:lnTo>
+                    <a:pt x="5189576" y="3160472"/>
+                  </a:lnTo>
+                  <a:lnTo>
+                    <a:pt x="5267210" y="3167371"/>
+                  </a:lnTo>
+                  <a:lnTo>
+                    <a:pt x="5344844" y="3174173"/>
+                  </a:lnTo>
+                  <a:lnTo>
+                    <a:pt x="5422478" y="3180880"/>
+                  </a:lnTo>
+                  <a:lnTo>
+                    <a:pt x="5500112" y="3187493"/>
+                  </a:lnTo>
+                  <a:lnTo>
+                    <a:pt x="5577746" y="3194013"/>
+                  </a:lnTo>
+                  <a:lnTo>
+                    <a:pt x="5655380" y="3200442"/>
+                  </a:lnTo>
+                  <a:lnTo>
+                    <a:pt x="5733014" y="3206781"/>
+                  </a:lnTo>
+                  <a:lnTo>
+                    <a:pt x="5810648" y="3213031"/>
+                  </a:lnTo>
+                  <a:lnTo>
+                    <a:pt x="5888282" y="3219193"/>
+                  </a:lnTo>
+                  <a:lnTo>
+                    <a:pt x="5965917" y="3225269"/>
+                  </a:lnTo>
+                  <a:lnTo>
+                    <a:pt x="6043551" y="3231259"/>
                   </a:lnTo>
                 </a:path>
               </a:pathLst>
@@ -3826,297 +3820,297 @@
           </p:nvSpPr>
           <p:spPr>
             <a:xfrm>
-              <a:off x="817517" y="3970588"/>
-              <a:ext cx="7370972" cy="1520351"/>
+              <a:off x="817517" y="3939435"/>
+              <a:ext cx="7370972" cy="1555674"/>
             </a:xfrm>
             <a:custGeom>
               <a:avLst/>
               <a:pathLst>
-                <a:path w="7370972" h="1520351">
+                <a:path w="7370972" h="1555674">
                   <a:moveTo>
-                    <a:pt x="7370972" y="1520351"/>
+                    <a:pt x="7370972" y="1555674"/>
                   </a:moveTo>
                   <a:lnTo>
-                    <a:pt x="7293338" y="1517200"/>
-                  </a:lnTo>
-                  <a:lnTo>
-                    <a:pt x="7215704" y="1513879"/>
-                  </a:lnTo>
-                  <a:lnTo>
-                    <a:pt x="7138070" y="1510378"/>
-                  </a:lnTo>
-                  <a:lnTo>
-                    <a:pt x="7060436" y="1506688"/>
-                  </a:lnTo>
-                  <a:lnTo>
-                    <a:pt x="6982802" y="1502799"/>
-                  </a:lnTo>
-                  <a:lnTo>
-                    <a:pt x="6905168" y="1498699"/>
-                  </a:lnTo>
-                  <a:lnTo>
-                    <a:pt x="6827534" y="1494377"/>
-                  </a:lnTo>
-                  <a:lnTo>
-                    <a:pt x="6749900" y="1489822"/>
-                  </a:lnTo>
-                  <a:lnTo>
-                    <a:pt x="6672266" y="1485021"/>
-                  </a:lnTo>
-                  <a:lnTo>
-                    <a:pt x="6594632" y="1479959"/>
-                  </a:lnTo>
-                  <a:lnTo>
-                    <a:pt x="6516998" y="1474624"/>
-                  </a:lnTo>
-                  <a:lnTo>
-                    <a:pt x="6439364" y="1469001"/>
-                  </a:lnTo>
-                  <a:lnTo>
-                    <a:pt x="6361730" y="1463074"/>
-                  </a:lnTo>
-                  <a:lnTo>
-                    <a:pt x="6284096" y="1456826"/>
-                  </a:lnTo>
-                  <a:lnTo>
-                    <a:pt x="6206462" y="1450240"/>
-                  </a:lnTo>
-                  <a:lnTo>
-                    <a:pt x="6128827" y="1443298"/>
-                  </a:lnTo>
-                  <a:lnTo>
-                    <a:pt x="6051193" y="1435981"/>
-                  </a:lnTo>
-                  <a:lnTo>
-                    <a:pt x="5973559" y="1428268"/>
-                  </a:lnTo>
-                  <a:lnTo>
-                    <a:pt x="5895925" y="1420138"/>
-                  </a:lnTo>
-                  <a:lnTo>
-                    <a:pt x="5818291" y="1411568"/>
-                  </a:lnTo>
-                  <a:lnTo>
-                    <a:pt x="5740657" y="1402535"/>
-                  </a:lnTo>
-                  <a:lnTo>
-                    <a:pt x="5663023" y="1393013"/>
-                  </a:lnTo>
-                  <a:lnTo>
-                    <a:pt x="5585389" y="1382977"/>
-                  </a:lnTo>
-                  <a:lnTo>
-                    <a:pt x="5507755" y="1372398"/>
-                  </a:lnTo>
-                  <a:lnTo>
-                    <a:pt x="5430121" y="1361247"/>
-                  </a:lnTo>
-                  <a:lnTo>
-                    <a:pt x="5352487" y="1349493"/>
-                  </a:lnTo>
-                  <a:lnTo>
-                    <a:pt x="5274853" y="1337103"/>
-                  </a:lnTo>
-                  <a:lnTo>
-                    <a:pt x="5197219" y="1324043"/>
-                  </a:lnTo>
-                  <a:lnTo>
-                    <a:pt x="5119585" y="1310277"/>
-                  </a:lnTo>
-                  <a:lnTo>
-                    <a:pt x="5041951" y="1295767"/>
-                  </a:lnTo>
-                  <a:lnTo>
-                    <a:pt x="4964317" y="1280472"/>
-                  </a:lnTo>
-                  <a:lnTo>
-                    <a:pt x="4886683" y="1264350"/>
-                  </a:lnTo>
-                  <a:lnTo>
-                    <a:pt x="4809049" y="1247357"/>
-                  </a:lnTo>
-                  <a:lnTo>
-                    <a:pt x="4731415" y="1229444"/>
-                  </a:lnTo>
-                  <a:lnTo>
-                    <a:pt x="4653781" y="1210563"/>
-                  </a:lnTo>
-                  <a:lnTo>
-                    <a:pt x="4576147" y="1190660"/>
-                  </a:lnTo>
-                  <a:lnTo>
-                    <a:pt x="4498513" y="1169682"/>
-                  </a:lnTo>
-                  <a:lnTo>
-                    <a:pt x="4420879" y="1147569"/>
-                  </a:lnTo>
-                  <a:lnTo>
-                    <a:pt x="4343244" y="1124260"/>
-                  </a:lnTo>
-                  <a:lnTo>
-                    <a:pt x="4265610" y="1099692"/>
-                  </a:lnTo>
-                  <a:lnTo>
-                    <a:pt x="4187976" y="1073794"/>
-                  </a:lnTo>
-                  <a:lnTo>
-                    <a:pt x="4110342" y="1046496"/>
-                  </a:lnTo>
-                  <a:lnTo>
-                    <a:pt x="4032708" y="1017722"/>
-                  </a:lnTo>
-                  <a:lnTo>
-                    <a:pt x="3955074" y="987392"/>
-                  </a:lnTo>
-                  <a:lnTo>
-                    <a:pt x="3877440" y="955422"/>
-                  </a:lnTo>
-                  <a:lnTo>
-                    <a:pt x="3799806" y="921723"/>
-                  </a:lnTo>
-                  <a:lnTo>
-                    <a:pt x="3722172" y="886203"/>
-                  </a:lnTo>
-                  <a:lnTo>
-                    <a:pt x="3644538" y="848761"/>
-                  </a:lnTo>
-                  <a:lnTo>
-                    <a:pt x="3566904" y="809294"/>
-                  </a:lnTo>
-                  <a:lnTo>
-                    <a:pt x="3489270" y="767694"/>
-                  </a:lnTo>
-                  <a:lnTo>
-                    <a:pt x="3411636" y="723844"/>
-                  </a:lnTo>
-                  <a:lnTo>
-                    <a:pt x="3334002" y="700918"/>
-                  </a:lnTo>
-                  <a:lnTo>
-                    <a:pt x="3256368" y="688839"/>
-                  </a:lnTo>
-                  <a:lnTo>
-                    <a:pt x="3178734" y="676594"/>
-                  </a:lnTo>
-                  <a:lnTo>
-                    <a:pt x="3101100" y="664180"/>
-                  </a:lnTo>
-                  <a:lnTo>
-                    <a:pt x="3023466" y="651595"/>
-                  </a:lnTo>
-                  <a:lnTo>
-                    <a:pt x="2945832" y="638837"/>
-                  </a:lnTo>
-                  <a:lnTo>
-                    <a:pt x="2868198" y="625903"/>
-                  </a:lnTo>
-                  <a:lnTo>
-                    <a:pt x="2790564" y="612792"/>
-                  </a:lnTo>
-                  <a:lnTo>
-                    <a:pt x="2712930" y="599500"/>
-                  </a:lnTo>
-                  <a:lnTo>
-                    <a:pt x="2635295" y="586025"/>
-                  </a:lnTo>
-                  <a:lnTo>
-                    <a:pt x="2557661" y="572364"/>
-                  </a:lnTo>
-                  <a:lnTo>
-                    <a:pt x="2480027" y="558516"/>
-                  </a:lnTo>
-                  <a:lnTo>
-                    <a:pt x="2402393" y="544477"/>
-                  </a:lnTo>
-                  <a:lnTo>
-                    <a:pt x="2324759" y="530245"/>
-                  </a:lnTo>
-                  <a:lnTo>
-                    <a:pt x="2247125" y="515816"/>
-                  </a:lnTo>
-                  <a:lnTo>
-                    <a:pt x="2169491" y="501190"/>
-                  </a:lnTo>
-                  <a:lnTo>
-                    <a:pt x="2091857" y="486362"/>
-                  </a:lnTo>
-                  <a:lnTo>
-                    <a:pt x="2014223" y="471330"/>
-                  </a:lnTo>
-                  <a:lnTo>
-                    <a:pt x="1936589" y="456091"/>
-                  </a:lnTo>
-                  <a:lnTo>
-                    <a:pt x="1858955" y="440642"/>
-                  </a:lnTo>
-                  <a:lnTo>
-                    <a:pt x="1781321" y="424981"/>
-                  </a:lnTo>
-                  <a:lnTo>
-                    <a:pt x="1703687" y="409104"/>
-                  </a:lnTo>
-                  <a:lnTo>
-                    <a:pt x="1626053" y="393009"/>
-                  </a:lnTo>
-                  <a:lnTo>
-                    <a:pt x="1548419" y="376692"/>
-                  </a:lnTo>
-                  <a:lnTo>
-                    <a:pt x="1470785" y="360151"/>
-                  </a:lnTo>
-                  <a:lnTo>
-                    <a:pt x="1393151" y="343382"/>
-                  </a:lnTo>
-                  <a:lnTo>
-                    <a:pt x="1315517" y="326382"/>
-                  </a:lnTo>
-                  <a:lnTo>
-                    <a:pt x="1237883" y="309148"/>
-                  </a:lnTo>
-                  <a:lnTo>
-                    <a:pt x="1160249" y="291677"/>
-                  </a:lnTo>
-                  <a:lnTo>
-                    <a:pt x="1082615" y="273966"/>
-                  </a:lnTo>
-                  <a:lnTo>
-                    <a:pt x="1004981" y="256011"/>
-                  </a:lnTo>
-                  <a:lnTo>
-                    <a:pt x="927346" y="237809"/>
-                  </a:lnTo>
-                  <a:lnTo>
-                    <a:pt x="849712" y="219356"/>
-                  </a:lnTo>
-                  <a:lnTo>
-                    <a:pt x="772078" y="200649"/>
-                  </a:lnTo>
-                  <a:lnTo>
-                    <a:pt x="694444" y="181685"/>
-                  </a:lnTo>
-                  <a:lnTo>
-                    <a:pt x="616810" y="162460"/>
-                  </a:lnTo>
-                  <a:lnTo>
-                    <a:pt x="539176" y="142971"/>
-                  </a:lnTo>
-                  <a:lnTo>
-                    <a:pt x="461542" y="123213"/>
-                  </a:lnTo>
-                  <a:lnTo>
-                    <a:pt x="383908" y="103183"/>
-                  </a:lnTo>
-                  <a:lnTo>
-                    <a:pt x="306274" y="82877"/>
-                  </a:lnTo>
-                  <a:lnTo>
-                    <a:pt x="228640" y="62292"/>
-                  </a:lnTo>
-                  <a:lnTo>
-                    <a:pt x="151006" y="41424"/>
-                  </a:lnTo>
-                  <a:lnTo>
-                    <a:pt x="73372" y="20269"/>
+                    <a:pt x="7293338" y="1552666"/>
+                  </a:lnTo>
+                  <a:lnTo>
+                    <a:pt x="7215704" y="1549491"/>
+                  </a:lnTo>
+                  <a:lnTo>
+                    <a:pt x="7138070" y="1546139"/>
+                  </a:lnTo>
+                  <a:lnTo>
+                    <a:pt x="7060436" y="1542601"/>
+                  </a:lnTo>
+                  <a:lnTo>
+                    <a:pt x="6982802" y="1538867"/>
+                  </a:lnTo>
+                  <a:lnTo>
+                    <a:pt x="6905168" y="1534924"/>
+                  </a:lnTo>
+                  <a:lnTo>
+                    <a:pt x="6827534" y="1530763"/>
+                  </a:lnTo>
+                  <a:lnTo>
+                    <a:pt x="6749900" y="1526370"/>
+                  </a:lnTo>
+                  <a:lnTo>
+                    <a:pt x="6672266" y="1521733"/>
+                  </a:lnTo>
+                  <a:lnTo>
+                    <a:pt x="6594632" y="1516838"/>
+                  </a:lnTo>
+                  <a:lnTo>
+                    <a:pt x="6516998" y="1511671"/>
+                  </a:lnTo>
+                  <a:lnTo>
+                    <a:pt x="6439364" y="1506217"/>
+                  </a:lnTo>
+                  <a:lnTo>
+                    <a:pt x="6361730" y="1500459"/>
+                  </a:lnTo>
+                  <a:lnTo>
+                    <a:pt x="6284096" y="1494381"/>
+                  </a:lnTo>
+                  <a:lnTo>
+                    <a:pt x="6206462" y="1487966"/>
+                  </a:lnTo>
+                  <a:lnTo>
+                    <a:pt x="6128827" y="1481193"/>
+                  </a:lnTo>
+                  <a:lnTo>
+                    <a:pt x="6051193" y="1474044"/>
+                  </a:lnTo>
+                  <a:lnTo>
+                    <a:pt x="5973559" y="1466498"/>
+                  </a:lnTo>
+                  <a:lnTo>
+                    <a:pt x="5895925" y="1458532"/>
+                  </a:lnTo>
+                  <a:lnTo>
+                    <a:pt x="5818291" y="1450123"/>
+                  </a:lnTo>
+                  <a:lnTo>
+                    <a:pt x="5740657" y="1441247"/>
+                  </a:lnTo>
+                  <a:lnTo>
+                    <a:pt x="5663023" y="1431877"/>
+                  </a:lnTo>
+                  <a:lnTo>
+                    <a:pt x="5585389" y="1421986"/>
+                  </a:lnTo>
+                  <a:lnTo>
+                    <a:pt x="5507755" y="1411545"/>
+                  </a:lnTo>
+                  <a:lnTo>
+                    <a:pt x="5430121" y="1400523"/>
+                  </a:lnTo>
+                  <a:lnTo>
+                    <a:pt x="5352487" y="1388889"/>
+                  </a:lnTo>
+                  <a:lnTo>
+                    <a:pt x="5274853" y="1376608"/>
+                  </a:lnTo>
+                  <a:lnTo>
+                    <a:pt x="5197219" y="1363644"/>
+                  </a:lnTo>
+                  <a:lnTo>
+                    <a:pt x="5119585" y="1349960"/>
+                  </a:lnTo>
+                  <a:lnTo>
+                    <a:pt x="5041951" y="1335514"/>
+                  </a:lnTo>
+                  <a:lnTo>
+                    <a:pt x="4964317" y="1320265"/>
+                  </a:lnTo>
+                  <a:lnTo>
+                    <a:pt x="4886683" y="1304169"/>
+                  </a:lnTo>
+                  <a:lnTo>
+                    <a:pt x="4809049" y="1287177"/>
+                  </a:lnTo>
+                  <a:lnTo>
+                    <a:pt x="4731415" y="1269241"/>
+                  </a:lnTo>
+                  <a:lnTo>
+                    <a:pt x="4653781" y="1250308"/>
+                  </a:lnTo>
+                  <a:lnTo>
+                    <a:pt x="4576147" y="1230322"/>
+                  </a:lnTo>
+                  <a:lnTo>
+                    <a:pt x="4498513" y="1209224"/>
+                  </a:lnTo>
+                  <a:lnTo>
+                    <a:pt x="4420879" y="1186954"/>
+                  </a:lnTo>
+                  <a:lnTo>
+                    <a:pt x="4343244" y="1163445"/>
+                  </a:lnTo>
+                  <a:lnTo>
+                    <a:pt x="4265610" y="1138629"/>
+                  </a:lnTo>
+                  <a:lnTo>
+                    <a:pt x="4187976" y="1112434"/>
+                  </a:lnTo>
+                  <a:lnTo>
+                    <a:pt x="4110342" y="1084782"/>
+                  </a:lnTo>
+                  <a:lnTo>
+                    <a:pt x="4032708" y="1055592"/>
+                  </a:lnTo>
+                  <a:lnTo>
+                    <a:pt x="3955074" y="1024780"/>
+                  </a:lnTo>
+                  <a:lnTo>
+                    <a:pt x="3877440" y="992254"/>
+                  </a:lnTo>
+                  <a:lnTo>
+                    <a:pt x="3799806" y="957921"/>
+                  </a:lnTo>
+                  <a:lnTo>
+                    <a:pt x="3722172" y="921678"/>
+                  </a:lnTo>
+                  <a:lnTo>
+                    <a:pt x="3644538" y="883420"/>
+                  </a:lnTo>
+                  <a:lnTo>
+                    <a:pt x="3566904" y="843034"/>
+                  </a:lnTo>
+                  <a:lnTo>
+                    <a:pt x="3489270" y="800404"/>
+                  </a:lnTo>
+                  <a:lnTo>
+                    <a:pt x="3411636" y="755403"/>
+                  </a:lnTo>
+                  <a:lnTo>
+                    <a:pt x="3334002" y="731807"/>
+                  </a:lnTo>
+                  <a:lnTo>
+                    <a:pt x="3256368" y="719326"/>
+                  </a:lnTo>
+                  <a:lnTo>
+                    <a:pt x="3178734" y="706666"/>
+                  </a:lnTo>
+                  <a:lnTo>
+                    <a:pt x="3101100" y="693827"/>
+                  </a:lnTo>
+                  <a:lnTo>
+                    <a:pt x="3023466" y="680806"/>
+                  </a:lnTo>
+                  <a:lnTo>
+                    <a:pt x="2945832" y="667599"/>
+                  </a:lnTo>
+                  <a:lnTo>
+                    <a:pt x="2868198" y="654204"/>
+                  </a:lnTo>
+                  <a:lnTo>
+                    <a:pt x="2790564" y="640619"/>
+                  </a:lnTo>
+                  <a:lnTo>
+                    <a:pt x="2712930" y="626841"/>
+                  </a:lnTo>
+                  <a:lnTo>
+                    <a:pt x="2635295" y="612867"/>
+                  </a:lnTo>
+                  <a:lnTo>
+                    <a:pt x="2557661" y="598695"/>
+                  </a:lnTo>
+                  <a:lnTo>
+                    <a:pt x="2480027" y="584320"/>
+                  </a:lnTo>
+                  <a:lnTo>
+                    <a:pt x="2402393" y="569742"/>
+                  </a:lnTo>
+                  <a:lnTo>
+                    <a:pt x="2324759" y="554956"/>
+                  </a:lnTo>
+                  <a:lnTo>
+                    <a:pt x="2247125" y="539960"/>
+                  </a:lnTo>
+                  <a:lnTo>
+                    <a:pt x="2169491" y="524751"/>
+                  </a:lnTo>
+                  <a:lnTo>
+                    <a:pt x="2091857" y="509326"/>
+                  </a:lnTo>
+                  <a:lnTo>
+                    <a:pt x="2014223" y="493681"/>
+                  </a:lnTo>
+                  <a:lnTo>
+                    <a:pt x="1936589" y="477814"/>
+                  </a:lnTo>
+                  <a:lnTo>
+                    <a:pt x="1858955" y="461721"/>
+                  </a:lnTo>
+                  <a:lnTo>
+                    <a:pt x="1781321" y="445400"/>
+                  </a:lnTo>
+                  <a:lnTo>
+                    <a:pt x="1703687" y="428846"/>
+                  </a:lnTo>
+                  <a:lnTo>
+                    <a:pt x="1626053" y="412058"/>
+                  </a:lnTo>
+                  <a:lnTo>
+                    <a:pt x="1548419" y="395030"/>
+                  </a:lnTo>
+                  <a:lnTo>
+                    <a:pt x="1470785" y="377761"/>
+                  </a:lnTo>
+                  <a:lnTo>
+                    <a:pt x="1393151" y="360245"/>
+                  </a:lnTo>
+                  <a:lnTo>
+                    <a:pt x="1315517" y="342481"/>
+                  </a:lnTo>
+                  <a:lnTo>
+                    <a:pt x="1237883" y="324465"/>
+                  </a:lnTo>
+                  <a:lnTo>
+                    <a:pt x="1160249" y="306192"/>
+                  </a:lnTo>
+                  <a:lnTo>
+                    <a:pt x="1082615" y="287659"/>
+                  </a:lnTo>
+                  <a:lnTo>
+                    <a:pt x="1004981" y="268863"/>
+                  </a:lnTo>
+                  <a:lnTo>
+                    <a:pt x="927346" y="249800"/>
+                  </a:lnTo>
+                  <a:lnTo>
+                    <a:pt x="849712" y="230466"/>
+                  </a:lnTo>
+                  <a:lnTo>
+                    <a:pt x="772078" y="210857"/>
+                  </a:lnTo>
+                  <a:lnTo>
+                    <a:pt x="694444" y="190969"/>
+                  </a:lnTo>
+                  <a:lnTo>
+                    <a:pt x="616810" y="170798"/>
+                  </a:lnTo>
+                  <a:lnTo>
+                    <a:pt x="539176" y="150341"/>
+                  </a:lnTo>
+                  <a:lnTo>
+                    <a:pt x="461542" y="129593"/>
+                  </a:lnTo>
+                  <a:lnTo>
+                    <a:pt x="383908" y="108549"/>
+                  </a:lnTo>
+                  <a:lnTo>
+                    <a:pt x="306274" y="87207"/>
+                  </a:lnTo>
+                  <a:lnTo>
+                    <a:pt x="228640" y="65561"/>
+                  </a:lnTo>
+                  <a:lnTo>
+                    <a:pt x="151006" y="43608"/>
+                  </a:lnTo>
+                  <a:lnTo>
+                    <a:pt x="73372" y="21342"/>
                   </a:lnTo>
                   <a:lnTo>
                     <a:pt x="0" y="0"/>
@@ -4139,300 +4133,297 @@
           </p:nvSpPr>
           <p:spPr>
             <a:xfrm>
-              <a:off x="844740" y="1896563"/>
-              <a:ext cx="7343750" cy="3494138"/>
+              <a:off x="938035" y="1896563"/>
+              <a:ext cx="7250454" cy="3501661"/>
             </a:xfrm>
             <a:custGeom>
               <a:avLst/>
               <a:pathLst>
-                <a:path w="7343750" h="3494138">
+                <a:path w="7250454" h="3501661">
                   <a:moveTo>
                     <a:pt x="0" y="0"/>
                   </a:moveTo>
                   <a:lnTo>
-                    <a:pt x="46150" y="71782"/>
-                  </a:lnTo>
-                  <a:lnTo>
-                    <a:pt x="123784" y="188596"/>
-                  </a:lnTo>
-                  <a:lnTo>
-                    <a:pt x="201418" y="301599"/>
-                  </a:lnTo>
-                  <a:lnTo>
-                    <a:pt x="279052" y="410916"/>
-                  </a:lnTo>
-                  <a:lnTo>
-                    <a:pt x="356686" y="516666"/>
-                  </a:lnTo>
-                  <a:lnTo>
-                    <a:pt x="434320" y="618967"/>
-                  </a:lnTo>
-                  <a:lnTo>
-                    <a:pt x="511954" y="717931"/>
-                  </a:lnTo>
-                  <a:lnTo>
-                    <a:pt x="589588" y="813666"/>
-                  </a:lnTo>
-                  <a:lnTo>
-                    <a:pt x="667222" y="906278"/>
-                  </a:lnTo>
-                  <a:lnTo>
-                    <a:pt x="744856" y="995869"/>
-                  </a:lnTo>
-                  <a:lnTo>
-                    <a:pt x="822490" y="1082538"/>
-                  </a:lnTo>
-                  <a:lnTo>
-                    <a:pt x="900124" y="1166379"/>
-                  </a:lnTo>
-                  <a:lnTo>
-                    <a:pt x="977758" y="1247485"/>
-                  </a:lnTo>
-                  <a:lnTo>
-                    <a:pt x="1055392" y="1325945"/>
-                  </a:lnTo>
-                  <a:lnTo>
-                    <a:pt x="1133026" y="1401846"/>
-                  </a:lnTo>
-                  <a:lnTo>
-                    <a:pt x="1210661" y="1475271"/>
-                  </a:lnTo>
-                  <a:lnTo>
-                    <a:pt x="1288295" y="1546301"/>
-                  </a:lnTo>
-                  <a:lnTo>
-                    <a:pt x="1365929" y="1615013"/>
-                  </a:lnTo>
-                  <a:lnTo>
-                    <a:pt x="1443563" y="1681484"/>
-                  </a:lnTo>
-                  <a:lnTo>
-                    <a:pt x="1521197" y="1745786"/>
-                  </a:lnTo>
-                  <a:lnTo>
-                    <a:pt x="1598831" y="1807991"/>
-                  </a:lnTo>
-                  <a:lnTo>
-                    <a:pt x="1676465" y="1868167"/>
-                  </a:lnTo>
-                  <a:lnTo>
-                    <a:pt x="1754099" y="1926380"/>
-                  </a:lnTo>
-                  <a:lnTo>
-                    <a:pt x="1831733" y="1982693"/>
-                  </a:lnTo>
-                  <a:lnTo>
-                    <a:pt x="1909367" y="2037170"/>
-                  </a:lnTo>
-                  <a:lnTo>
-                    <a:pt x="1987001" y="2089869"/>
-                  </a:lnTo>
-                  <a:lnTo>
-                    <a:pt x="2064635" y="2140850"/>
-                  </a:lnTo>
-                  <a:lnTo>
-                    <a:pt x="2142269" y="2190167"/>
-                  </a:lnTo>
-                  <a:lnTo>
-                    <a:pt x="2219903" y="2237875"/>
-                  </a:lnTo>
-                  <a:lnTo>
-                    <a:pt x="2297537" y="2284027"/>
-                  </a:lnTo>
-                  <a:lnTo>
-                    <a:pt x="2375171" y="2328674"/>
-                  </a:lnTo>
-                  <a:lnTo>
-                    <a:pt x="2452805" y="2371864"/>
-                  </a:lnTo>
-                  <a:lnTo>
-                    <a:pt x="2530439" y="2413645"/>
-                  </a:lnTo>
-                  <a:lnTo>
-                    <a:pt x="2608073" y="2454063"/>
-                  </a:lnTo>
-                  <a:lnTo>
-                    <a:pt x="2685707" y="2493163"/>
-                  </a:lnTo>
-                  <a:lnTo>
-                    <a:pt x="2763341" y="2530987"/>
-                  </a:lnTo>
-                  <a:lnTo>
-                    <a:pt x="2840975" y="2567578"/>
-                  </a:lnTo>
-                  <a:lnTo>
-                    <a:pt x="2918610" y="2602974"/>
-                  </a:lnTo>
-                  <a:lnTo>
-                    <a:pt x="2996244" y="2637216"/>
-                  </a:lnTo>
-                  <a:lnTo>
-                    <a:pt x="3073878" y="2670341"/>
-                  </a:lnTo>
-                  <a:lnTo>
-                    <a:pt x="3151512" y="2702386"/>
-                  </a:lnTo>
-                  <a:lnTo>
-                    <a:pt x="3229146" y="2733385"/>
-                  </a:lnTo>
-                  <a:lnTo>
-                    <a:pt x="3306780" y="2763372"/>
-                  </a:lnTo>
-                  <a:lnTo>
-                    <a:pt x="3384414" y="2792382"/>
-                  </a:lnTo>
-                  <a:lnTo>
-                    <a:pt x="3462048" y="2820445"/>
-                  </a:lnTo>
-                  <a:lnTo>
-                    <a:pt x="3539682" y="2847593"/>
-                  </a:lnTo>
-                  <a:lnTo>
-                    <a:pt x="3617316" y="2873855"/>
-                  </a:lnTo>
-                  <a:lnTo>
-                    <a:pt x="3694950" y="2899260"/>
-                  </a:lnTo>
-                  <a:lnTo>
-                    <a:pt x="3772584" y="2923837"/>
-                  </a:lnTo>
-                  <a:lnTo>
-                    <a:pt x="3850218" y="2947612"/>
-                  </a:lnTo>
-                  <a:lnTo>
-                    <a:pt x="3927852" y="2970611"/>
-                  </a:lnTo>
-                  <a:lnTo>
-                    <a:pt x="4005486" y="2992860"/>
-                  </a:lnTo>
-                  <a:lnTo>
-                    <a:pt x="4083120" y="3014383"/>
-                  </a:lnTo>
-                  <a:lnTo>
-                    <a:pt x="4160754" y="3035204"/>
-                  </a:lnTo>
-                  <a:lnTo>
-                    <a:pt x="4238388" y="3055346"/>
-                  </a:lnTo>
-                  <a:lnTo>
-                    <a:pt x="4316022" y="3074831"/>
-                  </a:lnTo>
-                  <a:lnTo>
-                    <a:pt x="4393656" y="3093680"/>
-                  </a:lnTo>
-                  <a:lnTo>
-                    <a:pt x="4471290" y="3111915"/>
-                  </a:lnTo>
-                  <a:lnTo>
-                    <a:pt x="4548924" y="3129554"/>
-                  </a:lnTo>
-                  <a:lnTo>
-                    <a:pt x="4626558" y="3146618"/>
-                  </a:lnTo>
-                  <a:lnTo>
-                    <a:pt x="4704193" y="3163126"/>
-                  </a:lnTo>
-                  <a:lnTo>
-                    <a:pt x="4781827" y="3179095"/>
-                  </a:lnTo>
-                  <a:lnTo>
-                    <a:pt x="4859461" y="3194542"/>
-                  </a:lnTo>
-                  <a:lnTo>
-                    <a:pt x="4937095" y="3209486"/>
-                  </a:lnTo>
-                  <a:lnTo>
-                    <a:pt x="5014729" y="3223943"/>
-                  </a:lnTo>
-                  <a:lnTo>
-                    <a:pt x="5092363" y="3237928"/>
-                  </a:lnTo>
-                  <a:lnTo>
-                    <a:pt x="5169997" y="3251457"/>
-                  </a:lnTo>
-                  <a:lnTo>
-                    <a:pt x="5247631" y="3264544"/>
-                  </a:lnTo>
-                  <a:lnTo>
-                    <a:pt x="5325265" y="3277204"/>
-                  </a:lnTo>
-                  <a:lnTo>
-                    <a:pt x="5402899" y="3289452"/>
-                  </a:lnTo>
-                  <a:lnTo>
-                    <a:pt x="5480533" y="3301300"/>
-                  </a:lnTo>
-                  <a:lnTo>
-                    <a:pt x="5558167" y="3312761"/>
-                  </a:lnTo>
-                  <a:lnTo>
-                    <a:pt x="5635801" y="3323849"/>
-                  </a:lnTo>
-                  <a:lnTo>
-                    <a:pt x="5713435" y="3334575"/>
-                  </a:lnTo>
-                  <a:lnTo>
-                    <a:pt x="5791069" y="3344951"/>
-                  </a:lnTo>
-                  <a:lnTo>
-                    <a:pt x="5868703" y="3354988"/>
-                  </a:lnTo>
-                  <a:lnTo>
-                    <a:pt x="5946337" y="3364698"/>
-                  </a:lnTo>
-                  <a:lnTo>
-                    <a:pt x="6023971" y="3374091"/>
-                  </a:lnTo>
-                  <a:lnTo>
-                    <a:pt x="6101605" y="3383178"/>
-                  </a:lnTo>
-                  <a:lnTo>
-                    <a:pt x="6179239" y="3391969"/>
-                  </a:lnTo>
-                  <a:lnTo>
-                    <a:pt x="6256873" y="3400472"/>
-                  </a:lnTo>
-                  <a:lnTo>
-                    <a:pt x="6334507" y="3408698"/>
-                  </a:lnTo>
-                  <a:lnTo>
-                    <a:pt x="6412142" y="3416656"/>
-                  </a:lnTo>
-                  <a:lnTo>
-                    <a:pt x="6489776" y="3424355"/>
-                  </a:lnTo>
-                  <a:lnTo>
-                    <a:pt x="6567410" y="3431802"/>
-                  </a:lnTo>
-                  <a:lnTo>
-                    <a:pt x="6645044" y="3439006"/>
-                  </a:lnTo>
-                  <a:lnTo>
-                    <a:pt x="6722678" y="3445975"/>
-                  </a:lnTo>
-                  <a:lnTo>
-                    <a:pt x="6800312" y="3452717"/>
-                  </a:lnTo>
-                  <a:lnTo>
-                    <a:pt x="6877946" y="3459239"/>
-                  </a:lnTo>
-                  <a:lnTo>
-                    <a:pt x="6955580" y="3465548"/>
-                  </a:lnTo>
-                  <a:lnTo>
-                    <a:pt x="7033214" y="3471652"/>
-                  </a:lnTo>
-                  <a:lnTo>
-                    <a:pt x="7110848" y="3477556"/>
-                  </a:lnTo>
-                  <a:lnTo>
-                    <a:pt x="7188482" y="3483267"/>
-                  </a:lnTo>
-                  <a:lnTo>
-                    <a:pt x="7266116" y="3488793"/>
-                  </a:lnTo>
-                  <a:lnTo>
-                    <a:pt x="7343750" y="3494138"/>
+                    <a:pt x="30488" y="49108"/>
+                  </a:lnTo>
+                  <a:lnTo>
+                    <a:pt x="108122" y="169963"/>
+                  </a:lnTo>
+                  <a:lnTo>
+                    <a:pt x="185756" y="286764"/>
+                  </a:lnTo>
+                  <a:lnTo>
+                    <a:pt x="263390" y="399648"/>
+                  </a:lnTo>
+                  <a:lnTo>
+                    <a:pt x="341024" y="508746"/>
+                  </a:lnTo>
+                  <a:lnTo>
+                    <a:pt x="418658" y="614185"/>
+                  </a:lnTo>
+                  <a:lnTo>
+                    <a:pt x="496292" y="716088"/>
+                  </a:lnTo>
+                  <a:lnTo>
+                    <a:pt x="573926" y="814573"/>
+                  </a:lnTo>
+                  <a:lnTo>
+                    <a:pt x="651560" y="909755"/>
+                  </a:lnTo>
+                  <a:lnTo>
+                    <a:pt x="729194" y="1001745"/>
+                  </a:lnTo>
+                  <a:lnTo>
+                    <a:pt x="806828" y="1090650"/>
+                  </a:lnTo>
+                  <a:lnTo>
+                    <a:pt x="884462" y="1176574"/>
+                  </a:lnTo>
+                  <a:lnTo>
+                    <a:pt x="962097" y="1259615"/>
+                  </a:lnTo>
+                  <a:lnTo>
+                    <a:pt x="1039731" y="1339872"/>
+                  </a:lnTo>
+                  <a:lnTo>
+                    <a:pt x="1117365" y="1417437"/>
+                  </a:lnTo>
+                  <a:lnTo>
+                    <a:pt x="1194999" y="1492401"/>
+                  </a:lnTo>
+                  <a:lnTo>
+                    <a:pt x="1272633" y="1564850"/>
+                  </a:lnTo>
+                  <a:lnTo>
+                    <a:pt x="1350267" y="1634870"/>
+                  </a:lnTo>
+                  <a:lnTo>
+                    <a:pt x="1427901" y="1702541"/>
+                  </a:lnTo>
+                  <a:lnTo>
+                    <a:pt x="1505535" y="1767943"/>
+                  </a:lnTo>
+                  <a:lnTo>
+                    <a:pt x="1583169" y="1831152"/>
+                  </a:lnTo>
+                  <a:lnTo>
+                    <a:pt x="1660803" y="1892240"/>
+                  </a:lnTo>
+                  <a:lnTo>
+                    <a:pt x="1738437" y="1951280"/>
+                  </a:lnTo>
+                  <a:lnTo>
+                    <a:pt x="1816071" y="2008340"/>
+                  </a:lnTo>
+                  <a:lnTo>
+                    <a:pt x="1893705" y="2063486"/>
+                  </a:lnTo>
+                  <a:lnTo>
+                    <a:pt x="1971339" y="2116783"/>
+                  </a:lnTo>
+                  <a:lnTo>
+                    <a:pt x="2048973" y="2168292"/>
+                  </a:lnTo>
+                  <a:lnTo>
+                    <a:pt x="2126607" y="2218074"/>
+                  </a:lnTo>
+                  <a:lnTo>
+                    <a:pt x="2204241" y="2266186"/>
+                  </a:lnTo>
+                  <a:lnTo>
+                    <a:pt x="2281875" y="2312685"/>
+                  </a:lnTo>
+                  <a:lnTo>
+                    <a:pt x="2359509" y="2357624"/>
+                  </a:lnTo>
+                  <a:lnTo>
+                    <a:pt x="2437143" y="2401056"/>
+                  </a:lnTo>
+                  <a:lnTo>
+                    <a:pt x="2514777" y="2443031"/>
+                  </a:lnTo>
+                  <a:lnTo>
+                    <a:pt x="2592411" y="2483599"/>
+                  </a:lnTo>
+                  <a:lnTo>
+                    <a:pt x="2670046" y="2522806"/>
+                  </a:lnTo>
+                  <a:lnTo>
+                    <a:pt x="2747680" y="2560698"/>
+                  </a:lnTo>
+                  <a:lnTo>
+                    <a:pt x="2825314" y="2597319"/>
+                  </a:lnTo>
+                  <a:lnTo>
+                    <a:pt x="2902948" y="2632712"/>
+                  </a:lnTo>
+                  <a:lnTo>
+                    <a:pt x="2980582" y="2666918"/>
+                  </a:lnTo>
+                  <a:lnTo>
+                    <a:pt x="3058216" y="2699977"/>
+                  </a:lnTo>
+                  <a:lnTo>
+                    <a:pt x="3135850" y="2731928"/>
+                  </a:lnTo>
+                  <a:lnTo>
+                    <a:pt x="3213484" y="2762806"/>
+                  </a:lnTo>
+                  <a:lnTo>
+                    <a:pt x="3291118" y="2792649"/>
+                  </a:lnTo>
+                  <a:lnTo>
+                    <a:pt x="3368752" y="2821492"/>
+                  </a:lnTo>
+                  <a:lnTo>
+                    <a:pt x="3446386" y="2849366"/>
+                  </a:lnTo>
+                  <a:lnTo>
+                    <a:pt x="3524020" y="2876306"/>
+                  </a:lnTo>
+                  <a:lnTo>
+                    <a:pt x="3601654" y="2902343"/>
+                  </a:lnTo>
+                  <a:lnTo>
+                    <a:pt x="3679288" y="2927506"/>
+                  </a:lnTo>
+                  <a:lnTo>
+                    <a:pt x="3756922" y="2951826"/>
+                  </a:lnTo>
+                  <a:lnTo>
+                    <a:pt x="3834556" y="2975330"/>
+                  </a:lnTo>
+                  <a:lnTo>
+                    <a:pt x="3912190" y="2998045"/>
+                  </a:lnTo>
+                  <a:lnTo>
+                    <a:pt x="3989824" y="3019999"/>
+                  </a:lnTo>
+                  <a:lnTo>
+                    <a:pt x="4067458" y="3041216"/>
+                  </a:lnTo>
+                  <a:lnTo>
+                    <a:pt x="4145092" y="3061722"/>
+                  </a:lnTo>
+                  <a:lnTo>
+                    <a:pt x="4222726" y="3081540"/>
+                  </a:lnTo>
+                  <a:lnTo>
+                    <a:pt x="4300360" y="3100694"/>
+                  </a:lnTo>
+                  <a:lnTo>
+                    <a:pt x="4377994" y="3119205"/>
+                  </a:lnTo>
+                  <a:lnTo>
+                    <a:pt x="4455629" y="3137095"/>
+                  </a:lnTo>
+                  <a:lnTo>
+                    <a:pt x="4533263" y="3154385"/>
+                  </a:lnTo>
+                  <a:lnTo>
+                    <a:pt x="4610897" y="3171096"/>
+                  </a:lnTo>
+                  <a:lnTo>
+                    <a:pt x="4688531" y="3187246"/>
+                  </a:lnTo>
+                  <a:lnTo>
+                    <a:pt x="4766165" y="3202854"/>
+                  </a:lnTo>
+                  <a:lnTo>
+                    <a:pt x="4843799" y="3217939"/>
+                  </a:lnTo>
+                  <a:lnTo>
+                    <a:pt x="4921433" y="3232518"/>
+                  </a:lnTo>
+                  <a:lnTo>
+                    <a:pt x="4999067" y="3246608"/>
+                  </a:lnTo>
+                  <a:lnTo>
+                    <a:pt x="5076701" y="3260226"/>
+                  </a:lnTo>
+                  <a:lnTo>
+                    <a:pt x="5154335" y="3273386"/>
+                  </a:lnTo>
+                  <a:lnTo>
+                    <a:pt x="5231969" y="3286106"/>
+                  </a:lnTo>
+                  <a:lnTo>
+                    <a:pt x="5309603" y="3298399"/>
+                  </a:lnTo>
+                  <a:lnTo>
+                    <a:pt x="5387237" y="3310279"/>
+                  </a:lnTo>
+                  <a:lnTo>
+                    <a:pt x="5464871" y="3321761"/>
+                  </a:lnTo>
+                  <a:lnTo>
+                    <a:pt x="5542505" y="3332858"/>
+                  </a:lnTo>
+                  <a:lnTo>
+                    <a:pt x="5620139" y="3343583"/>
+                  </a:lnTo>
+                  <a:lnTo>
+                    <a:pt x="5697773" y="3353948"/>
+                  </a:lnTo>
+                  <a:lnTo>
+                    <a:pt x="5775407" y="3363966"/>
+                  </a:lnTo>
+                  <a:lnTo>
+                    <a:pt x="5853041" y="3373647"/>
+                  </a:lnTo>
+                  <a:lnTo>
+                    <a:pt x="5930675" y="3383004"/>
+                  </a:lnTo>
+                  <a:lnTo>
+                    <a:pt x="6008309" y="3392047"/>
+                  </a:lnTo>
+                  <a:lnTo>
+                    <a:pt x="6085943" y="3400787"/>
+                  </a:lnTo>
+                  <a:lnTo>
+                    <a:pt x="6163578" y="3409234"/>
+                  </a:lnTo>
+                  <a:lnTo>
+                    <a:pt x="6241212" y="3417397"/>
+                  </a:lnTo>
+                  <a:lnTo>
+                    <a:pt x="6318846" y="3425287"/>
+                  </a:lnTo>
+                  <a:lnTo>
+                    <a:pt x="6396480" y="3432912"/>
+                  </a:lnTo>
+                  <a:lnTo>
+                    <a:pt x="6474114" y="3440281"/>
+                  </a:lnTo>
+                  <a:lnTo>
+                    <a:pt x="6551748" y="3447403"/>
+                  </a:lnTo>
+                  <a:lnTo>
+                    <a:pt x="6629382" y="3454287"/>
+                  </a:lnTo>
+                  <a:lnTo>
+                    <a:pt x="6707016" y="3460939"/>
+                  </a:lnTo>
+                  <a:lnTo>
+                    <a:pt x="6784650" y="3467368"/>
+                  </a:lnTo>
+                  <a:lnTo>
+                    <a:pt x="6862284" y="3473582"/>
+                  </a:lnTo>
+                  <a:lnTo>
+                    <a:pt x="6939918" y="3479587"/>
+                  </a:lnTo>
+                  <a:lnTo>
+                    <a:pt x="7017552" y="3485391"/>
+                  </a:lnTo>
+                  <a:lnTo>
+                    <a:pt x="7095186" y="3491000"/>
+                  </a:lnTo>
+                  <a:lnTo>
+                    <a:pt x="7172820" y="3496422"/>
+                  </a:lnTo>
+                  <a:lnTo>
+                    <a:pt x="7250454" y="3501661"/>
                   </a:lnTo>
                 </a:path>
               </a:pathLst>

--- a/docs/plots/carbo/jx_carbo_linsubhr_ratio_anyhosp.pptx
+++ b/docs/plots/carbo/jx_carbo_linsubhr_ratio_anyhosp.pptx
@@ -3003,536 +3003,536 @@
           <p:spPr>
             <a:xfrm>
               <a:off x="817517" y="1896563"/>
-              <a:ext cx="7370972" cy="3598546"/>
+              <a:ext cx="7370972" cy="3600746"/>
             </a:xfrm>
             <a:custGeom>
               <a:avLst/>
               <a:pathLst>
-                <a:path w="7370972" h="3598546">
+                <a:path w="7370972" h="3600746">
                   <a:moveTo>
-                    <a:pt x="1327421" y="0"/>
+                    <a:pt x="1357999" y="0"/>
                   </a:moveTo>
                   <a:lnTo>
-                    <a:pt x="1393151" y="164215"/>
-                  </a:lnTo>
-                  <a:lnTo>
-                    <a:pt x="1470785" y="347956"/>
-                  </a:lnTo>
-                  <a:lnTo>
-                    <a:pt x="1548419" y="522019"/>
-                  </a:lnTo>
-                  <a:lnTo>
-                    <a:pt x="1626053" y="686914"/>
-                  </a:lnTo>
-                  <a:lnTo>
-                    <a:pt x="1703687" y="843123"/>
-                  </a:lnTo>
-                  <a:lnTo>
-                    <a:pt x="1781321" y="991105"/>
-                  </a:lnTo>
-                  <a:lnTo>
-                    <a:pt x="1858955" y="1131292"/>
-                  </a:lnTo>
-                  <a:lnTo>
-                    <a:pt x="1936589" y="1264096"/>
-                  </a:lnTo>
-                  <a:lnTo>
-                    <a:pt x="2014223" y="1389904"/>
-                  </a:lnTo>
-                  <a:lnTo>
-                    <a:pt x="2091857" y="1509086"/>
-                  </a:lnTo>
-                  <a:lnTo>
-                    <a:pt x="2169491" y="1621991"/>
-                  </a:lnTo>
-                  <a:lnTo>
-                    <a:pt x="2247125" y="1728948"/>
-                  </a:lnTo>
-                  <a:lnTo>
-                    <a:pt x="2324759" y="1830272"/>
-                  </a:lnTo>
-                  <a:lnTo>
-                    <a:pt x="2402393" y="1926259"/>
-                  </a:lnTo>
-                  <a:lnTo>
-                    <a:pt x="2480027" y="2017191"/>
-                  </a:lnTo>
-                  <a:lnTo>
-                    <a:pt x="2557661" y="2103332"/>
-                  </a:lnTo>
-                  <a:lnTo>
-                    <a:pt x="2635295" y="2184937"/>
-                  </a:lnTo>
-                  <a:lnTo>
-                    <a:pt x="2712930" y="2262243"/>
-                  </a:lnTo>
-                  <a:lnTo>
-                    <a:pt x="2790564" y="2335478"/>
-                  </a:lnTo>
-                  <a:lnTo>
-                    <a:pt x="2868198" y="2404855"/>
-                  </a:lnTo>
-                  <a:lnTo>
-                    <a:pt x="2945832" y="2470578"/>
-                  </a:lnTo>
-                  <a:lnTo>
-                    <a:pt x="3023466" y="2532839"/>
-                  </a:lnTo>
-                  <a:lnTo>
-                    <a:pt x="3101100" y="2591821"/>
-                  </a:lnTo>
-                  <a:lnTo>
-                    <a:pt x="3178734" y="2647696"/>
-                  </a:lnTo>
-                  <a:lnTo>
-                    <a:pt x="3256368" y="2700628"/>
-                  </a:lnTo>
-                  <a:lnTo>
-                    <a:pt x="3334002" y="2750772"/>
-                  </a:lnTo>
-                  <a:lnTo>
-                    <a:pt x="3411636" y="2786986"/>
-                  </a:lnTo>
-                  <a:lnTo>
-                    <a:pt x="3489270" y="2799121"/>
-                  </a:lnTo>
-                  <a:lnTo>
-                    <a:pt x="3566904" y="2811085"/>
-                  </a:lnTo>
-                  <a:lnTo>
-                    <a:pt x="3644538" y="2822881"/>
-                  </a:lnTo>
-                  <a:lnTo>
-                    <a:pt x="3722172" y="2834512"/>
-                  </a:lnTo>
-                  <a:lnTo>
-                    <a:pt x="3799806" y="2845980"/>
-                  </a:lnTo>
-                  <a:lnTo>
-                    <a:pt x="3877440" y="2857288"/>
-                  </a:lnTo>
-                  <a:lnTo>
-                    <a:pt x="3955074" y="2868437"/>
-                  </a:lnTo>
-                  <a:lnTo>
-                    <a:pt x="4032708" y="2879429"/>
-                  </a:lnTo>
-                  <a:lnTo>
-                    <a:pt x="4110342" y="2890268"/>
-                  </a:lnTo>
-                  <a:lnTo>
-                    <a:pt x="4187976" y="2900954"/>
-                  </a:lnTo>
-                  <a:lnTo>
-                    <a:pt x="4265610" y="2911491"/>
-                  </a:lnTo>
-                  <a:lnTo>
-                    <a:pt x="4343244" y="2921880"/>
-                  </a:lnTo>
-                  <a:lnTo>
-                    <a:pt x="4420879" y="2932123"/>
-                  </a:lnTo>
-                  <a:lnTo>
-                    <a:pt x="4498513" y="2942223"/>
-                  </a:lnTo>
-                  <a:lnTo>
-                    <a:pt x="4576147" y="2952181"/>
-                  </a:lnTo>
-                  <a:lnTo>
-                    <a:pt x="4653781" y="2962000"/>
-                  </a:lnTo>
-                  <a:lnTo>
-                    <a:pt x="4731415" y="2971681"/>
-                  </a:lnTo>
-                  <a:lnTo>
-                    <a:pt x="4809049" y="2981226"/>
-                  </a:lnTo>
-                  <a:lnTo>
-                    <a:pt x="4886683" y="2990638"/>
-                  </a:lnTo>
-                  <a:lnTo>
-                    <a:pt x="4964317" y="2999917"/>
-                  </a:lnTo>
-                  <a:lnTo>
-                    <a:pt x="5041951" y="3009067"/>
-                  </a:lnTo>
-                  <a:lnTo>
-                    <a:pt x="5119585" y="3018088"/>
-                  </a:lnTo>
-                  <a:lnTo>
-                    <a:pt x="5197219" y="3026983"/>
-                  </a:lnTo>
-                  <a:lnTo>
-                    <a:pt x="5274853" y="3035753"/>
-                  </a:lnTo>
-                  <a:lnTo>
-                    <a:pt x="5352487" y="3044400"/>
-                  </a:lnTo>
-                  <a:lnTo>
-                    <a:pt x="5430121" y="3052926"/>
-                  </a:lnTo>
-                  <a:lnTo>
-                    <a:pt x="5507755" y="3061333"/>
-                  </a:lnTo>
-                  <a:lnTo>
-                    <a:pt x="5585389" y="3069621"/>
-                  </a:lnTo>
-                  <a:lnTo>
-                    <a:pt x="5663023" y="3077794"/>
-                  </a:lnTo>
-                  <a:lnTo>
-                    <a:pt x="5740657" y="3085852"/>
-                  </a:lnTo>
-                  <a:lnTo>
-                    <a:pt x="5818291" y="3093797"/>
-                  </a:lnTo>
-                  <a:lnTo>
-                    <a:pt x="5895925" y="3101630"/>
-                  </a:lnTo>
-                  <a:lnTo>
-                    <a:pt x="5973559" y="3109354"/>
-                  </a:lnTo>
-                  <a:lnTo>
-                    <a:pt x="6051193" y="3116969"/>
-                  </a:lnTo>
-                  <a:lnTo>
-                    <a:pt x="6128827" y="3124478"/>
-                  </a:lnTo>
-                  <a:lnTo>
-                    <a:pt x="6206462" y="3131882"/>
-                  </a:lnTo>
-                  <a:lnTo>
-                    <a:pt x="6284096" y="3139181"/>
-                  </a:lnTo>
-                  <a:lnTo>
-                    <a:pt x="6361730" y="3146379"/>
-                  </a:lnTo>
-                  <a:lnTo>
-                    <a:pt x="6439364" y="3153475"/>
-                  </a:lnTo>
-                  <a:lnTo>
-                    <a:pt x="6516998" y="3160472"/>
-                  </a:lnTo>
-                  <a:lnTo>
-                    <a:pt x="6594632" y="3167371"/>
-                  </a:lnTo>
-                  <a:lnTo>
-                    <a:pt x="6672266" y="3174173"/>
-                  </a:lnTo>
-                  <a:lnTo>
-                    <a:pt x="6749900" y="3180880"/>
-                  </a:lnTo>
-                  <a:lnTo>
-                    <a:pt x="6827534" y="3187493"/>
-                  </a:lnTo>
-                  <a:lnTo>
-                    <a:pt x="6905168" y="3194013"/>
-                  </a:lnTo>
-                  <a:lnTo>
-                    <a:pt x="6982802" y="3200442"/>
-                  </a:lnTo>
-                  <a:lnTo>
-                    <a:pt x="7060436" y="3206781"/>
-                  </a:lnTo>
-                  <a:lnTo>
-                    <a:pt x="7138070" y="3213031"/>
-                  </a:lnTo>
-                  <a:lnTo>
-                    <a:pt x="7215704" y="3219193"/>
-                  </a:lnTo>
-                  <a:lnTo>
-                    <a:pt x="7293338" y="3225269"/>
-                  </a:lnTo>
-                  <a:lnTo>
-                    <a:pt x="7370972" y="3231259"/>
-                  </a:lnTo>
-                  <a:lnTo>
-                    <a:pt x="7370972" y="3598546"/>
-                  </a:lnTo>
-                  <a:lnTo>
-                    <a:pt x="7293338" y="3595538"/>
-                  </a:lnTo>
-                  <a:lnTo>
-                    <a:pt x="7215704" y="3592363"/>
-                  </a:lnTo>
-                  <a:lnTo>
-                    <a:pt x="7138070" y="3589012"/>
-                  </a:lnTo>
-                  <a:lnTo>
-                    <a:pt x="7060436" y="3585474"/>
-                  </a:lnTo>
-                  <a:lnTo>
-                    <a:pt x="6982802" y="3581739"/>
-                  </a:lnTo>
-                  <a:lnTo>
-                    <a:pt x="6905168" y="3577797"/>
-                  </a:lnTo>
-                  <a:lnTo>
-                    <a:pt x="6827534" y="3573635"/>
-                  </a:lnTo>
-                  <a:lnTo>
-                    <a:pt x="6749900" y="3569242"/>
-                  </a:lnTo>
-                  <a:lnTo>
-                    <a:pt x="6672266" y="3564605"/>
-                  </a:lnTo>
-                  <a:lnTo>
-                    <a:pt x="6594632" y="3559710"/>
-                  </a:lnTo>
-                  <a:lnTo>
-                    <a:pt x="6516998" y="3554543"/>
-                  </a:lnTo>
-                  <a:lnTo>
-                    <a:pt x="6439364" y="3549089"/>
-                  </a:lnTo>
-                  <a:lnTo>
-                    <a:pt x="6361730" y="3543331"/>
-                  </a:lnTo>
-                  <a:lnTo>
-                    <a:pt x="6284096" y="3537254"/>
-                  </a:lnTo>
-                  <a:lnTo>
-                    <a:pt x="6206462" y="3530838"/>
-                  </a:lnTo>
-                  <a:lnTo>
-                    <a:pt x="6128827" y="3524066"/>
-                  </a:lnTo>
-                  <a:lnTo>
-                    <a:pt x="6051193" y="3516917"/>
-                  </a:lnTo>
-                  <a:lnTo>
-                    <a:pt x="5973559" y="3509370"/>
-                  </a:lnTo>
-                  <a:lnTo>
-                    <a:pt x="5895925" y="3501404"/>
-                  </a:lnTo>
-                  <a:lnTo>
-                    <a:pt x="5818291" y="3492995"/>
-                  </a:lnTo>
-                  <a:lnTo>
-                    <a:pt x="5740657" y="3484119"/>
-                  </a:lnTo>
-                  <a:lnTo>
-                    <a:pt x="5663023" y="3474749"/>
-                  </a:lnTo>
-                  <a:lnTo>
-                    <a:pt x="5585389" y="3464858"/>
-                  </a:lnTo>
-                  <a:lnTo>
-                    <a:pt x="5507755" y="3454417"/>
-                  </a:lnTo>
-                  <a:lnTo>
-                    <a:pt x="5430121" y="3443396"/>
-                  </a:lnTo>
-                  <a:lnTo>
-                    <a:pt x="5352487" y="3431762"/>
-                  </a:lnTo>
-                  <a:lnTo>
-                    <a:pt x="5274853" y="3419481"/>
-                  </a:lnTo>
-                  <a:lnTo>
-                    <a:pt x="5197219" y="3406517"/>
-                  </a:lnTo>
-                  <a:lnTo>
-                    <a:pt x="5119585" y="3392832"/>
-                  </a:lnTo>
-                  <a:lnTo>
-                    <a:pt x="5041951" y="3378387"/>
-                  </a:lnTo>
-                  <a:lnTo>
-                    <a:pt x="4964317" y="3363138"/>
-                  </a:lnTo>
-                  <a:lnTo>
-                    <a:pt x="4886683" y="3347041"/>
-                  </a:lnTo>
-                  <a:lnTo>
-                    <a:pt x="4809049" y="3330050"/>
-                  </a:lnTo>
-                  <a:lnTo>
-                    <a:pt x="4731415" y="3312114"/>
-                  </a:lnTo>
-                  <a:lnTo>
-                    <a:pt x="4653781" y="3293180"/>
-                  </a:lnTo>
-                  <a:lnTo>
-                    <a:pt x="4576147" y="3273194"/>
-                  </a:lnTo>
-                  <a:lnTo>
-                    <a:pt x="4498513" y="3252097"/>
-                  </a:lnTo>
-                  <a:lnTo>
-                    <a:pt x="4420879" y="3229826"/>
-                  </a:lnTo>
-                  <a:lnTo>
-                    <a:pt x="4343244" y="3206317"/>
-                  </a:lnTo>
-                  <a:lnTo>
-                    <a:pt x="4265610" y="3181502"/>
-                  </a:lnTo>
-                  <a:lnTo>
-                    <a:pt x="4187976" y="3155306"/>
-                  </a:lnTo>
-                  <a:lnTo>
-                    <a:pt x="4110342" y="3127654"/>
-                  </a:lnTo>
-                  <a:lnTo>
-                    <a:pt x="4032708" y="3098465"/>
-                  </a:lnTo>
-                  <a:lnTo>
-                    <a:pt x="3955074" y="3067652"/>
-                  </a:lnTo>
-                  <a:lnTo>
-                    <a:pt x="3877440" y="3035127"/>
-                  </a:lnTo>
-                  <a:lnTo>
-                    <a:pt x="3799806" y="3000793"/>
-                  </a:lnTo>
-                  <a:lnTo>
-                    <a:pt x="3722172" y="2964550"/>
-                  </a:lnTo>
-                  <a:lnTo>
-                    <a:pt x="3644538" y="2926292"/>
-                  </a:lnTo>
-                  <a:lnTo>
-                    <a:pt x="3566904" y="2885907"/>
-                  </a:lnTo>
-                  <a:lnTo>
-                    <a:pt x="3489270" y="2843276"/>
-                  </a:lnTo>
-                  <a:lnTo>
-                    <a:pt x="3411636" y="2798275"/>
-                  </a:lnTo>
-                  <a:lnTo>
-                    <a:pt x="3334002" y="2774680"/>
-                  </a:lnTo>
-                  <a:lnTo>
-                    <a:pt x="3256368" y="2762198"/>
-                  </a:lnTo>
-                  <a:lnTo>
-                    <a:pt x="3178734" y="2749539"/>
-                  </a:lnTo>
-                  <a:lnTo>
-                    <a:pt x="3101100" y="2736700"/>
-                  </a:lnTo>
-                  <a:lnTo>
-                    <a:pt x="3023466" y="2723678"/>
-                  </a:lnTo>
-                  <a:lnTo>
-                    <a:pt x="2945832" y="2710471"/>
-                  </a:lnTo>
-                  <a:lnTo>
-                    <a:pt x="2868198" y="2697077"/>
-                  </a:lnTo>
-                  <a:lnTo>
-                    <a:pt x="2790564" y="2683492"/>
-                  </a:lnTo>
-                  <a:lnTo>
-                    <a:pt x="2712930" y="2669714"/>
-                  </a:lnTo>
-                  <a:lnTo>
-                    <a:pt x="2635295" y="2655740"/>
-                  </a:lnTo>
-                  <a:lnTo>
-                    <a:pt x="2557661" y="2641567"/>
-                  </a:lnTo>
-                  <a:lnTo>
-                    <a:pt x="2480027" y="2627193"/>
-                  </a:lnTo>
-                  <a:lnTo>
-                    <a:pt x="2402393" y="2612614"/>
-                  </a:lnTo>
-                  <a:lnTo>
-                    <a:pt x="2324759" y="2597829"/>
-                  </a:lnTo>
-                  <a:lnTo>
-                    <a:pt x="2247125" y="2582833"/>
-                  </a:lnTo>
-                  <a:lnTo>
-                    <a:pt x="2169491" y="2567623"/>
-                  </a:lnTo>
-                  <a:lnTo>
-                    <a:pt x="2091857" y="2552198"/>
-                  </a:lnTo>
-                  <a:lnTo>
-                    <a:pt x="2014223" y="2536553"/>
-                  </a:lnTo>
-                  <a:lnTo>
-                    <a:pt x="1936589" y="2520686"/>
-                  </a:lnTo>
-                  <a:lnTo>
-                    <a:pt x="1858955" y="2504594"/>
-                  </a:lnTo>
-                  <a:lnTo>
-                    <a:pt x="1781321" y="2488272"/>
-                  </a:lnTo>
-                  <a:lnTo>
-                    <a:pt x="1703687" y="2471719"/>
-                  </a:lnTo>
-                  <a:lnTo>
-                    <a:pt x="1626053" y="2454930"/>
-                  </a:lnTo>
-                  <a:lnTo>
-                    <a:pt x="1548419" y="2437902"/>
-                  </a:lnTo>
-                  <a:lnTo>
-                    <a:pt x="1470785" y="2420633"/>
-                  </a:lnTo>
-                  <a:lnTo>
-                    <a:pt x="1393151" y="2403118"/>
-                  </a:lnTo>
-                  <a:lnTo>
-                    <a:pt x="1315517" y="2385354"/>
-                  </a:lnTo>
-                  <a:lnTo>
-                    <a:pt x="1237883" y="2367337"/>
-                  </a:lnTo>
-                  <a:lnTo>
-                    <a:pt x="1160249" y="2349064"/>
-                  </a:lnTo>
-                  <a:lnTo>
-                    <a:pt x="1082615" y="2330532"/>
-                  </a:lnTo>
-                  <a:lnTo>
-                    <a:pt x="1004981" y="2311736"/>
-                  </a:lnTo>
-                  <a:lnTo>
-                    <a:pt x="927346" y="2292672"/>
-                  </a:lnTo>
-                  <a:lnTo>
-                    <a:pt x="849712" y="2273338"/>
-                  </a:lnTo>
-                  <a:lnTo>
-                    <a:pt x="772078" y="2253729"/>
-                  </a:lnTo>
-                  <a:lnTo>
-                    <a:pt x="694444" y="2233841"/>
-                  </a:lnTo>
-                  <a:lnTo>
-                    <a:pt x="616810" y="2213671"/>
-                  </a:lnTo>
-                  <a:lnTo>
-                    <a:pt x="539176" y="2193213"/>
-                  </a:lnTo>
-                  <a:lnTo>
-                    <a:pt x="461542" y="2172465"/>
-                  </a:lnTo>
-                  <a:lnTo>
-                    <a:pt x="383908" y="2151422"/>
-                  </a:lnTo>
-                  <a:lnTo>
-                    <a:pt x="306274" y="2130079"/>
-                  </a:lnTo>
-                  <a:lnTo>
-                    <a:pt x="228640" y="2108434"/>
-                  </a:lnTo>
-                  <a:lnTo>
-                    <a:pt x="151006" y="2086480"/>
-                  </a:lnTo>
-                  <a:lnTo>
-                    <a:pt x="73372" y="2064214"/>
-                  </a:lnTo>
-                  <a:lnTo>
-                    <a:pt x="0" y="2042872"/>
+                    <a:pt x="1393151" y="91040"/>
+                  </a:lnTo>
+                  <a:lnTo>
+                    <a:pt x="1470785" y="281362"/>
+                  </a:lnTo>
+                  <a:lnTo>
+                    <a:pt x="1548419" y="461514"/>
+                  </a:lnTo>
+                  <a:lnTo>
+                    <a:pt x="1626053" y="632040"/>
+                  </a:lnTo>
+                  <a:lnTo>
+                    <a:pt x="1703687" y="793453"/>
+                  </a:lnTo>
+                  <a:lnTo>
+                    <a:pt x="1781321" y="946240"/>
+                  </a:lnTo>
+                  <a:lnTo>
+                    <a:pt x="1858955" y="1090863"/>
+                  </a:lnTo>
+                  <a:lnTo>
+                    <a:pt x="1936589" y="1227757"/>
+                  </a:lnTo>
+                  <a:lnTo>
+                    <a:pt x="2014223" y="1357337"/>
+                  </a:lnTo>
+                  <a:lnTo>
+                    <a:pt x="2091857" y="1479992"/>
+                  </a:lnTo>
+                  <a:lnTo>
+                    <a:pt x="2169491" y="1596092"/>
+                  </a:lnTo>
+                  <a:lnTo>
+                    <a:pt x="2247125" y="1705989"/>
+                  </a:lnTo>
+                  <a:lnTo>
+                    <a:pt x="2324759" y="1810013"/>
+                  </a:lnTo>
+                  <a:lnTo>
+                    <a:pt x="2402393" y="1908478"/>
+                  </a:lnTo>
+                  <a:lnTo>
+                    <a:pt x="2480027" y="2001681"/>
+                  </a:lnTo>
+                  <a:lnTo>
+                    <a:pt x="2557661" y="2089904"/>
+                  </a:lnTo>
+                  <a:lnTo>
+                    <a:pt x="2635295" y="2173413"/>
+                  </a:lnTo>
+                  <a:lnTo>
+                    <a:pt x="2712930" y="2252459"/>
+                  </a:lnTo>
+                  <a:lnTo>
+                    <a:pt x="2790564" y="2327281"/>
+                  </a:lnTo>
+                  <a:lnTo>
+                    <a:pt x="2868198" y="2398105"/>
+                  </a:lnTo>
+                  <a:lnTo>
+                    <a:pt x="2945832" y="2465144"/>
+                  </a:lnTo>
+                  <a:lnTo>
+                    <a:pt x="3023466" y="2528601"/>
+                  </a:lnTo>
+                  <a:lnTo>
+                    <a:pt x="3101100" y="2588666"/>
+                  </a:lnTo>
+                  <a:lnTo>
+                    <a:pt x="3178734" y="2645522"/>
+                  </a:lnTo>
+                  <a:lnTo>
+                    <a:pt x="3256368" y="2699340"/>
+                  </a:lnTo>
+                  <a:lnTo>
+                    <a:pt x="3334002" y="2750282"/>
+                  </a:lnTo>
+                  <a:lnTo>
+                    <a:pt x="3411636" y="2786929"/>
+                  </a:lnTo>
+                  <a:lnTo>
+                    <a:pt x="3489270" y="2798890"/>
+                  </a:lnTo>
+                  <a:lnTo>
+                    <a:pt x="3566904" y="2810686"/>
+                  </a:lnTo>
+                  <a:lnTo>
+                    <a:pt x="3644538" y="2822320"/>
+                  </a:lnTo>
+                  <a:lnTo>
+                    <a:pt x="3722172" y="2833792"/>
+                  </a:lnTo>
+                  <a:lnTo>
+                    <a:pt x="3799806" y="2845106"/>
+                  </a:lnTo>
+                  <a:lnTo>
+                    <a:pt x="3877440" y="2856264"/>
+                  </a:lnTo>
+                  <a:lnTo>
+                    <a:pt x="3955074" y="2867268"/>
+                  </a:lnTo>
+                  <a:lnTo>
+                    <a:pt x="4032708" y="2878119"/>
+                  </a:lnTo>
+                  <a:lnTo>
+                    <a:pt x="4110342" y="2888821"/>
+                  </a:lnTo>
+                  <a:lnTo>
+                    <a:pt x="4187976" y="2899374"/>
+                  </a:lnTo>
+                  <a:lnTo>
+                    <a:pt x="4265610" y="2909782"/>
+                  </a:lnTo>
+                  <a:lnTo>
+                    <a:pt x="4343244" y="2920046"/>
+                  </a:lnTo>
+                  <a:lnTo>
+                    <a:pt x="4420879" y="2930169"/>
+                  </a:lnTo>
+                  <a:lnTo>
+                    <a:pt x="4498513" y="2940151"/>
+                  </a:lnTo>
+                  <a:lnTo>
+                    <a:pt x="4576147" y="2949996"/>
+                  </a:lnTo>
+                  <a:lnTo>
+                    <a:pt x="4653781" y="2959704"/>
+                  </a:lnTo>
+                  <a:lnTo>
+                    <a:pt x="4731415" y="2969278"/>
+                  </a:lnTo>
+                  <a:lnTo>
+                    <a:pt x="4809049" y="2978720"/>
+                  </a:lnTo>
+                  <a:lnTo>
+                    <a:pt x="4886683" y="2988032"/>
+                  </a:lnTo>
+                  <a:lnTo>
+                    <a:pt x="4964317" y="2997215"/>
+                  </a:lnTo>
+                  <a:lnTo>
+                    <a:pt x="5041951" y="3006271"/>
+                  </a:lnTo>
+                  <a:lnTo>
+                    <a:pt x="5119585" y="3015202"/>
+                  </a:lnTo>
+                  <a:lnTo>
+                    <a:pt x="5197219" y="3024009"/>
+                  </a:lnTo>
+                  <a:lnTo>
+                    <a:pt x="5274853" y="3032695"/>
+                  </a:lnTo>
+                  <a:lnTo>
+                    <a:pt x="5352487" y="3041261"/>
+                  </a:lnTo>
+                  <a:lnTo>
+                    <a:pt x="5430121" y="3049708"/>
+                  </a:lnTo>
+                  <a:lnTo>
+                    <a:pt x="5507755" y="3058039"/>
+                  </a:lnTo>
+                  <a:lnTo>
+                    <a:pt x="5585389" y="3066255"/>
+                  </a:lnTo>
+                  <a:lnTo>
+                    <a:pt x="5663023" y="3074357"/>
+                  </a:lnTo>
+                  <a:lnTo>
+                    <a:pt x="5740657" y="3082347"/>
+                  </a:lnTo>
+                  <a:lnTo>
+                    <a:pt x="5818291" y="3090227"/>
+                  </a:lnTo>
+                  <a:lnTo>
+                    <a:pt x="5895925" y="3097998"/>
+                  </a:lnTo>
+                  <a:lnTo>
+                    <a:pt x="5973559" y="3105661"/>
+                  </a:lnTo>
+                  <a:lnTo>
+                    <a:pt x="6051193" y="3113219"/>
+                  </a:lnTo>
+                  <a:lnTo>
+                    <a:pt x="6128827" y="3120672"/>
+                  </a:lnTo>
+                  <a:lnTo>
+                    <a:pt x="6206462" y="3128022"/>
+                  </a:lnTo>
+                  <a:lnTo>
+                    <a:pt x="6284096" y="3135271"/>
+                  </a:lnTo>
+                  <a:lnTo>
+                    <a:pt x="6361730" y="3142420"/>
+                  </a:lnTo>
+                  <a:lnTo>
+                    <a:pt x="6439364" y="3149469"/>
+                  </a:lnTo>
+                  <a:lnTo>
+                    <a:pt x="6516998" y="3156422"/>
+                  </a:lnTo>
+                  <a:lnTo>
+                    <a:pt x="6594632" y="3163278"/>
+                  </a:lnTo>
+                  <a:lnTo>
+                    <a:pt x="6672266" y="3170040"/>
+                  </a:lnTo>
+                  <a:lnTo>
+                    <a:pt x="6749900" y="3176708"/>
+                  </a:lnTo>
+                  <a:lnTo>
+                    <a:pt x="6827534" y="3183284"/>
+                  </a:lnTo>
+                  <a:lnTo>
+                    <a:pt x="6905168" y="3189769"/>
+                  </a:lnTo>
+                  <a:lnTo>
+                    <a:pt x="6982802" y="3196164"/>
+                  </a:lnTo>
+                  <a:lnTo>
+                    <a:pt x="7060436" y="3202471"/>
+                  </a:lnTo>
+                  <a:lnTo>
+                    <a:pt x="7138070" y="3208691"/>
+                  </a:lnTo>
+                  <a:lnTo>
+                    <a:pt x="7215704" y="3214826"/>
+                  </a:lnTo>
+                  <a:lnTo>
+                    <a:pt x="7293338" y="3220875"/>
+                  </a:lnTo>
+                  <a:lnTo>
+                    <a:pt x="7370972" y="3226841"/>
+                  </a:lnTo>
+                  <a:lnTo>
+                    <a:pt x="7370972" y="3600746"/>
+                  </a:lnTo>
+                  <a:lnTo>
+                    <a:pt x="7293338" y="3597816"/>
+                  </a:lnTo>
+                  <a:lnTo>
+                    <a:pt x="7215704" y="3594720"/>
+                  </a:lnTo>
+                  <a:lnTo>
+                    <a:pt x="7138070" y="3591450"/>
+                  </a:lnTo>
+                  <a:lnTo>
+                    <a:pt x="7060436" y="3587996"/>
+                  </a:lnTo>
+                  <a:lnTo>
+                    <a:pt x="6982802" y="3584346"/>
+                  </a:lnTo>
+                  <a:lnTo>
+                    <a:pt x="6905168" y="3580491"/>
+                  </a:lnTo>
+                  <a:lnTo>
+                    <a:pt x="6827534" y="3576417"/>
+                  </a:lnTo>
+                  <a:lnTo>
+                    <a:pt x="6749900" y="3572114"/>
+                  </a:lnTo>
+                  <a:lnTo>
+                    <a:pt x="6672266" y="3567568"/>
+                  </a:lnTo>
+                  <a:lnTo>
+                    <a:pt x="6594632" y="3562765"/>
+                  </a:lnTo>
+                  <a:lnTo>
+                    <a:pt x="6516998" y="3557691"/>
+                  </a:lnTo>
+                  <a:lnTo>
+                    <a:pt x="6439364" y="3552331"/>
+                  </a:lnTo>
+                  <a:lnTo>
+                    <a:pt x="6361730" y="3546668"/>
+                  </a:lnTo>
+                  <a:lnTo>
+                    <a:pt x="6284096" y="3540685"/>
+                  </a:lnTo>
+                  <a:lnTo>
+                    <a:pt x="6206462" y="3534364"/>
+                  </a:lnTo>
+                  <a:lnTo>
+                    <a:pt x="6128827" y="3527687"/>
+                  </a:lnTo>
+                  <a:lnTo>
+                    <a:pt x="6051193" y="3520633"/>
+                  </a:lnTo>
+                  <a:lnTo>
+                    <a:pt x="5973559" y="3513180"/>
+                  </a:lnTo>
+                  <a:lnTo>
+                    <a:pt x="5895925" y="3505307"/>
+                  </a:lnTo>
+                  <a:lnTo>
+                    <a:pt x="5818291" y="3496989"/>
+                  </a:lnTo>
+                  <a:lnTo>
+                    <a:pt x="5740657" y="3488202"/>
+                  </a:lnTo>
+                  <a:lnTo>
+                    <a:pt x="5663023" y="3478918"/>
+                  </a:lnTo>
+                  <a:lnTo>
+                    <a:pt x="5585389" y="3469111"/>
+                  </a:lnTo>
+                  <a:lnTo>
+                    <a:pt x="5507755" y="3458750"/>
+                  </a:lnTo>
+                  <a:lnTo>
+                    <a:pt x="5430121" y="3447804"/>
+                  </a:lnTo>
+                  <a:lnTo>
+                    <a:pt x="5352487" y="3436240"/>
+                  </a:lnTo>
+                  <a:lnTo>
+                    <a:pt x="5274853" y="3424023"/>
+                  </a:lnTo>
+                  <a:lnTo>
+                    <a:pt x="5197219" y="3411116"/>
+                  </a:lnTo>
+                  <a:lnTo>
+                    <a:pt x="5119585" y="3397481"/>
+                  </a:lnTo>
+                  <a:lnTo>
+                    <a:pt x="5041951" y="3383076"/>
+                  </a:lnTo>
+                  <a:lnTo>
+                    <a:pt x="4964317" y="3367858"/>
+                  </a:lnTo>
+                  <a:lnTo>
+                    <a:pt x="4886683" y="3351781"/>
+                  </a:lnTo>
+                  <a:lnTo>
+                    <a:pt x="4809049" y="3334796"/>
+                  </a:lnTo>
+                  <a:lnTo>
+                    <a:pt x="4731415" y="3316852"/>
+                  </a:lnTo>
+                  <a:lnTo>
+                    <a:pt x="4653781" y="3297895"/>
+                  </a:lnTo>
+                  <a:lnTo>
+                    <a:pt x="4576147" y="3277868"/>
+                  </a:lnTo>
+                  <a:lnTo>
+                    <a:pt x="4498513" y="3256711"/>
+                  </a:lnTo>
+                  <a:lnTo>
+                    <a:pt x="4420879" y="3234359"/>
+                  </a:lnTo>
+                  <a:lnTo>
+                    <a:pt x="4343244" y="3210745"/>
+                  </a:lnTo>
+                  <a:lnTo>
+                    <a:pt x="4265610" y="3185798"/>
+                  </a:lnTo>
+                  <a:lnTo>
+                    <a:pt x="4187976" y="3159443"/>
+                  </a:lnTo>
+                  <a:lnTo>
+                    <a:pt x="4110342" y="3131599"/>
+                  </a:lnTo>
+                  <a:lnTo>
+                    <a:pt x="4032708" y="3102184"/>
+                  </a:lnTo>
+                  <a:lnTo>
+                    <a:pt x="3955074" y="3071109"/>
+                  </a:lnTo>
+                  <a:lnTo>
+                    <a:pt x="3877440" y="3038279"/>
+                  </a:lnTo>
+                  <a:lnTo>
+                    <a:pt x="3799806" y="3003595"/>
+                  </a:lnTo>
+                  <a:lnTo>
+                    <a:pt x="3722172" y="2966954"/>
+                  </a:lnTo>
+                  <a:lnTo>
+                    <a:pt x="3644538" y="2928244"/>
+                  </a:lnTo>
+                  <a:lnTo>
+                    <a:pt x="3566904" y="2887349"/>
+                  </a:lnTo>
+                  <a:lnTo>
+                    <a:pt x="3489270" y="2844145"/>
+                  </a:lnTo>
+                  <a:lnTo>
+                    <a:pt x="3411636" y="2798502"/>
+                  </a:lnTo>
+                  <a:lnTo>
+                    <a:pt x="3334002" y="2774800"/>
+                  </a:lnTo>
+                  <a:lnTo>
+                    <a:pt x="3256368" y="2762500"/>
+                  </a:lnTo>
+                  <a:lnTo>
+                    <a:pt x="3178734" y="2750029"/>
+                  </a:lnTo>
+                  <a:lnTo>
+                    <a:pt x="3101100" y="2737383"/>
+                  </a:lnTo>
+                  <a:lnTo>
+                    <a:pt x="3023466" y="2724560"/>
+                  </a:lnTo>
+                  <a:lnTo>
+                    <a:pt x="2945832" y="2711557"/>
+                  </a:lnTo>
+                  <a:lnTo>
+                    <a:pt x="2868198" y="2698371"/>
+                  </a:lnTo>
+                  <a:lnTo>
+                    <a:pt x="2790564" y="2685002"/>
+                  </a:lnTo>
+                  <a:lnTo>
+                    <a:pt x="2712930" y="2671444"/>
+                  </a:lnTo>
+                  <a:lnTo>
+                    <a:pt x="2635295" y="2657697"/>
+                  </a:lnTo>
+                  <a:lnTo>
+                    <a:pt x="2557661" y="2643757"/>
+                  </a:lnTo>
+                  <a:lnTo>
+                    <a:pt x="2480027" y="2629622"/>
+                  </a:lnTo>
+                  <a:lnTo>
+                    <a:pt x="2402393" y="2615289"/>
+                  </a:lnTo>
+                  <a:lnTo>
+                    <a:pt x="2324759" y="2600755"/>
+                  </a:lnTo>
+                  <a:lnTo>
+                    <a:pt x="2247125" y="2586018"/>
+                  </a:lnTo>
+                  <a:lnTo>
+                    <a:pt x="2169491" y="2571074"/>
+                  </a:lnTo>
+                  <a:lnTo>
+                    <a:pt x="2091857" y="2555920"/>
+                  </a:lnTo>
+                  <a:lnTo>
+                    <a:pt x="2014223" y="2540555"/>
+                  </a:lnTo>
+                  <a:lnTo>
+                    <a:pt x="1936589" y="2524974"/>
+                  </a:lnTo>
+                  <a:lnTo>
+                    <a:pt x="1858955" y="2509175"/>
+                  </a:lnTo>
+                  <a:lnTo>
+                    <a:pt x="1781321" y="2493154"/>
+                  </a:lnTo>
+                  <a:lnTo>
+                    <a:pt x="1703687" y="2476909"/>
+                  </a:lnTo>
+                  <a:lnTo>
+                    <a:pt x="1626053" y="2460436"/>
+                  </a:lnTo>
+                  <a:lnTo>
+                    <a:pt x="1548419" y="2443733"/>
+                  </a:lnTo>
+                  <a:lnTo>
+                    <a:pt x="1470785" y="2426795"/>
+                  </a:lnTo>
+                  <a:lnTo>
+                    <a:pt x="1393151" y="2409620"/>
+                  </a:lnTo>
+                  <a:lnTo>
+                    <a:pt x="1315517" y="2392205"/>
+                  </a:lnTo>
+                  <a:lnTo>
+                    <a:pt x="1237883" y="2374545"/>
+                  </a:lnTo>
+                  <a:lnTo>
+                    <a:pt x="1160249" y="2356639"/>
+                  </a:lnTo>
+                  <a:lnTo>
+                    <a:pt x="1082615" y="2338481"/>
+                  </a:lnTo>
+                  <a:lnTo>
+                    <a:pt x="1004981" y="2320069"/>
+                  </a:lnTo>
+                  <a:lnTo>
+                    <a:pt x="927346" y="2301399"/>
+                  </a:lnTo>
+                  <a:lnTo>
+                    <a:pt x="849712" y="2282467"/>
+                  </a:lnTo>
+                  <a:lnTo>
+                    <a:pt x="772078" y="2263270"/>
+                  </a:lnTo>
+                  <a:lnTo>
+                    <a:pt x="694444" y="2243804"/>
+                  </a:lnTo>
+                  <a:lnTo>
+                    <a:pt x="616810" y="2224065"/>
+                  </a:lnTo>
+                  <a:lnTo>
+                    <a:pt x="539176" y="2204050"/>
+                  </a:lnTo>
+                  <a:lnTo>
+                    <a:pt x="461542" y="2183755"/>
+                  </a:lnTo>
+                  <a:lnTo>
+                    <a:pt x="383908" y="2163175"/>
+                  </a:lnTo>
+                  <a:lnTo>
+                    <a:pt x="306274" y="2142306"/>
+                  </a:lnTo>
+                  <a:lnTo>
+                    <a:pt x="228640" y="2121146"/>
+                  </a:lnTo>
+                  <a:lnTo>
+                    <a:pt x="151006" y="2099689"/>
+                  </a:lnTo>
+                  <a:lnTo>
+                    <a:pt x="73372" y="2077931"/>
+                  </a:lnTo>
+                  <a:lnTo>
+                    <a:pt x="0" y="2057079"/>
                   </a:lnTo>
                   <a:close/>
                 </a:path>
@@ -3558,249 +3558,249 @@
           </p:nvSpPr>
           <p:spPr>
             <a:xfrm>
-              <a:off x="2144939" y="1896563"/>
-              <a:ext cx="6043551" cy="3231259"/>
+              <a:off x="2175517" y="1896563"/>
+              <a:ext cx="6012973" cy="3226841"/>
             </a:xfrm>
             <a:custGeom>
               <a:avLst/>
               <a:pathLst>
-                <a:path w="6043551" h="3231259">
+                <a:path w="6012973" h="3226841">
                   <a:moveTo>
                     <a:pt x="0" y="0"/>
                   </a:moveTo>
                   <a:lnTo>
-                    <a:pt x="65729" y="164215"/>
-                  </a:lnTo>
-                  <a:lnTo>
-                    <a:pt x="143363" y="347956"/>
-                  </a:lnTo>
-                  <a:lnTo>
-                    <a:pt x="220997" y="522019"/>
-                  </a:lnTo>
-                  <a:lnTo>
-                    <a:pt x="298631" y="686914"/>
-                  </a:lnTo>
-                  <a:lnTo>
-                    <a:pt x="376265" y="843123"/>
-                  </a:lnTo>
-                  <a:lnTo>
-                    <a:pt x="453899" y="991105"/>
-                  </a:lnTo>
-                  <a:lnTo>
-                    <a:pt x="531533" y="1131292"/>
-                  </a:lnTo>
-                  <a:lnTo>
-                    <a:pt x="609167" y="1264096"/>
-                  </a:lnTo>
-                  <a:lnTo>
-                    <a:pt x="686801" y="1389904"/>
-                  </a:lnTo>
-                  <a:lnTo>
-                    <a:pt x="764436" y="1509086"/>
-                  </a:lnTo>
-                  <a:lnTo>
-                    <a:pt x="842070" y="1621991"/>
-                  </a:lnTo>
-                  <a:lnTo>
-                    <a:pt x="919704" y="1728948"/>
-                  </a:lnTo>
-                  <a:lnTo>
-                    <a:pt x="997338" y="1830272"/>
-                  </a:lnTo>
-                  <a:lnTo>
-                    <a:pt x="1074972" y="1926259"/>
-                  </a:lnTo>
-                  <a:lnTo>
-                    <a:pt x="1152606" y="2017191"/>
-                  </a:lnTo>
-                  <a:lnTo>
-                    <a:pt x="1230240" y="2103332"/>
-                  </a:lnTo>
-                  <a:lnTo>
-                    <a:pt x="1307874" y="2184937"/>
-                  </a:lnTo>
-                  <a:lnTo>
-                    <a:pt x="1385508" y="2262243"/>
-                  </a:lnTo>
-                  <a:lnTo>
-                    <a:pt x="1463142" y="2335478"/>
-                  </a:lnTo>
-                  <a:lnTo>
-                    <a:pt x="1540776" y="2404855"/>
-                  </a:lnTo>
-                  <a:lnTo>
-                    <a:pt x="1618410" y="2470578"/>
-                  </a:lnTo>
-                  <a:lnTo>
-                    <a:pt x="1696044" y="2532839"/>
-                  </a:lnTo>
-                  <a:lnTo>
-                    <a:pt x="1773678" y="2591821"/>
-                  </a:lnTo>
-                  <a:lnTo>
-                    <a:pt x="1851312" y="2647696"/>
-                  </a:lnTo>
-                  <a:lnTo>
-                    <a:pt x="1928946" y="2700628"/>
-                  </a:lnTo>
-                  <a:lnTo>
-                    <a:pt x="2006580" y="2750772"/>
-                  </a:lnTo>
-                  <a:lnTo>
-                    <a:pt x="2084214" y="2786986"/>
-                  </a:lnTo>
-                  <a:lnTo>
-                    <a:pt x="2161848" y="2799121"/>
-                  </a:lnTo>
-                  <a:lnTo>
-                    <a:pt x="2239482" y="2811085"/>
-                  </a:lnTo>
-                  <a:lnTo>
-                    <a:pt x="2317116" y="2822881"/>
-                  </a:lnTo>
-                  <a:lnTo>
-                    <a:pt x="2394750" y="2834512"/>
-                  </a:lnTo>
-                  <a:lnTo>
-                    <a:pt x="2472385" y="2845980"/>
-                  </a:lnTo>
-                  <a:lnTo>
-                    <a:pt x="2550019" y="2857288"/>
-                  </a:lnTo>
-                  <a:lnTo>
-                    <a:pt x="2627653" y="2868437"/>
-                  </a:lnTo>
-                  <a:lnTo>
-                    <a:pt x="2705287" y="2879429"/>
-                  </a:lnTo>
-                  <a:lnTo>
-                    <a:pt x="2782921" y="2890268"/>
-                  </a:lnTo>
-                  <a:lnTo>
-                    <a:pt x="2860555" y="2900954"/>
-                  </a:lnTo>
-                  <a:lnTo>
-                    <a:pt x="2938189" y="2911491"/>
-                  </a:lnTo>
-                  <a:lnTo>
-                    <a:pt x="3015823" y="2921880"/>
-                  </a:lnTo>
-                  <a:lnTo>
-                    <a:pt x="3093457" y="2932123"/>
-                  </a:lnTo>
-                  <a:lnTo>
-                    <a:pt x="3171091" y="2942223"/>
-                  </a:lnTo>
-                  <a:lnTo>
-                    <a:pt x="3248725" y="2952181"/>
-                  </a:lnTo>
-                  <a:lnTo>
-                    <a:pt x="3326359" y="2962000"/>
-                  </a:lnTo>
-                  <a:lnTo>
-                    <a:pt x="3403993" y="2971681"/>
-                  </a:lnTo>
-                  <a:lnTo>
-                    <a:pt x="3481627" y="2981226"/>
-                  </a:lnTo>
-                  <a:lnTo>
-                    <a:pt x="3559261" y="2990638"/>
-                  </a:lnTo>
-                  <a:lnTo>
-                    <a:pt x="3636895" y="2999917"/>
-                  </a:lnTo>
-                  <a:lnTo>
-                    <a:pt x="3714529" y="3009067"/>
-                  </a:lnTo>
-                  <a:lnTo>
-                    <a:pt x="3792163" y="3018088"/>
-                  </a:lnTo>
-                  <a:lnTo>
-                    <a:pt x="3869797" y="3026983"/>
-                  </a:lnTo>
-                  <a:lnTo>
-                    <a:pt x="3947431" y="3035753"/>
-                  </a:lnTo>
-                  <a:lnTo>
-                    <a:pt x="4025065" y="3044400"/>
-                  </a:lnTo>
-                  <a:lnTo>
-                    <a:pt x="4102699" y="3052926"/>
-                  </a:lnTo>
-                  <a:lnTo>
-                    <a:pt x="4180334" y="3061333"/>
-                  </a:lnTo>
-                  <a:lnTo>
-                    <a:pt x="4257968" y="3069621"/>
-                  </a:lnTo>
-                  <a:lnTo>
-                    <a:pt x="4335602" y="3077794"/>
-                  </a:lnTo>
-                  <a:lnTo>
-                    <a:pt x="4413236" y="3085852"/>
-                  </a:lnTo>
-                  <a:lnTo>
-                    <a:pt x="4490870" y="3093797"/>
-                  </a:lnTo>
-                  <a:lnTo>
-                    <a:pt x="4568504" y="3101630"/>
-                  </a:lnTo>
-                  <a:lnTo>
-                    <a:pt x="4646138" y="3109354"/>
-                  </a:lnTo>
-                  <a:lnTo>
-                    <a:pt x="4723772" y="3116969"/>
-                  </a:lnTo>
-                  <a:lnTo>
-                    <a:pt x="4801406" y="3124478"/>
-                  </a:lnTo>
-                  <a:lnTo>
-                    <a:pt x="4879040" y="3131882"/>
-                  </a:lnTo>
-                  <a:lnTo>
-                    <a:pt x="4956674" y="3139181"/>
-                  </a:lnTo>
-                  <a:lnTo>
-                    <a:pt x="5034308" y="3146379"/>
-                  </a:lnTo>
-                  <a:lnTo>
-                    <a:pt x="5111942" y="3153475"/>
-                  </a:lnTo>
-                  <a:lnTo>
-                    <a:pt x="5189576" y="3160472"/>
-                  </a:lnTo>
-                  <a:lnTo>
-                    <a:pt x="5267210" y="3167371"/>
-                  </a:lnTo>
-                  <a:lnTo>
-                    <a:pt x="5344844" y="3174173"/>
-                  </a:lnTo>
-                  <a:lnTo>
-                    <a:pt x="5422478" y="3180880"/>
-                  </a:lnTo>
-                  <a:lnTo>
-                    <a:pt x="5500112" y="3187493"/>
-                  </a:lnTo>
-                  <a:lnTo>
-                    <a:pt x="5577746" y="3194013"/>
-                  </a:lnTo>
-                  <a:lnTo>
-                    <a:pt x="5655380" y="3200442"/>
-                  </a:lnTo>
-                  <a:lnTo>
-                    <a:pt x="5733014" y="3206781"/>
-                  </a:lnTo>
-                  <a:lnTo>
-                    <a:pt x="5810648" y="3213031"/>
-                  </a:lnTo>
-                  <a:lnTo>
-                    <a:pt x="5888282" y="3219193"/>
-                  </a:lnTo>
-                  <a:lnTo>
-                    <a:pt x="5965917" y="3225269"/>
-                  </a:lnTo>
-                  <a:lnTo>
-                    <a:pt x="6043551" y="3231259"/>
+                    <a:pt x="35151" y="91040"/>
+                  </a:lnTo>
+                  <a:lnTo>
+                    <a:pt x="112785" y="281362"/>
+                  </a:lnTo>
+                  <a:lnTo>
+                    <a:pt x="190419" y="461514"/>
+                  </a:lnTo>
+                  <a:lnTo>
+                    <a:pt x="268053" y="632040"/>
+                  </a:lnTo>
+                  <a:lnTo>
+                    <a:pt x="345687" y="793453"/>
+                  </a:lnTo>
+                  <a:lnTo>
+                    <a:pt x="423321" y="946240"/>
+                  </a:lnTo>
+                  <a:lnTo>
+                    <a:pt x="500955" y="1090863"/>
+                  </a:lnTo>
+                  <a:lnTo>
+                    <a:pt x="578589" y="1227757"/>
+                  </a:lnTo>
+                  <a:lnTo>
+                    <a:pt x="656223" y="1357337"/>
+                  </a:lnTo>
+                  <a:lnTo>
+                    <a:pt x="733858" y="1479992"/>
+                  </a:lnTo>
+                  <a:lnTo>
+                    <a:pt x="811492" y="1596092"/>
+                  </a:lnTo>
+                  <a:lnTo>
+                    <a:pt x="889126" y="1705989"/>
+                  </a:lnTo>
+                  <a:lnTo>
+                    <a:pt x="966760" y="1810013"/>
+                  </a:lnTo>
+                  <a:lnTo>
+                    <a:pt x="1044394" y="1908478"/>
+                  </a:lnTo>
+                  <a:lnTo>
+                    <a:pt x="1122028" y="2001681"/>
+                  </a:lnTo>
+                  <a:lnTo>
+                    <a:pt x="1199662" y="2089904"/>
+                  </a:lnTo>
+                  <a:lnTo>
+                    <a:pt x="1277296" y="2173413"/>
+                  </a:lnTo>
+                  <a:lnTo>
+                    <a:pt x="1354930" y="2252459"/>
+                  </a:lnTo>
+                  <a:lnTo>
+                    <a:pt x="1432564" y="2327281"/>
+                  </a:lnTo>
+                  <a:lnTo>
+                    <a:pt x="1510198" y="2398105"/>
+                  </a:lnTo>
+                  <a:lnTo>
+                    <a:pt x="1587832" y="2465144"/>
+                  </a:lnTo>
+                  <a:lnTo>
+                    <a:pt x="1665466" y="2528601"/>
+                  </a:lnTo>
+                  <a:lnTo>
+                    <a:pt x="1743100" y="2588666"/>
+                  </a:lnTo>
+                  <a:lnTo>
+                    <a:pt x="1820734" y="2645522"/>
+                  </a:lnTo>
+                  <a:lnTo>
+                    <a:pt x="1898368" y="2699340"/>
+                  </a:lnTo>
+                  <a:lnTo>
+                    <a:pt x="1976002" y="2750282"/>
+                  </a:lnTo>
+                  <a:lnTo>
+                    <a:pt x="2053636" y="2786929"/>
+                  </a:lnTo>
+                  <a:lnTo>
+                    <a:pt x="2131270" y="2798890"/>
+                  </a:lnTo>
+                  <a:lnTo>
+                    <a:pt x="2208904" y="2810686"/>
+                  </a:lnTo>
+                  <a:lnTo>
+                    <a:pt x="2286538" y="2822320"/>
+                  </a:lnTo>
+                  <a:lnTo>
+                    <a:pt x="2364172" y="2833792"/>
+                  </a:lnTo>
+                  <a:lnTo>
+                    <a:pt x="2441807" y="2845106"/>
+                  </a:lnTo>
+                  <a:lnTo>
+                    <a:pt x="2519441" y="2856264"/>
+                  </a:lnTo>
+                  <a:lnTo>
+                    <a:pt x="2597075" y="2867268"/>
+                  </a:lnTo>
+                  <a:lnTo>
+                    <a:pt x="2674709" y="2878119"/>
+                  </a:lnTo>
+                  <a:lnTo>
+                    <a:pt x="2752343" y="2888821"/>
+                  </a:lnTo>
+                  <a:lnTo>
+                    <a:pt x="2829977" y="2899374"/>
+                  </a:lnTo>
+                  <a:lnTo>
+                    <a:pt x="2907611" y="2909782"/>
+                  </a:lnTo>
+                  <a:lnTo>
+                    <a:pt x="2985245" y="2920046"/>
+                  </a:lnTo>
+                  <a:lnTo>
+                    <a:pt x="3062879" y="2930169"/>
+                  </a:lnTo>
+                  <a:lnTo>
+                    <a:pt x="3140513" y="2940151"/>
+                  </a:lnTo>
+                  <a:lnTo>
+                    <a:pt x="3218147" y="2949996"/>
+                  </a:lnTo>
+                  <a:lnTo>
+                    <a:pt x="3295781" y="2959704"/>
+                  </a:lnTo>
+                  <a:lnTo>
+                    <a:pt x="3373415" y="2969278"/>
+                  </a:lnTo>
+                  <a:lnTo>
+                    <a:pt x="3451049" y="2978720"/>
+                  </a:lnTo>
+                  <a:lnTo>
+                    <a:pt x="3528683" y="2988032"/>
+                  </a:lnTo>
+                  <a:lnTo>
+                    <a:pt x="3606317" y="2997215"/>
+                  </a:lnTo>
+                  <a:lnTo>
+                    <a:pt x="3683951" y="3006271"/>
+                  </a:lnTo>
+                  <a:lnTo>
+                    <a:pt x="3761585" y="3015202"/>
+                  </a:lnTo>
+                  <a:lnTo>
+                    <a:pt x="3839219" y="3024009"/>
+                  </a:lnTo>
+                  <a:lnTo>
+                    <a:pt x="3916853" y="3032695"/>
+                  </a:lnTo>
+                  <a:lnTo>
+                    <a:pt x="3994487" y="3041261"/>
+                  </a:lnTo>
+                  <a:lnTo>
+                    <a:pt x="4072121" y="3049708"/>
+                  </a:lnTo>
+                  <a:lnTo>
+                    <a:pt x="4149756" y="3058039"/>
+                  </a:lnTo>
+                  <a:lnTo>
+                    <a:pt x="4227390" y="3066255"/>
+                  </a:lnTo>
+                  <a:lnTo>
+                    <a:pt x="4305024" y="3074357"/>
+                  </a:lnTo>
+                  <a:lnTo>
+                    <a:pt x="4382658" y="3082347"/>
+                  </a:lnTo>
+                  <a:lnTo>
+                    <a:pt x="4460292" y="3090227"/>
+                  </a:lnTo>
+                  <a:lnTo>
+                    <a:pt x="4537926" y="3097998"/>
+                  </a:lnTo>
+                  <a:lnTo>
+                    <a:pt x="4615560" y="3105661"/>
+                  </a:lnTo>
+                  <a:lnTo>
+                    <a:pt x="4693194" y="3113219"/>
+                  </a:lnTo>
+                  <a:lnTo>
+                    <a:pt x="4770828" y="3120672"/>
+                  </a:lnTo>
+                  <a:lnTo>
+                    <a:pt x="4848462" y="3128022"/>
+                  </a:lnTo>
+                  <a:lnTo>
+                    <a:pt x="4926096" y="3135271"/>
+                  </a:lnTo>
+                  <a:lnTo>
+                    <a:pt x="5003730" y="3142420"/>
+                  </a:lnTo>
+                  <a:lnTo>
+                    <a:pt x="5081364" y="3149469"/>
+                  </a:lnTo>
+                  <a:lnTo>
+                    <a:pt x="5158998" y="3156422"/>
+                  </a:lnTo>
+                  <a:lnTo>
+                    <a:pt x="5236632" y="3163278"/>
+                  </a:lnTo>
+                  <a:lnTo>
+                    <a:pt x="5314266" y="3170040"/>
+                  </a:lnTo>
+                  <a:lnTo>
+                    <a:pt x="5391900" y="3176708"/>
+                  </a:lnTo>
+                  <a:lnTo>
+                    <a:pt x="5469534" y="3183284"/>
+                  </a:lnTo>
+                  <a:lnTo>
+                    <a:pt x="5547168" y="3189769"/>
+                  </a:lnTo>
+                  <a:lnTo>
+                    <a:pt x="5624802" y="3196164"/>
+                  </a:lnTo>
+                  <a:lnTo>
+                    <a:pt x="5702436" y="3202471"/>
+                  </a:lnTo>
+                  <a:lnTo>
+                    <a:pt x="5780070" y="3208691"/>
+                  </a:lnTo>
+                  <a:lnTo>
+                    <a:pt x="5857705" y="3214826"/>
+                  </a:lnTo>
+                  <a:lnTo>
+                    <a:pt x="5935339" y="3220875"/>
+                  </a:lnTo>
+                  <a:lnTo>
+                    <a:pt x="6012973" y="3226841"/>
                   </a:lnTo>
                 </a:path>
               </a:pathLst>
@@ -3820,297 +3820,297 @@
           </p:nvSpPr>
           <p:spPr>
             <a:xfrm>
-              <a:off x="817517" y="3939435"/>
-              <a:ext cx="7370972" cy="1555674"/>
+              <a:off x="817517" y="3953643"/>
+              <a:ext cx="7370972" cy="1543666"/>
             </a:xfrm>
             <a:custGeom>
               <a:avLst/>
               <a:pathLst>
-                <a:path w="7370972" h="1555674">
+                <a:path w="7370972" h="1543666">
                   <a:moveTo>
-                    <a:pt x="7370972" y="1555674"/>
+                    <a:pt x="7370972" y="1543666"/>
                   </a:moveTo>
                   <a:lnTo>
-                    <a:pt x="7293338" y="1552666"/>
-                  </a:lnTo>
-                  <a:lnTo>
-                    <a:pt x="7215704" y="1549491"/>
-                  </a:lnTo>
-                  <a:lnTo>
-                    <a:pt x="7138070" y="1546139"/>
-                  </a:lnTo>
-                  <a:lnTo>
-                    <a:pt x="7060436" y="1542601"/>
-                  </a:lnTo>
-                  <a:lnTo>
-                    <a:pt x="6982802" y="1538867"/>
-                  </a:lnTo>
-                  <a:lnTo>
-                    <a:pt x="6905168" y="1534924"/>
-                  </a:lnTo>
-                  <a:lnTo>
-                    <a:pt x="6827534" y="1530763"/>
-                  </a:lnTo>
-                  <a:lnTo>
-                    <a:pt x="6749900" y="1526370"/>
-                  </a:lnTo>
-                  <a:lnTo>
-                    <a:pt x="6672266" y="1521733"/>
-                  </a:lnTo>
-                  <a:lnTo>
-                    <a:pt x="6594632" y="1516838"/>
-                  </a:lnTo>
-                  <a:lnTo>
-                    <a:pt x="6516998" y="1511671"/>
-                  </a:lnTo>
-                  <a:lnTo>
-                    <a:pt x="6439364" y="1506217"/>
-                  </a:lnTo>
-                  <a:lnTo>
-                    <a:pt x="6361730" y="1500459"/>
-                  </a:lnTo>
-                  <a:lnTo>
-                    <a:pt x="6284096" y="1494381"/>
-                  </a:lnTo>
-                  <a:lnTo>
-                    <a:pt x="6206462" y="1487966"/>
-                  </a:lnTo>
-                  <a:lnTo>
-                    <a:pt x="6128827" y="1481193"/>
-                  </a:lnTo>
-                  <a:lnTo>
-                    <a:pt x="6051193" y="1474044"/>
-                  </a:lnTo>
-                  <a:lnTo>
-                    <a:pt x="5973559" y="1466498"/>
-                  </a:lnTo>
-                  <a:lnTo>
-                    <a:pt x="5895925" y="1458532"/>
-                  </a:lnTo>
-                  <a:lnTo>
-                    <a:pt x="5818291" y="1450123"/>
-                  </a:lnTo>
-                  <a:lnTo>
-                    <a:pt x="5740657" y="1441247"/>
-                  </a:lnTo>
-                  <a:lnTo>
-                    <a:pt x="5663023" y="1431877"/>
-                  </a:lnTo>
-                  <a:lnTo>
-                    <a:pt x="5585389" y="1421986"/>
-                  </a:lnTo>
-                  <a:lnTo>
-                    <a:pt x="5507755" y="1411545"/>
-                  </a:lnTo>
-                  <a:lnTo>
-                    <a:pt x="5430121" y="1400523"/>
-                  </a:lnTo>
-                  <a:lnTo>
-                    <a:pt x="5352487" y="1388889"/>
-                  </a:lnTo>
-                  <a:lnTo>
-                    <a:pt x="5274853" y="1376608"/>
-                  </a:lnTo>
-                  <a:lnTo>
-                    <a:pt x="5197219" y="1363644"/>
-                  </a:lnTo>
-                  <a:lnTo>
-                    <a:pt x="5119585" y="1349960"/>
-                  </a:lnTo>
-                  <a:lnTo>
-                    <a:pt x="5041951" y="1335514"/>
-                  </a:lnTo>
-                  <a:lnTo>
-                    <a:pt x="4964317" y="1320265"/>
-                  </a:lnTo>
-                  <a:lnTo>
-                    <a:pt x="4886683" y="1304169"/>
-                  </a:lnTo>
-                  <a:lnTo>
-                    <a:pt x="4809049" y="1287177"/>
-                  </a:lnTo>
-                  <a:lnTo>
-                    <a:pt x="4731415" y="1269241"/>
-                  </a:lnTo>
-                  <a:lnTo>
-                    <a:pt x="4653781" y="1250308"/>
-                  </a:lnTo>
-                  <a:lnTo>
-                    <a:pt x="4576147" y="1230322"/>
-                  </a:lnTo>
-                  <a:lnTo>
-                    <a:pt x="4498513" y="1209224"/>
-                  </a:lnTo>
-                  <a:lnTo>
-                    <a:pt x="4420879" y="1186954"/>
-                  </a:lnTo>
-                  <a:lnTo>
-                    <a:pt x="4343244" y="1163445"/>
-                  </a:lnTo>
-                  <a:lnTo>
-                    <a:pt x="4265610" y="1138629"/>
-                  </a:lnTo>
-                  <a:lnTo>
-                    <a:pt x="4187976" y="1112434"/>
-                  </a:lnTo>
-                  <a:lnTo>
-                    <a:pt x="4110342" y="1084782"/>
-                  </a:lnTo>
-                  <a:lnTo>
-                    <a:pt x="4032708" y="1055592"/>
-                  </a:lnTo>
-                  <a:lnTo>
-                    <a:pt x="3955074" y="1024780"/>
-                  </a:lnTo>
-                  <a:lnTo>
-                    <a:pt x="3877440" y="992254"/>
-                  </a:lnTo>
-                  <a:lnTo>
-                    <a:pt x="3799806" y="957921"/>
-                  </a:lnTo>
-                  <a:lnTo>
-                    <a:pt x="3722172" y="921678"/>
-                  </a:lnTo>
-                  <a:lnTo>
-                    <a:pt x="3644538" y="883420"/>
-                  </a:lnTo>
-                  <a:lnTo>
-                    <a:pt x="3566904" y="843034"/>
-                  </a:lnTo>
-                  <a:lnTo>
-                    <a:pt x="3489270" y="800404"/>
-                  </a:lnTo>
-                  <a:lnTo>
-                    <a:pt x="3411636" y="755403"/>
-                  </a:lnTo>
-                  <a:lnTo>
-                    <a:pt x="3334002" y="731807"/>
-                  </a:lnTo>
-                  <a:lnTo>
-                    <a:pt x="3256368" y="719326"/>
-                  </a:lnTo>
-                  <a:lnTo>
-                    <a:pt x="3178734" y="706666"/>
-                  </a:lnTo>
-                  <a:lnTo>
-                    <a:pt x="3101100" y="693827"/>
-                  </a:lnTo>
-                  <a:lnTo>
-                    <a:pt x="3023466" y="680806"/>
-                  </a:lnTo>
-                  <a:lnTo>
-                    <a:pt x="2945832" y="667599"/>
-                  </a:lnTo>
-                  <a:lnTo>
-                    <a:pt x="2868198" y="654204"/>
-                  </a:lnTo>
-                  <a:lnTo>
-                    <a:pt x="2790564" y="640619"/>
-                  </a:lnTo>
-                  <a:lnTo>
-                    <a:pt x="2712930" y="626841"/>
-                  </a:lnTo>
-                  <a:lnTo>
-                    <a:pt x="2635295" y="612867"/>
-                  </a:lnTo>
-                  <a:lnTo>
-                    <a:pt x="2557661" y="598695"/>
-                  </a:lnTo>
-                  <a:lnTo>
-                    <a:pt x="2480027" y="584320"/>
-                  </a:lnTo>
-                  <a:lnTo>
-                    <a:pt x="2402393" y="569742"/>
-                  </a:lnTo>
-                  <a:lnTo>
-                    <a:pt x="2324759" y="554956"/>
-                  </a:lnTo>
-                  <a:lnTo>
-                    <a:pt x="2247125" y="539960"/>
-                  </a:lnTo>
-                  <a:lnTo>
-                    <a:pt x="2169491" y="524751"/>
-                  </a:lnTo>
-                  <a:lnTo>
-                    <a:pt x="2091857" y="509326"/>
-                  </a:lnTo>
-                  <a:lnTo>
-                    <a:pt x="2014223" y="493681"/>
-                  </a:lnTo>
-                  <a:lnTo>
-                    <a:pt x="1936589" y="477814"/>
-                  </a:lnTo>
-                  <a:lnTo>
-                    <a:pt x="1858955" y="461721"/>
-                  </a:lnTo>
-                  <a:lnTo>
-                    <a:pt x="1781321" y="445400"/>
-                  </a:lnTo>
-                  <a:lnTo>
-                    <a:pt x="1703687" y="428846"/>
-                  </a:lnTo>
-                  <a:lnTo>
-                    <a:pt x="1626053" y="412058"/>
-                  </a:lnTo>
-                  <a:lnTo>
-                    <a:pt x="1548419" y="395030"/>
-                  </a:lnTo>
-                  <a:lnTo>
-                    <a:pt x="1470785" y="377761"/>
-                  </a:lnTo>
-                  <a:lnTo>
-                    <a:pt x="1393151" y="360245"/>
-                  </a:lnTo>
-                  <a:lnTo>
-                    <a:pt x="1315517" y="342481"/>
-                  </a:lnTo>
-                  <a:lnTo>
-                    <a:pt x="1237883" y="324465"/>
-                  </a:lnTo>
-                  <a:lnTo>
-                    <a:pt x="1160249" y="306192"/>
-                  </a:lnTo>
-                  <a:lnTo>
-                    <a:pt x="1082615" y="287659"/>
-                  </a:lnTo>
-                  <a:lnTo>
-                    <a:pt x="1004981" y="268863"/>
-                  </a:lnTo>
-                  <a:lnTo>
-                    <a:pt x="927346" y="249800"/>
-                  </a:lnTo>
-                  <a:lnTo>
-                    <a:pt x="849712" y="230466"/>
-                  </a:lnTo>
-                  <a:lnTo>
-                    <a:pt x="772078" y="210857"/>
-                  </a:lnTo>
-                  <a:lnTo>
-                    <a:pt x="694444" y="190969"/>
-                  </a:lnTo>
-                  <a:lnTo>
-                    <a:pt x="616810" y="170798"/>
-                  </a:lnTo>
-                  <a:lnTo>
-                    <a:pt x="539176" y="150341"/>
-                  </a:lnTo>
-                  <a:lnTo>
-                    <a:pt x="461542" y="129593"/>
-                  </a:lnTo>
-                  <a:lnTo>
-                    <a:pt x="383908" y="108549"/>
-                  </a:lnTo>
-                  <a:lnTo>
-                    <a:pt x="306274" y="87207"/>
-                  </a:lnTo>
-                  <a:lnTo>
-                    <a:pt x="228640" y="65561"/>
-                  </a:lnTo>
-                  <a:lnTo>
-                    <a:pt x="151006" y="43608"/>
-                  </a:lnTo>
-                  <a:lnTo>
-                    <a:pt x="73372" y="21342"/>
+                    <a:pt x="7293338" y="1540736"/>
+                  </a:lnTo>
+                  <a:lnTo>
+                    <a:pt x="7215704" y="1537641"/>
+                  </a:lnTo>
+                  <a:lnTo>
+                    <a:pt x="7138070" y="1534371"/>
+                  </a:lnTo>
+                  <a:lnTo>
+                    <a:pt x="7060436" y="1530916"/>
+                  </a:lnTo>
+                  <a:lnTo>
+                    <a:pt x="6982802" y="1527266"/>
+                  </a:lnTo>
+                  <a:lnTo>
+                    <a:pt x="6905168" y="1523411"/>
+                  </a:lnTo>
+                  <a:lnTo>
+                    <a:pt x="6827534" y="1519338"/>
+                  </a:lnTo>
+                  <a:lnTo>
+                    <a:pt x="6749900" y="1515034"/>
+                  </a:lnTo>
+                  <a:lnTo>
+                    <a:pt x="6672266" y="1510488"/>
+                  </a:lnTo>
+                  <a:lnTo>
+                    <a:pt x="6594632" y="1505685"/>
+                  </a:lnTo>
+                  <a:lnTo>
+                    <a:pt x="6516998" y="1500611"/>
+                  </a:lnTo>
+                  <a:lnTo>
+                    <a:pt x="6439364" y="1495251"/>
+                  </a:lnTo>
+                  <a:lnTo>
+                    <a:pt x="6361730" y="1489588"/>
+                  </a:lnTo>
+                  <a:lnTo>
+                    <a:pt x="6284096" y="1483605"/>
+                  </a:lnTo>
+                  <a:lnTo>
+                    <a:pt x="6206462" y="1477284"/>
+                  </a:lnTo>
+                  <a:lnTo>
+                    <a:pt x="6128827" y="1470607"/>
+                  </a:lnTo>
+                  <a:lnTo>
+                    <a:pt x="6051193" y="1463553"/>
+                  </a:lnTo>
+                  <a:lnTo>
+                    <a:pt x="5973559" y="1456100"/>
+                  </a:lnTo>
+                  <a:lnTo>
+                    <a:pt x="5895925" y="1448227"/>
+                  </a:lnTo>
+                  <a:lnTo>
+                    <a:pt x="5818291" y="1439909"/>
+                  </a:lnTo>
+                  <a:lnTo>
+                    <a:pt x="5740657" y="1431122"/>
+                  </a:lnTo>
+                  <a:lnTo>
+                    <a:pt x="5663023" y="1421839"/>
+                  </a:lnTo>
+                  <a:lnTo>
+                    <a:pt x="5585389" y="1412031"/>
+                  </a:lnTo>
+                  <a:lnTo>
+                    <a:pt x="5507755" y="1401670"/>
+                  </a:lnTo>
+                  <a:lnTo>
+                    <a:pt x="5430121" y="1390724"/>
+                  </a:lnTo>
+                  <a:lnTo>
+                    <a:pt x="5352487" y="1379160"/>
+                  </a:lnTo>
+                  <a:lnTo>
+                    <a:pt x="5274853" y="1366943"/>
+                  </a:lnTo>
+                  <a:lnTo>
+                    <a:pt x="5197219" y="1354036"/>
+                  </a:lnTo>
+                  <a:lnTo>
+                    <a:pt x="5119585" y="1340401"/>
+                  </a:lnTo>
+                  <a:lnTo>
+                    <a:pt x="5041951" y="1325996"/>
+                  </a:lnTo>
+                  <a:lnTo>
+                    <a:pt x="4964317" y="1310778"/>
+                  </a:lnTo>
+                  <a:lnTo>
+                    <a:pt x="4886683" y="1294701"/>
+                  </a:lnTo>
+                  <a:lnTo>
+                    <a:pt x="4809049" y="1277716"/>
+                  </a:lnTo>
+                  <a:lnTo>
+                    <a:pt x="4731415" y="1259772"/>
+                  </a:lnTo>
+                  <a:lnTo>
+                    <a:pt x="4653781" y="1240815"/>
+                  </a:lnTo>
+                  <a:lnTo>
+                    <a:pt x="4576147" y="1220788"/>
+                  </a:lnTo>
+                  <a:lnTo>
+                    <a:pt x="4498513" y="1199631"/>
+                  </a:lnTo>
+                  <a:lnTo>
+                    <a:pt x="4420879" y="1177279"/>
+                  </a:lnTo>
+                  <a:lnTo>
+                    <a:pt x="4343244" y="1153665"/>
+                  </a:lnTo>
+                  <a:lnTo>
+                    <a:pt x="4265610" y="1128718"/>
+                  </a:lnTo>
+                  <a:lnTo>
+                    <a:pt x="4187976" y="1102363"/>
+                  </a:lnTo>
+                  <a:lnTo>
+                    <a:pt x="4110342" y="1074520"/>
+                  </a:lnTo>
+                  <a:lnTo>
+                    <a:pt x="4032708" y="1045105"/>
+                  </a:lnTo>
+                  <a:lnTo>
+                    <a:pt x="3955074" y="1014029"/>
+                  </a:lnTo>
+                  <a:lnTo>
+                    <a:pt x="3877440" y="981199"/>
+                  </a:lnTo>
+                  <a:lnTo>
+                    <a:pt x="3799806" y="946516"/>
+                  </a:lnTo>
+                  <a:lnTo>
+                    <a:pt x="3722172" y="909874"/>
+                  </a:lnTo>
+                  <a:lnTo>
+                    <a:pt x="3644538" y="871164"/>
+                  </a:lnTo>
+                  <a:lnTo>
+                    <a:pt x="3566904" y="830269"/>
+                  </a:lnTo>
+                  <a:lnTo>
+                    <a:pt x="3489270" y="787065"/>
+                  </a:lnTo>
+                  <a:lnTo>
+                    <a:pt x="3411636" y="741422"/>
+                  </a:lnTo>
+                  <a:lnTo>
+                    <a:pt x="3334002" y="717720"/>
+                  </a:lnTo>
+                  <a:lnTo>
+                    <a:pt x="3256368" y="705421"/>
+                  </a:lnTo>
+                  <a:lnTo>
+                    <a:pt x="3178734" y="692949"/>
+                  </a:lnTo>
+                  <a:lnTo>
+                    <a:pt x="3101100" y="680303"/>
+                  </a:lnTo>
+                  <a:lnTo>
+                    <a:pt x="3023466" y="667480"/>
+                  </a:lnTo>
+                  <a:lnTo>
+                    <a:pt x="2945832" y="654477"/>
+                  </a:lnTo>
+                  <a:lnTo>
+                    <a:pt x="2868198" y="641292"/>
+                  </a:lnTo>
+                  <a:lnTo>
+                    <a:pt x="2790564" y="627922"/>
+                  </a:lnTo>
+                  <a:lnTo>
+                    <a:pt x="2712930" y="614365"/>
+                  </a:lnTo>
+                  <a:lnTo>
+                    <a:pt x="2635295" y="600617"/>
+                  </a:lnTo>
+                  <a:lnTo>
+                    <a:pt x="2557661" y="586678"/>
+                  </a:lnTo>
+                  <a:lnTo>
+                    <a:pt x="2480027" y="572543"/>
+                  </a:lnTo>
+                  <a:lnTo>
+                    <a:pt x="2402393" y="558210"/>
+                  </a:lnTo>
+                  <a:lnTo>
+                    <a:pt x="2324759" y="543676"/>
+                  </a:lnTo>
+                  <a:lnTo>
+                    <a:pt x="2247125" y="528938"/>
+                  </a:lnTo>
+                  <a:lnTo>
+                    <a:pt x="2169491" y="513994"/>
+                  </a:lnTo>
+                  <a:lnTo>
+                    <a:pt x="2091857" y="498841"/>
+                  </a:lnTo>
+                  <a:lnTo>
+                    <a:pt x="2014223" y="483475"/>
+                  </a:lnTo>
+                  <a:lnTo>
+                    <a:pt x="1936589" y="467894"/>
+                  </a:lnTo>
+                  <a:lnTo>
+                    <a:pt x="1858955" y="452095"/>
+                  </a:lnTo>
+                  <a:lnTo>
+                    <a:pt x="1781321" y="436074"/>
+                  </a:lnTo>
+                  <a:lnTo>
+                    <a:pt x="1703687" y="419829"/>
+                  </a:lnTo>
+                  <a:lnTo>
+                    <a:pt x="1626053" y="403356"/>
+                  </a:lnTo>
+                  <a:lnTo>
+                    <a:pt x="1548419" y="386653"/>
+                  </a:lnTo>
+                  <a:lnTo>
+                    <a:pt x="1470785" y="369715"/>
+                  </a:lnTo>
+                  <a:lnTo>
+                    <a:pt x="1393151" y="352541"/>
+                  </a:lnTo>
+                  <a:lnTo>
+                    <a:pt x="1315517" y="335125"/>
+                  </a:lnTo>
+                  <a:lnTo>
+                    <a:pt x="1237883" y="317466"/>
+                  </a:lnTo>
+                  <a:lnTo>
+                    <a:pt x="1160249" y="299559"/>
+                  </a:lnTo>
+                  <a:lnTo>
+                    <a:pt x="1082615" y="281401"/>
+                  </a:lnTo>
+                  <a:lnTo>
+                    <a:pt x="1004981" y="262989"/>
+                  </a:lnTo>
+                  <a:lnTo>
+                    <a:pt x="927346" y="244319"/>
+                  </a:lnTo>
+                  <a:lnTo>
+                    <a:pt x="849712" y="225387"/>
+                  </a:lnTo>
+                  <a:lnTo>
+                    <a:pt x="772078" y="206190"/>
+                  </a:lnTo>
+                  <a:lnTo>
+                    <a:pt x="694444" y="186724"/>
+                  </a:lnTo>
+                  <a:lnTo>
+                    <a:pt x="616810" y="166986"/>
+                  </a:lnTo>
+                  <a:lnTo>
+                    <a:pt x="539176" y="146970"/>
+                  </a:lnTo>
+                  <a:lnTo>
+                    <a:pt x="461542" y="126675"/>
+                  </a:lnTo>
+                  <a:lnTo>
+                    <a:pt x="383908" y="106095"/>
+                  </a:lnTo>
+                  <a:lnTo>
+                    <a:pt x="306274" y="85227"/>
+                  </a:lnTo>
+                  <a:lnTo>
+                    <a:pt x="228640" y="64066"/>
+                  </a:lnTo>
+                  <a:lnTo>
+                    <a:pt x="151006" y="42609"/>
+                  </a:lnTo>
+                  <a:lnTo>
+                    <a:pt x="73372" y="20851"/>
                   </a:lnTo>
                   <a:lnTo>
                     <a:pt x="0" y="0"/>
@@ -4133,297 +4133,297 @@
           </p:nvSpPr>
           <p:spPr>
             <a:xfrm>
-              <a:off x="938035" y="1896563"/>
-              <a:ext cx="7250454" cy="3501661"/>
+              <a:off x="966479" y="1896563"/>
+              <a:ext cx="7222010" cy="3503989"/>
             </a:xfrm>
             <a:custGeom>
               <a:avLst/>
               <a:pathLst>
-                <a:path w="7250454" h="3501661">
+                <a:path w="7222010" h="3503989">
                   <a:moveTo>
                     <a:pt x="0" y="0"/>
                   </a:moveTo>
                   <a:lnTo>
-                    <a:pt x="30488" y="49108"/>
-                  </a:lnTo>
-                  <a:lnTo>
-                    <a:pt x="108122" y="169963"/>
-                  </a:lnTo>
-                  <a:lnTo>
-                    <a:pt x="185756" y="286764"/>
-                  </a:lnTo>
-                  <a:lnTo>
-                    <a:pt x="263390" y="399648"/>
-                  </a:lnTo>
-                  <a:lnTo>
-                    <a:pt x="341024" y="508746"/>
-                  </a:lnTo>
-                  <a:lnTo>
-                    <a:pt x="418658" y="614185"/>
-                  </a:lnTo>
-                  <a:lnTo>
-                    <a:pt x="496292" y="716088"/>
-                  </a:lnTo>
-                  <a:lnTo>
-                    <a:pt x="573926" y="814573"/>
-                  </a:lnTo>
-                  <a:lnTo>
-                    <a:pt x="651560" y="909755"/>
-                  </a:lnTo>
-                  <a:lnTo>
-                    <a:pt x="729194" y="1001745"/>
-                  </a:lnTo>
-                  <a:lnTo>
-                    <a:pt x="806828" y="1090650"/>
-                  </a:lnTo>
-                  <a:lnTo>
-                    <a:pt x="884462" y="1176574"/>
-                  </a:lnTo>
-                  <a:lnTo>
-                    <a:pt x="962097" y="1259615"/>
-                  </a:lnTo>
-                  <a:lnTo>
-                    <a:pt x="1039731" y="1339872"/>
-                  </a:lnTo>
-                  <a:lnTo>
-                    <a:pt x="1117365" y="1417437"/>
-                  </a:lnTo>
-                  <a:lnTo>
-                    <a:pt x="1194999" y="1492401"/>
-                  </a:lnTo>
-                  <a:lnTo>
-                    <a:pt x="1272633" y="1564850"/>
-                  </a:lnTo>
-                  <a:lnTo>
-                    <a:pt x="1350267" y="1634870"/>
-                  </a:lnTo>
-                  <a:lnTo>
-                    <a:pt x="1427901" y="1702541"/>
-                  </a:lnTo>
-                  <a:lnTo>
-                    <a:pt x="1505535" y="1767943"/>
-                  </a:lnTo>
-                  <a:lnTo>
-                    <a:pt x="1583169" y="1831152"/>
-                  </a:lnTo>
-                  <a:lnTo>
-                    <a:pt x="1660803" y="1892240"/>
-                  </a:lnTo>
-                  <a:lnTo>
-                    <a:pt x="1738437" y="1951280"/>
-                  </a:lnTo>
-                  <a:lnTo>
-                    <a:pt x="1816071" y="2008340"/>
-                  </a:lnTo>
-                  <a:lnTo>
-                    <a:pt x="1893705" y="2063486"/>
-                  </a:lnTo>
-                  <a:lnTo>
-                    <a:pt x="1971339" y="2116783"/>
-                  </a:lnTo>
-                  <a:lnTo>
-                    <a:pt x="2048973" y="2168292"/>
-                  </a:lnTo>
-                  <a:lnTo>
-                    <a:pt x="2126607" y="2218074"/>
-                  </a:lnTo>
-                  <a:lnTo>
-                    <a:pt x="2204241" y="2266186"/>
-                  </a:lnTo>
-                  <a:lnTo>
-                    <a:pt x="2281875" y="2312685"/>
-                  </a:lnTo>
-                  <a:lnTo>
-                    <a:pt x="2359509" y="2357624"/>
-                  </a:lnTo>
-                  <a:lnTo>
-                    <a:pt x="2437143" y="2401056"/>
-                  </a:lnTo>
-                  <a:lnTo>
-                    <a:pt x="2514777" y="2443031"/>
-                  </a:lnTo>
-                  <a:lnTo>
-                    <a:pt x="2592411" y="2483599"/>
-                  </a:lnTo>
-                  <a:lnTo>
-                    <a:pt x="2670046" y="2522806"/>
-                  </a:lnTo>
-                  <a:lnTo>
-                    <a:pt x="2747680" y="2560698"/>
-                  </a:lnTo>
-                  <a:lnTo>
-                    <a:pt x="2825314" y="2597319"/>
-                  </a:lnTo>
-                  <a:lnTo>
-                    <a:pt x="2902948" y="2632712"/>
-                  </a:lnTo>
-                  <a:lnTo>
-                    <a:pt x="2980582" y="2666918"/>
-                  </a:lnTo>
-                  <a:lnTo>
-                    <a:pt x="3058216" y="2699977"/>
-                  </a:lnTo>
-                  <a:lnTo>
-                    <a:pt x="3135850" y="2731928"/>
-                  </a:lnTo>
-                  <a:lnTo>
-                    <a:pt x="3213484" y="2762806"/>
-                  </a:lnTo>
-                  <a:lnTo>
-                    <a:pt x="3291118" y="2792649"/>
-                  </a:lnTo>
-                  <a:lnTo>
-                    <a:pt x="3368752" y="2821492"/>
-                  </a:lnTo>
-                  <a:lnTo>
-                    <a:pt x="3446386" y="2849366"/>
-                  </a:lnTo>
-                  <a:lnTo>
-                    <a:pt x="3524020" y="2876306"/>
-                  </a:lnTo>
-                  <a:lnTo>
-                    <a:pt x="3601654" y="2902343"/>
-                  </a:lnTo>
-                  <a:lnTo>
-                    <a:pt x="3679288" y="2927506"/>
-                  </a:lnTo>
-                  <a:lnTo>
-                    <a:pt x="3756922" y="2951826"/>
-                  </a:lnTo>
-                  <a:lnTo>
-                    <a:pt x="3834556" y="2975330"/>
-                  </a:lnTo>
-                  <a:lnTo>
-                    <a:pt x="3912190" y="2998045"/>
-                  </a:lnTo>
-                  <a:lnTo>
-                    <a:pt x="3989824" y="3019999"/>
-                  </a:lnTo>
-                  <a:lnTo>
-                    <a:pt x="4067458" y="3041216"/>
-                  </a:lnTo>
-                  <a:lnTo>
-                    <a:pt x="4145092" y="3061722"/>
-                  </a:lnTo>
-                  <a:lnTo>
-                    <a:pt x="4222726" y="3081540"/>
-                  </a:lnTo>
-                  <a:lnTo>
-                    <a:pt x="4300360" y="3100694"/>
-                  </a:lnTo>
-                  <a:lnTo>
-                    <a:pt x="4377994" y="3119205"/>
-                  </a:lnTo>
-                  <a:lnTo>
-                    <a:pt x="4455629" y="3137095"/>
-                  </a:lnTo>
-                  <a:lnTo>
-                    <a:pt x="4533263" y="3154385"/>
-                  </a:lnTo>
-                  <a:lnTo>
-                    <a:pt x="4610897" y="3171096"/>
-                  </a:lnTo>
-                  <a:lnTo>
-                    <a:pt x="4688531" y="3187246"/>
-                  </a:lnTo>
-                  <a:lnTo>
-                    <a:pt x="4766165" y="3202854"/>
-                  </a:lnTo>
-                  <a:lnTo>
-                    <a:pt x="4843799" y="3217939"/>
-                  </a:lnTo>
-                  <a:lnTo>
-                    <a:pt x="4921433" y="3232518"/>
-                  </a:lnTo>
-                  <a:lnTo>
-                    <a:pt x="4999067" y="3246608"/>
-                  </a:lnTo>
-                  <a:lnTo>
-                    <a:pt x="5076701" y="3260226"/>
-                  </a:lnTo>
-                  <a:lnTo>
-                    <a:pt x="5154335" y="3273386"/>
-                  </a:lnTo>
-                  <a:lnTo>
-                    <a:pt x="5231969" y="3286106"/>
-                  </a:lnTo>
-                  <a:lnTo>
-                    <a:pt x="5309603" y="3298399"/>
-                  </a:lnTo>
-                  <a:lnTo>
-                    <a:pt x="5387237" y="3310279"/>
-                  </a:lnTo>
-                  <a:lnTo>
-                    <a:pt x="5464871" y="3321761"/>
-                  </a:lnTo>
-                  <a:lnTo>
-                    <a:pt x="5542505" y="3332858"/>
-                  </a:lnTo>
-                  <a:lnTo>
-                    <a:pt x="5620139" y="3343583"/>
-                  </a:lnTo>
-                  <a:lnTo>
-                    <a:pt x="5697773" y="3353948"/>
-                  </a:lnTo>
-                  <a:lnTo>
-                    <a:pt x="5775407" y="3363966"/>
-                  </a:lnTo>
-                  <a:lnTo>
-                    <a:pt x="5853041" y="3373647"/>
-                  </a:lnTo>
-                  <a:lnTo>
-                    <a:pt x="5930675" y="3383004"/>
-                  </a:lnTo>
-                  <a:lnTo>
-                    <a:pt x="6008309" y="3392047"/>
-                  </a:lnTo>
-                  <a:lnTo>
-                    <a:pt x="6085943" y="3400787"/>
-                  </a:lnTo>
-                  <a:lnTo>
-                    <a:pt x="6163578" y="3409234"/>
-                  </a:lnTo>
-                  <a:lnTo>
-                    <a:pt x="6241212" y="3417397"/>
-                  </a:lnTo>
-                  <a:lnTo>
-                    <a:pt x="6318846" y="3425287"/>
-                  </a:lnTo>
-                  <a:lnTo>
-                    <a:pt x="6396480" y="3432912"/>
-                  </a:lnTo>
-                  <a:lnTo>
-                    <a:pt x="6474114" y="3440281"/>
-                  </a:lnTo>
-                  <a:lnTo>
-                    <a:pt x="6551748" y="3447403"/>
-                  </a:lnTo>
-                  <a:lnTo>
-                    <a:pt x="6629382" y="3454287"/>
-                  </a:lnTo>
-                  <a:lnTo>
-                    <a:pt x="6707016" y="3460939"/>
-                  </a:lnTo>
-                  <a:lnTo>
-                    <a:pt x="6784650" y="3467368"/>
-                  </a:lnTo>
-                  <a:lnTo>
-                    <a:pt x="6862284" y="3473582"/>
-                  </a:lnTo>
-                  <a:lnTo>
-                    <a:pt x="6939918" y="3479587"/>
-                  </a:lnTo>
-                  <a:lnTo>
-                    <a:pt x="7017552" y="3485391"/>
-                  </a:lnTo>
-                  <a:lnTo>
-                    <a:pt x="7095186" y="3491000"/>
-                  </a:lnTo>
-                  <a:lnTo>
-                    <a:pt x="7172820" y="3496422"/>
-                  </a:lnTo>
-                  <a:lnTo>
-                    <a:pt x="7250454" y="3501661"/>
+                    <a:pt x="2044" y="3365"/>
+                  </a:lnTo>
+                  <a:lnTo>
+                    <a:pt x="79678" y="126820"/>
+                  </a:lnTo>
+                  <a:lnTo>
+                    <a:pt x="157312" y="246100"/>
+                  </a:lnTo>
+                  <a:lnTo>
+                    <a:pt x="234946" y="361344"/>
+                  </a:lnTo>
+                  <a:lnTo>
+                    <a:pt x="312580" y="472689"/>
+                  </a:lnTo>
+                  <a:lnTo>
+                    <a:pt x="390214" y="580268"/>
+                  </a:lnTo>
+                  <a:lnTo>
+                    <a:pt x="467848" y="684207"/>
+                  </a:lnTo>
+                  <a:lnTo>
+                    <a:pt x="545482" y="784629"/>
+                  </a:lnTo>
+                  <a:lnTo>
+                    <a:pt x="623116" y="881655"/>
+                  </a:lnTo>
+                  <a:lnTo>
+                    <a:pt x="700750" y="975398"/>
+                  </a:lnTo>
+                  <a:lnTo>
+                    <a:pt x="778384" y="1065970"/>
+                  </a:lnTo>
+                  <a:lnTo>
+                    <a:pt x="856018" y="1153477"/>
+                  </a:lnTo>
+                  <a:lnTo>
+                    <a:pt x="933653" y="1238025"/>
+                  </a:lnTo>
+                  <a:lnTo>
+                    <a:pt x="1011287" y="1319712"/>
+                  </a:lnTo>
+                  <a:lnTo>
+                    <a:pt x="1088921" y="1398635"/>
+                  </a:lnTo>
+                  <a:lnTo>
+                    <a:pt x="1166555" y="1474889"/>
+                  </a:lnTo>
+                  <a:lnTo>
+                    <a:pt x="1244189" y="1548563"/>
+                  </a:lnTo>
+                  <a:lnTo>
+                    <a:pt x="1321823" y="1619744"/>
+                  </a:lnTo>
+                  <a:lnTo>
+                    <a:pt x="1399457" y="1688518"/>
+                  </a:lnTo>
+                  <a:lnTo>
+                    <a:pt x="1477091" y="1754964"/>
+                  </a:lnTo>
+                  <a:lnTo>
+                    <a:pt x="1554725" y="1819163"/>
+                  </a:lnTo>
+                  <a:lnTo>
+                    <a:pt x="1632359" y="1881190"/>
+                  </a:lnTo>
+                  <a:lnTo>
+                    <a:pt x="1709993" y="1941119"/>
+                  </a:lnTo>
+                  <a:lnTo>
+                    <a:pt x="1787627" y="1999020"/>
+                  </a:lnTo>
+                  <a:lnTo>
+                    <a:pt x="1865261" y="2054962"/>
+                  </a:lnTo>
+                  <a:lnTo>
+                    <a:pt x="1942895" y="2109012"/>
+                  </a:lnTo>
+                  <a:lnTo>
+                    <a:pt x="2020529" y="2161234"/>
+                  </a:lnTo>
+                  <a:lnTo>
+                    <a:pt x="2098163" y="2211688"/>
+                  </a:lnTo>
+                  <a:lnTo>
+                    <a:pt x="2175797" y="2260436"/>
+                  </a:lnTo>
+                  <a:lnTo>
+                    <a:pt x="2253431" y="2307535"/>
+                  </a:lnTo>
+                  <a:lnTo>
+                    <a:pt x="2331065" y="2353040"/>
+                  </a:lnTo>
+                  <a:lnTo>
+                    <a:pt x="2408699" y="2397006"/>
+                  </a:lnTo>
+                  <a:lnTo>
+                    <a:pt x="2486333" y="2439484"/>
+                  </a:lnTo>
+                  <a:lnTo>
+                    <a:pt x="2563967" y="2480526"/>
+                  </a:lnTo>
+                  <a:lnTo>
+                    <a:pt x="2641602" y="2520179"/>
+                  </a:lnTo>
+                  <a:lnTo>
+                    <a:pt x="2719236" y="2558490"/>
+                  </a:lnTo>
+                  <a:lnTo>
+                    <a:pt x="2796870" y="2595506"/>
+                  </a:lnTo>
+                  <a:lnTo>
+                    <a:pt x="2874504" y="2631269"/>
+                  </a:lnTo>
+                  <a:lnTo>
+                    <a:pt x="2952138" y="2665822"/>
+                  </a:lnTo>
+                  <a:lnTo>
+                    <a:pt x="3029772" y="2699207"/>
+                  </a:lnTo>
+                  <a:lnTo>
+                    <a:pt x="3107406" y="2731461"/>
+                  </a:lnTo>
+                  <a:lnTo>
+                    <a:pt x="3185040" y="2762625"/>
+                  </a:lnTo>
+                  <a:lnTo>
+                    <a:pt x="3262674" y="2792735"/>
+                  </a:lnTo>
+                  <a:lnTo>
+                    <a:pt x="3340308" y="2821826"/>
+                  </a:lnTo>
+                  <a:lnTo>
+                    <a:pt x="3417942" y="2849932"/>
+                  </a:lnTo>
+                  <a:lnTo>
+                    <a:pt x="3495576" y="2877088"/>
+                  </a:lnTo>
+                  <a:lnTo>
+                    <a:pt x="3573210" y="2903325"/>
+                  </a:lnTo>
+                  <a:lnTo>
+                    <a:pt x="3650844" y="2928675"/>
+                  </a:lnTo>
+                  <a:lnTo>
+                    <a:pt x="3728478" y="2953167"/>
+                  </a:lnTo>
+                  <a:lnTo>
+                    <a:pt x="3806112" y="2976830"/>
+                  </a:lnTo>
+                  <a:lnTo>
+                    <a:pt x="3883746" y="2999693"/>
+                  </a:lnTo>
+                  <a:lnTo>
+                    <a:pt x="3961380" y="3021783"/>
+                  </a:lnTo>
+                  <a:lnTo>
+                    <a:pt x="4039014" y="3043125"/>
+                  </a:lnTo>
+                  <a:lnTo>
+                    <a:pt x="4116648" y="3063745"/>
+                  </a:lnTo>
+                  <a:lnTo>
+                    <a:pt x="4194282" y="3083668"/>
+                  </a:lnTo>
+                  <a:lnTo>
+                    <a:pt x="4271916" y="3102916"/>
+                  </a:lnTo>
+                  <a:lnTo>
+                    <a:pt x="4349550" y="3121513"/>
+                  </a:lnTo>
+                  <a:lnTo>
+                    <a:pt x="4427185" y="3139482"/>
+                  </a:lnTo>
+                  <a:lnTo>
+                    <a:pt x="4504819" y="3156842"/>
+                  </a:lnTo>
+                  <a:lnTo>
+                    <a:pt x="4582453" y="3173615"/>
+                  </a:lnTo>
+                  <a:lnTo>
+                    <a:pt x="4660087" y="3189821"/>
+                  </a:lnTo>
+                  <a:lnTo>
+                    <a:pt x="4737721" y="3205478"/>
+                  </a:lnTo>
+                  <a:lnTo>
+                    <a:pt x="4815355" y="3220606"/>
+                  </a:lnTo>
+                  <a:lnTo>
+                    <a:pt x="4892989" y="3235222"/>
+                  </a:lnTo>
+                  <a:lnTo>
+                    <a:pt x="4970623" y="3249343"/>
+                  </a:lnTo>
+                  <a:lnTo>
+                    <a:pt x="5048257" y="3262987"/>
+                  </a:lnTo>
+                  <a:lnTo>
+                    <a:pt x="5125891" y="3276169"/>
+                  </a:lnTo>
+                  <a:lnTo>
+                    <a:pt x="5203525" y="3288905"/>
+                  </a:lnTo>
+                  <a:lnTo>
+                    <a:pt x="5281159" y="3301211"/>
+                  </a:lnTo>
+                  <a:lnTo>
+                    <a:pt x="5358793" y="3313100"/>
+                  </a:lnTo>
+                  <a:lnTo>
+                    <a:pt x="5436427" y="3324586"/>
+                  </a:lnTo>
+                  <a:lnTo>
+                    <a:pt x="5514061" y="3335685"/>
+                  </a:lnTo>
+                  <a:lnTo>
+                    <a:pt x="5591695" y="3346407"/>
+                  </a:lnTo>
+                  <a:lnTo>
+                    <a:pt x="5669329" y="3356767"/>
+                  </a:lnTo>
+                  <a:lnTo>
+                    <a:pt x="5746963" y="3366777"/>
+                  </a:lnTo>
+                  <a:lnTo>
+                    <a:pt x="5824597" y="3376448"/>
+                  </a:lnTo>
+                  <a:lnTo>
+                    <a:pt x="5902231" y="3385792"/>
+                  </a:lnTo>
+                  <a:lnTo>
+                    <a:pt x="5979865" y="3394819"/>
+                  </a:lnTo>
+                  <a:lnTo>
+                    <a:pt x="6057499" y="3403542"/>
+                  </a:lnTo>
+                  <a:lnTo>
+                    <a:pt x="6135134" y="3411969"/>
+                  </a:lnTo>
+                  <a:lnTo>
+                    <a:pt x="6212768" y="3420111"/>
+                  </a:lnTo>
+                  <a:lnTo>
+                    <a:pt x="6290402" y="3427977"/>
+                  </a:lnTo>
+                  <a:lnTo>
+                    <a:pt x="6368036" y="3435578"/>
+                  </a:lnTo>
+                  <a:lnTo>
+                    <a:pt x="6445670" y="3442921"/>
+                  </a:lnTo>
+                  <a:lnTo>
+                    <a:pt x="6523304" y="3450016"/>
+                  </a:lnTo>
+                  <a:lnTo>
+                    <a:pt x="6600938" y="3456871"/>
+                  </a:lnTo>
+                  <a:lnTo>
+                    <a:pt x="6678572" y="3463494"/>
+                  </a:lnTo>
+                  <a:lnTo>
+                    <a:pt x="6756206" y="3469893"/>
+                  </a:lnTo>
+                  <a:lnTo>
+                    <a:pt x="6833840" y="3476076"/>
+                  </a:lnTo>
+                  <a:lnTo>
+                    <a:pt x="6911474" y="3482049"/>
+                  </a:lnTo>
+                  <a:lnTo>
+                    <a:pt x="6989108" y="3487820"/>
+                  </a:lnTo>
+                  <a:lnTo>
+                    <a:pt x="7066742" y="3493396"/>
+                  </a:lnTo>
+                  <a:lnTo>
+                    <a:pt x="7144376" y="3498784"/>
+                  </a:lnTo>
+                  <a:lnTo>
+                    <a:pt x="7222010" y="3503989"/>
                   </a:lnTo>
                 </a:path>
               </a:pathLst>

--- a/docs/plots/carbo/jx_carbo_linsubhr_ratio_anyhosp.pptx
+++ b/docs/plots/carbo/jx_carbo_linsubhr_ratio_anyhosp.pptx
@@ -3003,536 +3003,536 @@
           <p:spPr>
             <a:xfrm>
               <a:off x="817517" y="1896563"/>
-              <a:ext cx="7370972" cy="3600746"/>
+              <a:ext cx="7370972" cy="3598546"/>
             </a:xfrm>
             <a:custGeom>
               <a:avLst/>
               <a:pathLst>
-                <a:path w="7370972" h="3600746">
+                <a:path w="7370972" h="3598546">
                   <a:moveTo>
-                    <a:pt x="1357999" y="0"/>
+                    <a:pt x="1327421" y="0"/>
                   </a:moveTo>
                   <a:lnTo>
-                    <a:pt x="1393151" y="91040"/>
-                  </a:lnTo>
-                  <a:lnTo>
-                    <a:pt x="1470785" y="281362"/>
-                  </a:lnTo>
-                  <a:lnTo>
-                    <a:pt x="1548419" y="461514"/>
-                  </a:lnTo>
-                  <a:lnTo>
-                    <a:pt x="1626053" y="632040"/>
-                  </a:lnTo>
-                  <a:lnTo>
-                    <a:pt x="1703687" y="793453"/>
-                  </a:lnTo>
-                  <a:lnTo>
-                    <a:pt x="1781321" y="946240"/>
-                  </a:lnTo>
-                  <a:lnTo>
-                    <a:pt x="1858955" y="1090863"/>
-                  </a:lnTo>
-                  <a:lnTo>
-                    <a:pt x="1936589" y="1227757"/>
-                  </a:lnTo>
-                  <a:lnTo>
-                    <a:pt x="2014223" y="1357337"/>
-                  </a:lnTo>
-                  <a:lnTo>
-                    <a:pt x="2091857" y="1479992"/>
-                  </a:lnTo>
-                  <a:lnTo>
-                    <a:pt x="2169491" y="1596092"/>
-                  </a:lnTo>
-                  <a:lnTo>
-                    <a:pt x="2247125" y="1705989"/>
-                  </a:lnTo>
-                  <a:lnTo>
-                    <a:pt x="2324759" y="1810013"/>
-                  </a:lnTo>
-                  <a:lnTo>
-                    <a:pt x="2402393" y="1908478"/>
-                  </a:lnTo>
-                  <a:lnTo>
-                    <a:pt x="2480027" y="2001681"/>
-                  </a:lnTo>
-                  <a:lnTo>
-                    <a:pt x="2557661" y="2089904"/>
-                  </a:lnTo>
-                  <a:lnTo>
-                    <a:pt x="2635295" y="2173413"/>
-                  </a:lnTo>
-                  <a:lnTo>
-                    <a:pt x="2712930" y="2252459"/>
-                  </a:lnTo>
-                  <a:lnTo>
-                    <a:pt x="2790564" y="2327281"/>
-                  </a:lnTo>
-                  <a:lnTo>
-                    <a:pt x="2868198" y="2398105"/>
-                  </a:lnTo>
-                  <a:lnTo>
-                    <a:pt x="2945832" y="2465144"/>
-                  </a:lnTo>
-                  <a:lnTo>
-                    <a:pt x="3023466" y="2528601"/>
-                  </a:lnTo>
-                  <a:lnTo>
-                    <a:pt x="3101100" y="2588666"/>
-                  </a:lnTo>
-                  <a:lnTo>
-                    <a:pt x="3178734" y="2645522"/>
-                  </a:lnTo>
-                  <a:lnTo>
-                    <a:pt x="3256368" y="2699340"/>
-                  </a:lnTo>
-                  <a:lnTo>
-                    <a:pt x="3334002" y="2750282"/>
-                  </a:lnTo>
-                  <a:lnTo>
-                    <a:pt x="3411636" y="2786929"/>
-                  </a:lnTo>
-                  <a:lnTo>
-                    <a:pt x="3489270" y="2798890"/>
-                  </a:lnTo>
-                  <a:lnTo>
-                    <a:pt x="3566904" y="2810686"/>
-                  </a:lnTo>
-                  <a:lnTo>
-                    <a:pt x="3644538" y="2822320"/>
-                  </a:lnTo>
-                  <a:lnTo>
-                    <a:pt x="3722172" y="2833792"/>
-                  </a:lnTo>
-                  <a:lnTo>
-                    <a:pt x="3799806" y="2845106"/>
-                  </a:lnTo>
-                  <a:lnTo>
-                    <a:pt x="3877440" y="2856264"/>
-                  </a:lnTo>
-                  <a:lnTo>
-                    <a:pt x="3955074" y="2867268"/>
-                  </a:lnTo>
-                  <a:lnTo>
-                    <a:pt x="4032708" y="2878119"/>
-                  </a:lnTo>
-                  <a:lnTo>
-                    <a:pt x="4110342" y="2888821"/>
-                  </a:lnTo>
-                  <a:lnTo>
-                    <a:pt x="4187976" y="2899374"/>
-                  </a:lnTo>
-                  <a:lnTo>
-                    <a:pt x="4265610" y="2909782"/>
-                  </a:lnTo>
-                  <a:lnTo>
-                    <a:pt x="4343244" y="2920046"/>
-                  </a:lnTo>
-                  <a:lnTo>
-                    <a:pt x="4420879" y="2930169"/>
-                  </a:lnTo>
-                  <a:lnTo>
-                    <a:pt x="4498513" y="2940151"/>
-                  </a:lnTo>
-                  <a:lnTo>
-                    <a:pt x="4576147" y="2949996"/>
-                  </a:lnTo>
-                  <a:lnTo>
-                    <a:pt x="4653781" y="2959704"/>
-                  </a:lnTo>
-                  <a:lnTo>
-                    <a:pt x="4731415" y="2969278"/>
-                  </a:lnTo>
-                  <a:lnTo>
-                    <a:pt x="4809049" y="2978720"/>
-                  </a:lnTo>
-                  <a:lnTo>
-                    <a:pt x="4886683" y="2988032"/>
-                  </a:lnTo>
-                  <a:lnTo>
-                    <a:pt x="4964317" y="2997215"/>
-                  </a:lnTo>
-                  <a:lnTo>
-                    <a:pt x="5041951" y="3006271"/>
-                  </a:lnTo>
-                  <a:lnTo>
-                    <a:pt x="5119585" y="3015202"/>
-                  </a:lnTo>
-                  <a:lnTo>
-                    <a:pt x="5197219" y="3024009"/>
-                  </a:lnTo>
-                  <a:lnTo>
-                    <a:pt x="5274853" y="3032695"/>
-                  </a:lnTo>
-                  <a:lnTo>
-                    <a:pt x="5352487" y="3041261"/>
-                  </a:lnTo>
-                  <a:lnTo>
-                    <a:pt x="5430121" y="3049708"/>
-                  </a:lnTo>
-                  <a:lnTo>
-                    <a:pt x="5507755" y="3058039"/>
-                  </a:lnTo>
-                  <a:lnTo>
-                    <a:pt x="5585389" y="3066255"/>
-                  </a:lnTo>
-                  <a:lnTo>
-                    <a:pt x="5663023" y="3074357"/>
-                  </a:lnTo>
-                  <a:lnTo>
-                    <a:pt x="5740657" y="3082347"/>
-                  </a:lnTo>
-                  <a:lnTo>
-                    <a:pt x="5818291" y="3090227"/>
-                  </a:lnTo>
-                  <a:lnTo>
-                    <a:pt x="5895925" y="3097998"/>
-                  </a:lnTo>
-                  <a:lnTo>
-                    <a:pt x="5973559" y="3105661"/>
-                  </a:lnTo>
-                  <a:lnTo>
-                    <a:pt x="6051193" y="3113219"/>
-                  </a:lnTo>
-                  <a:lnTo>
-                    <a:pt x="6128827" y="3120672"/>
-                  </a:lnTo>
-                  <a:lnTo>
-                    <a:pt x="6206462" y="3128022"/>
-                  </a:lnTo>
-                  <a:lnTo>
-                    <a:pt x="6284096" y="3135271"/>
-                  </a:lnTo>
-                  <a:lnTo>
-                    <a:pt x="6361730" y="3142420"/>
-                  </a:lnTo>
-                  <a:lnTo>
-                    <a:pt x="6439364" y="3149469"/>
-                  </a:lnTo>
-                  <a:lnTo>
-                    <a:pt x="6516998" y="3156422"/>
-                  </a:lnTo>
-                  <a:lnTo>
-                    <a:pt x="6594632" y="3163278"/>
-                  </a:lnTo>
-                  <a:lnTo>
-                    <a:pt x="6672266" y="3170040"/>
-                  </a:lnTo>
-                  <a:lnTo>
-                    <a:pt x="6749900" y="3176708"/>
-                  </a:lnTo>
-                  <a:lnTo>
-                    <a:pt x="6827534" y="3183284"/>
-                  </a:lnTo>
-                  <a:lnTo>
-                    <a:pt x="6905168" y="3189769"/>
-                  </a:lnTo>
-                  <a:lnTo>
-                    <a:pt x="6982802" y="3196164"/>
-                  </a:lnTo>
-                  <a:lnTo>
-                    <a:pt x="7060436" y="3202471"/>
-                  </a:lnTo>
-                  <a:lnTo>
-                    <a:pt x="7138070" y="3208691"/>
-                  </a:lnTo>
-                  <a:lnTo>
-                    <a:pt x="7215704" y="3214826"/>
-                  </a:lnTo>
-                  <a:lnTo>
-                    <a:pt x="7293338" y="3220875"/>
-                  </a:lnTo>
-                  <a:lnTo>
-                    <a:pt x="7370972" y="3226841"/>
-                  </a:lnTo>
-                  <a:lnTo>
-                    <a:pt x="7370972" y="3600746"/>
-                  </a:lnTo>
-                  <a:lnTo>
-                    <a:pt x="7293338" y="3597816"/>
-                  </a:lnTo>
-                  <a:lnTo>
-                    <a:pt x="7215704" y="3594720"/>
-                  </a:lnTo>
-                  <a:lnTo>
-                    <a:pt x="7138070" y="3591450"/>
-                  </a:lnTo>
-                  <a:lnTo>
-                    <a:pt x="7060436" y="3587996"/>
-                  </a:lnTo>
-                  <a:lnTo>
-                    <a:pt x="6982802" y="3584346"/>
-                  </a:lnTo>
-                  <a:lnTo>
-                    <a:pt x="6905168" y="3580491"/>
-                  </a:lnTo>
-                  <a:lnTo>
-                    <a:pt x="6827534" y="3576417"/>
-                  </a:lnTo>
-                  <a:lnTo>
-                    <a:pt x="6749900" y="3572114"/>
-                  </a:lnTo>
-                  <a:lnTo>
-                    <a:pt x="6672266" y="3567568"/>
-                  </a:lnTo>
-                  <a:lnTo>
-                    <a:pt x="6594632" y="3562765"/>
-                  </a:lnTo>
-                  <a:lnTo>
-                    <a:pt x="6516998" y="3557691"/>
-                  </a:lnTo>
-                  <a:lnTo>
-                    <a:pt x="6439364" y="3552331"/>
-                  </a:lnTo>
-                  <a:lnTo>
-                    <a:pt x="6361730" y="3546668"/>
-                  </a:lnTo>
-                  <a:lnTo>
-                    <a:pt x="6284096" y="3540685"/>
-                  </a:lnTo>
-                  <a:lnTo>
-                    <a:pt x="6206462" y="3534364"/>
-                  </a:lnTo>
-                  <a:lnTo>
-                    <a:pt x="6128827" y="3527687"/>
-                  </a:lnTo>
-                  <a:lnTo>
-                    <a:pt x="6051193" y="3520633"/>
-                  </a:lnTo>
-                  <a:lnTo>
-                    <a:pt x="5973559" y="3513180"/>
-                  </a:lnTo>
-                  <a:lnTo>
-                    <a:pt x="5895925" y="3505307"/>
-                  </a:lnTo>
-                  <a:lnTo>
-                    <a:pt x="5818291" y="3496989"/>
-                  </a:lnTo>
-                  <a:lnTo>
-                    <a:pt x="5740657" y="3488202"/>
-                  </a:lnTo>
-                  <a:lnTo>
-                    <a:pt x="5663023" y="3478918"/>
-                  </a:lnTo>
-                  <a:lnTo>
-                    <a:pt x="5585389" y="3469111"/>
-                  </a:lnTo>
-                  <a:lnTo>
-                    <a:pt x="5507755" y="3458750"/>
-                  </a:lnTo>
-                  <a:lnTo>
-                    <a:pt x="5430121" y="3447804"/>
-                  </a:lnTo>
-                  <a:lnTo>
-                    <a:pt x="5352487" y="3436240"/>
-                  </a:lnTo>
-                  <a:lnTo>
-                    <a:pt x="5274853" y="3424023"/>
-                  </a:lnTo>
-                  <a:lnTo>
-                    <a:pt x="5197219" y="3411116"/>
-                  </a:lnTo>
-                  <a:lnTo>
-                    <a:pt x="5119585" y="3397481"/>
-                  </a:lnTo>
-                  <a:lnTo>
-                    <a:pt x="5041951" y="3383076"/>
-                  </a:lnTo>
-                  <a:lnTo>
-                    <a:pt x="4964317" y="3367858"/>
-                  </a:lnTo>
-                  <a:lnTo>
-                    <a:pt x="4886683" y="3351781"/>
-                  </a:lnTo>
-                  <a:lnTo>
-                    <a:pt x="4809049" y="3334796"/>
-                  </a:lnTo>
-                  <a:lnTo>
-                    <a:pt x="4731415" y="3316852"/>
-                  </a:lnTo>
-                  <a:lnTo>
-                    <a:pt x="4653781" y="3297895"/>
-                  </a:lnTo>
-                  <a:lnTo>
-                    <a:pt x="4576147" y="3277868"/>
-                  </a:lnTo>
-                  <a:lnTo>
-                    <a:pt x="4498513" y="3256711"/>
-                  </a:lnTo>
-                  <a:lnTo>
-                    <a:pt x="4420879" y="3234359"/>
-                  </a:lnTo>
-                  <a:lnTo>
-                    <a:pt x="4343244" y="3210745"/>
-                  </a:lnTo>
-                  <a:lnTo>
-                    <a:pt x="4265610" y="3185798"/>
-                  </a:lnTo>
-                  <a:lnTo>
-                    <a:pt x="4187976" y="3159443"/>
-                  </a:lnTo>
-                  <a:lnTo>
-                    <a:pt x="4110342" y="3131599"/>
-                  </a:lnTo>
-                  <a:lnTo>
-                    <a:pt x="4032708" y="3102184"/>
-                  </a:lnTo>
-                  <a:lnTo>
-                    <a:pt x="3955074" y="3071109"/>
-                  </a:lnTo>
-                  <a:lnTo>
-                    <a:pt x="3877440" y="3038279"/>
-                  </a:lnTo>
-                  <a:lnTo>
-                    <a:pt x="3799806" y="3003595"/>
-                  </a:lnTo>
-                  <a:lnTo>
-                    <a:pt x="3722172" y="2966954"/>
-                  </a:lnTo>
-                  <a:lnTo>
-                    <a:pt x="3644538" y="2928244"/>
-                  </a:lnTo>
-                  <a:lnTo>
-                    <a:pt x="3566904" y="2887349"/>
-                  </a:lnTo>
-                  <a:lnTo>
-                    <a:pt x="3489270" y="2844145"/>
-                  </a:lnTo>
-                  <a:lnTo>
-                    <a:pt x="3411636" y="2798502"/>
-                  </a:lnTo>
-                  <a:lnTo>
-                    <a:pt x="3334002" y="2774800"/>
-                  </a:lnTo>
-                  <a:lnTo>
-                    <a:pt x="3256368" y="2762500"/>
-                  </a:lnTo>
-                  <a:lnTo>
-                    <a:pt x="3178734" y="2750029"/>
-                  </a:lnTo>
-                  <a:lnTo>
-                    <a:pt x="3101100" y="2737383"/>
-                  </a:lnTo>
-                  <a:lnTo>
-                    <a:pt x="3023466" y="2724560"/>
-                  </a:lnTo>
-                  <a:lnTo>
-                    <a:pt x="2945832" y="2711557"/>
-                  </a:lnTo>
-                  <a:lnTo>
-                    <a:pt x="2868198" y="2698371"/>
-                  </a:lnTo>
-                  <a:lnTo>
-                    <a:pt x="2790564" y="2685002"/>
-                  </a:lnTo>
-                  <a:lnTo>
-                    <a:pt x="2712930" y="2671444"/>
-                  </a:lnTo>
-                  <a:lnTo>
-                    <a:pt x="2635295" y="2657697"/>
-                  </a:lnTo>
-                  <a:lnTo>
-                    <a:pt x="2557661" y="2643757"/>
-                  </a:lnTo>
-                  <a:lnTo>
-                    <a:pt x="2480027" y="2629622"/>
-                  </a:lnTo>
-                  <a:lnTo>
-                    <a:pt x="2402393" y="2615289"/>
-                  </a:lnTo>
-                  <a:lnTo>
-                    <a:pt x="2324759" y="2600755"/>
-                  </a:lnTo>
-                  <a:lnTo>
-                    <a:pt x="2247125" y="2586018"/>
-                  </a:lnTo>
-                  <a:lnTo>
-                    <a:pt x="2169491" y="2571074"/>
-                  </a:lnTo>
-                  <a:lnTo>
-                    <a:pt x="2091857" y="2555920"/>
-                  </a:lnTo>
-                  <a:lnTo>
-                    <a:pt x="2014223" y="2540555"/>
-                  </a:lnTo>
-                  <a:lnTo>
-                    <a:pt x="1936589" y="2524974"/>
-                  </a:lnTo>
-                  <a:lnTo>
-                    <a:pt x="1858955" y="2509175"/>
-                  </a:lnTo>
-                  <a:lnTo>
-                    <a:pt x="1781321" y="2493154"/>
-                  </a:lnTo>
-                  <a:lnTo>
-                    <a:pt x="1703687" y="2476909"/>
-                  </a:lnTo>
-                  <a:lnTo>
-                    <a:pt x="1626053" y="2460436"/>
-                  </a:lnTo>
-                  <a:lnTo>
-                    <a:pt x="1548419" y="2443733"/>
-                  </a:lnTo>
-                  <a:lnTo>
-                    <a:pt x="1470785" y="2426795"/>
-                  </a:lnTo>
-                  <a:lnTo>
-                    <a:pt x="1393151" y="2409620"/>
-                  </a:lnTo>
-                  <a:lnTo>
-                    <a:pt x="1315517" y="2392205"/>
-                  </a:lnTo>
-                  <a:lnTo>
-                    <a:pt x="1237883" y="2374545"/>
-                  </a:lnTo>
-                  <a:lnTo>
-                    <a:pt x="1160249" y="2356639"/>
-                  </a:lnTo>
-                  <a:lnTo>
-                    <a:pt x="1082615" y="2338481"/>
-                  </a:lnTo>
-                  <a:lnTo>
-                    <a:pt x="1004981" y="2320069"/>
-                  </a:lnTo>
-                  <a:lnTo>
-                    <a:pt x="927346" y="2301399"/>
-                  </a:lnTo>
-                  <a:lnTo>
-                    <a:pt x="849712" y="2282467"/>
-                  </a:lnTo>
-                  <a:lnTo>
-                    <a:pt x="772078" y="2263270"/>
-                  </a:lnTo>
-                  <a:lnTo>
-                    <a:pt x="694444" y="2243804"/>
-                  </a:lnTo>
-                  <a:lnTo>
-                    <a:pt x="616810" y="2224065"/>
-                  </a:lnTo>
-                  <a:lnTo>
-                    <a:pt x="539176" y="2204050"/>
-                  </a:lnTo>
-                  <a:lnTo>
-                    <a:pt x="461542" y="2183755"/>
-                  </a:lnTo>
-                  <a:lnTo>
-                    <a:pt x="383908" y="2163175"/>
-                  </a:lnTo>
-                  <a:lnTo>
-                    <a:pt x="306274" y="2142306"/>
-                  </a:lnTo>
-                  <a:lnTo>
-                    <a:pt x="228640" y="2121146"/>
-                  </a:lnTo>
-                  <a:lnTo>
-                    <a:pt x="151006" y="2099689"/>
-                  </a:lnTo>
-                  <a:lnTo>
-                    <a:pt x="73372" y="2077931"/>
-                  </a:lnTo>
-                  <a:lnTo>
-                    <a:pt x="0" y="2057079"/>
+                    <a:pt x="1393151" y="164215"/>
+                  </a:lnTo>
+                  <a:lnTo>
+                    <a:pt x="1470785" y="347956"/>
+                  </a:lnTo>
+                  <a:lnTo>
+                    <a:pt x="1548419" y="522019"/>
+                  </a:lnTo>
+                  <a:lnTo>
+                    <a:pt x="1626053" y="686914"/>
+                  </a:lnTo>
+                  <a:lnTo>
+                    <a:pt x="1703687" y="843123"/>
+                  </a:lnTo>
+                  <a:lnTo>
+                    <a:pt x="1781321" y="991105"/>
+                  </a:lnTo>
+                  <a:lnTo>
+                    <a:pt x="1858955" y="1131292"/>
+                  </a:lnTo>
+                  <a:lnTo>
+                    <a:pt x="1936589" y="1264096"/>
+                  </a:lnTo>
+                  <a:lnTo>
+                    <a:pt x="2014223" y="1389904"/>
+                  </a:lnTo>
+                  <a:lnTo>
+                    <a:pt x="2091857" y="1509086"/>
+                  </a:lnTo>
+                  <a:lnTo>
+                    <a:pt x="2169491" y="1621991"/>
+                  </a:lnTo>
+                  <a:lnTo>
+                    <a:pt x="2247125" y="1728948"/>
+                  </a:lnTo>
+                  <a:lnTo>
+                    <a:pt x="2324759" y="1830272"/>
+                  </a:lnTo>
+                  <a:lnTo>
+                    <a:pt x="2402393" y="1926259"/>
+                  </a:lnTo>
+                  <a:lnTo>
+                    <a:pt x="2480027" y="2017191"/>
+                  </a:lnTo>
+                  <a:lnTo>
+                    <a:pt x="2557661" y="2103332"/>
+                  </a:lnTo>
+                  <a:lnTo>
+                    <a:pt x="2635295" y="2184937"/>
+                  </a:lnTo>
+                  <a:lnTo>
+                    <a:pt x="2712930" y="2262243"/>
+                  </a:lnTo>
+                  <a:lnTo>
+                    <a:pt x="2790564" y="2335478"/>
+                  </a:lnTo>
+                  <a:lnTo>
+                    <a:pt x="2868198" y="2404855"/>
+                  </a:lnTo>
+                  <a:lnTo>
+                    <a:pt x="2945832" y="2470578"/>
+                  </a:lnTo>
+                  <a:lnTo>
+                    <a:pt x="3023466" y="2532839"/>
+                  </a:lnTo>
+                  <a:lnTo>
+                    <a:pt x="3101100" y="2591821"/>
+                  </a:lnTo>
+                  <a:lnTo>
+                    <a:pt x="3178734" y="2647696"/>
+                  </a:lnTo>
+                  <a:lnTo>
+                    <a:pt x="3256368" y="2700628"/>
+                  </a:lnTo>
+                  <a:lnTo>
+                    <a:pt x="3334002" y="2750772"/>
+                  </a:lnTo>
+                  <a:lnTo>
+                    <a:pt x="3411636" y="2786986"/>
+                  </a:lnTo>
+                  <a:lnTo>
+                    <a:pt x="3489270" y="2799121"/>
+                  </a:lnTo>
+                  <a:lnTo>
+                    <a:pt x="3566904" y="2811085"/>
+                  </a:lnTo>
+                  <a:lnTo>
+                    <a:pt x="3644538" y="2822881"/>
+                  </a:lnTo>
+                  <a:lnTo>
+                    <a:pt x="3722172" y="2834512"/>
+                  </a:lnTo>
+                  <a:lnTo>
+                    <a:pt x="3799806" y="2845980"/>
+                  </a:lnTo>
+                  <a:lnTo>
+                    <a:pt x="3877440" y="2857288"/>
+                  </a:lnTo>
+                  <a:lnTo>
+                    <a:pt x="3955074" y="2868437"/>
+                  </a:lnTo>
+                  <a:lnTo>
+                    <a:pt x="4032708" y="2879429"/>
+                  </a:lnTo>
+                  <a:lnTo>
+                    <a:pt x="4110342" y="2890268"/>
+                  </a:lnTo>
+                  <a:lnTo>
+                    <a:pt x="4187976" y="2900954"/>
+                  </a:lnTo>
+                  <a:lnTo>
+                    <a:pt x="4265610" y="2911491"/>
+                  </a:lnTo>
+                  <a:lnTo>
+                    <a:pt x="4343244" y="2921880"/>
+                  </a:lnTo>
+                  <a:lnTo>
+                    <a:pt x="4420879" y="2932123"/>
+                  </a:lnTo>
+                  <a:lnTo>
+                    <a:pt x="4498513" y="2942223"/>
+                  </a:lnTo>
+                  <a:lnTo>
+                    <a:pt x="4576147" y="2952181"/>
+                  </a:lnTo>
+                  <a:lnTo>
+                    <a:pt x="4653781" y="2962000"/>
+                  </a:lnTo>
+                  <a:lnTo>
+                    <a:pt x="4731415" y="2971681"/>
+                  </a:lnTo>
+                  <a:lnTo>
+                    <a:pt x="4809049" y="2981226"/>
+                  </a:lnTo>
+                  <a:lnTo>
+                    <a:pt x="4886683" y="2990638"/>
+                  </a:lnTo>
+                  <a:lnTo>
+                    <a:pt x="4964317" y="2999917"/>
+                  </a:lnTo>
+                  <a:lnTo>
+                    <a:pt x="5041951" y="3009067"/>
+                  </a:lnTo>
+                  <a:lnTo>
+                    <a:pt x="5119585" y="3018088"/>
+                  </a:lnTo>
+                  <a:lnTo>
+                    <a:pt x="5197219" y="3026983"/>
+                  </a:lnTo>
+                  <a:lnTo>
+                    <a:pt x="5274853" y="3035753"/>
+                  </a:lnTo>
+                  <a:lnTo>
+                    <a:pt x="5352487" y="3044400"/>
+                  </a:lnTo>
+                  <a:lnTo>
+                    <a:pt x="5430121" y="3052926"/>
+                  </a:lnTo>
+                  <a:lnTo>
+                    <a:pt x="5507755" y="3061333"/>
+                  </a:lnTo>
+                  <a:lnTo>
+                    <a:pt x="5585389" y="3069621"/>
+                  </a:lnTo>
+                  <a:lnTo>
+                    <a:pt x="5663023" y="3077794"/>
+                  </a:lnTo>
+                  <a:lnTo>
+                    <a:pt x="5740657" y="3085852"/>
+                  </a:lnTo>
+                  <a:lnTo>
+                    <a:pt x="5818291" y="3093797"/>
+                  </a:lnTo>
+                  <a:lnTo>
+                    <a:pt x="5895925" y="3101630"/>
+                  </a:lnTo>
+                  <a:lnTo>
+                    <a:pt x="5973559" y="3109354"/>
+                  </a:lnTo>
+                  <a:lnTo>
+                    <a:pt x="6051193" y="3116969"/>
+                  </a:lnTo>
+                  <a:lnTo>
+                    <a:pt x="6128827" y="3124478"/>
+                  </a:lnTo>
+                  <a:lnTo>
+                    <a:pt x="6206462" y="3131882"/>
+                  </a:lnTo>
+                  <a:lnTo>
+                    <a:pt x="6284096" y="3139181"/>
+                  </a:lnTo>
+                  <a:lnTo>
+                    <a:pt x="6361730" y="3146379"/>
+                  </a:lnTo>
+                  <a:lnTo>
+                    <a:pt x="6439364" y="3153475"/>
+                  </a:lnTo>
+                  <a:lnTo>
+                    <a:pt x="6516998" y="3160472"/>
+                  </a:lnTo>
+                  <a:lnTo>
+                    <a:pt x="6594632" y="3167371"/>
+                  </a:lnTo>
+                  <a:lnTo>
+                    <a:pt x="6672266" y="3174173"/>
+                  </a:lnTo>
+                  <a:lnTo>
+                    <a:pt x="6749900" y="3180880"/>
+                  </a:lnTo>
+                  <a:lnTo>
+                    <a:pt x="6827534" y="3187493"/>
+                  </a:lnTo>
+                  <a:lnTo>
+                    <a:pt x="6905168" y="3194013"/>
+                  </a:lnTo>
+                  <a:lnTo>
+                    <a:pt x="6982802" y="3200442"/>
+                  </a:lnTo>
+                  <a:lnTo>
+                    <a:pt x="7060436" y="3206781"/>
+                  </a:lnTo>
+                  <a:lnTo>
+                    <a:pt x="7138070" y="3213031"/>
+                  </a:lnTo>
+                  <a:lnTo>
+                    <a:pt x="7215704" y="3219193"/>
+                  </a:lnTo>
+                  <a:lnTo>
+                    <a:pt x="7293338" y="3225269"/>
+                  </a:lnTo>
+                  <a:lnTo>
+                    <a:pt x="7370972" y="3231259"/>
+                  </a:lnTo>
+                  <a:lnTo>
+                    <a:pt x="7370972" y="3598546"/>
+                  </a:lnTo>
+                  <a:lnTo>
+                    <a:pt x="7293338" y="3595538"/>
+                  </a:lnTo>
+                  <a:lnTo>
+                    <a:pt x="7215704" y="3592363"/>
+                  </a:lnTo>
+                  <a:lnTo>
+                    <a:pt x="7138070" y="3589012"/>
+                  </a:lnTo>
+                  <a:lnTo>
+                    <a:pt x="7060436" y="3585474"/>
+                  </a:lnTo>
+                  <a:lnTo>
+                    <a:pt x="6982802" y="3581739"/>
+                  </a:lnTo>
+                  <a:lnTo>
+                    <a:pt x="6905168" y="3577797"/>
+                  </a:lnTo>
+                  <a:lnTo>
+                    <a:pt x="6827534" y="3573635"/>
+                  </a:lnTo>
+                  <a:lnTo>
+                    <a:pt x="6749900" y="3569242"/>
+                  </a:lnTo>
+                  <a:lnTo>
+                    <a:pt x="6672266" y="3564605"/>
+                  </a:lnTo>
+                  <a:lnTo>
+                    <a:pt x="6594632" y="3559710"/>
+                  </a:lnTo>
+                  <a:lnTo>
+                    <a:pt x="6516998" y="3554543"/>
+                  </a:lnTo>
+                  <a:lnTo>
+                    <a:pt x="6439364" y="3549089"/>
+                  </a:lnTo>
+                  <a:lnTo>
+                    <a:pt x="6361730" y="3543331"/>
+                  </a:lnTo>
+                  <a:lnTo>
+                    <a:pt x="6284096" y="3537254"/>
+                  </a:lnTo>
+                  <a:lnTo>
+                    <a:pt x="6206462" y="3530838"/>
+                  </a:lnTo>
+                  <a:lnTo>
+                    <a:pt x="6128827" y="3524066"/>
+                  </a:lnTo>
+                  <a:lnTo>
+                    <a:pt x="6051193" y="3516917"/>
+                  </a:lnTo>
+                  <a:lnTo>
+                    <a:pt x="5973559" y="3509370"/>
+                  </a:lnTo>
+                  <a:lnTo>
+                    <a:pt x="5895925" y="3501404"/>
+                  </a:lnTo>
+                  <a:lnTo>
+                    <a:pt x="5818291" y="3492995"/>
+                  </a:lnTo>
+                  <a:lnTo>
+                    <a:pt x="5740657" y="3484119"/>
+                  </a:lnTo>
+                  <a:lnTo>
+                    <a:pt x="5663023" y="3474749"/>
+                  </a:lnTo>
+                  <a:lnTo>
+                    <a:pt x="5585389" y="3464858"/>
+                  </a:lnTo>
+                  <a:lnTo>
+                    <a:pt x="5507755" y="3454417"/>
+                  </a:lnTo>
+                  <a:lnTo>
+                    <a:pt x="5430121" y="3443396"/>
+                  </a:lnTo>
+                  <a:lnTo>
+                    <a:pt x="5352487" y="3431762"/>
+                  </a:lnTo>
+                  <a:lnTo>
+                    <a:pt x="5274853" y="3419481"/>
+                  </a:lnTo>
+                  <a:lnTo>
+                    <a:pt x="5197219" y="3406517"/>
+                  </a:lnTo>
+                  <a:lnTo>
+                    <a:pt x="5119585" y="3392832"/>
+                  </a:lnTo>
+                  <a:lnTo>
+                    <a:pt x="5041951" y="3378387"/>
+                  </a:lnTo>
+                  <a:lnTo>
+                    <a:pt x="4964317" y="3363138"/>
+                  </a:lnTo>
+                  <a:lnTo>
+                    <a:pt x="4886683" y="3347041"/>
+                  </a:lnTo>
+                  <a:lnTo>
+                    <a:pt x="4809049" y="3330050"/>
+                  </a:lnTo>
+                  <a:lnTo>
+                    <a:pt x="4731415" y="3312114"/>
+                  </a:lnTo>
+                  <a:lnTo>
+                    <a:pt x="4653781" y="3293180"/>
+                  </a:lnTo>
+                  <a:lnTo>
+                    <a:pt x="4576147" y="3273194"/>
+                  </a:lnTo>
+                  <a:lnTo>
+                    <a:pt x="4498513" y="3252097"/>
+                  </a:lnTo>
+                  <a:lnTo>
+                    <a:pt x="4420879" y="3229826"/>
+                  </a:lnTo>
+                  <a:lnTo>
+                    <a:pt x="4343244" y="3206317"/>
+                  </a:lnTo>
+                  <a:lnTo>
+                    <a:pt x="4265610" y="3181502"/>
+                  </a:lnTo>
+                  <a:lnTo>
+                    <a:pt x="4187976" y="3155306"/>
+                  </a:lnTo>
+                  <a:lnTo>
+                    <a:pt x="4110342" y="3127654"/>
+                  </a:lnTo>
+                  <a:lnTo>
+                    <a:pt x="4032708" y="3098465"/>
+                  </a:lnTo>
+                  <a:lnTo>
+                    <a:pt x="3955074" y="3067652"/>
+                  </a:lnTo>
+                  <a:lnTo>
+                    <a:pt x="3877440" y="3035127"/>
+                  </a:lnTo>
+                  <a:lnTo>
+                    <a:pt x="3799806" y="3000793"/>
+                  </a:lnTo>
+                  <a:lnTo>
+                    <a:pt x="3722172" y="2964550"/>
+                  </a:lnTo>
+                  <a:lnTo>
+                    <a:pt x="3644538" y="2926292"/>
+                  </a:lnTo>
+                  <a:lnTo>
+                    <a:pt x="3566904" y="2885907"/>
+                  </a:lnTo>
+                  <a:lnTo>
+                    <a:pt x="3489270" y="2843276"/>
+                  </a:lnTo>
+                  <a:lnTo>
+                    <a:pt x="3411636" y="2798275"/>
+                  </a:lnTo>
+                  <a:lnTo>
+                    <a:pt x="3334002" y="2774680"/>
+                  </a:lnTo>
+                  <a:lnTo>
+                    <a:pt x="3256368" y="2762198"/>
+                  </a:lnTo>
+                  <a:lnTo>
+                    <a:pt x="3178734" y="2749539"/>
+                  </a:lnTo>
+                  <a:lnTo>
+                    <a:pt x="3101100" y="2736700"/>
+                  </a:lnTo>
+                  <a:lnTo>
+                    <a:pt x="3023466" y="2723678"/>
+                  </a:lnTo>
+                  <a:lnTo>
+                    <a:pt x="2945832" y="2710471"/>
+                  </a:lnTo>
+                  <a:lnTo>
+                    <a:pt x="2868198" y="2697077"/>
+                  </a:lnTo>
+                  <a:lnTo>
+                    <a:pt x="2790564" y="2683492"/>
+                  </a:lnTo>
+                  <a:lnTo>
+                    <a:pt x="2712930" y="2669714"/>
+                  </a:lnTo>
+                  <a:lnTo>
+                    <a:pt x="2635295" y="2655740"/>
+                  </a:lnTo>
+                  <a:lnTo>
+                    <a:pt x="2557661" y="2641567"/>
+                  </a:lnTo>
+                  <a:lnTo>
+                    <a:pt x="2480027" y="2627193"/>
+                  </a:lnTo>
+                  <a:lnTo>
+                    <a:pt x="2402393" y="2612614"/>
+                  </a:lnTo>
+                  <a:lnTo>
+                    <a:pt x="2324759" y="2597829"/>
+                  </a:lnTo>
+                  <a:lnTo>
+                    <a:pt x="2247125" y="2582833"/>
+                  </a:lnTo>
+                  <a:lnTo>
+                    <a:pt x="2169491" y="2567623"/>
+                  </a:lnTo>
+                  <a:lnTo>
+                    <a:pt x="2091857" y="2552198"/>
+                  </a:lnTo>
+                  <a:lnTo>
+                    <a:pt x="2014223" y="2536553"/>
+                  </a:lnTo>
+                  <a:lnTo>
+                    <a:pt x="1936589" y="2520686"/>
+                  </a:lnTo>
+                  <a:lnTo>
+                    <a:pt x="1858955" y="2504594"/>
+                  </a:lnTo>
+                  <a:lnTo>
+                    <a:pt x="1781321" y="2488272"/>
+                  </a:lnTo>
+                  <a:lnTo>
+                    <a:pt x="1703687" y="2471719"/>
+                  </a:lnTo>
+                  <a:lnTo>
+                    <a:pt x="1626053" y="2454930"/>
+                  </a:lnTo>
+                  <a:lnTo>
+                    <a:pt x="1548419" y="2437902"/>
+                  </a:lnTo>
+                  <a:lnTo>
+                    <a:pt x="1470785" y="2420633"/>
+                  </a:lnTo>
+                  <a:lnTo>
+                    <a:pt x="1393151" y="2403118"/>
+                  </a:lnTo>
+                  <a:lnTo>
+                    <a:pt x="1315517" y="2385354"/>
+                  </a:lnTo>
+                  <a:lnTo>
+                    <a:pt x="1237883" y="2367337"/>
+                  </a:lnTo>
+                  <a:lnTo>
+                    <a:pt x="1160249" y="2349064"/>
+                  </a:lnTo>
+                  <a:lnTo>
+                    <a:pt x="1082615" y="2330532"/>
+                  </a:lnTo>
+                  <a:lnTo>
+                    <a:pt x="1004981" y="2311736"/>
+                  </a:lnTo>
+                  <a:lnTo>
+                    <a:pt x="927346" y="2292672"/>
+                  </a:lnTo>
+                  <a:lnTo>
+                    <a:pt x="849712" y="2273338"/>
+                  </a:lnTo>
+                  <a:lnTo>
+                    <a:pt x="772078" y="2253729"/>
+                  </a:lnTo>
+                  <a:lnTo>
+                    <a:pt x="694444" y="2233841"/>
+                  </a:lnTo>
+                  <a:lnTo>
+                    <a:pt x="616810" y="2213671"/>
+                  </a:lnTo>
+                  <a:lnTo>
+                    <a:pt x="539176" y="2193213"/>
+                  </a:lnTo>
+                  <a:lnTo>
+                    <a:pt x="461542" y="2172465"/>
+                  </a:lnTo>
+                  <a:lnTo>
+                    <a:pt x="383908" y="2151422"/>
+                  </a:lnTo>
+                  <a:lnTo>
+                    <a:pt x="306274" y="2130079"/>
+                  </a:lnTo>
+                  <a:lnTo>
+                    <a:pt x="228640" y="2108434"/>
+                  </a:lnTo>
+                  <a:lnTo>
+                    <a:pt x="151006" y="2086480"/>
+                  </a:lnTo>
+                  <a:lnTo>
+                    <a:pt x="73372" y="2064214"/>
+                  </a:lnTo>
+                  <a:lnTo>
+                    <a:pt x="0" y="2042872"/>
                   </a:lnTo>
                   <a:close/>
                 </a:path>
@@ -3558,249 +3558,249 @@
           </p:nvSpPr>
           <p:spPr>
             <a:xfrm>
-              <a:off x="2175517" y="1896563"/>
-              <a:ext cx="6012973" cy="3226841"/>
+              <a:off x="2144939" y="1896563"/>
+              <a:ext cx="6043551" cy="3231259"/>
             </a:xfrm>
             <a:custGeom>
               <a:avLst/>
               <a:pathLst>
-                <a:path w="6012973" h="3226841">
+                <a:path w="6043551" h="3231259">
                   <a:moveTo>
                     <a:pt x="0" y="0"/>
                   </a:moveTo>
                   <a:lnTo>
-                    <a:pt x="35151" y="91040"/>
-                  </a:lnTo>
-                  <a:lnTo>
-                    <a:pt x="112785" y="281362"/>
-                  </a:lnTo>
-                  <a:lnTo>
-                    <a:pt x="190419" y="461514"/>
-                  </a:lnTo>
-                  <a:lnTo>
-                    <a:pt x="268053" y="632040"/>
-                  </a:lnTo>
-                  <a:lnTo>
-                    <a:pt x="345687" y="793453"/>
-                  </a:lnTo>
-                  <a:lnTo>
-                    <a:pt x="423321" y="946240"/>
-                  </a:lnTo>
-                  <a:lnTo>
-                    <a:pt x="500955" y="1090863"/>
-                  </a:lnTo>
-                  <a:lnTo>
-                    <a:pt x="578589" y="1227757"/>
-                  </a:lnTo>
-                  <a:lnTo>
-                    <a:pt x="656223" y="1357337"/>
-                  </a:lnTo>
-                  <a:lnTo>
-                    <a:pt x="733858" y="1479992"/>
-                  </a:lnTo>
-                  <a:lnTo>
-                    <a:pt x="811492" y="1596092"/>
-                  </a:lnTo>
-                  <a:lnTo>
-                    <a:pt x="889126" y="1705989"/>
-                  </a:lnTo>
-                  <a:lnTo>
-                    <a:pt x="966760" y="1810013"/>
-                  </a:lnTo>
-                  <a:lnTo>
-                    <a:pt x="1044394" y="1908478"/>
-                  </a:lnTo>
-                  <a:lnTo>
-                    <a:pt x="1122028" y="2001681"/>
-                  </a:lnTo>
-                  <a:lnTo>
-                    <a:pt x="1199662" y="2089904"/>
-                  </a:lnTo>
-                  <a:lnTo>
-                    <a:pt x="1277296" y="2173413"/>
-                  </a:lnTo>
-                  <a:lnTo>
-                    <a:pt x="1354930" y="2252459"/>
-                  </a:lnTo>
-                  <a:lnTo>
-                    <a:pt x="1432564" y="2327281"/>
-                  </a:lnTo>
-                  <a:lnTo>
-                    <a:pt x="1510198" y="2398105"/>
-                  </a:lnTo>
-                  <a:lnTo>
-                    <a:pt x="1587832" y="2465144"/>
-                  </a:lnTo>
-                  <a:lnTo>
-                    <a:pt x="1665466" y="2528601"/>
-                  </a:lnTo>
-                  <a:lnTo>
-                    <a:pt x="1743100" y="2588666"/>
-                  </a:lnTo>
-                  <a:lnTo>
-                    <a:pt x="1820734" y="2645522"/>
-                  </a:lnTo>
-                  <a:lnTo>
-                    <a:pt x="1898368" y="2699340"/>
-                  </a:lnTo>
-                  <a:lnTo>
-                    <a:pt x="1976002" y="2750282"/>
-                  </a:lnTo>
-                  <a:lnTo>
-                    <a:pt x="2053636" y="2786929"/>
-                  </a:lnTo>
-                  <a:lnTo>
-                    <a:pt x="2131270" y="2798890"/>
-                  </a:lnTo>
-                  <a:lnTo>
-                    <a:pt x="2208904" y="2810686"/>
-                  </a:lnTo>
-                  <a:lnTo>
-                    <a:pt x="2286538" y="2822320"/>
-                  </a:lnTo>
-                  <a:lnTo>
-                    <a:pt x="2364172" y="2833792"/>
-                  </a:lnTo>
-                  <a:lnTo>
-                    <a:pt x="2441807" y="2845106"/>
-                  </a:lnTo>
-                  <a:lnTo>
-                    <a:pt x="2519441" y="2856264"/>
-                  </a:lnTo>
-                  <a:lnTo>
-                    <a:pt x="2597075" y="2867268"/>
-                  </a:lnTo>
-                  <a:lnTo>
-                    <a:pt x="2674709" y="2878119"/>
-                  </a:lnTo>
-                  <a:lnTo>
-                    <a:pt x="2752343" y="2888821"/>
-                  </a:lnTo>
-                  <a:lnTo>
-                    <a:pt x="2829977" y="2899374"/>
-                  </a:lnTo>
-                  <a:lnTo>
-                    <a:pt x="2907611" y="2909782"/>
-                  </a:lnTo>
-                  <a:lnTo>
-                    <a:pt x="2985245" y="2920046"/>
-                  </a:lnTo>
-                  <a:lnTo>
-                    <a:pt x="3062879" y="2930169"/>
-                  </a:lnTo>
-                  <a:lnTo>
-                    <a:pt x="3140513" y="2940151"/>
-                  </a:lnTo>
-                  <a:lnTo>
-                    <a:pt x="3218147" y="2949996"/>
-                  </a:lnTo>
-                  <a:lnTo>
-                    <a:pt x="3295781" y="2959704"/>
-                  </a:lnTo>
-                  <a:lnTo>
-                    <a:pt x="3373415" y="2969278"/>
-                  </a:lnTo>
-                  <a:lnTo>
-                    <a:pt x="3451049" y="2978720"/>
-                  </a:lnTo>
-                  <a:lnTo>
-                    <a:pt x="3528683" y="2988032"/>
-                  </a:lnTo>
-                  <a:lnTo>
-                    <a:pt x="3606317" y="2997215"/>
-                  </a:lnTo>
-                  <a:lnTo>
-                    <a:pt x="3683951" y="3006271"/>
-                  </a:lnTo>
-                  <a:lnTo>
-                    <a:pt x="3761585" y="3015202"/>
-                  </a:lnTo>
-                  <a:lnTo>
-                    <a:pt x="3839219" y="3024009"/>
-                  </a:lnTo>
-                  <a:lnTo>
-                    <a:pt x="3916853" y="3032695"/>
-                  </a:lnTo>
-                  <a:lnTo>
-                    <a:pt x="3994487" y="3041261"/>
-                  </a:lnTo>
-                  <a:lnTo>
-                    <a:pt x="4072121" y="3049708"/>
-                  </a:lnTo>
-                  <a:lnTo>
-                    <a:pt x="4149756" y="3058039"/>
-                  </a:lnTo>
-                  <a:lnTo>
-                    <a:pt x="4227390" y="3066255"/>
-                  </a:lnTo>
-                  <a:lnTo>
-                    <a:pt x="4305024" y="3074357"/>
-                  </a:lnTo>
-                  <a:lnTo>
-                    <a:pt x="4382658" y="3082347"/>
-                  </a:lnTo>
-                  <a:lnTo>
-                    <a:pt x="4460292" y="3090227"/>
-                  </a:lnTo>
-                  <a:lnTo>
-                    <a:pt x="4537926" y="3097998"/>
-                  </a:lnTo>
-                  <a:lnTo>
-                    <a:pt x="4615560" y="3105661"/>
-                  </a:lnTo>
-                  <a:lnTo>
-                    <a:pt x="4693194" y="3113219"/>
-                  </a:lnTo>
-                  <a:lnTo>
-                    <a:pt x="4770828" y="3120672"/>
-                  </a:lnTo>
-                  <a:lnTo>
-                    <a:pt x="4848462" y="3128022"/>
-                  </a:lnTo>
-                  <a:lnTo>
-                    <a:pt x="4926096" y="3135271"/>
-                  </a:lnTo>
-                  <a:lnTo>
-                    <a:pt x="5003730" y="3142420"/>
-                  </a:lnTo>
-                  <a:lnTo>
-                    <a:pt x="5081364" y="3149469"/>
-                  </a:lnTo>
-                  <a:lnTo>
-                    <a:pt x="5158998" y="3156422"/>
-                  </a:lnTo>
-                  <a:lnTo>
-                    <a:pt x="5236632" y="3163278"/>
-                  </a:lnTo>
-                  <a:lnTo>
-                    <a:pt x="5314266" y="3170040"/>
-                  </a:lnTo>
-                  <a:lnTo>
-                    <a:pt x="5391900" y="3176708"/>
-                  </a:lnTo>
-                  <a:lnTo>
-                    <a:pt x="5469534" y="3183284"/>
-                  </a:lnTo>
-                  <a:lnTo>
-                    <a:pt x="5547168" y="3189769"/>
-                  </a:lnTo>
-                  <a:lnTo>
-                    <a:pt x="5624802" y="3196164"/>
-                  </a:lnTo>
-                  <a:lnTo>
-                    <a:pt x="5702436" y="3202471"/>
-                  </a:lnTo>
-                  <a:lnTo>
-                    <a:pt x="5780070" y="3208691"/>
-                  </a:lnTo>
-                  <a:lnTo>
-                    <a:pt x="5857705" y="3214826"/>
-                  </a:lnTo>
-                  <a:lnTo>
-                    <a:pt x="5935339" y="3220875"/>
-                  </a:lnTo>
-                  <a:lnTo>
-                    <a:pt x="6012973" y="3226841"/>
+                    <a:pt x="65729" y="164215"/>
+                  </a:lnTo>
+                  <a:lnTo>
+                    <a:pt x="143363" y="347956"/>
+                  </a:lnTo>
+                  <a:lnTo>
+                    <a:pt x="220997" y="522019"/>
+                  </a:lnTo>
+                  <a:lnTo>
+                    <a:pt x="298631" y="686914"/>
+                  </a:lnTo>
+                  <a:lnTo>
+                    <a:pt x="376265" y="843123"/>
+                  </a:lnTo>
+                  <a:lnTo>
+                    <a:pt x="453899" y="991105"/>
+                  </a:lnTo>
+                  <a:lnTo>
+                    <a:pt x="531533" y="1131292"/>
+                  </a:lnTo>
+                  <a:lnTo>
+                    <a:pt x="609167" y="1264096"/>
+                  </a:lnTo>
+                  <a:lnTo>
+                    <a:pt x="686801" y="1389904"/>
+                  </a:lnTo>
+                  <a:lnTo>
+                    <a:pt x="764436" y="1509086"/>
+                  </a:lnTo>
+                  <a:lnTo>
+                    <a:pt x="842070" y="1621991"/>
+                  </a:lnTo>
+                  <a:lnTo>
+                    <a:pt x="919704" y="1728948"/>
+                  </a:lnTo>
+                  <a:lnTo>
+                    <a:pt x="997338" y="1830272"/>
+                  </a:lnTo>
+                  <a:lnTo>
+                    <a:pt x="1074972" y="1926259"/>
+                  </a:lnTo>
+                  <a:lnTo>
+                    <a:pt x="1152606" y="2017191"/>
+                  </a:lnTo>
+                  <a:lnTo>
+                    <a:pt x="1230240" y="2103332"/>
+                  </a:lnTo>
+                  <a:lnTo>
+                    <a:pt x="1307874" y="2184937"/>
+                  </a:lnTo>
+                  <a:lnTo>
+                    <a:pt x="1385508" y="2262243"/>
+                  </a:lnTo>
+                  <a:lnTo>
+                    <a:pt x="1463142" y="2335478"/>
+                  </a:lnTo>
+                  <a:lnTo>
+                    <a:pt x="1540776" y="2404855"/>
+                  </a:lnTo>
+                  <a:lnTo>
+                    <a:pt x="1618410" y="2470578"/>
+                  </a:lnTo>
+                  <a:lnTo>
+                    <a:pt x="1696044" y="2532839"/>
+                  </a:lnTo>
+                  <a:lnTo>
+                    <a:pt x="1773678" y="2591821"/>
+                  </a:lnTo>
+                  <a:lnTo>
+                    <a:pt x="1851312" y="2647696"/>
+                  </a:lnTo>
+                  <a:lnTo>
+                    <a:pt x="1928946" y="2700628"/>
+                  </a:lnTo>
+                  <a:lnTo>
+                    <a:pt x="2006580" y="2750772"/>
+                  </a:lnTo>
+                  <a:lnTo>
+                    <a:pt x="2084214" y="2786986"/>
+                  </a:lnTo>
+                  <a:lnTo>
+                    <a:pt x="2161848" y="2799121"/>
+                  </a:lnTo>
+                  <a:lnTo>
+                    <a:pt x="2239482" y="2811085"/>
+                  </a:lnTo>
+                  <a:lnTo>
+                    <a:pt x="2317116" y="2822881"/>
+                  </a:lnTo>
+                  <a:lnTo>
+                    <a:pt x="2394750" y="2834512"/>
+                  </a:lnTo>
+                  <a:lnTo>
+                    <a:pt x="2472385" y="2845980"/>
+                  </a:lnTo>
+                  <a:lnTo>
+                    <a:pt x="2550019" y="2857288"/>
+                  </a:lnTo>
+                  <a:lnTo>
+                    <a:pt x="2627653" y="2868437"/>
+                  </a:lnTo>
+                  <a:lnTo>
+                    <a:pt x="2705287" y="2879429"/>
+                  </a:lnTo>
+                  <a:lnTo>
+                    <a:pt x="2782921" y="2890268"/>
+                  </a:lnTo>
+                  <a:lnTo>
+                    <a:pt x="2860555" y="2900954"/>
+                  </a:lnTo>
+                  <a:lnTo>
+                    <a:pt x="2938189" y="2911491"/>
+                  </a:lnTo>
+                  <a:lnTo>
+                    <a:pt x="3015823" y="2921880"/>
+                  </a:lnTo>
+                  <a:lnTo>
+                    <a:pt x="3093457" y="2932123"/>
+                  </a:lnTo>
+                  <a:lnTo>
+                    <a:pt x="3171091" y="2942223"/>
+                  </a:lnTo>
+                  <a:lnTo>
+                    <a:pt x="3248725" y="2952181"/>
+                  </a:lnTo>
+                  <a:lnTo>
+                    <a:pt x="3326359" y="2962000"/>
+                  </a:lnTo>
+                  <a:lnTo>
+                    <a:pt x="3403993" y="2971681"/>
+                  </a:lnTo>
+                  <a:lnTo>
+                    <a:pt x="3481627" y="2981226"/>
+                  </a:lnTo>
+                  <a:lnTo>
+                    <a:pt x="3559261" y="2990638"/>
+                  </a:lnTo>
+                  <a:lnTo>
+                    <a:pt x="3636895" y="2999917"/>
+                  </a:lnTo>
+                  <a:lnTo>
+                    <a:pt x="3714529" y="3009067"/>
+                  </a:lnTo>
+                  <a:lnTo>
+                    <a:pt x="3792163" y="3018088"/>
+                  </a:lnTo>
+                  <a:lnTo>
+                    <a:pt x="3869797" y="3026983"/>
+                  </a:lnTo>
+                  <a:lnTo>
+                    <a:pt x="3947431" y="3035753"/>
+                  </a:lnTo>
+                  <a:lnTo>
+                    <a:pt x="4025065" y="3044400"/>
+                  </a:lnTo>
+                  <a:lnTo>
+                    <a:pt x="4102699" y="3052926"/>
+                  </a:lnTo>
+                  <a:lnTo>
+                    <a:pt x="4180334" y="3061333"/>
+                  </a:lnTo>
+                  <a:lnTo>
+                    <a:pt x="4257968" y="3069621"/>
+                  </a:lnTo>
+                  <a:lnTo>
+                    <a:pt x="4335602" y="3077794"/>
+                  </a:lnTo>
+                  <a:lnTo>
+                    <a:pt x="4413236" y="3085852"/>
+                  </a:lnTo>
+                  <a:lnTo>
+                    <a:pt x="4490870" y="3093797"/>
+                  </a:lnTo>
+                  <a:lnTo>
+                    <a:pt x="4568504" y="3101630"/>
+                  </a:lnTo>
+                  <a:lnTo>
+                    <a:pt x="4646138" y="3109354"/>
+                  </a:lnTo>
+                  <a:lnTo>
+                    <a:pt x="4723772" y="3116969"/>
+                  </a:lnTo>
+                  <a:lnTo>
+                    <a:pt x="4801406" y="3124478"/>
+                  </a:lnTo>
+                  <a:lnTo>
+                    <a:pt x="4879040" y="3131882"/>
+                  </a:lnTo>
+                  <a:lnTo>
+                    <a:pt x="4956674" y="3139181"/>
+                  </a:lnTo>
+                  <a:lnTo>
+                    <a:pt x="5034308" y="3146379"/>
+                  </a:lnTo>
+                  <a:lnTo>
+                    <a:pt x="5111942" y="3153475"/>
+                  </a:lnTo>
+                  <a:lnTo>
+                    <a:pt x="5189576" y="3160472"/>
+                  </a:lnTo>
+                  <a:lnTo>
+                    <a:pt x="5267210" y="3167371"/>
+                  </a:lnTo>
+                  <a:lnTo>
+                    <a:pt x="5344844" y="3174173"/>
+                  </a:lnTo>
+                  <a:lnTo>
+                    <a:pt x="5422478" y="3180880"/>
+                  </a:lnTo>
+                  <a:lnTo>
+                    <a:pt x="5500112" y="3187493"/>
+                  </a:lnTo>
+                  <a:lnTo>
+                    <a:pt x="5577746" y="3194013"/>
+                  </a:lnTo>
+                  <a:lnTo>
+                    <a:pt x="5655380" y="3200442"/>
+                  </a:lnTo>
+                  <a:lnTo>
+                    <a:pt x="5733014" y="3206781"/>
+                  </a:lnTo>
+                  <a:lnTo>
+                    <a:pt x="5810648" y="3213031"/>
+                  </a:lnTo>
+                  <a:lnTo>
+                    <a:pt x="5888282" y="3219193"/>
+                  </a:lnTo>
+                  <a:lnTo>
+                    <a:pt x="5965917" y="3225269"/>
+                  </a:lnTo>
+                  <a:lnTo>
+                    <a:pt x="6043551" y="3231259"/>
                   </a:lnTo>
                 </a:path>
               </a:pathLst>
@@ -3820,297 +3820,297 @@
           </p:nvSpPr>
           <p:spPr>
             <a:xfrm>
-              <a:off x="817517" y="3953643"/>
-              <a:ext cx="7370972" cy="1543666"/>
+              <a:off x="817517" y="3939435"/>
+              <a:ext cx="7370972" cy="1555674"/>
             </a:xfrm>
             <a:custGeom>
               <a:avLst/>
               <a:pathLst>
-                <a:path w="7370972" h="1543666">
+                <a:path w="7370972" h="1555674">
                   <a:moveTo>
-                    <a:pt x="7370972" y="1543666"/>
+                    <a:pt x="7370972" y="1555674"/>
                   </a:moveTo>
                   <a:lnTo>
-                    <a:pt x="7293338" y="1540736"/>
-                  </a:lnTo>
-                  <a:lnTo>
-                    <a:pt x="7215704" y="1537641"/>
-                  </a:lnTo>
-                  <a:lnTo>
-                    <a:pt x="7138070" y="1534371"/>
-                  </a:lnTo>
-                  <a:lnTo>
-                    <a:pt x="7060436" y="1530916"/>
-                  </a:lnTo>
-                  <a:lnTo>
-                    <a:pt x="6982802" y="1527266"/>
-                  </a:lnTo>
-                  <a:lnTo>
-                    <a:pt x="6905168" y="1523411"/>
-                  </a:lnTo>
-                  <a:lnTo>
-                    <a:pt x="6827534" y="1519338"/>
-                  </a:lnTo>
-                  <a:lnTo>
-                    <a:pt x="6749900" y="1515034"/>
-                  </a:lnTo>
-                  <a:lnTo>
-                    <a:pt x="6672266" y="1510488"/>
-                  </a:lnTo>
-                  <a:lnTo>
-                    <a:pt x="6594632" y="1505685"/>
-                  </a:lnTo>
-                  <a:lnTo>
-                    <a:pt x="6516998" y="1500611"/>
-                  </a:lnTo>
-                  <a:lnTo>
-                    <a:pt x="6439364" y="1495251"/>
-                  </a:lnTo>
-                  <a:lnTo>
-                    <a:pt x="6361730" y="1489588"/>
-                  </a:lnTo>
-                  <a:lnTo>
-                    <a:pt x="6284096" y="1483605"/>
-                  </a:lnTo>
-                  <a:lnTo>
-                    <a:pt x="6206462" y="1477284"/>
-                  </a:lnTo>
-                  <a:lnTo>
-                    <a:pt x="6128827" y="1470607"/>
-                  </a:lnTo>
-                  <a:lnTo>
-                    <a:pt x="6051193" y="1463553"/>
-                  </a:lnTo>
-                  <a:lnTo>
-                    <a:pt x="5973559" y="1456100"/>
-                  </a:lnTo>
-                  <a:lnTo>
-                    <a:pt x="5895925" y="1448227"/>
-                  </a:lnTo>
-                  <a:lnTo>
-                    <a:pt x="5818291" y="1439909"/>
-                  </a:lnTo>
-                  <a:lnTo>
-                    <a:pt x="5740657" y="1431122"/>
-                  </a:lnTo>
-                  <a:lnTo>
-                    <a:pt x="5663023" y="1421839"/>
-                  </a:lnTo>
-                  <a:lnTo>
-                    <a:pt x="5585389" y="1412031"/>
-                  </a:lnTo>
-                  <a:lnTo>
-                    <a:pt x="5507755" y="1401670"/>
-                  </a:lnTo>
-                  <a:lnTo>
-                    <a:pt x="5430121" y="1390724"/>
-                  </a:lnTo>
-                  <a:lnTo>
-                    <a:pt x="5352487" y="1379160"/>
-                  </a:lnTo>
-                  <a:lnTo>
-                    <a:pt x="5274853" y="1366943"/>
-                  </a:lnTo>
-                  <a:lnTo>
-                    <a:pt x="5197219" y="1354036"/>
-                  </a:lnTo>
-                  <a:lnTo>
-                    <a:pt x="5119585" y="1340401"/>
-                  </a:lnTo>
-                  <a:lnTo>
-                    <a:pt x="5041951" y="1325996"/>
-                  </a:lnTo>
-                  <a:lnTo>
-                    <a:pt x="4964317" y="1310778"/>
-                  </a:lnTo>
-                  <a:lnTo>
-                    <a:pt x="4886683" y="1294701"/>
-                  </a:lnTo>
-                  <a:lnTo>
-                    <a:pt x="4809049" y="1277716"/>
-                  </a:lnTo>
-                  <a:lnTo>
-                    <a:pt x="4731415" y="1259772"/>
-                  </a:lnTo>
-                  <a:lnTo>
-                    <a:pt x="4653781" y="1240815"/>
-                  </a:lnTo>
-                  <a:lnTo>
-                    <a:pt x="4576147" y="1220788"/>
-                  </a:lnTo>
-                  <a:lnTo>
-                    <a:pt x="4498513" y="1199631"/>
-                  </a:lnTo>
-                  <a:lnTo>
-                    <a:pt x="4420879" y="1177279"/>
-                  </a:lnTo>
-                  <a:lnTo>
-                    <a:pt x="4343244" y="1153665"/>
-                  </a:lnTo>
-                  <a:lnTo>
-                    <a:pt x="4265610" y="1128718"/>
-                  </a:lnTo>
-                  <a:lnTo>
-                    <a:pt x="4187976" y="1102363"/>
-                  </a:lnTo>
-                  <a:lnTo>
-                    <a:pt x="4110342" y="1074520"/>
-                  </a:lnTo>
-                  <a:lnTo>
-                    <a:pt x="4032708" y="1045105"/>
-                  </a:lnTo>
-                  <a:lnTo>
-                    <a:pt x="3955074" y="1014029"/>
-                  </a:lnTo>
-                  <a:lnTo>
-                    <a:pt x="3877440" y="981199"/>
-                  </a:lnTo>
-                  <a:lnTo>
-                    <a:pt x="3799806" y="946516"/>
-                  </a:lnTo>
-                  <a:lnTo>
-                    <a:pt x="3722172" y="909874"/>
-                  </a:lnTo>
-                  <a:lnTo>
-                    <a:pt x="3644538" y="871164"/>
-                  </a:lnTo>
-                  <a:lnTo>
-                    <a:pt x="3566904" y="830269"/>
-                  </a:lnTo>
-                  <a:lnTo>
-                    <a:pt x="3489270" y="787065"/>
-                  </a:lnTo>
-                  <a:lnTo>
-                    <a:pt x="3411636" y="741422"/>
-                  </a:lnTo>
-                  <a:lnTo>
-                    <a:pt x="3334002" y="717720"/>
-                  </a:lnTo>
-                  <a:lnTo>
-                    <a:pt x="3256368" y="705421"/>
-                  </a:lnTo>
-                  <a:lnTo>
-                    <a:pt x="3178734" y="692949"/>
-                  </a:lnTo>
-                  <a:lnTo>
-                    <a:pt x="3101100" y="680303"/>
-                  </a:lnTo>
-                  <a:lnTo>
-                    <a:pt x="3023466" y="667480"/>
-                  </a:lnTo>
-                  <a:lnTo>
-                    <a:pt x="2945832" y="654477"/>
-                  </a:lnTo>
-                  <a:lnTo>
-                    <a:pt x="2868198" y="641292"/>
-                  </a:lnTo>
-                  <a:lnTo>
-                    <a:pt x="2790564" y="627922"/>
-                  </a:lnTo>
-                  <a:lnTo>
-                    <a:pt x="2712930" y="614365"/>
-                  </a:lnTo>
-                  <a:lnTo>
-                    <a:pt x="2635295" y="600617"/>
-                  </a:lnTo>
-                  <a:lnTo>
-                    <a:pt x="2557661" y="586678"/>
-                  </a:lnTo>
-                  <a:lnTo>
-                    <a:pt x="2480027" y="572543"/>
-                  </a:lnTo>
-                  <a:lnTo>
-                    <a:pt x="2402393" y="558210"/>
-                  </a:lnTo>
-                  <a:lnTo>
-                    <a:pt x="2324759" y="543676"/>
-                  </a:lnTo>
-                  <a:lnTo>
-                    <a:pt x="2247125" y="528938"/>
-                  </a:lnTo>
-                  <a:lnTo>
-                    <a:pt x="2169491" y="513994"/>
-                  </a:lnTo>
-                  <a:lnTo>
-                    <a:pt x="2091857" y="498841"/>
-                  </a:lnTo>
-                  <a:lnTo>
-                    <a:pt x="2014223" y="483475"/>
-                  </a:lnTo>
-                  <a:lnTo>
-                    <a:pt x="1936589" y="467894"/>
-                  </a:lnTo>
-                  <a:lnTo>
-                    <a:pt x="1858955" y="452095"/>
-                  </a:lnTo>
-                  <a:lnTo>
-                    <a:pt x="1781321" y="436074"/>
-                  </a:lnTo>
-                  <a:lnTo>
-                    <a:pt x="1703687" y="419829"/>
-                  </a:lnTo>
-                  <a:lnTo>
-                    <a:pt x="1626053" y="403356"/>
-                  </a:lnTo>
-                  <a:lnTo>
-                    <a:pt x="1548419" y="386653"/>
-                  </a:lnTo>
-                  <a:lnTo>
-                    <a:pt x="1470785" y="369715"/>
-                  </a:lnTo>
-                  <a:lnTo>
-                    <a:pt x="1393151" y="352541"/>
-                  </a:lnTo>
-                  <a:lnTo>
-                    <a:pt x="1315517" y="335125"/>
-                  </a:lnTo>
-                  <a:lnTo>
-                    <a:pt x="1237883" y="317466"/>
-                  </a:lnTo>
-                  <a:lnTo>
-                    <a:pt x="1160249" y="299559"/>
-                  </a:lnTo>
-                  <a:lnTo>
-                    <a:pt x="1082615" y="281401"/>
-                  </a:lnTo>
-                  <a:lnTo>
-                    <a:pt x="1004981" y="262989"/>
-                  </a:lnTo>
-                  <a:lnTo>
-                    <a:pt x="927346" y="244319"/>
-                  </a:lnTo>
-                  <a:lnTo>
-                    <a:pt x="849712" y="225387"/>
-                  </a:lnTo>
-                  <a:lnTo>
-                    <a:pt x="772078" y="206190"/>
-                  </a:lnTo>
-                  <a:lnTo>
-                    <a:pt x="694444" y="186724"/>
-                  </a:lnTo>
-                  <a:lnTo>
-                    <a:pt x="616810" y="166986"/>
-                  </a:lnTo>
-                  <a:lnTo>
-                    <a:pt x="539176" y="146970"/>
-                  </a:lnTo>
-                  <a:lnTo>
-                    <a:pt x="461542" y="126675"/>
-                  </a:lnTo>
-                  <a:lnTo>
-                    <a:pt x="383908" y="106095"/>
-                  </a:lnTo>
-                  <a:lnTo>
-                    <a:pt x="306274" y="85227"/>
-                  </a:lnTo>
-                  <a:lnTo>
-                    <a:pt x="228640" y="64066"/>
-                  </a:lnTo>
-                  <a:lnTo>
-                    <a:pt x="151006" y="42609"/>
-                  </a:lnTo>
-                  <a:lnTo>
-                    <a:pt x="73372" y="20851"/>
+                    <a:pt x="7293338" y="1552666"/>
+                  </a:lnTo>
+                  <a:lnTo>
+                    <a:pt x="7215704" y="1549491"/>
+                  </a:lnTo>
+                  <a:lnTo>
+                    <a:pt x="7138070" y="1546139"/>
+                  </a:lnTo>
+                  <a:lnTo>
+                    <a:pt x="7060436" y="1542601"/>
+                  </a:lnTo>
+                  <a:lnTo>
+                    <a:pt x="6982802" y="1538867"/>
+                  </a:lnTo>
+                  <a:lnTo>
+                    <a:pt x="6905168" y="1534924"/>
+                  </a:lnTo>
+                  <a:lnTo>
+                    <a:pt x="6827534" y="1530763"/>
+                  </a:lnTo>
+                  <a:lnTo>
+                    <a:pt x="6749900" y="1526370"/>
+                  </a:lnTo>
+                  <a:lnTo>
+                    <a:pt x="6672266" y="1521733"/>
+                  </a:lnTo>
+                  <a:lnTo>
+                    <a:pt x="6594632" y="1516838"/>
+                  </a:lnTo>
+                  <a:lnTo>
+                    <a:pt x="6516998" y="1511671"/>
+                  </a:lnTo>
+                  <a:lnTo>
+                    <a:pt x="6439364" y="1506217"/>
+                  </a:lnTo>
+                  <a:lnTo>
+                    <a:pt x="6361730" y="1500459"/>
+                  </a:lnTo>
+                  <a:lnTo>
+                    <a:pt x="6284096" y="1494381"/>
+                  </a:lnTo>
+                  <a:lnTo>
+                    <a:pt x="6206462" y="1487966"/>
+                  </a:lnTo>
+                  <a:lnTo>
+                    <a:pt x="6128827" y="1481193"/>
+                  </a:lnTo>
+                  <a:lnTo>
+                    <a:pt x="6051193" y="1474044"/>
+                  </a:lnTo>
+                  <a:lnTo>
+                    <a:pt x="5973559" y="1466498"/>
+                  </a:lnTo>
+                  <a:lnTo>
+                    <a:pt x="5895925" y="1458532"/>
+                  </a:lnTo>
+                  <a:lnTo>
+                    <a:pt x="5818291" y="1450123"/>
+                  </a:lnTo>
+                  <a:lnTo>
+                    <a:pt x="5740657" y="1441247"/>
+                  </a:lnTo>
+                  <a:lnTo>
+                    <a:pt x="5663023" y="1431877"/>
+                  </a:lnTo>
+                  <a:lnTo>
+                    <a:pt x="5585389" y="1421986"/>
+                  </a:lnTo>
+                  <a:lnTo>
+                    <a:pt x="5507755" y="1411545"/>
+                  </a:lnTo>
+                  <a:lnTo>
+                    <a:pt x="5430121" y="1400523"/>
+                  </a:lnTo>
+                  <a:lnTo>
+                    <a:pt x="5352487" y="1388889"/>
+                  </a:lnTo>
+                  <a:lnTo>
+                    <a:pt x="5274853" y="1376608"/>
+                  </a:lnTo>
+                  <a:lnTo>
+                    <a:pt x="5197219" y="1363644"/>
+                  </a:lnTo>
+                  <a:lnTo>
+                    <a:pt x="5119585" y="1349960"/>
+                  </a:lnTo>
+                  <a:lnTo>
+                    <a:pt x="5041951" y="1335514"/>
+                  </a:lnTo>
+                  <a:lnTo>
+                    <a:pt x="4964317" y="1320265"/>
+                  </a:lnTo>
+                  <a:lnTo>
+                    <a:pt x="4886683" y="1304169"/>
+                  </a:lnTo>
+                  <a:lnTo>
+                    <a:pt x="4809049" y="1287177"/>
+                  </a:lnTo>
+                  <a:lnTo>
+                    <a:pt x="4731415" y="1269241"/>
+                  </a:lnTo>
+                  <a:lnTo>
+                    <a:pt x="4653781" y="1250308"/>
+                  </a:lnTo>
+                  <a:lnTo>
+                    <a:pt x="4576147" y="1230322"/>
+                  </a:lnTo>
+                  <a:lnTo>
+                    <a:pt x="4498513" y="1209224"/>
+                  </a:lnTo>
+                  <a:lnTo>
+                    <a:pt x="4420879" y="1186954"/>
+                  </a:lnTo>
+                  <a:lnTo>
+                    <a:pt x="4343244" y="1163445"/>
+                  </a:lnTo>
+                  <a:lnTo>
+                    <a:pt x="4265610" y="1138629"/>
+                  </a:lnTo>
+                  <a:lnTo>
+                    <a:pt x="4187976" y="1112434"/>
+                  </a:lnTo>
+                  <a:lnTo>
+                    <a:pt x="4110342" y="1084782"/>
+                  </a:lnTo>
+                  <a:lnTo>
+                    <a:pt x="4032708" y="1055592"/>
+                  </a:lnTo>
+                  <a:lnTo>
+                    <a:pt x="3955074" y="1024780"/>
+                  </a:lnTo>
+                  <a:lnTo>
+                    <a:pt x="3877440" y="992254"/>
+                  </a:lnTo>
+                  <a:lnTo>
+                    <a:pt x="3799806" y="957921"/>
+                  </a:lnTo>
+                  <a:lnTo>
+                    <a:pt x="3722172" y="921678"/>
+                  </a:lnTo>
+                  <a:lnTo>
+                    <a:pt x="3644538" y="883420"/>
+                  </a:lnTo>
+                  <a:lnTo>
+                    <a:pt x="3566904" y="843034"/>
+                  </a:lnTo>
+                  <a:lnTo>
+                    <a:pt x="3489270" y="800404"/>
+                  </a:lnTo>
+                  <a:lnTo>
+                    <a:pt x="3411636" y="755403"/>
+                  </a:lnTo>
+                  <a:lnTo>
+                    <a:pt x="3334002" y="731807"/>
+                  </a:lnTo>
+                  <a:lnTo>
+                    <a:pt x="3256368" y="719326"/>
+                  </a:lnTo>
+                  <a:lnTo>
+                    <a:pt x="3178734" y="706666"/>
+                  </a:lnTo>
+                  <a:lnTo>
+                    <a:pt x="3101100" y="693827"/>
+                  </a:lnTo>
+                  <a:lnTo>
+                    <a:pt x="3023466" y="680806"/>
+                  </a:lnTo>
+                  <a:lnTo>
+                    <a:pt x="2945832" y="667599"/>
+                  </a:lnTo>
+                  <a:lnTo>
+                    <a:pt x="2868198" y="654204"/>
+                  </a:lnTo>
+                  <a:lnTo>
+                    <a:pt x="2790564" y="640619"/>
+                  </a:lnTo>
+                  <a:lnTo>
+                    <a:pt x="2712930" y="626841"/>
+                  </a:lnTo>
+                  <a:lnTo>
+                    <a:pt x="2635295" y="612867"/>
+                  </a:lnTo>
+                  <a:lnTo>
+                    <a:pt x="2557661" y="598695"/>
+                  </a:lnTo>
+                  <a:lnTo>
+                    <a:pt x="2480027" y="584320"/>
+                  </a:lnTo>
+                  <a:lnTo>
+                    <a:pt x="2402393" y="569742"/>
+                  </a:lnTo>
+                  <a:lnTo>
+                    <a:pt x="2324759" y="554956"/>
+                  </a:lnTo>
+                  <a:lnTo>
+                    <a:pt x="2247125" y="539960"/>
+                  </a:lnTo>
+                  <a:lnTo>
+                    <a:pt x="2169491" y="524751"/>
+                  </a:lnTo>
+                  <a:lnTo>
+                    <a:pt x="2091857" y="509326"/>
+                  </a:lnTo>
+                  <a:lnTo>
+                    <a:pt x="2014223" y="493681"/>
+                  </a:lnTo>
+                  <a:lnTo>
+                    <a:pt x="1936589" y="477814"/>
+                  </a:lnTo>
+                  <a:lnTo>
+                    <a:pt x="1858955" y="461721"/>
+                  </a:lnTo>
+                  <a:lnTo>
+                    <a:pt x="1781321" y="445400"/>
+                  </a:lnTo>
+                  <a:lnTo>
+                    <a:pt x="1703687" y="428846"/>
+                  </a:lnTo>
+                  <a:lnTo>
+                    <a:pt x="1626053" y="412058"/>
+                  </a:lnTo>
+                  <a:lnTo>
+                    <a:pt x="1548419" y="395030"/>
+                  </a:lnTo>
+                  <a:lnTo>
+                    <a:pt x="1470785" y="377761"/>
+                  </a:lnTo>
+                  <a:lnTo>
+                    <a:pt x="1393151" y="360245"/>
+                  </a:lnTo>
+                  <a:lnTo>
+                    <a:pt x="1315517" y="342481"/>
+                  </a:lnTo>
+                  <a:lnTo>
+                    <a:pt x="1237883" y="324465"/>
+                  </a:lnTo>
+                  <a:lnTo>
+                    <a:pt x="1160249" y="306192"/>
+                  </a:lnTo>
+                  <a:lnTo>
+                    <a:pt x="1082615" y="287659"/>
+                  </a:lnTo>
+                  <a:lnTo>
+                    <a:pt x="1004981" y="268863"/>
+                  </a:lnTo>
+                  <a:lnTo>
+                    <a:pt x="927346" y="249800"/>
+                  </a:lnTo>
+                  <a:lnTo>
+                    <a:pt x="849712" y="230466"/>
+                  </a:lnTo>
+                  <a:lnTo>
+                    <a:pt x="772078" y="210857"/>
+                  </a:lnTo>
+                  <a:lnTo>
+                    <a:pt x="694444" y="190969"/>
+                  </a:lnTo>
+                  <a:lnTo>
+                    <a:pt x="616810" y="170798"/>
+                  </a:lnTo>
+                  <a:lnTo>
+                    <a:pt x="539176" y="150341"/>
+                  </a:lnTo>
+                  <a:lnTo>
+                    <a:pt x="461542" y="129593"/>
+                  </a:lnTo>
+                  <a:lnTo>
+                    <a:pt x="383908" y="108549"/>
+                  </a:lnTo>
+                  <a:lnTo>
+                    <a:pt x="306274" y="87207"/>
+                  </a:lnTo>
+                  <a:lnTo>
+                    <a:pt x="228640" y="65561"/>
+                  </a:lnTo>
+                  <a:lnTo>
+                    <a:pt x="151006" y="43608"/>
+                  </a:lnTo>
+                  <a:lnTo>
+                    <a:pt x="73372" y="21342"/>
                   </a:lnTo>
                   <a:lnTo>
                     <a:pt x="0" y="0"/>
@@ -4133,297 +4133,297 @@
           </p:nvSpPr>
           <p:spPr>
             <a:xfrm>
-              <a:off x="966479" y="1896563"/>
-              <a:ext cx="7222010" cy="3503989"/>
+              <a:off x="938035" y="1896563"/>
+              <a:ext cx="7250454" cy="3501661"/>
             </a:xfrm>
             <a:custGeom>
               <a:avLst/>
               <a:pathLst>
-                <a:path w="7222010" h="3503989">
+                <a:path w="7250454" h="3501661">
                   <a:moveTo>
                     <a:pt x="0" y="0"/>
                   </a:moveTo>
                   <a:lnTo>
-                    <a:pt x="2044" y="3365"/>
-                  </a:lnTo>
-                  <a:lnTo>
-                    <a:pt x="79678" y="126820"/>
-                  </a:lnTo>
-                  <a:lnTo>
-                    <a:pt x="157312" y="246100"/>
-                  </a:lnTo>
-                  <a:lnTo>
-                    <a:pt x="234946" y="361344"/>
-                  </a:lnTo>
-                  <a:lnTo>
-                    <a:pt x="312580" y="472689"/>
-                  </a:lnTo>
-                  <a:lnTo>
-                    <a:pt x="390214" y="580268"/>
-                  </a:lnTo>
-                  <a:lnTo>
-                    <a:pt x="467848" y="684207"/>
-                  </a:lnTo>
-                  <a:lnTo>
-                    <a:pt x="545482" y="784629"/>
-                  </a:lnTo>
-                  <a:lnTo>
-                    <a:pt x="623116" y="881655"/>
-                  </a:lnTo>
-                  <a:lnTo>
-                    <a:pt x="700750" y="975398"/>
-                  </a:lnTo>
-                  <a:lnTo>
-                    <a:pt x="778384" y="1065970"/>
-                  </a:lnTo>
-                  <a:lnTo>
-                    <a:pt x="856018" y="1153477"/>
-                  </a:lnTo>
-                  <a:lnTo>
-                    <a:pt x="933653" y="1238025"/>
-                  </a:lnTo>
-                  <a:lnTo>
-                    <a:pt x="1011287" y="1319712"/>
-                  </a:lnTo>
-                  <a:lnTo>
-                    <a:pt x="1088921" y="1398635"/>
-                  </a:lnTo>
-                  <a:lnTo>
-                    <a:pt x="1166555" y="1474889"/>
-                  </a:lnTo>
-                  <a:lnTo>
-                    <a:pt x="1244189" y="1548563"/>
-                  </a:lnTo>
-                  <a:lnTo>
-                    <a:pt x="1321823" y="1619744"/>
-                  </a:lnTo>
-                  <a:lnTo>
-                    <a:pt x="1399457" y="1688518"/>
-                  </a:lnTo>
-                  <a:lnTo>
-                    <a:pt x="1477091" y="1754964"/>
-                  </a:lnTo>
-                  <a:lnTo>
-                    <a:pt x="1554725" y="1819163"/>
-                  </a:lnTo>
-                  <a:lnTo>
-                    <a:pt x="1632359" y="1881190"/>
-                  </a:lnTo>
-                  <a:lnTo>
-                    <a:pt x="1709993" y="1941119"/>
-                  </a:lnTo>
-                  <a:lnTo>
-                    <a:pt x="1787627" y="1999020"/>
-                  </a:lnTo>
-                  <a:lnTo>
-                    <a:pt x="1865261" y="2054962"/>
-                  </a:lnTo>
-                  <a:lnTo>
-                    <a:pt x="1942895" y="2109012"/>
-                  </a:lnTo>
-                  <a:lnTo>
-                    <a:pt x="2020529" y="2161234"/>
-                  </a:lnTo>
-                  <a:lnTo>
-                    <a:pt x="2098163" y="2211688"/>
-                  </a:lnTo>
-                  <a:lnTo>
-                    <a:pt x="2175797" y="2260436"/>
-                  </a:lnTo>
-                  <a:lnTo>
-                    <a:pt x="2253431" y="2307535"/>
-                  </a:lnTo>
-                  <a:lnTo>
-                    <a:pt x="2331065" y="2353040"/>
-                  </a:lnTo>
-                  <a:lnTo>
-                    <a:pt x="2408699" y="2397006"/>
-                  </a:lnTo>
-                  <a:lnTo>
-                    <a:pt x="2486333" y="2439484"/>
-                  </a:lnTo>
-                  <a:lnTo>
-                    <a:pt x="2563967" y="2480526"/>
-                  </a:lnTo>
-                  <a:lnTo>
-                    <a:pt x="2641602" y="2520179"/>
-                  </a:lnTo>
-                  <a:lnTo>
-                    <a:pt x="2719236" y="2558490"/>
-                  </a:lnTo>
-                  <a:lnTo>
-                    <a:pt x="2796870" y="2595506"/>
-                  </a:lnTo>
-                  <a:lnTo>
-                    <a:pt x="2874504" y="2631269"/>
-                  </a:lnTo>
-                  <a:lnTo>
-                    <a:pt x="2952138" y="2665822"/>
-                  </a:lnTo>
-                  <a:lnTo>
-                    <a:pt x="3029772" y="2699207"/>
-                  </a:lnTo>
-                  <a:lnTo>
-                    <a:pt x="3107406" y="2731461"/>
-                  </a:lnTo>
-                  <a:lnTo>
-                    <a:pt x="3185040" y="2762625"/>
-                  </a:lnTo>
-                  <a:lnTo>
-                    <a:pt x="3262674" y="2792735"/>
-                  </a:lnTo>
-                  <a:lnTo>
-                    <a:pt x="3340308" y="2821826"/>
-                  </a:lnTo>
-                  <a:lnTo>
-                    <a:pt x="3417942" y="2849932"/>
-                  </a:lnTo>
-                  <a:lnTo>
-                    <a:pt x="3495576" y="2877088"/>
-                  </a:lnTo>
-                  <a:lnTo>
-                    <a:pt x="3573210" y="2903325"/>
-                  </a:lnTo>
-                  <a:lnTo>
-                    <a:pt x="3650844" y="2928675"/>
-                  </a:lnTo>
-                  <a:lnTo>
-                    <a:pt x="3728478" y="2953167"/>
-                  </a:lnTo>
-                  <a:lnTo>
-                    <a:pt x="3806112" y="2976830"/>
-                  </a:lnTo>
-                  <a:lnTo>
-                    <a:pt x="3883746" y="2999693"/>
-                  </a:lnTo>
-                  <a:lnTo>
-                    <a:pt x="3961380" y="3021783"/>
-                  </a:lnTo>
-                  <a:lnTo>
-                    <a:pt x="4039014" y="3043125"/>
-                  </a:lnTo>
-                  <a:lnTo>
-                    <a:pt x="4116648" y="3063745"/>
-                  </a:lnTo>
-                  <a:lnTo>
-                    <a:pt x="4194282" y="3083668"/>
-                  </a:lnTo>
-                  <a:lnTo>
-                    <a:pt x="4271916" y="3102916"/>
-                  </a:lnTo>
-                  <a:lnTo>
-                    <a:pt x="4349550" y="3121513"/>
-                  </a:lnTo>
-                  <a:lnTo>
-                    <a:pt x="4427185" y="3139482"/>
-                  </a:lnTo>
-                  <a:lnTo>
-                    <a:pt x="4504819" y="3156842"/>
-                  </a:lnTo>
-                  <a:lnTo>
-                    <a:pt x="4582453" y="3173615"/>
-                  </a:lnTo>
-                  <a:lnTo>
-                    <a:pt x="4660087" y="3189821"/>
-                  </a:lnTo>
-                  <a:lnTo>
-                    <a:pt x="4737721" y="3205478"/>
-                  </a:lnTo>
-                  <a:lnTo>
-                    <a:pt x="4815355" y="3220606"/>
-                  </a:lnTo>
-                  <a:lnTo>
-                    <a:pt x="4892989" y="3235222"/>
-                  </a:lnTo>
-                  <a:lnTo>
-                    <a:pt x="4970623" y="3249343"/>
-                  </a:lnTo>
-                  <a:lnTo>
-                    <a:pt x="5048257" y="3262987"/>
-                  </a:lnTo>
-                  <a:lnTo>
-                    <a:pt x="5125891" y="3276169"/>
-                  </a:lnTo>
-                  <a:lnTo>
-                    <a:pt x="5203525" y="3288905"/>
-                  </a:lnTo>
-                  <a:lnTo>
-                    <a:pt x="5281159" y="3301211"/>
-                  </a:lnTo>
-                  <a:lnTo>
-                    <a:pt x="5358793" y="3313100"/>
-                  </a:lnTo>
-                  <a:lnTo>
-                    <a:pt x="5436427" y="3324586"/>
-                  </a:lnTo>
-                  <a:lnTo>
-                    <a:pt x="5514061" y="3335685"/>
-                  </a:lnTo>
-                  <a:lnTo>
-                    <a:pt x="5591695" y="3346407"/>
-                  </a:lnTo>
-                  <a:lnTo>
-                    <a:pt x="5669329" y="3356767"/>
-                  </a:lnTo>
-                  <a:lnTo>
-                    <a:pt x="5746963" y="3366777"/>
-                  </a:lnTo>
-                  <a:lnTo>
-                    <a:pt x="5824597" y="3376448"/>
-                  </a:lnTo>
-                  <a:lnTo>
-                    <a:pt x="5902231" y="3385792"/>
-                  </a:lnTo>
-                  <a:lnTo>
-                    <a:pt x="5979865" y="3394819"/>
-                  </a:lnTo>
-                  <a:lnTo>
-                    <a:pt x="6057499" y="3403542"/>
-                  </a:lnTo>
-                  <a:lnTo>
-                    <a:pt x="6135134" y="3411969"/>
-                  </a:lnTo>
-                  <a:lnTo>
-                    <a:pt x="6212768" y="3420111"/>
-                  </a:lnTo>
-                  <a:lnTo>
-                    <a:pt x="6290402" y="3427977"/>
-                  </a:lnTo>
-                  <a:lnTo>
-                    <a:pt x="6368036" y="3435578"/>
-                  </a:lnTo>
-                  <a:lnTo>
-                    <a:pt x="6445670" y="3442921"/>
-                  </a:lnTo>
-                  <a:lnTo>
-                    <a:pt x="6523304" y="3450016"/>
-                  </a:lnTo>
-                  <a:lnTo>
-                    <a:pt x="6600938" y="3456871"/>
-                  </a:lnTo>
-                  <a:lnTo>
-                    <a:pt x="6678572" y="3463494"/>
-                  </a:lnTo>
-                  <a:lnTo>
-                    <a:pt x="6756206" y="3469893"/>
-                  </a:lnTo>
-                  <a:lnTo>
-                    <a:pt x="6833840" y="3476076"/>
-                  </a:lnTo>
-                  <a:lnTo>
-                    <a:pt x="6911474" y="3482049"/>
-                  </a:lnTo>
-                  <a:lnTo>
-                    <a:pt x="6989108" y="3487820"/>
-                  </a:lnTo>
-                  <a:lnTo>
-                    <a:pt x="7066742" y="3493396"/>
-                  </a:lnTo>
-                  <a:lnTo>
-                    <a:pt x="7144376" y="3498784"/>
-                  </a:lnTo>
-                  <a:lnTo>
-                    <a:pt x="7222010" y="3503989"/>
+                    <a:pt x="30488" y="49108"/>
+                  </a:lnTo>
+                  <a:lnTo>
+                    <a:pt x="108122" y="169963"/>
+                  </a:lnTo>
+                  <a:lnTo>
+                    <a:pt x="185756" y="286764"/>
+                  </a:lnTo>
+                  <a:lnTo>
+                    <a:pt x="263390" y="399648"/>
+                  </a:lnTo>
+                  <a:lnTo>
+                    <a:pt x="341024" y="508746"/>
+                  </a:lnTo>
+                  <a:lnTo>
+                    <a:pt x="418658" y="614185"/>
+                  </a:lnTo>
+                  <a:lnTo>
+                    <a:pt x="496292" y="716088"/>
+                  </a:lnTo>
+                  <a:lnTo>
+                    <a:pt x="573926" y="814573"/>
+                  </a:lnTo>
+                  <a:lnTo>
+                    <a:pt x="651560" y="909755"/>
+                  </a:lnTo>
+                  <a:lnTo>
+                    <a:pt x="729194" y="1001745"/>
+                  </a:lnTo>
+                  <a:lnTo>
+                    <a:pt x="806828" y="1090650"/>
+                  </a:lnTo>
+                  <a:lnTo>
+                    <a:pt x="884462" y="1176574"/>
+                  </a:lnTo>
+                  <a:lnTo>
+                    <a:pt x="962097" y="1259615"/>
+                  </a:lnTo>
+                  <a:lnTo>
+                    <a:pt x="1039731" y="1339872"/>
+                  </a:lnTo>
+                  <a:lnTo>
+                    <a:pt x="1117365" y="1417437"/>
+                  </a:lnTo>
+                  <a:lnTo>
+                    <a:pt x="1194999" y="1492401"/>
+                  </a:lnTo>
+                  <a:lnTo>
+                    <a:pt x="1272633" y="1564850"/>
+                  </a:lnTo>
+                  <a:lnTo>
+                    <a:pt x="1350267" y="1634870"/>
+                  </a:lnTo>
+                  <a:lnTo>
+                    <a:pt x="1427901" y="1702541"/>
+                  </a:lnTo>
+                  <a:lnTo>
+                    <a:pt x="1505535" y="1767943"/>
+                  </a:lnTo>
+                  <a:lnTo>
+                    <a:pt x="1583169" y="1831152"/>
+                  </a:lnTo>
+                  <a:lnTo>
+                    <a:pt x="1660803" y="1892240"/>
+                  </a:lnTo>
+                  <a:lnTo>
+                    <a:pt x="1738437" y="1951280"/>
+                  </a:lnTo>
+                  <a:lnTo>
+                    <a:pt x="1816071" y="2008340"/>
+                  </a:lnTo>
+                  <a:lnTo>
+                    <a:pt x="1893705" y="2063486"/>
+                  </a:lnTo>
+                  <a:lnTo>
+                    <a:pt x="1971339" y="2116783"/>
+                  </a:lnTo>
+                  <a:lnTo>
+                    <a:pt x="2048973" y="2168292"/>
+                  </a:lnTo>
+                  <a:lnTo>
+                    <a:pt x="2126607" y="2218074"/>
+                  </a:lnTo>
+                  <a:lnTo>
+                    <a:pt x="2204241" y="2266186"/>
+                  </a:lnTo>
+                  <a:lnTo>
+                    <a:pt x="2281875" y="2312685"/>
+                  </a:lnTo>
+                  <a:lnTo>
+                    <a:pt x="2359509" y="2357624"/>
+                  </a:lnTo>
+                  <a:lnTo>
+                    <a:pt x="2437143" y="2401056"/>
+                  </a:lnTo>
+                  <a:lnTo>
+                    <a:pt x="2514777" y="2443031"/>
+                  </a:lnTo>
+                  <a:lnTo>
+                    <a:pt x="2592411" y="2483599"/>
+                  </a:lnTo>
+                  <a:lnTo>
+                    <a:pt x="2670046" y="2522806"/>
+                  </a:lnTo>
+                  <a:lnTo>
+                    <a:pt x="2747680" y="2560698"/>
+                  </a:lnTo>
+                  <a:lnTo>
+                    <a:pt x="2825314" y="2597319"/>
+                  </a:lnTo>
+                  <a:lnTo>
+                    <a:pt x="2902948" y="2632712"/>
+                  </a:lnTo>
+                  <a:lnTo>
+                    <a:pt x="2980582" y="2666918"/>
+                  </a:lnTo>
+                  <a:lnTo>
+                    <a:pt x="3058216" y="2699977"/>
+                  </a:lnTo>
+                  <a:lnTo>
+                    <a:pt x="3135850" y="2731928"/>
+                  </a:lnTo>
+                  <a:lnTo>
+                    <a:pt x="3213484" y="2762806"/>
+                  </a:lnTo>
+                  <a:lnTo>
+                    <a:pt x="3291118" y="2792649"/>
+                  </a:lnTo>
+                  <a:lnTo>
+                    <a:pt x="3368752" y="2821492"/>
+                  </a:lnTo>
+                  <a:lnTo>
+                    <a:pt x="3446386" y="2849366"/>
+                  </a:lnTo>
+                  <a:lnTo>
+                    <a:pt x="3524020" y="2876306"/>
+                  </a:lnTo>
+                  <a:lnTo>
+                    <a:pt x="3601654" y="2902343"/>
+                  </a:lnTo>
+                  <a:lnTo>
+                    <a:pt x="3679288" y="2927506"/>
+                  </a:lnTo>
+                  <a:lnTo>
+                    <a:pt x="3756922" y="2951826"/>
+                  </a:lnTo>
+                  <a:lnTo>
+                    <a:pt x="3834556" y="2975330"/>
+                  </a:lnTo>
+                  <a:lnTo>
+                    <a:pt x="3912190" y="2998045"/>
+                  </a:lnTo>
+                  <a:lnTo>
+                    <a:pt x="3989824" y="3019999"/>
+                  </a:lnTo>
+                  <a:lnTo>
+                    <a:pt x="4067458" y="3041216"/>
+                  </a:lnTo>
+                  <a:lnTo>
+                    <a:pt x="4145092" y="3061722"/>
+                  </a:lnTo>
+                  <a:lnTo>
+                    <a:pt x="4222726" y="3081540"/>
+                  </a:lnTo>
+                  <a:lnTo>
+                    <a:pt x="4300360" y="3100694"/>
+                  </a:lnTo>
+                  <a:lnTo>
+                    <a:pt x="4377994" y="3119205"/>
+                  </a:lnTo>
+                  <a:lnTo>
+                    <a:pt x="4455629" y="3137095"/>
+                  </a:lnTo>
+                  <a:lnTo>
+                    <a:pt x="4533263" y="3154385"/>
+                  </a:lnTo>
+                  <a:lnTo>
+                    <a:pt x="4610897" y="3171096"/>
+                  </a:lnTo>
+                  <a:lnTo>
+                    <a:pt x="4688531" y="3187246"/>
+                  </a:lnTo>
+                  <a:lnTo>
+                    <a:pt x="4766165" y="3202854"/>
+                  </a:lnTo>
+                  <a:lnTo>
+                    <a:pt x="4843799" y="3217939"/>
+                  </a:lnTo>
+                  <a:lnTo>
+                    <a:pt x="4921433" y="3232518"/>
+                  </a:lnTo>
+                  <a:lnTo>
+                    <a:pt x="4999067" y="3246608"/>
+                  </a:lnTo>
+                  <a:lnTo>
+                    <a:pt x="5076701" y="3260226"/>
+                  </a:lnTo>
+                  <a:lnTo>
+                    <a:pt x="5154335" y="3273386"/>
+                  </a:lnTo>
+                  <a:lnTo>
+                    <a:pt x="5231969" y="3286106"/>
+                  </a:lnTo>
+                  <a:lnTo>
+                    <a:pt x="5309603" y="3298399"/>
+                  </a:lnTo>
+                  <a:lnTo>
+                    <a:pt x="5387237" y="3310279"/>
+                  </a:lnTo>
+                  <a:lnTo>
+                    <a:pt x="5464871" y="3321761"/>
+                  </a:lnTo>
+                  <a:lnTo>
+                    <a:pt x="5542505" y="3332858"/>
+                  </a:lnTo>
+                  <a:lnTo>
+                    <a:pt x="5620139" y="3343583"/>
+                  </a:lnTo>
+                  <a:lnTo>
+                    <a:pt x="5697773" y="3353948"/>
+                  </a:lnTo>
+                  <a:lnTo>
+                    <a:pt x="5775407" y="3363966"/>
+                  </a:lnTo>
+                  <a:lnTo>
+                    <a:pt x="5853041" y="3373647"/>
+                  </a:lnTo>
+                  <a:lnTo>
+                    <a:pt x="5930675" y="3383004"/>
+                  </a:lnTo>
+                  <a:lnTo>
+                    <a:pt x="6008309" y="3392047"/>
+                  </a:lnTo>
+                  <a:lnTo>
+                    <a:pt x="6085943" y="3400787"/>
+                  </a:lnTo>
+                  <a:lnTo>
+                    <a:pt x="6163578" y="3409234"/>
+                  </a:lnTo>
+                  <a:lnTo>
+                    <a:pt x="6241212" y="3417397"/>
+                  </a:lnTo>
+                  <a:lnTo>
+                    <a:pt x="6318846" y="3425287"/>
+                  </a:lnTo>
+                  <a:lnTo>
+                    <a:pt x="6396480" y="3432912"/>
+                  </a:lnTo>
+                  <a:lnTo>
+                    <a:pt x="6474114" y="3440281"/>
+                  </a:lnTo>
+                  <a:lnTo>
+                    <a:pt x="6551748" y="3447403"/>
+                  </a:lnTo>
+                  <a:lnTo>
+                    <a:pt x="6629382" y="3454287"/>
+                  </a:lnTo>
+                  <a:lnTo>
+                    <a:pt x="6707016" y="3460939"/>
+                  </a:lnTo>
+                  <a:lnTo>
+                    <a:pt x="6784650" y="3467368"/>
+                  </a:lnTo>
+                  <a:lnTo>
+                    <a:pt x="6862284" y="3473582"/>
+                  </a:lnTo>
+                  <a:lnTo>
+                    <a:pt x="6939918" y="3479587"/>
+                  </a:lnTo>
+                  <a:lnTo>
+                    <a:pt x="7017552" y="3485391"/>
+                  </a:lnTo>
+                  <a:lnTo>
+                    <a:pt x="7095186" y="3491000"/>
+                  </a:lnTo>
+                  <a:lnTo>
+                    <a:pt x="7172820" y="3496422"/>
+                  </a:lnTo>
+                  <a:lnTo>
+                    <a:pt x="7250454" y="3501661"/>
                   </a:lnTo>
                 </a:path>
               </a:pathLst>

--- a/docs/plots/carbo/jx_carbo_linsubhr_ratio_anyhosp.pptx
+++ b/docs/plots/carbo/jx_carbo_linsubhr_ratio_anyhosp.pptx
@@ -3271,7 +3271,7 @@
                     <a:pt x="6827534" y="3573635"/>
                   </a:lnTo>
                   <a:lnTo>
-                    <a:pt x="6749900" y="3569242"/>
+                    <a:pt x="6749900" y="3569243"/>
                   </a:lnTo>
                   <a:lnTo>
                     <a:pt x="6672266" y="3564605"/>
@@ -3662,7 +3662,7 @@
                     <a:pt x="2394750" y="2834512"/>
                   </a:lnTo>
                   <a:lnTo>
-                    <a:pt x="2472385" y="2845980"/>
+                    <a:pt x="2472384" y="2845980"/>
                   </a:lnTo>
                   <a:lnTo>
                     <a:pt x="2550019" y="2857288"/>
@@ -3728,7 +3728,7 @@
                     <a:pt x="4102699" y="3052926"/>
                   </a:lnTo>
                   <a:lnTo>
-                    <a:pt x="4180334" y="3061333"/>
+                    <a:pt x="4180333" y="3061333"/>
                   </a:lnTo>
                   <a:lnTo>
                     <a:pt x="4257968" y="3069621"/>
@@ -4162,7 +4162,7 @@
                     <a:pt x="418658" y="614185"/>
                   </a:lnTo>
                   <a:lnTo>
-                    <a:pt x="496292" y="716088"/>
+                    <a:pt x="496292" y="716087"/>
                   </a:lnTo>
                   <a:lnTo>
                     <a:pt x="573926" y="814573"/>
@@ -4180,7 +4180,7 @@
                     <a:pt x="884462" y="1176574"/>
                   </a:lnTo>
                   <a:lnTo>
-                    <a:pt x="962097" y="1259615"/>
+                    <a:pt x="962096" y="1259615"/>
                   </a:lnTo>
                   <a:lnTo>
                     <a:pt x="1039731" y="1339872"/>
@@ -4246,7 +4246,7 @@
                     <a:pt x="2592411" y="2483599"/>
                   </a:lnTo>
                   <a:lnTo>
-                    <a:pt x="2670046" y="2522806"/>
+                    <a:pt x="2670045" y="2522806"/>
                   </a:lnTo>
                   <a:lnTo>
                     <a:pt x="2747680" y="2560698"/>
@@ -4381,7 +4381,7 @@
                     <a:pt x="6085943" y="3400787"/>
                   </a:lnTo>
                   <a:lnTo>
-                    <a:pt x="6163578" y="3409234"/>
+                    <a:pt x="6163577" y="3409234"/>
                   </a:lnTo>
                   <a:lnTo>
                     <a:pt x="6241212" y="3417397"/>

--- a/docs/plots/carbo/jx_carbo_linsubhr_ratio_anyhosp.pptx
+++ b/docs/plots/carbo/jx_carbo_linsubhr_ratio_anyhosp.pptx
@@ -2271,7 +2271,7 @@
           </p:nvSpPr>
           <p:spPr>
             <a:xfrm>
-              <a:off x="817517" y="5114368"/>
+              <a:off x="817517" y="5142518"/>
               <a:ext cx="7799693" cy="0"/>
             </a:xfrm>
             <a:custGeom>
@@ -2314,7 +2314,7 @@
           </p:nvSpPr>
           <p:spPr>
             <a:xfrm>
-              <a:off x="817517" y="4244691"/>
+              <a:off x="817517" y="4313054"/>
               <a:ext cx="7799693" cy="0"/>
             </a:xfrm>
             <a:custGeom>
@@ -2357,7 +2357,7 @@
           </p:nvSpPr>
           <p:spPr>
             <a:xfrm>
-              <a:off x="817517" y="3375014"/>
+              <a:off x="817517" y="3483591"/>
               <a:ext cx="7799693" cy="0"/>
             </a:xfrm>
             <a:custGeom>
@@ -2400,7 +2400,7 @@
           </p:nvSpPr>
           <p:spPr>
             <a:xfrm>
-              <a:off x="817517" y="2505337"/>
+              <a:off x="817517" y="2654127"/>
               <a:ext cx="7799693" cy="0"/>
             </a:xfrm>
             <a:custGeom>
@@ -2443,15 +2443,15 @@
           </p:nvSpPr>
           <p:spPr>
             <a:xfrm>
-              <a:off x="1615213" y="1896563"/>
-              <a:ext cx="0" cy="3826579"/>
+              <a:off x="1615213" y="2073503"/>
+              <a:ext cx="0" cy="3649639"/>
             </a:xfrm>
             <a:custGeom>
               <a:avLst/>
               <a:pathLst>
-                <a:path w="0" h="3826579">
+                <a:path w="0" h="3649639">
                   <a:moveTo>
-                    <a:pt x="0" y="3826579"/>
+                    <a:pt x="0" y="3649639"/>
                   </a:moveTo>
                   <a:lnTo>
                     <a:pt x="0" y="0"/>
@@ -2486,15 +2486,15 @@
           </p:nvSpPr>
           <p:spPr>
             <a:xfrm>
-              <a:off x="3387871" y="1896563"/>
-              <a:ext cx="0" cy="3826579"/>
+              <a:off x="3387871" y="2073503"/>
+              <a:ext cx="0" cy="3649639"/>
             </a:xfrm>
             <a:custGeom>
               <a:avLst/>
               <a:pathLst>
-                <a:path w="0" h="3826579">
+                <a:path w="0" h="3649639">
                   <a:moveTo>
-                    <a:pt x="0" y="3826579"/>
+                    <a:pt x="0" y="3649639"/>
                   </a:moveTo>
                   <a:lnTo>
                     <a:pt x="0" y="0"/>
@@ -2529,15 +2529,15 @@
           </p:nvSpPr>
           <p:spPr>
             <a:xfrm>
-              <a:off x="5160528" y="1896563"/>
-              <a:ext cx="0" cy="3826579"/>
+              <a:off x="5160528" y="2073503"/>
+              <a:ext cx="0" cy="3649639"/>
             </a:xfrm>
             <a:custGeom>
               <a:avLst/>
               <a:pathLst>
-                <a:path w="0" h="3826579">
+                <a:path w="0" h="3649639">
                   <a:moveTo>
-                    <a:pt x="0" y="3826579"/>
+                    <a:pt x="0" y="3649639"/>
                   </a:moveTo>
                   <a:lnTo>
                     <a:pt x="0" y="0"/>
@@ -2572,15 +2572,15 @@
           </p:nvSpPr>
           <p:spPr>
             <a:xfrm>
-              <a:off x="6933186" y="1896563"/>
-              <a:ext cx="0" cy="3826579"/>
+              <a:off x="6933186" y="2073503"/>
+              <a:ext cx="0" cy="3649639"/>
             </a:xfrm>
             <a:custGeom>
               <a:avLst/>
               <a:pathLst>
-                <a:path w="0" h="3826579">
+                <a:path w="0" h="3649639">
                   <a:moveTo>
-                    <a:pt x="0" y="3826579"/>
+                    <a:pt x="0" y="3649639"/>
                   </a:moveTo>
                   <a:lnTo>
                     <a:pt x="0" y="0"/>
@@ -2615,7 +2615,7 @@
           </p:nvSpPr>
           <p:spPr>
             <a:xfrm>
-              <a:off x="817517" y="5549207"/>
+              <a:off x="817517" y="5557249"/>
               <a:ext cx="7799693" cy="0"/>
             </a:xfrm>
             <a:custGeom>
@@ -2658,7 +2658,7 @@
           </p:nvSpPr>
           <p:spPr>
             <a:xfrm>
-              <a:off x="817517" y="4679530"/>
+              <a:off x="817517" y="4727786"/>
               <a:ext cx="7799693" cy="0"/>
             </a:xfrm>
             <a:custGeom>
@@ -2701,7 +2701,7 @@
           </p:nvSpPr>
           <p:spPr>
             <a:xfrm>
-              <a:off x="817517" y="3809853"/>
+              <a:off x="817517" y="3898322"/>
               <a:ext cx="7799693" cy="0"/>
             </a:xfrm>
             <a:custGeom>
@@ -2744,7 +2744,7 @@
           </p:nvSpPr>
           <p:spPr>
             <a:xfrm>
-              <a:off x="817517" y="2940175"/>
+              <a:off x="817517" y="3068859"/>
               <a:ext cx="7799693" cy="0"/>
             </a:xfrm>
             <a:custGeom>
@@ -2787,7 +2787,7 @@
           </p:nvSpPr>
           <p:spPr>
             <a:xfrm>
-              <a:off x="817517" y="2070498"/>
+              <a:off x="817517" y="2239395"/>
               <a:ext cx="7799693" cy="0"/>
             </a:xfrm>
             <a:custGeom>
@@ -2830,15 +2830,15 @@
           </p:nvSpPr>
           <p:spPr>
             <a:xfrm>
-              <a:off x="2501542" y="1896563"/>
-              <a:ext cx="0" cy="3826579"/>
+              <a:off x="2501542" y="2073503"/>
+              <a:ext cx="0" cy="3649639"/>
             </a:xfrm>
             <a:custGeom>
               <a:avLst/>
               <a:pathLst>
-                <a:path w="0" h="3826579">
+                <a:path w="0" h="3649639">
                   <a:moveTo>
-                    <a:pt x="0" y="3826579"/>
+                    <a:pt x="0" y="3649639"/>
                   </a:moveTo>
                   <a:lnTo>
                     <a:pt x="0" y="0"/>
@@ -2873,15 +2873,15 @@
           </p:nvSpPr>
           <p:spPr>
             <a:xfrm>
-              <a:off x="4274200" y="1896563"/>
-              <a:ext cx="0" cy="3826579"/>
+              <a:off x="4274200" y="2073503"/>
+              <a:ext cx="0" cy="3649639"/>
             </a:xfrm>
             <a:custGeom>
               <a:avLst/>
               <a:pathLst>
-                <a:path w="0" h="3826579">
+                <a:path w="0" h="3649639">
                   <a:moveTo>
-                    <a:pt x="0" y="3826579"/>
+                    <a:pt x="0" y="3649639"/>
                   </a:moveTo>
                   <a:lnTo>
                     <a:pt x="0" y="0"/>
@@ -2916,15 +2916,15 @@
           </p:nvSpPr>
           <p:spPr>
             <a:xfrm>
-              <a:off x="6046857" y="1896563"/>
-              <a:ext cx="0" cy="3826579"/>
+              <a:off x="6046857" y="2073503"/>
+              <a:ext cx="0" cy="3649639"/>
             </a:xfrm>
             <a:custGeom>
               <a:avLst/>
               <a:pathLst>
-                <a:path w="0" h="3826579">
+                <a:path w="0" h="3649639">
                   <a:moveTo>
-                    <a:pt x="0" y="3826579"/>
+                    <a:pt x="0" y="3649639"/>
                   </a:moveTo>
                   <a:lnTo>
                     <a:pt x="0" y="0"/>
@@ -2959,15 +2959,15 @@
           </p:nvSpPr>
           <p:spPr>
             <a:xfrm>
-              <a:off x="7819515" y="1896563"/>
-              <a:ext cx="0" cy="3826579"/>
+              <a:off x="7819515" y="2073503"/>
+              <a:ext cx="0" cy="3649639"/>
             </a:xfrm>
             <a:custGeom>
               <a:avLst/>
               <a:pathLst>
-                <a:path w="0" h="3826579">
+                <a:path w="0" h="3649639">
                   <a:moveTo>
-                    <a:pt x="0" y="3826579"/>
+                    <a:pt x="0" y="3649639"/>
                   </a:moveTo>
                   <a:lnTo>
                     <a:pt x="0" y="0"/>
@@ -3002,537 +3002,537 @@
           </p:nvSpPr>
           <p:spPr>
             <a:xfrm>
-              <a:off x="817517" y="1896563"/>
-              <a:ext cx="7370972" cy="3598546"/>
+              <a:off x="817517" y="2073503"/>
+              <a:ext cx="7370972" cy="3432151"/>
             </a:xfrm>
             <a:custGeom>
               <a:avLst/>
               <a:pathLst>
-                <a:path w="7370972" h="3598546">
+                <a:path w="7370972" h="3432151">
                   <a:moveTo>
                     <a:pt x="1327421" y="0"/>
                   </a:moveTo>
                   <a:lnTo>
-                    <a:pt x="1393151" y="164215"/>
-                  </a:lnTo>
-                  <a:lnTo>
-                    <a:pt x="1470785" y="347956"/>
-                  </a:lnTo>
-                  <a:lnTo>
-                    <a:pt x="1548419" y="522019"/>
-                  </a:lnTo>
-                  <a:lnTo>
-                    <a:pt x="1626053" y="686914"/>
-                  </a:lnTo>
-                  <a:lnTo>
-                    <a:pt x="1703687" y="843123"/>
-                  </a:lnTo>
-                  <a:lnTo>
-                    <a:pt x="1781321" y="991105"/>
-                  </a:lnTo>
-                  <a:lnTo>
-                    <a:pt x="1858955" y="1131292"/>
-                  </a:lnTo>
-                  <a:lnTo>
-                    <a:pt x="1936589" y="1264096"/>
-                  </a:lnTo>
-                  <a:lnTo>
-                    <a:pt x="2014223" y="1389904"/>
-                  </a:lnTo>
-                  <a:lnTo>
-                    <a:pt x="2091857" y="1509086"/>
-                  </a:lnTo>
-                  <a:lnTo>
-                    <a:pt x="2169491" y="1621991"/>
-                  </a:lnTo>
-                  <a:lnTo>
-                    <a:pt x="2247125" y="1728948"/>
-                  </a:lnTo>
-                  <a:lnTo>
-                    <a:pt x="2324759" y="1830272"/>
-                  </a:lnTo>
-                  <a:lnTo>
-                    <a:pt x="2402393" y="1926259"/>
-                  </a:lnTo>
-                  <a:lnTo>
-                    <a:pt x="2480027" y="2017191"/>
-                  </a:lnTo>
-                  <a:lnTo>
-                    <a:pt x="2557661" y="2103332"/>
-                  </a:lnTo>
-                  <a:lnTo>
-                    <a:pt x="2635295" y="2184937"/>
-                  </a:lnTo>
-                  <a:lnTo>
-                    <a:pt x="2712930" y="2262243"/>
-                  </a:lnTo>
-                  <a:lnTo>
-                    <a:pt x="2790564" y="2335478"/>
-                  </a:lnTo>
-                  <a:lnTo>
-                    <a:pt x="2868198" y="2404855"/>
-                  </a:lnTo>
-                  <a:lnTo>
-                    <a:pt x="2945832" y="2470578"/>
-                  </a:lnTo>
-                  <a:lnTo>
-                    <a:pt x="3023466" y="2532839"/>
-                  </a:lnTo>
-                  <a:lnTo>
-                    <a:pt x="3101100" y="2591821"/>
-                  </a:lnTo>
-                  <a:lnTo>
-                    <a:pt x="3178734" y="2647696"/>
-                  </a:lnTo>
-                  <a:lnTo>
-                    <a:pt x="3256368" y="2700628"/>
-                  </a:lnTo>
-                  <a:lnTo>
-                    <a:pt x="3334002" y="2750772"/>
-                  </a:lnTo>
-                  <a:lnTo>
-                    <a:pt x="3411636" y="2786986"/>
-                  </a:lnTo>
-                  <a:lnTo>
-                    <a:pt x="3489270" y="2799121"/>
-                  </a:lnTo>
-                  <a:lnTo>
-                    <a:pt x="3566904" y="2811085"/>
-                  </a:lnTo>
-                  <a:lnTo>
-                    <a:pt x="3644538" y="2822881"/>
-                  </a:lnTo>
-                  <a:lnTo>
-                    <a:pt x="3722172" y="2834512"/>
-                  </a:lnTo>
-                  <a:lnTo>
-                    <a:pt x="3799806" y="2845980"/>
-                  </a:lnTo>
-                  <a:lnTo>
-                    <a:pt x="3877440" y="2857288"/>
-                  </a:lnTo>
-                  <a:lnTo>
-                    <a:pt x="3955074" y="2868437"/>
-                  </a:lnTo>
-                  <a:lnTo>
-                    <a:pt x="4032708" y="2879429"/>
-                  </a:lnTo>
-                  <a:lnTo>
-                    <a:pt x="4110342" y="2890268"/>
-                  </a:lnTo>
-                  <a:lnTo>
-                    <a:pt x="4187976" y="2900954"/>
-                  </a:lnTo>
-                  <a:lnTo>
-                    <a:pt x="4265610" y="2911491"/>
-                  </a:lnTo>
-                  <a:lnTo>
-                    <a:pt x="4343244" y="2921880"/>
-                  </a:lnTo>
-                  <a:lnTo>
-                    <a:pt x="4420879" y="2932123"/>
-                  </a:lnTo>
-                  <a:lnTo>
-                    <a:pt x="4498513" y="2942223"/>
-                  </a:lnTo>
-                  <a:lnTo>
-                    <a:pt x="4576147" y="2952181"/>
-                  </a:lnTo>
-                  <a:lnTo>
-                    <a:pt x="4653781" y="2962000"/>
-                  </a:lnTo>
-                  <a:lnTo>
-                    <a:pt x="4731415" y="2971681"/>
-                  </a:lnTo>
-                  <a:lnTo>
-                    <a:pt x="4809049" y="2981226"/>
-                  </a:lnTo>
-                  <a:lnTo>
-                    <a:pt x="4886683" y="2990638"/>
-                  </a:lnTo>
-                  <a:lnTo>
-                    <a:pt x="4964317" y="2999917"/>
-                  </a:lnTo>
-                  <a:lnTo>
-                    <a:pt x="5041951" y="3009067"/>
-                  </a:lnTo>
-                  <a:lnTo>
-                    <a:pt x="5119585" y="3018088"/>
-                  </a:lnTo>
-                  <a:lnTo>
-                    <a:pt x="5197219" y="3026983"/>
-                  </a:lnTo>
-                  <a:lnTo>
-                    <a:pt x="5274853" y="3035753"/>
-                  </a:lnTo>
-                  <a:lnTo>
-                    <a:pt x="5352487" y="3044400"/>
-                  </a:lnTo>
-                  <a:lnTo>
-                    <a:pt x="5430121" y="3052926"/>
-                  </a:lnTo>
-                  <a:lnTo>
-                    <a:pt x="5507755" y="3061333"/>
-                  </a:lnTo>
-                  <a:lnTo>
-                    <a:pt x="5585389" y="3069621"/>
-                  </a:lnTo>
-                  <a:lnTo>
-                    <a:pt x="5663023" y="3077794"/>
-                  </a:lnTo>
-                  <a:lnTo>
-                    <a:pt x="5740657" y="3085852"/>
-                  </a:lnTo>
-                  <a:lnTo>
-                    <a:pt x="5818291" y="3093797"/>
-                  </a:lnTo>
-                  <a:lnTo>
-                    <a:pt x="5895925" y="3101630"/>
-                  </a:lnTo>
-                  <a:lnTo>
-                    <a:pt x="5973559" y="3109354"/>
-                  </a:lnTo>
-                  <a:lnTo>
-                    <a:pt x="6051193" y="3116969"/>
-                  </a:lnTo>
-                  <a:lnTo>
-                    <a:pt x="6128827" y="3124478"/>
-                  </a:lnTo>
-                  <a:lnTo>
-                    <a:pt x="6206462" y="3131882"/>
-                  </a:lnTo>
-                  <a:lnTo>
-                    <a:pt x="6284096" y="3139181"/>
-                  </a:lnTo>
-                  <a:lnTo>
-                    <a:pt x="6361730" y="3146379"/>
-                  </a:lnTo>
-                  <a:lnTo>
-                    <a:pt x="6439364" y="3153475"/>
-                  </a:lnTo>
-                  <a:lnTo>
-                    <a:pt x="6516998" y="3160472"/>
-                  </a:lnTo>
-                  <a:lnTo>
-                    <a:pt x="6594632" y="3167371"/>
-                  </a:lnTo>
-                  <a:lnTo>
-                    <a:pt x="6672266" y="3174173"/>
-                  </a:lnTo>
-                  <a:lnTo>
-                    <a:pt x="6749900" y="3180880"/>
-                  </a:lnTo>
-                  <a:lnTo>
-                    <a:pt x="6827534" y="3187493"/>
-                  </a:lnTo>
-                  <a:lnTo>
-                    <a:pt x="6905168" y="3194013"/>
-                  </a:lnTo>
-                  <a:lnTo>
-                    <a:pt x="6982802" y="3200442"/>
-                  </a:lnTo>
-                  <a:lnTo>
-                    <a:pt x="7060436" y="3206781"/>
-                  </a:lnTo>
-                  <a:lnTo>
-                    <a:pt x="7138070" y="3213031"/>
-                  </a:lnTo>
-                  <a:lnTo>
-                    <a:pt x="7215704" y="3219193"/>
-                  </a:lnTo>
-                  <a:lnTo>
-                    <a:pt x="7293338" y="3225269"/>
-                  </a:lnTo>
-                  <a:lnTo>
-                    <a:pt x="7370972" y="3231259"/>
-                  </a:lnTo>
-                  <a:lnTo>
-                    <a:pt x="7370972" y="3598546"/>
-                  </a:lnTo>
-                  <a:lnTo>
-                    <a:pt x="7293338" y="3595538"/>
-                  </a:lnTo>
-                  <a:lnTo>
-                    <a:pt x="7215704" y="3592363"/>
-                  </a:lnTo>
-                  <a:lnTo>
-                    <a:pt x="7138070" y="3589012"/>
-                  </a:lnTo>
-                  <a:lnTo>
-                    <a:pt x="7060436" y="3585474"/>
-                  </a:lnTo>
-                  <a:lnTo>
-                    <a:pt x="6982802" y="3581739"/>
-                  </a:lnTo>
-                  <a:lnTo>
-                    <a:pt x="6905168" y="3577797"/>
-                  </a:lnTo>
-                  <a:lnTo>
-                    <a:pt x="6827534" y="3573635"/>
-                  </a:lnTo>
-                  <a:lnTo>
-                    <a:pt x="6749900" y="3569243"/>
-                  </a:lnTo>
-                  <a:lnTo>
-                    <a:pt x="6672266" y="3564605"/>
-                  </a:lnTo>
-                  <a:lnTo>
-                    <a:pt x="6594632" y="3559710"/>
-                  </a:lnTo>
-                  <a:lnTo>
-                    <a:pt x="6516998" y="3554543"/>
-                  </a:lnTo>
-                  <a:lnTo>
-                    <a:pt x="6439364" y="3549089"/>
-                  </a:lnTo>
-                  <a:lnTo>
-                    <a:pt x="6361730" y="3543331"/>
-                  </a:lnTo>
-                  <a:lnTo>
-                    <a:pt x="6284096" y="3537254"/>
-                  </a:lnTo>
-                  <a:lnTo>
-                    <a:pt x="6206462" y="3530838"/>
-                  </a:lnTo>
-                  <a:lnTo>
-                    <a:pt x="6128827" y="3524066"/>
-                  </a:lnTo>
-                  <a:lnTo>
-                    <a:pt x="6051193" y="3516917"/>
-                  </a:lnTo>
-                  <a:lnTo>
-                    <a:pt x="5973559" y="3509370"/>
-                  </a:lnTo>
-                  <a:lnTo>
-                    <a:pt x="5895925" y="3501404"/>
-                  </a:lnTo>
-                  <a:lnTo>
-                    <a:pt x="5818291" y="3492995"/>
-                  </a:lnTo>
-                  <a:lnTo>
-                    <a:pt x="5740657" y="3484119"/>
-                  </a:lnTo>
-                  <a:lnTo>
-                    <a:pt x="5663023" y="3474749"/>
-                  </a:lnTo>
-                  <a:lnTo>
-                    <a:pt x="5585389" y="3464858"/>
-                  </a:lnTo>
-                  <a:lnTo>
-                    <a:pt x="5507755" y="3454417"/>
-                  </a:lnTo>
-                  <a:lnTo>
-                    <a:pt x="5430121" y="3443396"/>
-                  </a:lnTo>
-                  <a:lnTo>
-                    <a:pt x="5352487" y="3431762"/>
-                  </a:lnTo>
-                  <a:lnTo>
-                    <a:pt x="5274853" y="3419481"/>
-                  </a:lnTo>
-                  <a:lnTo>
-                    <a:pt x="5197219" y="3406517"/>
-                  </a:lnTo>
-                  <a:lnTo>
-                    <a:pt x="5119585" y="3392832"/>
-                  </a:lnTo>
-                  <a:lnTo>
-                    <a:pt x="5041951" y="3378387"/>
-                  </a:lnTo>
-                  <a:lnTo>
-                    <a:pt x="4964317" y="3363138"/>
-                  </a:lnTo>
-                  <a:lnTo>
-                    <a:pt x="4886683" y="3347041"/>
-                  </a:lnTo>
-                  <a:lnTo>
-                    <a:pt x="4809049" y="3330050"/>
-                  </a:lnTo>
-                  <a:lnTo>
-                    <a:pt x="4731415" y="3312114"/>
-                  </a:lnTo>
-                  <a:lnTo>
-                    <a:pt x="4653781" y="3293180"/>
-                  </a:lnTo>
-                  <a:lnTo>
-                    <a:pt x="4576147" y="3273194"/>
-                  </a:lnTo>
-                  <a:lnTo>
-                    <a:pt x="4498513" y="3252097"/>
-                  </a:lnTo>
-                  <a:lnTo>
-                    <a:pt x="4420879" y="3229826"/>
-                  </a:lnTo>
-                  <a:lnTo>
-                    <a:pt x="4343244" y="3206317"/>
-                  </a:lnTo>
-                  <a:lnTo>
-                    <a:pt x="4265610" y="3181502"/>
-                  </a:lnTo>
-                  <a:lnTo>
-                    <a:pt x="4187976" y="3155306"/>
-                  </a:lnTo>
-                  <a:lnTo>
-                    <a:pt x="4110342" y="3127654"/>
-                  </a:lnTo>
-                  <a:lnTo>
-                    <a:pt x="4032708" y="3098465"/>
-                  </a:lnTo>
-                  <a:lnTo>
-                    <a:pt x="3955074" y="3067652"/>
-                  </a:lnTo>
-                  <a:lnTo>
-                    <a:pt x="3877440" y="3035127"/>
-                  </a:lnTo>
-                  <a:lnTo>
-                    <a:pt x="3799806" y="3000793"/>
-                  </a:lnTo>
-                  <a:lnTo>
-                    <a:pt x="3722172" y="2964550"/>
-                  </a:lnTo>
-                  <a:lnTo>
-                    <a:pt x="3644538" y="2926292"/>
-                  </a:lnTo>
-                  <a:lnTo>
-                    <a:pt x="3566904" y="2885907"/>
-                  </a:lnTo>
-                  <a:lnTo>
-                    <a:pt x="3489270" y="2843276"/>
-                  </a:lnTo>
-                  <a:lnTo>
-                    <a:pt x="3411636" y="2798275"/>
-                  </a:lnTo>
-                  <a:lnTo>
-                    <a:pt x="3334002" y="2774680"/>
-                  </a:lnTo>
-                  <a:lnTo>
-                    <a:pt x="3256368" y="2762198"/>
-                  </a:lnTo>
-                  <a:lnTo>
-                    <a:pt x="3178734" y="2749539"/>
-                  </a:lnTo>
-                  <a:lnTo>
-                    <a:pt x="3101100" y="2736700"/>
-                  </a:lnTo>
-                  <a:lnTo>
-                    <a:pt x="3023466" y="2723678"/>
-                  </a:lnTo>
-                  <a:lnTo>
-                    <a:pt x="2945832" y="2710471"/>
-                  </a:lnTo>
-                  <a:lnTo>
-                    <a:pt x="2868198" y="2697077"/>
-                  </a:lnTo>
-                  <a:lnTo>
-                    <a:pt x="2790564" y="2683492"/>
-                  </a:lnTo>
-                  <a:lnTo>
-                    <a:pt x="2712930" y="2669714"/>
-                  </a:lnTo>
-                  <a:lnTo>
-                    <a:pt x="2635295" y="2655740"/>
-                  </a:lnTo>
-                  <a:lnTo>
-                    <a:pt x="2557661" y="2641567"/>
-                  </a:lnTo>
-                  <a:lnTo>
-                    <a:pt x="2480027" y="2627193"/>
-                  </a:lnTo>
-                  <a:lnTo>
-                    <a:pt x="2402393" y="2612614"/>
-                  </a:lnTo>
-                  <a:lnTo>
-                    <a:pt x="2324759" y="2597829"/>
-                  </a:lnTo>
-                  <a:lnTo>
-                    <a:pt x="2247125" y="2582833"/>
-                  </a:lnTo>
-                  <a:lnTo>
-                    <a:pt x="2169491" y="2567623"/>
-                  </a:lnTo>
-                  <a:lnTo>
-                    <a:pt x="2091857" y="2552198"/>
-                  </a:lnTo>
-                  <a:lnTo>
-                    <a:pt x="2014223" y="2536553"/>
-                  </a:lnTo>
-                  <a:lnTo>
-                    <a:pt x="1936589" y="2520686"/>
-                  </a:lnTo>
-                  <a:lnTo>
-                    <a:pt x="1858955" y="2504594"/>
-                  </a:lnTo>
-                  <a:lnTo>
-                    <a:pt x="1781321" y="2488272"/>
-                  </a:lnTo>
-                  <a:lnTo>
-                    <a:pt x="1703687" y="2471719"/>
-                  </a:lnTo>
-                  <a:lnTo>
-                    <a:pt x="1626053" y="2454930"/>
-                  </a:lnTo>
-                  <a:lnTo>
-                    <a:pt x="1548419" y="2437902"/>
-                  </a:lnTo>
-                  <a:lnTo>
-                    <a:pt x="1470785" y="2420633"/>
-                  </a:lnTo>
-                  <a:lnTo>
-                    <a:pt x="1393151" y="2403118"/>
-                  </a:lnTo>
-                  <a:lnTo>
-                    <a:pt x="1315517" y="2385354"/>
-                  </a:lnTo>
-                  <a:lnTo>
-                    <a:pt x="1237883" y="2367337"/>
-                  </a:lnTo>
-                  <a:lnTo>
-                    <a:pt x="1160249" y="2349064"/>
-                  </a:lnTo>
-                  <a:lnTo>
-                    <a:pt x="1082615" y="2330532"/>
-                  </a:lnTo>
-                  <a:lnTo>
-                    <a:pt x="1004981" y="2311736"/>
-                  </a:lnTo>
-                  <a:lnTo>
-                    <a:pt x="927346" y="2292672"/>
-                  </a:lnTo>
-                  <a:lnTo>
-                    <a:pt x="849712" y="2273338"/>
-                  </a:lnTo>
-                  <a:lnTo>
-                    <a:pt x="772078" y="2253729"/>
-                  </a:lnTo>
-                  <a:lnTo>
-                    <a:pt x="694444" y="2233841"/>
-                  </a:lnTo>
-                  <a:lnTo>
-                    <a:pt x="616810" y="2213671"/>
-                  </a:lnTo>
-                  <a:lnTo>
-                    <a:pt x="539176" y="2193213"/>
-                  </a:lnTo>
-                  <a:lnTo>
-                    <a:pt x="461542" y="2172465"/>
-                  </a:lnTo>
-                  <a:lnTo>
-                    <a:pt x="383908" y="2151422"/>
-                  </a:lnTo>
-                  <a:lnTo>
-                    <a:pt x="306274" y="2130079"/>
-                  </a:lnTo>
-                  <a:lnTo>
-                    <a:pt x="228640" y="2108434"/>
-                  </a:lnTo>
-                  <a:lnTo>
-                    <a:pt x="151006" y="2086480"/>
-                  </a:lnTo>
-                  <a:lnTo>
-                    <a:pt x="73372" y="2064214"/>
-                  </a:lnTo>
-                  <a:lnTo>
-                    <a:pt x="0" y="2042872"/>
+                    <a:pt x="1393151" y="156622"/>
+                  </a:lnTo>
+                  <a:lnTo>
+                    <a:pt x="1470785" y="331866"/>
+                  </a:lnTo>
+                  <a:lnTo>
+                    <a:pt x="1548419" y="497881"/>
+                  </a:lnTo>
+                  <a:lnTo>
+                    <a:pt x="1626053" y="655151"/>
+                  </a:lnTo>
+                  <a:lnTo>
+                    <a:pt x="1703687" y="804137"/>
+                  </a:lnTo>
+                  <a:lnTo>
+                    <a:pt x="1781321" y="945277"/>
+                  </a:lnTo>
+                  <a:lnTo>
+                    <a:pt x="1858955" y="1078982"/>
+                  </a:lnTo>
+                  <a:lnTo>
+                    <a:pt x="1936589" y="1205644"/>
+                  </a:lnTo>
+                  <a:lnTo>
+                    <a:pt x="2014223" y="1325635"/>
+                  </a:lnTo>
+                  <a:lnTo>
+                    <a:pt x="2091857" y="1439306"/>
+                  </a:lnTo>
+                  <a:lnTo>
+                    <a:pt x="2169491" y="1546990"/>
+                  </a:lnTo>
+                  <a:lnTo>
+                    <a:pt x="2247125" y="1649002"/>
+                  </a:lnTo>
+                  <a:lnTo>
+                    <a:pt x="2324759" y="1745641"/>
+                  </a:lnTo>
+                  <a:lnTo>
+                    <a:pt x="2402393" y="1837190"/>
+                  </a:lnTo>
+                  <a:lnTo>
+                    <a:pt x="2480027" y="1923916"/>
+                  </a:lnTo>
+                  <a:lnTo>
+                    <a:pt x="2557661" y="2006075"/>
+                  </a:lnTo>
+                  <a:lnTo>
+                    <a:pt x="2635295" y="2083906"/>
+                  </a:lnTo>
+                  <a:lnTo>
+                    <a:pt x="2712930" y="2157638"/>
+                  </a:lnTo>
+                  <a:lnTo>
+                    <a:pt x="2790564" y="2227486"/>
+                  </a:lnTo>
+                  <a:lnTo>
+                    <a:pt x="2868198" y="2293655"/>
+                  </a:lnTo>
+                  <a:lnTo>
+                    <a:pt x="2945832" y="2356339"/>
+                  </a:lnTo>
+                  <a:lnTo>
+                    <a:pt x="3023466" y="2415722"/>
+                  </a:lnTo>
+                  <a:lnTo>
+                    <a:pt x="3101100" y="2471976"/>
+                  </a:lnTo>
+                  <a:lnTo>
+                    <a:pt x="3178734" y="2525268"/>
+                  </a:lnTo>
+                  <a:lnTo>
+                    <a:pt x="3256368" y="2575752"/>
+                  </a:lnTo>
+                  <a:lnTo>
+                    <a:pt x="3334002" y="2623578"/>
+                  </a:lnTo>
+                  <a:lnTo>
+                    <a:pt x="3411636" y="2658117"/>
+                  </a:lnTo>
+                  <a:lnTo>
+                    <a:pt x="3489270" y="2669690"/>
+                  </a:lnTo>
+                  <a:lnTo>
+                    <a:pt x="3566904" y="2681101"/>
+                  </a:lnTo>
+                  <a:lnTo>
+                    <a:pt x="3644538" y="2692352"/>
+                  </a:lnTo>
+                  <a:lnTo>
+                    <a:pt x="3722172" y="2703446"/>
+                  </a:lnTo>
+                  <a:lnTo>
+                    <a:pt x="3799806" y="2714383"/>
+                  </a:lnTo>
+                  <a:lnTo>
+                    <a:pt x="3877440" y="2725168"/>
+                  </a:lnTo>
+                  <a:lnTo>
+                    <a:pt x="3955074" y="2735801"/>
+                  </a:lnTo>
+                  <a:lnTo>
+                    <a:pt x="4032708" y="2746285"/>
+                  </a:lnTo>
+                  <a:lnTo>
+                    <a:pt x="4110342" y="2756623"/>
+                  </a:lnTo>
+                  <a:lnTo>
+                    <a:pt x="4187976" y="2766815"/>
+                  </a:lnTo>
+                  <a:lnTo>
+                    <a:pt x="4265610" y="2776864"/>
+                  </a:lnTo>
+                  <a:lnTo>
+                    <a:pt x="4343244" y="2786773"/>
+                  </a:lnTo>
+                  <a:lnTo>
+                    <a:pt x="4420879" y="2796543"/>
+                  </a:lnTo>
+                  <a:lnTo>
+                    <a:pt x="4498513" y="2806176"/>
+                  </a:lnTo>
+                  <a:lnTo>
+                    <a:pt x="4576147" y="2815673"/>
+                  </a:lnTo>
+                  <a:lnTo>
+                    <a:pt x="4653781" y="2825038"/>
+                  </a:lnTo>
+                  <a:lnTo>
+                    <a:pt x="4731415" y="2834271"/>
+                  </a:lnTo>
+                  <a:lnTo>
+                    <a:pt x="4809049" y="2843375"/>
+                  </a:lnTo>
+                  <a:lnTo>
+                    <a:pt x="4886683" y="2852352"/>
+                  </a:lnTo>
+                  <a:lnTo>
+                    <a:pt x="4964317" y="2861202"/>
+                  </a:lnTo>
+                  <a:lnTo>
+                    <a:pt x="5041951" y="2869929"/>
+                  </a:lnTo>
+                  <a:lnTo>
+                    <a:pt x="5119585" y="2878533"/>
+                  </a:lnTo>
+                  <a:lnTo>
+                    <a:pt x="5197219" y="2887016"/>
+                  </a:lnTo>
+                  <a:lnTo>
+                    <a:pt x="5274853" y="2895381"/>
+                  </a:lnTo>
+                  <a:lnTo>
+                    <a:pt x="5352487" y="2903628"/>
+                  </a:lnTo>
+                  <a:lnTo>
+                    <a:pt x="5430121" y="2911760"/>
+                  </a:lnTo>
+                  <a:lnTo>
+                    <a:pt x="5507755" y="2919778"/>
+                  </a:lnTo>
+                  <a:lnTo>
+                    <a:pt x="5585389" y="2927683"/>
+                  </a:lnTo>
+                  <a:lnTo>
+                    <a:pt x="5663023" y="2935478"/>
+                  </a:lnTo>
+                  <a:lnTo>
+                    <a:pt x="5740657" y="2943163"/>
+                  </a:lnTo>
+                  <a:lnTo>
+                    <a:pt x="5818291" y="2950741"/>
+                  </a:lnTo>
+                  <a:lnTo>
+                    <a:pt x="5895925" y="2958212"/>
+                  </a:lnTo>
+                  <a:lnTo>
+                    <a:pt x="5973559" y="2965578"/>
+                  </a:lnTo>
+                  <a:lnTo>
+                    <a:pt x="6051193" y="2972842"/>
+                  </a:lnTo>
+                  <a:lnTo>
+                    <a:pt x="6128827" y="2980003"/>
+                  </a:lnTo>
+                  <a:lnTo>
+                    <a:pt x="6206462" y="2987065"/>
+                  </a:lnTo>
+                  <a:lnTo>
+                    <a:pt x="6284096" y="2994027"/>
+                  </a:lnTo>
+                  <a:lnTo>
+                    <a:pt x="6361730" y="3000891"/>
+                  </a:lnTo>
+                  <a:lnTo>
+                    <a:pt x="6439364" y="3007660"/>
+                  </a:lnTo>
+                  <a:lnTo>
+                    <a:pt x="6516998" y="3014333"/>
+                  </a:lnTo>
+                  <a:lnTo>
+                    <a:pt x="6594632" y="3020913"/>
+                  </a:lnTo>
+                  <a:lnTo>
+                    <a:pt x="6672266" y="3027401"/>
+                  </a:lnTo>
+                  <a:lnTo>
+                    <a:pt x="6749900" y="3033798"/>
+                  </a:lnTo>
+                  <a:lnTo>
+                    <a:pt x="6827534" y="3040105"/>
+                  </a:lnTo>
+                  <a:lnTo>
+                    <a:pt x="6905168" y="3046323"/>
+                  </a:lnTo>
+                  <a:lnTo>
+                    <a:pt x="6982802" y="3052455"/>
+                  </a:lnTo>
+                  <a:lnTo>
+                    <a:pt x="7060436" y="3058501"/>
+                  </a:lnTo>
+                  <a:lnTo>
+                    <a:pt x="7138070" y="3064461"/>
+                  </a:lnTo>
+                  <a:lnTo>
+                    <a:pt x="7215704" y="3070339"/>
+                  </a:lnTo>
+                  <a:lnTo>
+                    <a:pt x="7293338" y="3076134"/>
+                  </a:lnTo>
+                  <a:lnTo>
+                    <a:pt x="7370972" y="3081847"/>
+                  </a:lnTo>
+                  <a:lnTo>
+                    <a:pt x="7370972" y="3432151"/>
+                  </a:lnTo>
+                  <a:lnTo>
+                    <a:pt x="7293338" y="3429282"/>
+                  </a:lnTo>
+                  <a:lnTo>
+                    <a:pt x="7215704" y="3426254"/>
+                  </a:lnTo>
+                  <a:lnTo>
+                    <a:pt x="7138070" y="3423057"/>
+                  </a:lnTo>
+                  <a:lnTo>
+                    <a:pt x="7060436" y="3419683"/>
+                  </a:lnTo>
+                  <a:lnTo>
+                    <a:pt x="6982802" y="3416121"/>
+                  </a:lnTo>
+                  <a:lnTo>
+                    <a:pt x="6905168" y="3412361"/>
+                  </a:lnTo>
+                  <a:lnTo>
+                    <a:pt x="6827534" y="3408392"/>
+                  </a:lnTo>
+                  <a:lnTo>
+                    <a:pt x="6749900" y="3404202"/>
+                  </a:lnTo>
+                  <a:lnTo>
+                    <a:pt x="6672266" y="3399779"/>
+                  </a:lnTo>
+                  <a:lnTo>
+                    <a:pt x="6594632" y="3395111"/>
+                  </a:lnTo>
+                  <a:lnTo>
+                    <a:pt x="6516998" y="3390183"/>
+                  </a:lnTo>
+                  <a:lnTo>
+                    <a:pt x="6439364" y="3384980"/>
+                  </a:lnTo>
+                  <a:lnTo>
+                    <a:pt x="6361730" y="3379489"/>
+                  </a:lnTo>
+                  <a:lnTo>
+                    <a:pt x="6284096" y="3373692"/>
+                  </a:lnTo>
+                  <a:lnTo>
+                    <a:pt x="6206462" y="3367573"/>
+                  </a:lnTo>
+                  <a:lnTo>
+                    <a:pt x="6128827" y="3361114"/>
+                  </a:lnTo>
+                  <a:lnTo>
+                    <a:pt x="6051193" y="3354296"/>
+                  </a:lnTo>
+                  <a:lnTo>
+                    <a:pt x="5973559" y="3347098"/>
+                  </a:lnTo>
+                  <a:lnTo>
+                    <a:pt x="5895925" y="3339501"/>
+                  </a:lnTo>
+                  <a:lnTo>
+                    <a:pt x="5818291" y="3331481"/>
+                  </a:lnTo>
+                  <a:lnTo>
+                    <a:pt x="5740657" y="3323015"/>
+                  </a:lnTo>
+                  <a:lnTo>
+                    <a:pt x="5663023" y="3314078"/>
+                  </a:lnTo>
+                  <a:lnTo>
+                    <a:pt x="5585389" y="3304644"/>
+                  </a:lnTo>
+                  <a:lnTo>
+                    <a:pt x="5507755" y="3294686"/>
+                  </a:lnTo>
+                  <a:lnTo>
+                    <a:pt x="5430121" y="3284174"/>
+                  </a:lnTo>
+                  <a:lnTo>
+                    <a:pt x="5352487" y="3273078"/>
+                  </a:lnTo>
+                  <a:lnTo>
+                    <a:pt x="5274853" y="3261365"/>
+                  </a:lnTo>
+                  <a:lnTo>
+                    <a:pt x="5197219" y="3249001"/>
+                  </a:lnTo>
+                  <a:lnTo>
+                    <a:pt x="5119585" y="3235949"/>
+                  </a:lnTo>
+                  <a:lnTo>
+                    <a:pt x="5041951" y="3222171"/>
+                  </a:lnTo>
+                  <a:lnTo>
+                    <a:pt x="4964317" y="3207628"/>
+                  </a:lnTo>
+                  <a:lnTo>
+                    <a:pt x="4886683" y="3192275"/>
+                  </a:lnTo>
+                  <a:lnTo>
+                    <a:pt x="4809049" y="3176070"/>
+                  </a:lnTo>
+                  <a:lnTo>
+                    <a:pt x="4731415" y="3158963"/>
+                  </a:lnTo>
+                  <a:lnTo>
+                    <a:pt x="4653781" y="3140905"/>
+                  </a:lnTo>
+                  <a:lnTo>
+                    <a:pt x="4576147" y="3121843"/>
+                  </a:lnTo>
+                  <a:lnTo>
+                    <a:pt x="4498513" y="3101721"/>
+                  </a:lnTo>
+                  <a:lnTo>
+                    <a:pt x="4420879" y="3080480"/>
+                  </a:lnTo>
+                  <a:lnTo>
+                    <a:pt x="4343244" y="3058058"/>
+                  </a:lnTo>
+                  <a:lnTo>
+                    <a:pt x="4265610" y="3034390"/>
+                  </a:lnTo>
+                  <a:lnTo>
+                    <a:pt x="4187976" y="3009406"/>
+                  </a:lnTo>
+                  <a:lnTo>
+                    <a:pt x="4110342" y="2983033"/>
+                  </a:lnTo>
+                  <a:lnTo>
+                    <a:pt x="4032708" y="2955193"/>
+                  </a:lnTo>
+                  <a:lnTo>
+                    <a:pt x="3955074" y="2925805"/>
+                  </a:lnTo>
+                  <a:lnTo>
+                    <a:pt x="3877440" y="2894784"/>
+                  </a:lnTo>
+                  <a:lnTo>
+                    <a:pt x="3799806" y="2862037"/>
+                  </a:lnTo>
+                  <a:lnTo>
+                    <a:pt x="3722172" y="2827470"/>
+                  </a:lnTo>
+                  <a:lnTo>
+                    <a:pt x="3644538" y="2790981"/>
+                  </a:lnTo>
+                  <a:lnTo>
+                    <a:pt x="3566904" y="2752463"/>
+                  </a:lnTo>
+                  <a:lnTo>
+                    <a:pt x="3489270" y="2711804"/>
+                  </a:lnTo>
+                  <a:lnTo>
+                    <a:pt x="3411636" y="2668884"/>
+                  </a:lnTo>
+                  <a:lnTo>
+                    <a:pt x="3334002" y="2646379"/>
+                  </a:lnTo>
+                  <a:lnTo>
+                    <a:pt x="3256368" y="2634475"/>
+                  </a:lnTo>
+                  <a:lnTo>
+                    <a:pt x="3178734" y="2622401"/>
+                  </a:lnTo>
+                  <a:lnTo>
+                    <a:pt x="3101100" y="2610156"/>
+                  </a:lnTo>
+                  <a:lnTo>
+                    <a:pt x="3023466" y="2597736"/>
+                  </a:lnTo>
+                  <a:lnTo>
+                    <a:pt x="2945832" y="2585140"/>
+                  </a:lnTo>
+                  <a:lnTo>
+                    <a:pt x="2868198" y="2572365"/>
+                  </a:lnTo>
+                  <a:lnTo>
+                    <a:pt x="2790564" y="2559408"/>
+                  </a:lnTo>
+                  <a:lnTo>
+                    <a:pt x="2712930" y="2546267"/>
+                  </a:lnTo>
+                  <a:lnTo>
+                    <a:pt x="2635295" y="2532939"/>
+                  </a:lnTo>
+                  <a:lnTo>
+                    <a:pt x="2557661" y="2519422"/>
+                  </a:lnTo>
+                  <a:lnTo>
+                    <a:pt x="2480027" y="2505712"/>
+                  </a:lnTo>
+                  <a:lnTo>
+                    <a:pt x="2402393" y="2491808"/>
+                  </a:lnTo>
+                  <a:lnTo>
+                    <a:pt x="2324759" y="2477706"/>
+                  </a:lnTo>
+                  <a:lnTo>
+                    <a:pt x="2247125" y="2463403"/>
+                  </a:lnTo>
+                  <a:lnTo>
+                    <a:pt x="2169491" y="2448897"/>
+                  </a:lnTo>
+                  <a:lnTo>
+                    <a:pt x="2091857" y="2434185"/>
+                  </a:lnTo>
+                  <a:lnTo>
+                    <a:pt x="2014223" y="2419264"/>
+                  </a:lnTo>
+                  <a:lnTo>
+                    <a:pt x="1936589" y="2404131"/>
+                  </a:lnTo>
+                  <a:lnTo>
+                    <a:pt x="1858955" y="2388782"/>
+                  </a:lnTo>
+                  <a:lnTo>
+                    <a:pt x="1781321" y="2373215"/>
+                  </a:lnTo>
+                  <a:lnTo>
+                    <a:pt x="1703687" y="2357427"/>
+                  </a:lnTo>
+                  <a:lnTo>
+                    <a:pt x="1626053" y="2341415"/>
+                  </a:lnTo>
+                  <a:lnTo>
+                    <a:pt x="1548419" y="2325175"/>
+                  </a:lnTo>
+                  <a:lnTo>
+                    <a:pt x="1470785" y="2308704"/>
+                  </a:lnTo>
+                  <a:lnTo>
+                    <a:pt x="1393151" y="2291998"/>
+                  </a:lnTo>
+                  <a:lnTo>
+                    <a:pt x="1315517" y="2275056"/>
+                  </a:lnTo>
+                  <a:lnTo>
+                    <a:pt x="1237883" y="2257872"/>
+                  </a:lnTo>
+                  <a:lnTo>
+                    <a:pt x="1160249" y="2240444"/>
+                  </a:lnTo>
+                  <a:lnTo>
+                    <a:pt x="1082615" y="2222769"/>
+                  </a:lnTo>
+                  <a:lnTo>
+                    <a:pt x="1004981" y="2204842"/>
+                  </a:lnTo>
+                  <a:lnTo>
+                    <a:pt x="927346" y="2186660"/>
+                  </a:lnTo>
+                  <a:lnTo>
+                    <a:pt x="849712" y="2168220"/>
+                  </a:lnTo>
+                  <a:lnTo>
+                    <a:pt x="772078" y="2149517"/>
+                  </a:lnTo>
+                  <a:lnTo>
+                    <a:pt x="694444" y="2130549"/>
+                  </a:lnTo>
+                  <a:lnTo>
+                    <a:pt x="616810" y="2111311"/>
+                  </a:lnTo>
+                  <a:lnTo>
+                    <a:pt x="539176" y="2091800"/>
+                  </a:lnTo>
+                  <a:lnTo>
+                    <a:pt x="461542" y="2072011"/>
+                  </a:lnTo>
+                  <a:lnTo>
+                    <a:pt x="383908" y="2051941"/>
+                  </a:lnTo>
+                  <a:lnTo>
+                    <a:pt x="306274" y="2031585"/>
+                  </a:lnTo>
+                  <a:lnTo>
+                    <a:pt x="228640" y="2010940"/>
+                  </a:lnTo>
+                  <a:lnTo>
+                    <a:pt x="151006" y="1990002"/>
+                  </a:lnTo>
+                  <a:lnTo>
+                    <a:pt x="73372" y="1968766"/>
+                  </a:lnTo>
+                  <a:lnTo>
+                    <a:pt x="0" y="1948410"/>
                   </a:lnTo>
                   <a:close/>
                 </a:path>
@@ -3558,249 +3558,249 @@
           </p:nvSpPr>
           <p:spPr>
             <a:xfrm>
-              <a:off x="2144939" y="1896563"/>
-              <a:ext cx="6043551" cy="3231259"/>
+              <a:off x="2144939" y="2073503"/>
+              <a:ext cx="6043551" cy="3081847"/>
             </a:xfrm>
             <a:custGeom>
               <a:avLst/>
               <a:pathLst>
-                <a:path w="6043551" h="3231259">
+                <a:path w="6043551" h="3081847">
                   <a:moveTo>
                     <a:pt x="0" y="0"/>
                   </a:moveTo>
                   <a:lnTo>
-                    <a:pt x="65729" y="164215"/>
-                  </a:lnTo>
-                  <a:lnTo>
-                    <a:pt x="143363" y="347956"/>
-                  </a:lnTo>
-                  <a:lnTo>
-                    <a:pt x="220997" y="522019"/>
-                  </a:lnTo>
-                  <a:lnTo>
-                    <a:pt x="298631" y="686914"/>
-                  </a:lnTo>
-                  <a:lnTo>
-                    <a:pt x="376265" y="843123"/>
-                  </a:lnTo>
-                  <a:lnTo>
-                    <a:pt x="453899" y="991105"/>
-                  </a:lnTo>
-                  <a:lnTo>
-                    <a:pt x="531533" y="1131292"/>
-                  </a:lnTo>
-                  <a:lnTo>
-                    <a:pt x="609167" y="1264096"/>
-                  </a:lnTo>
-                  <a:lnTo>
-                    <a:pt x="686801" y="1389904"/>
-                  </a:lnTo>
-                  <a:lnTo>
-                    <a:pt x="764436" y="1509086"/>
-                  </a:lnTo>
-                  <a:lnTo>
-                    <a:pt x="842070" y="1621991"/>
-                  </a:lnTo>
-                  <a:lnTo>
-                    <a:pt x="919704" y="1728948"/>
-                  </a:lnTo>
-                  <a:lnTo>
-                    <a:pt x="997338" y="1830272"/>
-                  </a:lnTo>
-                  <a:lnTo>
-                    <a:pt x="1074972" y="1926259"/>
-                  </a:lnTo>
-                  <a:lnTo>
-                    <a:pt x="1152606" y="2017191"/>
-                  </a:lnTo>
-                  <a:lnTo>
-                    <a:pt x="1230240" y="2103332"/>
-                  </a:lnTo>
-                  <a:lnTo>
-                    <a:pt x="1307874" y="2184937"/>
-                  </a:lnTo>
-                  <a:lnTo>
-                    <a:pt x="1385508" y="2262243"/>
-                  </a:lnTo>
-                  <a:lnTo>
-                    <a:pt x="1463142" y="2335478"/>
-                  </a:lnTo>
-                  <a:lnTo>
-                    <a:pt x="1540776" y="2404855"/>
-                  </a:lnTo>
-                  <a:lnTo>
-                    <a:pt x="1618410" y="2470578"/>
-                  </a:lnTo>
-                  <a:lnTo>
-                    <a:pt x="1696044" y="2532839"/>
-                  </a:lnTo>
-                  <a:lnTo>
-                    <a:pt x="1773678" y="2591821"/>
-                  </a:lnTo>
-                  <a:lnTo>
-                    <a:pt x="1851312" y="2647696"/>
-                  </a:lnTo>
-                  <a:lnTo>
-                    <a:pt x="1928946" y="2700628"/>
-                  </a:lnTo>
-                  <a:lnTo>
-                    <a:pt x="2006580" y="2750772"/>
-                  </a:lnTo>
-                  <a:lnTo>
-                    <a:pt x="2084214" y="2786986"/>
-                  </a:lnTo>
-                  <a:lnTo>
-                    <a:pt x="2161848" y="2799121"/>
-                  </a:lnTo>
-                  <a:lnTo>
-                    <a:pt x="2239482" y="2811085"/>
-                  </a:lnTo>
-                  <a:lnTo>
-                    <a:pt x="2317116" y="2822881"/>
-                  </a:lnTo>
-                  <a:lnTo>
-                    <a:pt x="2394750" y="2834512"/>
-                  </a:lnTo>
-                  <a:lnTo>
-                    <a:pt x="2472384" y="2845980"/>
-                  </a:lnTo>
-                  <a:lnTo>
-                    <a:pt x="2550019" y="2857288"/>
-                  </a:lnTo>
-                  <a:lnTo>
-                    <a:pt x="2627653" y="2868437"/>
-                  </a:lnTo>
-                  <a:lnTo>
-                    <a:pt x="2705287" y="2879429"/>
-                  </a:lnTo>
-                  <a:lnTo>
-                    <a:pt x="2782921" y="2890268"/>
-                  </a:lnTo>
-                  <a:lnTo>
-                    <a:pt x="2860555" y="2900954"/>
-                  </a:lnTo>
-                  <a:lnTo>
-                    <a:pt x="2938189" y="2911491"/>
-                  </a:lnTo>
-                  <a:lnTo>
-                    <a:pt x="3015823" y="2921880"/>
-                  </a:lnTo>
-                  <a:lnTo>
-                    <a:pt x="3093457" y="2932123"/>
-                  </a:lnTo>
-                  <a:lnTo>
-                    <a:pt x="3171091" y="2942223"/>
-                  </a:lnTo>
-                  <a:lnTo>
-                    <a:pt x="3248725" y="2952181"/>
-                  </a:lnTo>
-                  <a:lnTo>
-                    <a:pt x="3326359" y="2962000"/>
-                  </a:lnTo>
-                  <a:lnTo>
-                    <a:pt x="3403993" y="2971681"/>
-                  </a:lnTo>
-                  <a:lnTo>
-                    <a:pt x="3481627" y="2981226"/>
-                  </a:lnTo>
-                  <a:lnTo>
-                    <a:pt x="3559261" y="2990638"/>
-                  </a:lnTo>
-                  <a:lnTo>
-                    <a:pt x="3636895" y="2999917"/>
-                  </a:lnTo>
-                  <a:lnTo>
-                    <a:pt x="3714529" y="3009067"/>
-                  </a:lnTo>
-                  <a:lnTo>
-                    <a:pt x="3792163" y="3018088"/>
-                  </a:lnTo>
-                  <a:lnTo>
-                    <a:pt x="3869797" y="3026983"/>
-                  </a:lnTo>
-                  <a:lnTo>
-                    <a:pt x="3947431" y="3035753"/>
-                  </a:lnTo>
-                  <a:lnTo>
-                    <a:pt x="4025065" y="3044400"/>
-                  </a:lnTo>
-                  <a:lnTo>
-                    <a:pt x="4102699" y="3052926"/>
-                  </a:lnTo>
-                  <a:lnTo>
-                    <a:pt x="4180333" y="3061333"/>
-                  </a:lnTo>
-                  <a:lnTo>
-                    <a:pt x="4257968" y="3069621"/>
-                  </a:lnTo>
-                  <a:lnTo>
-                    <a:pt x="4335602" y="3077794"/>
-                  </a:lnTo>
-                  <a:lnTo>
-                    <a:pt x="4413236" y="3085852"/>
-                  </a:lnTo>
-                  <a:lnTo>
-                    <a:pt x="4490870" y="3093797"/>
-                  </a:lnTo>
-                  <a:lnTo>
-                    <a:pt x="4568504" y="3101630"/>
-                  </a:lnTo>
-                  <a:lnTo>
-                    <a:pt x="4646138" y="3109354"/>
-                  </a:lnTo>
-                  <a:lnTo>
-                    <a:pt x="4723772" y="3116969"/>
-                  </a:lnTo>
-                  <a:lnTo>
-                    <a:pt x="4801406" y="3124478"/>
-                  </a:lnTo>
-                  <a:lnTo>
-                    <a:pt x="4879040" y="3131882"/>
-                  </a:lnTo>
-                  <a:lnTo>
-                    <a:pt x="4956674" y="3139181"/>
-                  </a:lnTo>
-                  <a:lnTo>
-                    <a:pt x="5034308" y="3146379"/>
-                  </a:lnTo>
-                  <a:lnTo>
-                    <a:pt x="5111942" y="3153475"/>
-                  </a:lnTo>
-                  <a:lnTo>
-                    <a:pt x="5189576" y="3160472"/>
-                  </a:lnTo>
-                  <a:lnTo>
-                    <a:pt x="5267210" y="3167371"/>
-                  </a:lnTo>
-                  <a:lnTo>
-                    <a:pt x="5344844" y="3174173"/>
-                  </a:lnTo>
-                  <a:lnTo>
-                    <a:pt x="5422478" y="3180880"/>
-                  </a:lnTo>
-                  <a:lnTo>
-                    <a:pt x="5500112" y="3187493"/>
-                  </a:lnTo>
-                  <a:lnTo>
-                    <a:pt x="5577746" y="3194013"/>
-                  </a:lnTo>
-                  <a:lnTo>
-                    <a:pt x="5655380" y="3200442"/>
-                  </a:lnTo>
-                  <a:lnTo>
-                    <a:pt x="5733014" y="3206781"/>
-                  </a:lnTo>
-                  <a:lnTo>
-                    <a:pt x="5810648" y="3213031"/>
-                  </a:lnTo>
-                  <a:lnTo>
-                    <a:pt x="5888282" y="3219193"/>
-                  </a:lnTo>
-                  <a:lnTo>
-                    <a:pt x="5965917" y="3225269"/>
-                  </a:lnTo>
-                  <a:lnTo>
-                    <a:pt x="6043551" y="3231259"/>
+                    <a:pt x="65729" y="156622"/>
+                  </a:lnTo>
+                  <a:lnTo>
+                    <a:pt x="143363" y="331866"/>
+                  </a:lnTo>
+                  <a:lnTo>
+                    <a:pt x="220997" y="497881"/>
+                  </a:lnTo>
+                  <a:lnTo>
+                    <a:pt x="298631" y="655151"/>
+                  </a:lnTo>
+                  <a:lnTo>
+                    <a:pt x="376265" y="804137"/>
+                  </a:lnTo>
+                  <a:lnTo>
+                    <a:pt x="453899" y="945277"/>
+                  </a:lnTo>
+                  <a:lnTo>
+                    <a:pt x="531533" y="1078982"/>
+                  </a:lnTo>
+                  <a:lnTo>
+                    <a:pt x="609167" y="1205644"/>
+                  </a:lnTo>
+                  <a:lnTo>
+                    <a:pt x="686801" y="1325635"/>
+                  </a:lnTo>
+                  <a:lnTo>
+                    <a:pt x="764436" y="1439306"/>
+                  </a:lnTo>
+                  <a:lnTo>
+                    <a:pt x="842070" y="1546990"/>
+                  </a:lnTo>
+                  <a:lnTo>
+                    <a:pt x="919704" y="1649002"/>
+                  </a:lnTo>
+                  <a:lnTo>
+                    <a:pt x="997338" y="1745641"/>
+                  </a:lnTo>
+                  <a:lnTo>
+                    <a:pt x="1074972" y="1837190"/>
+                  </a:lnTo>
+                  <a:lnTo>
+                    <a:pt x="1152606" y="1923916"/>
+                  </a:lnTo>
+                  <a:lnTo>
+                    <a:pt x="1230240" y="2006075"/>
+                  </a:lnTo>
+                  <a:lnTo>
+                    <a:pt x="1307874" y="2083906"/>
+                  </a:lnTo>
+                  <a:lnTo>
+                    <a:pt x="1385508" y="2157638"/>
+                  </a:lnTo>
+                  <a:lnTo>
+                    <a:pt x="1463142" y="2227486"/>
+                  </a:lnTo>
+                  <a:lnTo>
+                    <a:pt x="1540776" y="2293655"/>
+                  </a:lnTo>
+                  <a:lnTo>
+                    <a:pt x="1618410" y="2356339"/>
+                  </a:lnTo>
+                  <a:lnTo>
+                    <a:pt x="1696044" y="2415722"/>
+                  </a:lnTo>
+                  <a:lnTo>
+                    <a:pt x="1773678" y="2471976"/>
+                  </a:lnTo>
+                  <a:lnTo>
+                    <a:pt x="1851312" y="2525268"/>
+                  </a:lnTo>
+                  <a:lnTo>
+                    <a:pt x="1928946" y="2575752"/>
+                  </a:lnTo>
+                  <a:lnTo>
+                    <a:pt x="2006580" y="2623578"/>
+                  </a:lnTo>
+                  <a:lnTo>
+                    <a:pt x="2084214" y="2658117"/>
+                  </a:lnTo>
+                  <a:lnTo>
+                    <a:pt x="2161848" y="2669690"/>
+                  </a:lnTo>
+                  <a:lnTo>
+                    <a:pt x="2239482" y="2681101"/>
+                  </a:lnTo>
+                  <a:lnTo>
+                    <a:pt x="2317116" y="2692352"/>
+                  </a:lnTo>
+                  <a:lnTo>
+                    <a:pt x="2394750" y="2703446"/>
+                  </a:lnTo>
+                  <a:lnTo>
+                    <a:pt x="2472384" y="2714383"/>
+                  </a:lnTo>
+                  <a:lnTo>
+                    <a:pt x="2550019" y="2725168"/>
+                  </a:lnTo>
+                  <a:lnTo>
+                    <a:pt x="2627653" y="2735801"/>
+                  </a:lnTo>
+                  <a:lnTo>
+                    <a:pt x="2705287" y="2746285"/>
+                  </a:lnTo>
+                  <a:lnTo>
+                    <a:pt x="2782921" y="2756623"/>
+                  </a:lnTo>
+                  <a:lnTo>
+                    <a:pt x="2860555" y="2766815"/>
+                  </a:lnTo>
+                  <a:lnTo>
+                    <a:pt x="2938189" y="2776864"/>
+                  </a:lnTo>
+                  <a:lnTo>
+                    <a:pt x="3015823" y="2786773"/>
+                  </a:lnTo>
+                  <a:lnTo>
+                    <a:pt x="3093457" y="2796543"/>
+                  </a:lnTo>
+                  <a:lnTo>
+                    <a:pt x="3171091" y="2806176"/>
+                  </a:lnTo>
+                  <a:lnTo>
+                    <a:pt x="3248725" y="2815673"/>
+                  </a:lnTo>
+                  <a:lnTo>
+                    <a:pt x="3326359" y="2825038"/>
+                  </a:lnTo>
+                  <a:lnTo>
+                    <a:pt x="3403993" y="2834271"/>
+                  </a:lnTo>
+                  <a:lnTo>
+                    <a:pt x="3481627" y="2843375"/>
+                  </a:lnTo>
+                  <a:lnTo>
+                    <a:pt x="3559261" y="2852352"/>
+                  </a:lnTo>
+                  <a:lnTo>
+                    <a:pt x="3636895" y="2861202"/>
+                  </a:lnTo>
+                  <a:lnTo>
+                    <a:pt x="3714529" y="2869929"/>
+                  </a:lnTo>
+                  <a:lnTo>
+                    <a:pt x="3792163" y="2878533"/>
+                  </a:lnTo>
+                  <a:lnTo>
+                    <a:pt x="3869797" y="2887016"/>
+                  </a:lnTo>
+                  <a:lnTo>
+                    <a:pt x="3947431" y="2895381"/>
+                  </a:lnTo>
+                  <a:lnTo>
+                    <a:pt x="4025065" y="2903628"/>
+                  </a:lnTo>
+                  <a:lnTo>
+                    <a:pt x="4102699" y="2911760"/>
+                  </a:lnTo>
+                  <a:lnTo>
+                    <a:pt x="4180333" y="2919778"/>
+                  </a:lnTo>
+                  <a:lnTo>
+                    <a:pt x="4257968" y="2927683"/>
+                  </a:lnTo>
+                  <a:lnTo>
+                    <a:pt x="4335602" y="2935478"/>
+                  </a:lnTo>
+                  <a:lnTo>
+                    <a:pt x="4413236" y="2943163"/>
+                  </a:lnTo>
+                  <a:lnTo>
+                    <a:pt x="4490870" y="2950741"/>
+                  </a:lnTo>
+                  <a:lnTo>
+                    <a:pt x="4568504" y="2958212"/>
+                  </a:lnTo>
+                  <a:lnTo>
+                    <a:pt x="4646138" y="2965578"/>
+                  </a:lnTo>
+                  <a:lnTo>
+                    <a:pt x="4723772" y="2972842"/>
+                  </a:lnTo>
+                  <a:lnTo>
+                    <a:pt x="4801406" y="2980003"/>
+                  </a:lnTo>
+                  <a:lnTo>
+                    <a:pt x="4879040" y="2987065"/>
+                  </a:lnTo>
+                  <a:lnTo>
+                    <a:pt x="4956674" y="2994027"/>
+                  </a:lnTo>
+                  <a:lnTo>
+                    <a:pt x="5034308" y="3000891"/>
+                  </a:lnTo>
+                  <a:lnTo>
+                    <a:pt x="5111942" y="3007660"/>
+                  </a:lnTo>
+                  <a:lnTo>
+                    <a:pt x="5189576" y="3014333"/>
+                  </a:lnTo>
+                  <a:lnTo>
+                    <a:pt x="5267210" y="3020913"/>
+                  </a:lnTo>
+                  <a:lnTo>
+                    <a:pt x="5344844" y="3027401"/>
+                  </a:lnTo>
+                  <a:lnTo>
+                    <a:pt x="5422478" y="3033798"/>
+                  </a:lnTo>
+                  <a:lnTo>
+                    <a:pt x="5500112" y="3040105"/>
+                  </a:lnTo>
+                  <a:lnTo>
+                    <a:pt x="5577746" y="3046323"/>
+                  </a:lnTo>
+                  <a:lnTo>
+                    <a:pt x="5655380" y="3052455"/>
+                  </a:lnTo>
+                  <a:lnTo>
+                    <a:pt x="5733014" y="3058501"/>
+                  </a:lnTo>
+                  <a:lnTo>
+                    <a:pt x="5810648" y="3064461"/>
+                  </a:lnTo>
+                  <a:lnTo>
+                    <a:pt x="5888282" y="3070339"/>
+                  </a:lnTo>
+                  <a:lnTo>
+                    <a:pt x="5965917" y="3076134"/>
+                  </a:lnTo>
+                  <a:lnTo>
+                    <a:pt x="6043551" y="3081847"/>
                   </a:lnTo>
                 </a:path>
               </a:pathLst>
@@ -3820,297 +3820,297 @@
           </p:nvSpPr>
           <p:spPr>
             <a:xfrm>
-              <a:off x="817517" y="3939435"/>
-              <a:ext cx="7370972" cy="1555674"/>
+              <a:off x="817517" y="4021913"/>
+              <a:ext cx="7370972" cy="1483740"/>
             </a:xfrm>
             <a:custGeom>
               <a:avLst/>
               <a:pathLst>
-                <a:path w="7370972" h="1555674">
+                <a:path w="7370972" h="1483740">
                   <a:moveTo>
-                    <a:pt x="7370972" y="1555674"/>
+                    <a:pt x="7370972" y="1483740"/>
                   </a:moveTo>
                   <a:lnTo>
-                    <a:pt x="7293338" y="1552666"/>
-                  </a:lnTo>
-                  <a:lnTo>
-                    <a:pt x="7215704" y="1549491"/>
-                  </a:lnTo>
-                  <a:lnTo>
-                    <a:pt x="7138070" y="1546139"/>
-                  </a:lnTo>
-                  <a:lnTo>
-                    <a:pt x="7060436" y="1542601"/>
-                  </a:lnTo>
-                  <a:lnTo>
-                    <a:pt x="6982802" y="1538867"/>
-                  </a:lnTo>
-                  <a:lnTo>
-                    <a:pt x="6905168" y="1534924"/>
-                  </a:lnTo>
-                  <a:lnTo>
-                    <a:pt x="6827534" y="1530763"/>
-                  </a:lnTo>
-                  <a:lnTo>
-                    <a:pt x="6749900" y="1526370"/>
-                  </a:lnTo>
-                  <a:lnTo>
-                    <a:pt x="6672266" y="1521733"/>
-                  </a:lnTo>
-                  <a:lnTo>
-                    <a:pt x="6594632" y="1516838"/>
-                  </a:lnTo>
-                  <a:lnTo>
-                    <a:pt x="6516998" y="1511671"/>
-                  </a:lnTo>
-                  <a:lnTo>
-                    <a:pt x="6439364" y="1506217"/>
-                  </a:lnTo>
-                  <a:lnTo>
-                    <a:pt x="6361730" y="1500459"/>
-                  </a:lnTo>
-                  <a:lnTo>
-                    <a:pt x="6284096" y="1494381"/>
-                  </a:lnTo>
-                  <a:lnTo>
-                    <a:pt x="6206462" y="1487966"/>
-                  </a:lnTo>
-                  <a:lnTo>
-                    <a:pt x="6128827" y="1481193"/>
-                  </a:lnTo>
-                  <a:lnTo>
-                    <a:pt x="6051193" y="1474044"/>
-                  </a:lnTo>
-                  <a:lnTo>
-                    <a:pt x="5973559" y="1466498"/>
-                  </a:lnTo>
-                  <a:lnTo>
-                    <a:pt x="5895925" y="1458532"/>
-                  </a:lnTo>
-                  <a:lnTo>
-                    <a:pt x="5818291" y="1450123"/>
-                  </a:lnTo>
-                  <a:lnTo>
-                    <a:pt x="5740657" y="1441247"/>
-                  </a:lnTo>
-                  <a:lnTo>
-                    <a:pt x="5663023" y="1431877"/>
-                  </a:lnTo>
-                  <a:lnTo>
-                    <a:pt x="5585389" y="1421986"/>
-                  </a:lnTo>
-                  <a:lnTo>
-                    <a:pt x="5507755" y="1411545"/>
-                  </a:lnTo>
-                  <a:lnTo>
-                    <a:pt x="5430121" y="1400523"/>
-                  </a:lnTo>
-                  <a:lnTo>
-                    <a:pt x="5352487" y="1388889"/>
-                  </a:lnTo>
-                  <a:lnTo>
-                    <a:pt x="5274853" y="1376608"/>
-                  </a:lnTo>
-                  <a:lnTo>
-                    <a:pt x="5197219" y="1363644"/>
-                  </a:lnTo>
-                  <a:lnTo>
-                    <a:pt x="5119585" y="1349960"/>
-                  </a:lnTo>
-                  <a:lnTo>
-                    <a:pt x="5041951" y="1335514"/>
-                  </a:lnTo>
-                  <a:lnTo>
-                    <a:pt x="4964317" y="1320265"/>
-                  </a:lnTo>
-                  <a:lnTo>
-                    <a:pt x="4886683" y="1304169"/>
-                  </a:lnTo>
-                  <a:lnTo>
-                    <a:pt x="4809049" y="1287177"/>
-                  </a:lnTo>
-                  <a:lnTo>
-                    <a:pt x="4731415" y="1269241"/>
-                  </a:lnTo>
-                  <a:lnTo>
-                    <a:pt x="4653781" y="1250308"/>
-                  </a:lnTo>
-                  <a:lnTo>
-                    <a:pt x="4576147" y="1230322"/>
-                  </a:lnTo>
-                  <a:lnTo>
-                    <a:pt x="4498513" y="1209224"/>
-                  </a:lnTo>
-                  <a:lnTo>
-                    <a:pt x="4420879" y="1186954"/>
-                  </a:lnTo>
-                  <a:lnTo>
-                    <a:pt x="4343244" y="1163445"/>
-                  </a:lnTo>
-                  <a:lnTo>
-                    <a:pt x="4265610" y="1138629"/>
-                  </a:lnTo>
-                  <a:lnTo>
-                    <a:pt x="4187976" y="1112434"/>
-                  </a:lnTo>
-                  <a:lnTo>
-                    <a:pt x="4110342" y="1084782"/>
-                  </a:lnTo>
-                  <a:lnTo>
-                    <a:pt x="4032708" y="1055592"/>
-                  </a:lnTo>
-                  <a:lnTo>
-                    <a:pt x="3955074" y="1024780"/>
-                  </a:lnTo>
-                  <a:lnTo>
-                    <a:pt x="3877440" y="992254"/>
-                  </a:lnTo>
-                  <a:lnTo>
-                    <a:pt x="3799806" y="957921"/>
-                  </a:lnTo>
-                  <a:lnTo>
-                    <a:pt x="3722172" y="921678"/>
-                  </a:lnTo>
-                  <a:lnTo>
-                    <a:pt x="3644538" y="883420"/>
-                  </a:lnTo>
-                  <a:lnTo>
-                    <a:pt x="3566904" y="843034"/>
-                  </a:lnTo>
-                  <a:lnTo>
-                    <a:pt x="3489270" y="800404"/>
-                  </a:lnTo>
-                  <a:lnTo>
-                    <a:pt x="3411636" y="755403"/>
-                  </a:lnTo>
-                  <a:lnTo>
-                    <a:pt x="3334002" y="731807"/>
-                  </a:lnTo>
-                  <a:lnTo>
-                    <a:pt x="3256368" y="719326"/>
-                  </a:lnTo>
-                  <a:lnTo>
-                    <a:pt x="3178734" y="706666"/>
-                  </a:lnTo>
-                  <a:lnTo>
-                    <a:pt x="3101100" y="693827"/>
-                  </a:lnTo>
-                  <a:lnTo>
-                    <a:pt x="3023466" y="680806"/>
-                  </a:lnTo>
-                  <a:lnTo>
-                    <a:pt x="2945832" y="667599"/>
-                  </a:lnTo>
-                  <a:lnTo>
-                    <a:pt x="2868198" y="654204"/>
-                  </a:lnTo>
-                  <a:lnTo>
-                    <a:pt x="2790564" y="640619"/>
-                  </a:lnTo>
-                  <a:lnTo>
-                    <a:pt x="2712930" y="626841"/>
-                  </a:lnTo>
-                  <a:lnTo>
-                    <a:pt x="2635295" y="612867"/>
-                  </a:lnTo>
-                  <a:lnTo>
-                    <a:pt x="2557661" y="598695"/>
-                  </a:lnTo>
-                  <a:lnTo>
-                    <a:pt x="2480027" y="584320"/>
-                  </a:lnTo>
-                  <a:lnTo>
-                    <a:pt x="2402393" y="569742"/>
-                  </a:lnTo>
-                  <a:lnTo>
-                    <a:pt x="2324759" y="554956"/>
-                  </a:lnTo>
-                  <a:lnTo>
-                    <a:pt x="2247125" y="539960"/>
-                  </a:lnTo>
-                  <a:lnTo>
-                    <a:pt x="2169491" y="524751"/>
-                  </a:lnTo>
-                  <a:lnTo>
-                    <a:pt x="2091857" y="509326"/>
-                  </a:lnTo>
-                  <a:lnTo>
-                    <a:pt x="2014223" y="493681"/>
-                  </a:lnTo>
-                  <a:lnTo>
-                    <a:pt x="1936589" y="477814"/>
-                  </a:lnTo>
-                  <a:lnTo>
-                    <a:pt x="1858955" y="461721"/>
-                  </a:lnTo>
-                  <a:lnTo>
-                    <a:pt x="1781321" y="445400"/>
-                  </a:lnTo>
-                  <a:lnTo>
-                    <a:pt x="1703687" y="428846"/>
-                  </a:lnTo>
-                  <a:lnTo>
-                    <a:pt x="1626053" y="412058"/>
-                  </a:lnTo>
-                  <a:lnTo>
-                    <a:pt x="1548419" y="395030"/>
-                  </a:lnTo>
-                  <a:lnTo>
-                    <a:pt x="1470785" y="377761"/>
-                  </a:lnTo>
-                  <a:lnTo>
-                    <a:pt x="1393151" y="360245"/>
-                  </a:lnTo>
-                  <a:lnTo>
-                    <a:pt x="1315517" y="342481"/>
-                  </a:lnTo>
-                  <a:lnTo>
-                    <a:pt x="1237883" y="324465"/>
-                  </a:lnTo>
-                  <a:lnTo>
-                    <a:pt x="1160249" y="306192"/>
-                  </a:lnTo>
-                  <a:lnTo>
-                    <a:pt x="1082615" y="287659"/>
-                  </a:lnTo>
-                  <a:lnTo>
-                    <a:pt x="1004981" y="268863"/>
-                  </a:lnTo>
-                  <a:lnTo>
-                    <a:pt x="927346" y="249800"/>
-                  </a:lnTo>
-                  <a:lnTo>
-                    <a:pt x="849712" y="230466"/>
-                  </a:lnTo>
-                  <a:lnTo>
-                    <a:pt x="772078" y="210857"/>
-                  </a:lnTo>
-                  <a:lnTo>
-                    <a:pt x="694444" y="190969"/>
-                  </a:lnTo>
-                  <a:lnTo>
-                    <a:pt x="616810" y="170798"/>
-                  </a:lnTo>
-                  <a:lnTo>
-                    <a:pt x="539176" y="150341"/>
-                  </a:lnTo>
-                  <a:lnTo>
-                    <a:pt x="461542" y="129593"/>
-                  </a:lnTo>
-                  <a:lnTo>
-                    <a:pt x="383908" y="108549"/>
-                  </a:lnTo>
-                  <a:lnTo>
-                    <a:pt x="306274" y="87207"/>
-                  </a:lnTo>
-                  <a:lnTo>
-                    <a:pt x="228640" y="65561"/>
-                  </a:lnTo>
-                  <a:lnTo>
-                    <a:pt x="151006" y="43608"/>
-                  </a:lnTo>
-                  <a:lnTo>
-                    <a:pt x="73372" y="21342"/>
+                    <a:pt x="7293338" y="1480871"/>
+                  </a:lnTo>
+                  <a:lnTo>
+                    <a:pt x="7215704" y="1477843"/>
+                  </a:lnTo>
+                  <a:lnTo>
+                    <a:pt x="7138070" y="1474646"/>
+                  </a:lnTo>
+                  <a:lnTo>
+                    <a:pt x="7060436" y="1471272"/>
+                  </a:lnTo>
+                  <a:lnTo>
+                    <a:pt x="6982802" y="1467710"/>
+                  </a:lnTo>
+                  <a:lnTo>
+                    <a:pt x="6905168" y="1463950"/>
+                  </a:lnTo>
+                  <a:lnTo>
+                    <a:pt x="6827534" y="1459981"/>
+                  </a:lnTo>
+                  <a:lnTo>
+                    <a:pt x="6749900" y="1455791"/>
+                  </a:lnTo>
+                  <a:lnTo>
+                    <a:pt x="6672266" y="1451369"/>
+                  </a:lnTo>
+                  <a:lnTo>
+                    <a:pt x="6594632" y="1446700"/>
+                  </a:lnTo>
+                  <a:lnTo>
+                    <a:pt x="6516998" y="1441772"/>
+                  </a:lnTo>
+                  <a:lnTo>
+                    <a:pt x="6439364" y="1436570"/>
+                  </a:lnTo>
+                  <a:lnTo>
+                    <a:pt x="6361730" y="1431078"/>
+                  </a:lnTo>
+                  <a:lnTo>
+                    <a:pt x="6284096" y="1425282"/>
+                  </a:lnTo>
+                  <a:lnTo>
+                    <a:pt x="6206462" y="1419163"/>
+                  </a:lnTo>
+                  <a:lnTo>
+                    <a:pt x="6128827" y="1412703"/>
+                  </a:lnTo>
+                  <a:lnTo>
+                    <a:pt x="6051193" y="1405885"/>
+                  </a:lnTo>
+                  <a:lnTo>
+                    <a:pt x="5973559" y="1398688"/>
+                  </a:lnTo>
+                  <a:lnTo>
+                    <a:pt x="5895925" y="1391090"/>
+                  </a:lnTo>
+                  <a:lnTo>
+                    <a:pt x="5818291" y="1383070"/>
+                  </a:lnTo>
+                  <a:lnTo>
+                    <a:pt x="5740657" y="1374604"/>
+                  </a:lnTo>
+                  <a:lnTo>
+                    <a:pt x="5663023" y="1365667"/>
+                  </a:lnTo>
+                  <a:lnTo>
+                    <a:pt x="5585389" y="1356234"/>
+                  </a:lnTo>
+                  <a:lnTo>
+                    <a:pt x="5507755" y="1346276"/>
+                  </a:lnTo>
+                  <a:lnTo>
+                    <a:pt x="5430121" y="1335764"/>
+                  </a:lnTo>
+                  <a:lnTo>
+                    <a:pt x="5352487" y="1324668"/>
+                  </a:lnTo>
+                  <a:lnTo>
+                    <a:pt x="5274853" y="1312954"/>
+                  </a:lnTo>
+                  <a:lnTo>
+                    <a:pt x="5197219" y="1300590"/>
+                  </a:lnTo>
+                  <a:lnTo>
+                    <a:pt x="5119585" y="1287538"/>
+                  </a:lnTo>
+                  <a:lnTo>
+                    <a:pt x="5041951" y="1273760"/>
+                  </a:lnTo>
+                  <a:lnTo>
+                    <a:pt x="4964317" y="1259217"/>
+                  </a:lnTo>
+                  <a:lnTo>
+                    <a:pt x="4886683" y="1243865"/>
+                  </a:lnTo>
+                  <a:lnTo>
+                    <a:pt x="4809049" y="1227659"/>
+                  </a:lnTo>
+                  <a:lnTo>
+                    <a:pt x="4731415" y="1210552"/>
+                  </a:lnTo>
+                  <a:lnTo>
+                    <a:pt x="4653781" y="1192494"/>
+                  </a:lnTo>
+                  <a:lnTo>
+                    <a:pt x="4576147" y="1173432"/>
+                  </a:lnTo>
+                  <a:lnTo>
+                    <a:pt x="4498513" y="1153310"/>
+                  </a:lnTo>
+                  <a:lnTo>
+                    <a:pt x="4420879" y="1132069"/>
+                  </a:lnTo>
+                  <a:lnTo>
+                    <a:pt x="4343244" y="1109648"/>
+                  </a:lnTo>
+                  <a:lnTo>
+                    <a:pt x="4265610" y="1085980"/>
+                  </a:lnTo>
+                  <a:lnTo>
+                    <a:pt x="4187976" y="1060995"/>
+                  </a:lnTo>
+                  <a:lnTo>
+                    <a:pt x="4110342" y="1034622"/>
+                  </a:lnTo>
+                  <a:lnTo>
+                    <a:pt x="4032708" y="1006782"/>
+                  </a:lnTo>
+                  <a:lnTo>
+                    <a:pt x="3955074" y="977395"/>
+                  </a:lnTo>
+                  <a:lnTo>
+                    <a:pt x="3877440" y="946373"/>
+                  </a:lnTo>
+                  <a:lnTo>
+                    <a:pt x="3799806" y="913627"/>
+                  </a:lnTo>
+                  <a:lnTo>
+                    <a:pt x="3722172" y="879060"/>
+                  </a:lnTo>
+                  <a:lnTo>
+                    <a:pt x="3644538" y="842571"/>
+                  </a:lnTo>
+                  <a:lnTo>
+                    <a:pt x="3566904" y="804053"/>
+                  </a:lnTo>
+                  <a:lnTo>
+                    <a:pt x="3489270" y="763393"/>
+                  </a:lnTo>
+                  <a:lnTo>
+                    <a:pt x="3411636" y="720473"/>
+                  </a:lnTo>
+                  <a:lnTo>
+                    <a:pt x="3334002" y="697969"/>
+                  </a:lnTo>
+                  <a:lnTo>
+                    <a:pt x="3256368" y="686064"/>
+                  </a:lnTo>
+                  <a:lnTo>
+                    <a:pt x="3178734" y="673990"/>
+                  </a:lnTo>
+                  <a:lnTo>
+                    <a:pt x="3101100" y="661745"/>
+                  </a:lnTo>
+                  <a:lnTo>
+                    <a:pt x="3023466" y="649325"/>
+                  </a:lnTo>
+                  <a:lnTo>
+                    <a:pt x="2945832" y="636729"/>
+                  </a:lnTo>
+                  <a:lnTo>
+                    <a:pt x="2868198" y="623954"/>
+                  </a:lnTo>
+                  <a:lnTo>
+                    <a:pt x="2790564" y="610997"/>
+                  </a:lnTo>
+                  <a:lnTo>
+                    <a:pt x="2712930" y="597856"/>
+                  </a:lnTo>
+                  <a:lnTo>
+                    <a:pt x="2635295" y="584528"/>
+                  </a:lnTo>
+                  <a:lnTo>
+                    <a:pt x="2557661" y="571011"/>
+                  </a:lnTo>
+                  <a:lnTo>
+                    <a:pt x="2480027" y="557302"/>
+                  </a:lnTo>
+                  <a:lnTo>
+                    <a:pt x="2402393" y="543397"/>
+                  </a:lnTo>
+                  <a:lnTo>
+                    <a:pt x="2324759" y="529295"/>
+                  </a:lnTo>
+                  <a:lnTo>
+                    <a:pt x="2247125" y="514993"/>
+                  </a:lnTo>
+                  <a:lnTo>
+                    <a:pt x="2169491" y="500487"/>
+                  </a:lnTo>
+                  <a:lnTo>
+                    <a:pt x="2091857" y="485775"/>
+                  </a:lnTo>
+                  <a:lnTo>
+                    <a:pt x="2014223" y="470853"/>
+                  </a:lnTo>
+                  <a:lnTo>
+                    <a:pt x="1936589" y="455720"/>
+                  </a:lnTo>
+                  <a:lnTo>
+                    <a:pt x="1858955" y="440371"/>
+                  </a:lnTo>
+                  <a:lnTo>
+                    <a:pt x="1781321" y="424805"/>
+                  </a:lnTo>
+                  <a:lnTo>
+                    <a:pt x="1703687" y="409017"/>
+                  </a:lnTo>
+                  <a:lnTo>
+                    <a:pt x="1626053" y="393004"/>
+                  </a:lnTo>
+                  <a:lnTo>
+                    <a:pt x="1548419" y="376764"/>
+                  </a:lnTo>
+                  <a:lnTo>
+                    <a:pt x="1470785" y="360293"/>
+                  </a:lnTo>
+                  <a:lnTo>
+                    <a:pt x="1393151" y="343588"/>
+                  </a:lnTo>
+                  <a:lnTo>
+                    <a:pt x="1315517" y="326645"/>
+                  </a:lnTo>
+                  <a:lnTo>
+                    <a:pt x="1237883" y="309462"/>
+                  </a:lnTo>
+                  <a:lnTo>
+                    <a:pt x="1160249" y="292034"/>
+                  </a:lnTo>
+                  <a:lnTo>
+                    <a:pt x="1082615" y="274358"/>
+                  </a:lnTo>
+                  <a:lnTo>
+                    <a:pt x="1004981" y="256431"/>
+                  </a:lnTo>
+                  <a:lnTo>
+                    <a:pt x="927346" y="238249"/>
+                  </a:lnTo>
+                  <a:lnTo>
+                    <a:pt x="849712" y="219809"/>
+                  </a:lnTo>
+                  <a:lnTo>
+                    <a:pt x="772078" y="201107"/>
+                  </a:lnTo>
+                  <a:lnTo>
+                    <a:pt x="694444" y="182138"/>
+                  </a:lnTo>
+                  <a:lnTo>
+                    <a:pt x="616810" y="162901"/>
+                  </a:lnTo>
+                  <a:lnTo>
+                    <a:pt x="539176" y="143389"/>
+                  </a:lnTo>
+                  <a:lnTo>
+                    <a:pt x="461542" y="123600"/>
+                  </a:lnTo>
+                  <a:lnTo>
+                    <a:pt x="383908" y="103530"/>
+                  </a:lnTo>
+                  <a:lnTo>
+                    <a:pt x="306274" y="83175"/>
+                  </a:lnTo>
+                  <a:lnTo>
+                    <a:pt x="228640" y="62530"/>
+                  </a:lnTo>
+                  <a:lnTo>
+                    <a:pt x="151006" y="41591"/>
+                  </a:lnTo>
+                  <a:lnTo>
+                    <a:pt x="73372" y="20355"/>
                   </a:lnTo>
                   <a:lnTo>
                     <a:pt x="0" y="0"/>
@@ -4133,297 +4133,297 @@
           </p:nvSpPr>
           <p:spPr>
             <a:xfrm>
-              <a:off x="938035" y="1896563"/>
-              <a:ext cx="7250454" cy="3501661"/>
+              <a:off x="938035" y="2073503"/>
+              <a:ext cx="7250454" cy="3339745"/>
             </a:xfrm>
             <a:custGeom>
               <a:avLst/>
               <a:pathLst>
-                <a:path w="7250454" h="3501661">
+                <a:path w="7250454" h="3339745">
                   <a:moveTo>
                     <a:pt x="0" y="0"/>
                   </a:moveTo>
                   <a:lnTo>
-                    <a:pt x="30488" y="49108"/>
-                  </a:lnTo>
-                  <a:lnTo>
-                    <a:pt x="108122" y="169963"/>
-                  </a:lnTo>
-                  <a:lnTo>
-                    <a:pt x="185756" y="286764"/>
-                  </a:lnTo>
-                  <a:lnTo>
-                    <a:pt x="263390" y="399648"/>
-                  </a:lnTo>
-                  <a:lnTo>
-                    <a:pt x="341024" y="508746"/>
-                  </a:lnTo>
-                  <a:lnTo>
-                    <a:pt x="418658" y="614185"/>
-                  </a:lnTo>
-                  <a:lnTo>
-                    <a:pt x="496292" y="716087"/>
-                  </a:lnTo>
-                  <a:lnTo>
-                    <a:pt x="573926" y="814573"/>
-                  </a:lnTo>
-                  <a:lnTo>
-                    <a:pt x="651560" y="909755"/>
-                  </a:lnTo>
-                  <a:lnTo>
-                    <a:pt x="729194" y="1001745"/>
-                  </a:lnTo>
-                  <a:lnTo>
-                    <a:pt x="806828" y="1090650"/>
-                  </a:lnTo>
-                  <a:lnTo>
-                    <a:pt x="884462" y="1176574"/>
-                  </a:lnTo>
-                  <a:lnTo>
-                    <a:pt x="962096" y="1259615"/>
-                  </a:lnTo>
-                  <a:lnTo>
-                    <a:pt x="1039731" y="1339872"/>
-                  </a:lnTo>
-                  <a:lnTo>
-                    <a:pt x="1117365" y="1417437"/>
-                  </a:lnTo>
-                  <a:lnTo>
-                    <a:pt x="1194999" y="1492401"/>
-                  </a:lnTo>
-                  <a:lnTo>
-                    <a:pt x="1272633" y="1564850"/>
-                  </a:lnTo>
-                  <a:lnTo>
-                    <a:pt x="1350267" y="1634870"/>
-                  </a:lnTo>
-                  <a:lnTo>
-                    <a:pt x="1427901" y="1702541"/>
-                  </a:lnTo>
-                  <a:lnTo>
-                    <a:pt x="1505535" y="1767943"/>
-                  </a:lnTo>
-                  <a:lnTo>
-                    <a:pt x="1583169" y="1831152"/>
-                  </a:lnTo>
-                  <a:lnTo>
-                    <a:pt x="1660803" y="1892240"/>
-                  </a:lnTo>
-                  <a:lnTo>
-                    <a:pt x="1738437" y="1951280"/>
-                  </a:lnTo>
-                  <a:lnTo>
-                    <a:pt x="1816071" y="2008340"/>
-                  </a:lnTo>
-                  <a:lnTo>
-                    <a:pt x="1893705" y="2063486"/>
-                  </a:lnTo>
-                  <a:lnTo>
-                    <a:pt x="1971339" y="2116783"/>
-                  </a:lnTo>
-                  <a:lnTo>
-                    <a:pt x="2048973" y="2168292"/>
-                  </a:lnTo>
-                  <a:lnTo>
-                    <a:pt x="2126607" y="2218074"/>
-                  </a:lnTo>
-                  <a:lnTo>
-                    <a:pt x="2204241" y="2266186"/>
-                  </a:lnTo>
-                  <a:lnTo>
-                    <a:pt x="2281875" y="2312685"/>
-                  </a:lnTo>
-                  <a:lnTo>
-                    <a:pt x="2359509" y="2357624"/>
-                  </a:lnTo>
-                  <a:lnTo>
-                    <a:pt x="2437143" y="2401056"/>
-                  </a:lnTo>
-                  <a:lnTo>
-                    <a:pt x="2514777" y="2443031"/>
-                  </a:lnTo>
-                  <a:lnTo>
-                    <a:pt x="2592411" y="2483599"/>
-                  </a:lnTo>
-                  <a:lnTo>
-                    <a:pt x="2670045" y="2522806"/>
-                  </a:lnTo>
-                  <a:lnTo>
-                    <a:pt x="2747680" y="2560698"/>
-                  </a:lnTo>
-                  <a:lnTo>
-                    <a:pt x="2825314" y="2597319"/>
-                  </a:lnTo>
-                  <a:lnTo>
-                    <a:pt x="2902948" y="2632712"/>
-                  </a:lnTo>
-                  <a:lnTo>
-                    <a:pt x="2980582" y="2666918"/>
-                  </a:lnTo>
-                  <a:lnTo>
-                    <a:pt x="3058216" y="2699977"/>
-                  </a:lnTo>
-                  <a:lnTo>
-                    <a:pt x="3135850" y="2731928"/>
-                  </a:lnTo>
-                  <a:lnTo>
-                    <a:pt x="3213484" y="2762806"/>
-                  </a:lnTo>
-                  <a:lnTo>
-                    <a:pt x="3291118" y="2792649"/>
-                  </a:lnTo>
-                  <a:lnTo>
-                    <a:pt x="3368752" y="2821492"/>
-                  </a:lnTo>
-                  <a:lnTo>
-                    <a:pt x="3446386" y="2849366"/>
-                  </a:lnTo>
-                  <a:lnTo>
-                    <a:pt x="3524020" y="2876306"/>
-                  </a:lnTo>
-                  <a:lnTo>
-                    <a:pt x="3601654" y="2902343"/>
-                  </a:lnTo>
-                  <a:lnTo>
-                    <a:pt x="3679288" y="2927506"/>
-                  </a:lnTo>
-                  <a:lnTo>
-                    <a:pt x="3756922" y="2951826"/>
-                  </a:lnTo>
-                  <a:lnTo>
-                    <a:pt x="3834556" y="2975330"/>
-                  </a:lnTo>
-                  <a:lnTo>
-                    <a:pt x="3912190" y="2998045"/>
-                  </a:lnTo>
-                  <a:lnTo>
-                    <a:pt x="3989824" y="3019999"/>
-                  </a:lnTo>
-                  <a:lnTo>
-                    <a:pt x="4067458" y="3041216"/>
-                  </a:lnTo>
-                  <a:lnTo>
-                    <a:pt x="4145092" y="3061722"/>
-                  </a:lnTo>
-                  <a:lnTo>
-                    <a:pt x="4222726" y="3081540"/>
-                  </a:lnTo>
-                  <a:lnTo>
-                    <a:pt x="4300360" y="3100694"/>
-                  </a:lnTo>
-                  <a:lnTo>
-                    <a:pt x="4377994" y="3119205"/>
-                  </a:lnTo>
-                  <a:lnTo>
-                    <a:pt x="4455629" y="3137095"/>
-                  </a:lnTo>
-                  <a:lnTo>
-                    <a:pt x="4533263" y="3154385"/>
-                  </a:lnTo>
-                  <a:lnTo>
-                    <a:pt x="4610897" y="3171096"/>
-                  </a:lnTo>
-                  <a:lnTo>
-                    <a:pt x="4688531" y="3187246"/>
-                  </a:lnTo>
-                  <a:lnTo>
-                    <a:pt x="4766165" y="3202854"/>
-                  </a:lnTo>
-                  <a:lnTo>
-                    <a:pt x="4843799" y="3217939"/>
-                  </a:lnTo>
-                  <a:lnTo>
-                    <a:pt x="4921433" y="3232518"/>
-                  </a:lnTo>
-                  <a:lnTo>
-                    <a:pt x="4999067" y="3246608"/>
-                  </a:lnTo>
-                  <a:lnTo>
-                    <a:pt x="5076701" y="3260226"/>
-                  </a:lnTo>
-                  <a:lnTo>
-                    <a:pt x="5154335" y="3273386"/>
-                  </a:lnTo>
-                  <a:lnTo>
-                    <a:pt x="5231969" y="3286106"/>
-                  </a:lnTo>
-                  <a:lnTo>
-                    <a:pt x="5309603" y="3298399"/>
-                  </a:lnTo>
-                  <a:lnTo>
-                    <a:pt x="5387237" y="3310279"/>
-                  </a:lnTo>
-                  <a:lnTo>
-                    <a:pt x="5464871" y="3321761"/>
-                  </a:lnTo>
-                  <a:lnTo>
-                    <a:pt x="5542505" y="3332858"/>
-                  </a:lnTo>
-                  <a:lnTo>
-                    <a:pt x="5620139" y="3343583"/>
-                  </a:lnTo>
-                  <a:lnTo>
-                    <a:pt x="5697773" y="3353948"/>
-                  </a:lnTo>
-                  <a:lnTo>
-                    <a:pt x="5775407" y="3363966"/>
-                  </a:lnTo>
-                  <a:lnTo>
-                    <a:pt x="5853041" y="3373647"/>
-                  </a:lnTo>
-                  <a:lnTo>
-                    <a:pt x="5930675" y="3383004"/>
-                  </a:lnTo>
-                  <a:lnTo>
-                    <a:pt x="6008309" y="3392047"/>
-                  </a:lnTo>
-                  <a:lnTo>
-                    <a:pt x="6085943" y="3400787"/>
-                  </a:lnTo>
-                  <a:lnTo>
-                    <a:pt x="6163577" y="3409234"/>
-                  </a:lnTo>
-                  <a:lnTo>
-                    <a:pt x="6241212" y="3417397"/>
-                  </a:lnTo>
-                  <a:lnTo>
-                    <a:pt x="6318846" y="3425287"/>
-                  </a:lnTo>
-                  <a:lnTo>
-                    <a:pt x="6396480" y="3432912"/>
-                  </a:lnTo>
-                  <a:lnTo>
-                    <a:pt x="6474114" y="3440281"/>
-                  </a:lnTo>
-                  <a:lnTo>
-                    <a:pt x="6551748" y="3447403"/>
-                  </a:lnTo>
-                  <a:lnTo>
-                    <a:pt x="6629382" y="3454287"/>
-                  </a:lnTo>
-                  <a:lnTo>
-                    <a:pt x="6707016" y="3460939"/>
-                  </a:lnTo>
-                  <a:lnTo>
-                    <a:pt x="6784650" y="3467368"/>
-                  </a:lnTo>
-                  <a:lnTo>
-                    <a:pt x="6862284" y="3473582"/>
-                  </a:lnTo>
-                  <a:lnTo>
-                    <a:pt x="6939918" y="3479587"/>
-                  </a:lnTo>
-                  <a:lnTo>
-                    <a:pt x="7017552" y="3485391"/>
-                  </a:lnTo>
-                  <a:lnTo>
-                    <a:pt x="7095186" y="3491000"/>
-                  </a:lnTo>
-                  <a:lnTo>
-                    <a:pt x="7172820" y="3496422"/>
-                  </a:lnTo>
-                  <a:lnTo>
-                    <a:pt x="7250454" y="3501661"/>
+                    <a:pt x="30488" y="46838"/>
+                  </a:lnTo>
+                  <a:lnTo>
+                    <a:pt x="108122" y="162104"/>
+                  </a:lnTo>
+                  <a:lnTo>
+                    <a:pt x="185756" y="273504"/>
+                  </a:lnTo>
+                  <a:lnTo>
+                    <a:pt x="263390" y="381168"/>
+                  </a:lnTo>
+                  <a:lnTo>
+                    <a:pt x="341024" y="485221"/>
+                  </a:lnTo>
+                  <a:lnTo>
+                    <a:pt x="418658" y="585785"/>
+                  </a:lnTo>
+                  <a:lnTo>
+                    <a:pt x="496292" y="682976"/>
+                  </a:lnTo>
+                  <a:lnTo>
+                    <a:pt x="573926" y="776907"/>
+                  </a:lnTo>
+                  <a:lnTo>
+                    <a:pt x="651560" y="867688"/>
+                  </a:lnTo>
+                  <a:lnTo>
+                    <a:pt x="729194" y="955425"/>
+                  </a:lnTo>
+                  <a:lnTo>
+                    <a:pt x="806828" y="1040219"/>
+                  </a:lnTo>
+                  <a:lnTo>
+                    <a:pt x="884462" y="1122169"/>
+                  </a:lnTo>
+                  <a:lnTo>
+                    <a:pt x="962096" y="1201371"/>
+                  </a:lnTo>
+                  <a:lnTo>
+                    <a:pt x="1039731" y="1277917"/>
+                  </a:lnTo>
+                  <a:lnTo>
+                    <a:pt x="1117365" y="1351895"/>
+                  </a:lnTo>
+                  <a:lnTo>
+                    <a:pt x="1194999" y="1423393"/>
+                  </a:lnTo>
+                  <a:lnTo>
+                    <a:pt x="1272633" y="1492492"/>
+                  </a:lnTo>
+                  <a:lnTo>
+                    <a:pt x="1350267" y="1559274"/>
+                  </a:lnTo>
+                  <a:lnTo>
+                    <a:pt x="1427901" y="1623816"/>
+                  </a:lnTo>
+                  <a:lnTo>
+                    <a:pt x="1505535" y="1686194"/>
+                  </a:lnTo>
+                  <a:lnTo>
+                    <a:pt x="1583169" y="1746480"/>
+                  </a:lnTo>
+                  <a:lnTo>
+                    <a:pt x="1660803" y="1804744"/>
+                  </a:lnTo>
+                  <a:lnTo>
+                    <a:pt x="1738437" y="1861054"/>
+                  </a:lnTo>
+                  <a:lnTo>
+                    <a:pt x="1816071" y="1915475"/>
+                  </a:lnTo>
+                  <a:lnTo>
+                    <a:pt x="1893705" y="1968071"/>
+                  </a:lnTo>
+                  <a:lnTo>
+                    <a:pt x="1971339" y="2018904"/>
+                  </a:lnTo>
+                  <a:lnTo>
+                    <a:pt x="2048973" y="2068031"/>
+                  </a:lnTo>
+                  <a:lnTo>
+                    <a:pt x="2126607" y="2115511"/>
+                  </a:lnTo>
+                  <a:lnTo>
+                    <a:pt x="2204241" y="2161398"/>
+                  </a:lnTo>
+                  <a:lnTo>
+                    <a:pt x="2281875" y="2205747"/>
+                  </a:lnTo>
+                  <a:lnTo>
+                    <a:pt x="2359509" y="2248608"/>
+                  </a:lnTo>
+                  <a:lnTo>
+                    <a:pt x="2437143" y="2290032"/>
+                  </a:lnTo>
+                  <a:lnTo>
+                    <a:pt x="2514777" y="2330066"/>
+                  </a:lnTo>
+                  <a:lnTo>
+                    <a:pt x="2592411" y="2368758"/>
+                  </a:lnTo>
+                  <a:lnTo>
+                    <a:pt x="2670045" y="2406152"/>
+                  </a:lnTo>
+                  <a:lnTo>
+                    <a:pt x="2747680" y="2442292"/>
+                  </a:lnTo>
+                  <a:lnTo>
+                    <a:pt x="2825314" y="2477220"/>
+                  </a:lnTo>
+                  <a:lnTo>
+                    <a:pt x="2902948" y="2510977"/>
+                  </a:lnTo>
+                  <a:lnTo>
+                    <a:pt x="2980582" y="2543601"/>
+                  </a:lnTo>
+                  <a:lnTo>
+                    <a:pt x="3058216" y="2575131"/>
+                  </a:lnTo>
+                  <a:lnTo>
+                    <a:pt x="3135850" y="2605604"/>
+                  </a:lnTo>
+                  <a:lnTo>
+                    <a:pt x="3213484" y="2635055"/>
+                  </a:lnTo>
+                  <a:lnTo>
+                    <a:pt x="3291118" y="2663518"/>
+                  </a:lnTo>
+                  <a:lnTo>
+                    <a:pt x="3368752" y="2691027"/>
+                  </a:lnTo>
+                  <a:lnTo>
+                    <a:pt x="3446386" y="2717613"/>
+                  </a:lnTo>
+                  <a:lnTo>
+                    <a:pt x="3524020" y="2743307"/>
+                  </a:lnTo>
+                  <a:lnTo>
+                    <a:pt x="3601654" y="2768140"/>
+                  </a:lnTo>
+                  <a:lnTo>
+                    <a:pt x="3679288" y="2792140"/>
+                  </a:lnTo>
+                  <a:lnTo>
+                    <a:pt x="3756922" y="2815334"/>
+                  </a:lnTo>
+                  <a:lnTo>
+                    <a:pt x="3834556" y="2837751"/>
+                  </a:lnTo>
+                  <a:lnTo>
+                    <a:pt x="3912190" y="2859417"/>
+                  </a:lnTo>
+                  <a:lnTo>
+                    <a:pt x="3989824" y="2880355"/>
+                  </a:lnTo>
+                  <a:lnTo>
+                    <a:pt x="4067458" y="2900592"/>
+                  </a:lnTo>
+                  <a:lnTo>
+                    <a:pt x="4145092" y="2920149"/>
+                  </a:lnTo>
+                  <a:lnTo>
+                    <a:pt x="4222726" y="2939051"/>
+                  </a:lnTo>
+                  <a:lnTo>
+                    <a:pt x="4300360" y="2957319"/>
+                  </a:lnTo>
+                  <a:lnTo>
+                    <a:pt x="4377994" y="2974974"/>
+                  </a:lnTo>
+                  <a:lnTo>
+                    <a:pt x="4455629" y="2992037"/>
+                  </a:lnTo>
+                  <a:lnTo>
+                    <a:pt x="4533263" y="3008528"/>
+                  </a:lnTo>
+                  <a:lnTo>
+                    <a:pt x="4610897" y="3024466"/>
+                  </a:lnTo>
+                  <a:lnTo>
+                    <a:pt x="4688531" y="3039869"/>
+                  </a:lnTo>
+                  <a:lnTo>
+                    <a:pt x="4766165" y="3054755"/>
+                  </a:lnTo>
+                  <a:lnTo>
+                    <a:pt x="4843799" y="3069143"/>
+                  </a:lnTo>
+                  <a:lnTo>
+                    <a:pt x="4921433" y="3083048"/>
+                  </a:lnTo>
+                  <a:lnTo>
+                    <a:pt x="4999067" y="3096486"/>
+                  </a:lnTo>
+                  <a:lnTo>
+                    <a:pt x="5076701" y="3109474"/>
+                  </a:lnTo>
+                  <a:lnTo>
+                    <a:pt x="5154335" y="3122026"/>
+                  </a:lnTo>
+                  <a:lnTo>
+                    <a:pt x="5231969" y="3134157"/>
+                  </a:lnTo>
+                  <a:lnTo>
+                    <a:pt x="5309603" y="3145882"/>
+                  </a:lnTo>
+                  <a:lnTo>
+                    <a:pt x="5387237" y="3157213"/>
+                  </a:lnTo>
+                  <a:lnTo>
+                    <a:pt x="5464871" y="3168164"/>
+                  </a:lnTo>
+                  <a:lnTo>
+                    <a:pt x="5542505" y="3178748"/>
+                  </a:lnTo>
+                  <a:lnTo>
+                    <a:pt x="5620139" y="3188977"/>
+                  </a:lnTo>
+                  <a:lnTo>
+                    <a:pt x="5697773" y="3198863"/>
+                  </a:lnTo>
+                  <a:lnTo>
+                    <a:pt x="5775407" y="3208417"/>
+                  </a:lnTo>
+                  <a:lnTo>
+                    <a:pt x="5853041" y="3217651"/>
+                  </a:lnTo>
+                  <a:lnTo>
+                    <a:pt x="5930675" y="3226575"/>
+                  </a:lnTo>
+                  <a:lnTo>
+                    <a:pt x="6008309" y="3235200"/>
+                  </a:lnTo>
+                  <a:lnTo>
+                    <a:pt x="6085943" y="3243536"/>
+                  </a:lnTo>
+                  <a:lnTo>
+                    <a:pt x="6163577" y="3251592"/>
+                  </a:lnTo>
+                  <a:lnTo>
+                    <a:pt x="6241212" y="3259378"/>
+                  </a:lnTo>
+                  <a:lnTo>
+                    <a:pt x="6318846" y="3266903"/>
+                  </a:lnTo>
+                  <a:lnTo>
+                    <a:pt x="6396480" y="3274175"/>
+                  </a:lnTo>
+                  <a:lnTo>
+                    <a:pt x="6474114" y="3281204"/>
+                  </a:lnTo>
+                  <a:lnTo>
+                    <a:pt x="6551748" y="3287997"/>
+                  </a:lnTo>
+                  <a:lnTo>
+                    <a:pt x="6629382" y="3294562"/>
+                  </a:lnTo>
+                  <a:lnTo>
+                    <a:pt x="6707016" y="3300906"/>
+                  </a:lnTo>
+                  <a:lnTo>
+                    <a:pt x="6784650" y="3307038"/>
+                  </a:lnTo>
+                  <a:lnTo>
+                    <a:pt x="6862284" y="3312965"/>
+                  </a:lnTo>
+                  <a:lnTo>
+                    <a:pt x="6939918" y="3318692"/>
+                  </a:lnTo>
+                  <a:lnTo>
+                    <a:pt x="7017552" y="3324228"/>
+                  </a:lnTo>
+                  <a:lnTo>
+                    <a:pt x="7095186" y="3329578"/>
+                  </a:lnTo>
+                  <a:lnTo>
+                    <a:pt x="7172820" y="3334748"/>
+                  </a:lnTo>
+                  <a:lnTo>
+                    <a:pt x="7250454" y="3339745"/>
                   </a:lnTo>
                 </a:path>
               </a:pathLst>
@@ -4452,7 +4452,7 @@
           </p:nvSpPr>
           <p:spPr>
             <a:xfrm>
-              <a:off x="817517" y="4679530"/>
+              <a:off x="817517" y="4727786"/>
               <a:ext cx="7799693" cy="0"/>
             </a:xfrm>
             <a:custGeom>
@@ -4495,15 +4495,15 @@
           </p:nvSpPr>
           <p:spPr>
             <a:xfrm>
-              <a:off x="4203673" y="1896563"/>
-              <a:ext cx="0" cy="3826579"/>
+              <a:off x="4203673" y="2073503"/>
+              <a:ext cx="0" cy="3649639"/>
             </a:xfrm>
             <a:custGeom>
               <a:avLst/>
               <a:pathLst>
-                <a:path w="0" h="3826579">
+                <a:path w="0" h="3649639">
                   <a:moveTo>
-                    <a:pt x="0" y="3826579"/>
+                    <a:pt x="0" y="3649639"/>
                   </a:moveTo>
                   <a:lnTo>
                     <a:pt x="0" y="0"/>
@@ -4538,7 +4538,7 @@
           </p:nvSpPr>
           <p:spPr>
             <a:xfrm>
-              <a:off x="692708" y="5509156"/>
+              <a:off x="692708" y="5517199"/>
               <a:ext cx="62179" cy="80101"/>
             </a:xfrm>
             <a:prstGeom prst="rect">
@@ -4584,7 +4584,7 @@
           </p:nvSpPr>
           <p:spPr>
             <a:xfrm>
-              <a:off x="692708" y="4639479"/>
+              <a:off x="692708" y="4687735"/>
               <a:ext cx="62179" cy="80101"/>
             </a:xfrm>
             <a:prstGeom prst="rect">
@@ -4630,7 +4630,7 @@
           </p:nvSpPr>
           <p:spPr>
             <a:xfrm>
-              <a:off x="692708" y="3769802"/>
+              <a:off x="692708" y="3858272"/>
               <a:ext cx="62179" cy="80101"/>
             </a:xfrm>
             <a:prstGeom prst="rect">
@@ -4676,7 +4676,7 @@
           </p:nvSpPr>
           <p:spPr>
             <a:xfrm>
-              <a:off x="692708" y="2900125"/>
+              <a:off x="692708" y="3028808"/>
               <a:ext cx="62179" cy="80101"/>
             </a:xfrm>
             <a:prstGeom prst="rect">
@@ -4722,7 +4722,7 @@
           </p:nvSpPr>
           <p:spPr>
             <a:xfrm>
-              <a:off x="692708" y="2030448"/>
+              <a:off x="692708" y="2199345"/>
               <a:ext cx="62179" cy="80101"/>
             </a:xfrm>
             <a:prstGeom prst="rect">
@@ -4998,7 +4998,7 @@
           </p:nvSpPr>
           <p:spPr>
             <a:xfrm rot="-5400000">
-              <a:off x="68446" y="3759743"/>
+              <a:off x="68446" y="3848213"/>
               <a:ext cx="1016904" cy="100218"/>
             </a:xfrm>
             <a:prstGeom prst="rect">
@@ -5039,6 +5039,52 @@
         <p:sp>
           <p:nvSpPr>
             <p:cNvPr id="38" name="tx38"/>
+            <p:cNvSpPr/>
+            <p:nvPr/>
+          </p:nvSpPr>
+          <p:spPr>
+            <a:xfrm>
+              <a:off x="817517" y="1896563"/>
+              <a:ext cx="4233214" cy="82021"/>
+            </a:xfrm>
+            <a:prstGeom prst="rect">
+              <a:avLst/>
+            </a:prstGeom>
+            <a:noFill/>
+          </p:spPr>
+          <p:txBody>
+            <a:bodyPr lIns="0" rIns="0" tIns="0" bIns="0" anchorCtr="1" anchor="ctr" wrap="none"/>
+            <a:lstStyle/>
+            <a:p>
+              <a:pPr algn="l" marL="0" marR="0" indent="0">
+                <a:lnSpc>
+                  <a:spcPts val="900"/>
+                </a:lnSpc>
+                <a:spcBef>
+                  <a:spcPts val="0"/>
+                </a:spcBef>
+                <a:spcAft>
+                  <a:spcPts val="0"/>
+                </a:spcAft>
+              </a:pPr>
+              <a:r>
+                <a:rPr sz="900">
+                  <a:solidFill>
+                    <a:srgbClr val="404040">
+                      <a:alpha val="100000"/>
+                    </a:srgbClr>
+                  </a:solidFill>
+                  <a:latin typeface="Helvetica"/>
+                  <a:cs typeface="Helvetica"/>
+                </a:rPr>
+                <a:t>subHR = 0.68 (95% CI 0.54-0.85), p = &lt;0.001   (per 0.1-unit increase in eGFR ratio)</a:t>
+              </a:r>
+            </a:p>
+          </p:txBody>
+        </p:sp>
+        <p:sp>
+          <p:nvSpPr>
+            <p:cNvPr id="39" name="tx39"/>
             <p:cNvSpPr/>
             <p:nvPr/>
           </p:nvSpPr>

--- a/docs/plots/carbo/jx_carbo_linsubhr_ratio_anyhosp.pptx
+++ b/docs/plots/carbo/jx_carbo_linsubhr_ratio_anyhosp.pptx
@@ -2271,26 +2271,26 @@
           </p:nvSpPr>
           <p:spPr>
             <a:xfrm>
-              <a:off x="817517" y="5142518"/>
-              <a:ext cx="7799693" cy="0"/>
+              <a:off x="915645" y="5071743"/>
+              <a:ext cx="7682587" cy="0"/>
             </a:xfrm>
             <a:custGeom>
               <a:avLst/>
               <a:pathLst>
-                <a:path w="7799693" h="0">
+                <a:path w="7682587" h="0">
                   <a:moveTo>
                     <a:pt x="0" y="0"/>
                   </a:moveTo>
                   <a:lnTo>
-                    <a:pt x="7799693" y="0"/>
-                  </a:lnTo>
-                  <a:lnTo>
-                    <a:pt x="7799693" y="0"/>
+                    <a:pt x="7682587" y="0"/>
+                  </a:lnTo>
+                  <a:lnTo>
+                    <a:pt x="7682587" y="0"/>
                   </a:lnTo>
                 </a:path>
               </a:pathLst>
             </a:custGeom>
-            <a:ln w="6775" cap="flat">
+            <a:ln w="8623" cap="flat">
               <a:solidFill>
                 <a:srgbClr val="EBEBEB">
                   <a:alpha val="100000"/>
@@ -2314,26 +2314,26 @@
           </p:nvSpPr>
           <p:spPr>
             <a:xfrm>
-              <a:off x="817517" y="4313054"/>
-              <a:ext cx="7799693" cy="0"/>
+              <a:off x="915645" y="4298074"/>
+              <a:ext cx="7682587" cy="0"/>
             </a:xfrm>
             <a:custGeom>
               <a:avLst/>
               <a:pathLst>
-                <a:path w="7799693" h="0">
+                <a:path w="7682587" h="0">
                   <a:moveTo>
                     <a:pt x="0" y="0"/>
                   </a:moveTo>
                   <a:lnTo>
-                    <a:pt x="7799693" y="0"/>
-                  </a:lnTo>
-                  <a:lnTo>
-                    <a:pt x="7799693" y="0"/>
+                    <a:pt x="7682587" y="0"/>
+                  </a:lnTo>
+                  <a:lnTo>
+                    <a:pt x="7682587" y="0"/>
                   </a:lnTo>
                 </a:path>
               </a:pathLst>
             </a:custGeom>
-            <a:ln w="6775" cap="flat">
+            <a:ln w="8623" cap="flat">
               <a:solidFill>
                 <a:srgbClr val="EBEBEB">
                   <a:alpha val="100000"/>
@@ -2357,26 +2357,26 @@
           </p:nvSpPr>
           <p:spPr>
             <a:xfrm>
-              <a:off x="817517" y="3483591"/>
-              <a:ext cx="7799693" cy="0"/>
+              <a:off x="915645" y="3524405"/>
+              <a:ext cx="7682587" cy="0"/>
             </a:xfrm>
             <a:custGeom>
               <a:avLst/>
               <a:pathLst>
-                <a:path w="7799693" h="0">
+                <a:path w="7682587" h="0">
                   <a:moveTo>
                     <a:pt x="0" y="0"/>
                   </a:moveTo>
                   <a:lnTo>
-                    <a:pt x="7799693" y="0"/>
-                  </a:lnTo>
-                  <a:lnTo>
-                    <a:pt x="7799693" y="0"/>
+                    <a:pt x="7682587" y="0"/>
+                  </a:lnTo>
+                  <a:lnTo>
+                    <a:pt x="7682587" y="0"/>
                   </a:lnTo>
                 </a:path>
               </a:pathLst>
             </a:custGeom>
-            <a:ln w="6775" cap="flat">
+            <a:ln w="8623" cap="flat">
               <a:solidFill>
                 <a:srgbClr val="EBEBEB">
                   <a:alpha val="100000"/>
@@ -2400,26 +2400,26 @@
           </p:nvSpPr>
           <p:spPr>
             <a:xfrm>
-              <a:off x="817517" y="2654127"/>
-              <a:ext cx="7799693" cy="0"/>
+              <a:off x="915645" y="2750737"/>
+              <a:ext cx="7682587" cy="0"/>
             </a:xfrm>
             <a:custGeom>
               <a:avLst/>
               <a:pathLst>
-                <a:path w="7799693" h="0">
+                <a:path w="7682587" h="0">
                   <a:moveTo>
                     <a:pt x="0" y="0"/>
                   </a:moveTo>
                   <a:lnTo>
-                    <a:pt x="7799693" y="0"/>
-                  </a:lnTo>
-                  <a:lnTo>
-                    <a:pt x="7799693" y="0"/>
+                    <a:pt x="7682587" y="0"/>
+                  </a:lnTo>
+                  <a:lnTo>
+                    <a:pt x="7682587" y="0"/>
                   </a:lnTo>
                 </a:path>
               </a:pathLst>
             </a:custGeom>
-            <a:ln w="6775" cap="flat">
+            <a:ln w="8623" cap="flat">
               <a:solidFill>
                 <a:srgbClr val="EBEBEB">
                   <a:alpha val="100000"/>
@@ -2443,15 +2443,15 @@
           </p:nvSpPr>
           <p:spPr>
             <a:xfrm>
-              <a:off x="1615213" y="2073503"/>
-              <a:ext cx="0" cy="3649639"/>
+              <a:off x="1701364" y="2209169"/>
+              <a:ext cx="0" cy="3404141"/>
             </a:xfrm>
             <a:custGeom>
               <a:avLst/>
               <a:pathLst>
-                <a:path w="0" h="3649639">
+                <a:path w="0" h="3404141">
                   <a:moveTo>
-                    <a:pt x="0" y="3649639"/>
+                    <a:pt x="0" y="3404141"/>
                   </a:moveTo>
                   <a:lnTo>
                     <a:pt x="0" y="0"/>
@@ -2462,7 +2462,7 @@
                 </a:path>
               </a:pathLst>
             </a:custGeom>
-            <a:ln w="6775" cap="flat">
+            <a:ln w="8623" cap="flat">
               <a:solidFill>
                 <a:srgbClr val="EBEBEB">
                   <a:alpha val="100000"/>
@@ -2486,15 +2486,15 @@
           </p:nvSpPr>
           <p:spPr>
             <a:xfrm>
-              <a:off x="3387871" y="2073503"/>
-              <a:ext cx="0" cy="3649639"/>
+              <a:off x="3447406" y="2209169"/>
+              <a:ext cx="0" cy="3404141"/>
             </a:xfrm>
             <a:custGeom>
               <a:avLst/>
               <a:pathLst>
-                <a:path w="0" h="3649639">
+                <a:path w="0" h="3404141">
                   <a:moveTo>
-                    <a:pt x="0" y="3649639"/>
+                    <a:pt x="0" y="3404141"/>
                   </a:moveTo>
                   <a:lnTo>
                     <a:pt x="0" y="0"/>
@@ -2505,7 +2505,7 @@
                 </a:path>
               </a:pathLst>
             </a:custGeom>
-            <a:ln w="6775" cap="flat">
+            <a:ln w="8623" cap="flat">
               <a:solidFill>
                 <a:srgbClr val="EBEBEB">
                   <a:alpha val="100000"/>
@@ -2529,15 +2529,15 @@
           </p:nvSpPr>
           <p:spPr>
             <a:xfrm>
-              <a:off x="5160528" y="2073503"/>
-              <a:ext cx="0" cy="3649639"/>
+              <a:off x="5193449" y="2209169"/>
+              <a:ext cx="0" cy="3404141"/>
             </a:xfrm>
             <a:custGeom>
               <a:avLst/>
               <a:pathLst>
-                <a:path w="0" h="3649639">
+                <a:path w="0" h="3404141">
                   <a:moveTo>
-                    <a:pt x="0" y="3649639"/>
+                    <a:pt x="0" y="3404141"/>
                   </a:moveTo>
                   <a:lnTo>
                     <a:pt x="0" y="0"/>
@@ -2548,7 +2548,7 @@
                 </a:path>
               </a:pathLst>
             </a:custGeom>
-            <a:ln w="6775" cap="flat">
+            <a:ln w="8623" cap="flat">
               <a:solidFill>
                 <a:srgbClr val="EBEBEB">
                   <a:alpha val="100000"/>
@@ -2572,15 +2572,15 @@
           </p:nvSpPr>
           <p:spPr>
             <a:xfrm>
-              <a:off x="6933186" y="2073503"/>
-              <a:ext cx="0" cy="3649639"/>
+              <a:off x="6939491" y="2209169"/>
+              <a:ext cx="0" cy="3404141"/>
             </a:xfrm>
             <a:custGeom>
               <a:avLst/>
               <a:pathLst>
-                <a:path w="0" h="3649639">
+                <a:path w="0" h="3404141">
                   <a:moveTo>
-                    <a:pt x="0" y="3649639"/>
+                    <a:pt x="0" y="3404141"/>
                   </a:moveTo>
                   <a:lnTo>
                     <a:pt x="0" y="0"/>
@@ -2591,7 +2591,7 @@
                 </a:path>
               </a:pathLst>
             </a:custGeom>
-            <a:ln w="6775" cap="flat">
+            <a:ln w="8623" cap="flat">
               <a:solidFill>
                 <a:srgbClr val="EBEBEB">
                   <a:alpha val="100000"/>
@@ -2615,26 +2615,26 @@
           </p:nvSpPr>
           <p:spPr>
             <a:xfrm>
-              <a:off x="817517" y="5557249"/>
-              <a:ext cx="7799693" cy="0"/>
+              <a:off x="915645" y="5458577"/>
+              <a:ext cx="7682587" cy="0"/>
             </a:xfrm>
             <a:custGeom>
               <a:avLst/>
               <a:pathLst>
-                <a:path w="7799693" h="0">
+                <a:path w="7682587" h="0">
                   <a:moveTo>
                     <a:pt x="0" y="0"/>
                   </a:moveTo>
                   <a:lnTo>
-                    <a:pt x="7799693" y="0"/>
-                  </a:lnTo>
-                  <a:lnTo>
-                    <a:pt x="7799693" y="0"/>
+                    <a:pt x="7682587" y="0"/>
+                  </a:lnTo>
+                  <a:lnTo>
+                    <a:pt x="7682587" y="0"/>
                   </a:lnTo>
                 </a:path>
               </a:pathLst>
             </a:custGeom>
-            <a:ln w="13550" cap="flat">
+            <a:ln w="17246" cap="flat">
               <a:solidFill>
                 <a:srgbClr val="EBEBEB">
                   <a:alpha val="100000"/>
@@ -2658,26 +2658,26 @@
           </p:nvSpPr>
           <p:spPr>
             <a:xfrm>
-              <a:off x="817517" y="4727786"/>
-              <a:ext cx="7799693" cy="0"/>
+              <a:off x="915645" y="4684908"/>
+              <a:ext cx="7682587" cy="0"/>
             </a:xfrm>
             <a:custGeom>
               <a:avLst/>
               <a:pathLst>
-                <a:path w="7799693" h="0">
+                <a:path w="7682587" h="0">
                   <a:moveTo>
                     <a:pt x="0" y="0"/>
                   </a:moveTo>
                   <a:lnTo>
-                    <a:pt x="7799693" y="0"/>
-                  </a:lnTo>
-                  <a:lnTo>
-                    <a:pt x="7799693" y="0"/>
+                    <a:pt x="7682587" y="0"/>
+                  </a:lnTo>
+                  <a:lnTo>
+                    <a:pt x="7682587" y="0"/>
                   </a:lnTo>
                 </a:path>
               </a:pathLst>
             </a:custGeom>
-            <a:ln w="13550" cap="flat">
+            <a:ln w="17246" cap="flat">
               <a:solidFill>
                 <a:srgbClr val="EBEBEB">
                   <a:alpha val="100000"/>
@@ -2701,26 +2701,26 @@
           </p:nvSpPr>
           <p:spPr>
             <a:xfrm>
-              <a:off x="817517" y="3898322"/>
-              <a:ext cx="7799693" cy="0"/>
+              <a:off x="915645" y="3911240"/>
+              <a:ext cx="7682587" cy="0"/>
             </a:xfrm>
             <a:custGeom>
               <a:avLst/>
               <a:pathLst>
-                <a:path w="7799693" h="0">
+                <a:path w="7682587" h="0">
                   <a:moveTo>
                     <a:pt x="0" y="0"/>
                   </a:moveTo>
                   <a:lnTo>
-                    <a:pt x="7799693" y="0"/>
-                  </a:lnTo>
-                  <a:lnTo>
-                    <a:pt x="7799693" y="0"/>
+                    <a:pt x="7682587" y="0"/>
+                  </a:lnTo>
+                  <a:lnTo>
+                    <a:pt x="7682587" y="0"/>
                   </a:lnTo>
                 </a:path>
               </a:pathLst>
             </a:custGeom>
-            <a:ln w="13550" cap="flat">
+            <a:ln w="17246" cap="flat">
               <a:solidFill>
                 <a:srgbClr val="EBEBEB">
                   <a:alpha val="100000"/>
@@ -2744,26 +2744,26 @@
           </p:nvSpPr>
           <p:spPr>
             <a:xfrm>
-              <a:off x="817517" y="3068859"/>
-              <a:ext cx="7799693" cy="0"/>
+              <a:off x="915645" y="3137571"/>
+              <a:ext cx="7682587" cy="0"/>
             </a:xfrm>
             <a:custGeom>
               <a:avLst/>
               <a:pathLst>
-                <a:path w="7799693" h="0">
+                <a:path w="7682587" h="0">
                   <a:moveTo>
                     <a:pt x="0" y="0"/>
                   </a:moveTo>
                   <a:lnTo>
-                    <a:pt x="7799693" y="0"/>
-                  </a:lnTo>
-                  <a:lnTo>
-                    <a:pt x="7799693" y="0"/>
+                    <a:pt x="7682587" y="0"/>
+                  </a:lnTo>
+                  <a:lnTo>
+                    <a:pt x="7682587" y="0"/>
                   </a:lnTo>
                 </a:path>
               </a:pathLst>
             </a:custGeom>
-            <a:ln w="13550" cap="flat">
+            <a:ln w="17246" cap="flat">
               <a:solidFill>
                 <a:srgbClr val="EBEBEB">
                   <a:alpha val="100000"/>
@@ -2787,26 +2787,26 @@
           </p:nvSpPr>
           <p:spPr>
             <a:xfrm>
-              <a:off x="817517" y="2239395"/>
-              <a:ext cx="7799693" cy="0"/>
+              <a:off x="915645" y="2363903"/>
+              <a:ext cx="7682587" cy="0"/>
             </a:xfrm>
             <a:custGeom>
               <a:avLst/>
               <a:pathLst>
-                <a:path w="7799693" h="0">
+                <a:path w="7682587" h="0">
                   <a:moveTo>
                     <a:pt x="0" y="0"/>
                   </a:moveTo>
                   <a:lnTo>
-                    <a:pt x="7799693" y="0"/>
-                  </a:lnTo>
-                  <a:lnTo>
-                    <a:pt x="7799693" y="0"/>
+                    <a:pt x="7682587" y="0"/>
+                  </a:lnTo>
+                  <a:lnTo>
+                    <a:pt x="7682587" y="0"/>
                   </a:lnTo>
                 </a:path>
               </a:pathLst>
             </a:custGeom>
-            <a:ln w="13550" cap="flat">
+            <a:ln w="17246" cap="flat">
               <a:solidFill>
                 <a:srgbClr val="EBEBEB">
                   <a:alpha val="100000"/>
@@ -2830,15 +2830,15 @@
           </p:nvSpPr>
           <p:spPr>
             <a:xfrm>
-              <a:off x="2501542" y="2073503"/>
-              <a:ext cx="0" cy="3649639"/>
+              <a:off x="2574385" y="2209169"/>
+              <a:ext cx="0" cy="3404141"/>
             </a:xfrm>
             <a:custGeom>
               <a:avLst/>
               <a:pathLst>
-                <a:path w="0" h="3649639">
+                <a:path w="0" h="3404141">
                   <a:moveTo>
-                    <a:pt x="0" y="3649639"/>
+                    <a:pt x="0" y="3404141"/>
                   </a:moveTo>
                   <a:lnTo>
                     <a:pt x="0" y="0"/>
@@ -2849,7 +2849,7 @@
                 </a:path>
               </a:pathLst>
             </a:custGeom>
-            <a:ln w="13550" cap="flat">
+            <a:ln w="17246" cap="flat">
               <a:solidFill>
                 <a:srgbClr val="EBEBEB">
                   <a:alpha val="100000"/>
@@ -2873,15 +2873,15 @@
           </p:nvSpPr>
           <p:spPr>
             <a:xfrm>
-              <a:off x="4274200" y="2073503"/>
-              <a:ext cx="0" cy="3649639"/>
+              <a:off x="4320427" y="2209169"/>
+              <a:ext cx="0" cy="3404141"/>
             </a:xfrm>
             <a:custGeom>
               <a:avLst/>
               <a:pathLst>
-                <a:path w="0" h="3649639">
+                <a:path w="0" h="3404141">
                   <a:moveTo>
-                    <a:pt x="0" y="3649639"/>
+                    <a:pt x="0" y="3404141"/>
                   </a:moveTo>
                   <a:lnTo>
                     <a:pt x="0" y="0"/>
@@ -2892,7 +2892,7 @@
                 </a:path>
               </a:pathLst>
             </a:custGeom>
-            <a:ln w="13550" cap="flat">
+            <a:ln w="17246" cap="flat">
               <a:solidFill>
                 <a:srgbClr val="EBEBEB">
                   <a:alpha val="100000"/>
@@ -2916,15 +2916,15 @@
           </p:nvSpPr>
           <p:spPr>
             <a:xfrm>
-              <a:off x="6046857" y="2073503"/>
-              <a:ext cx="0" cy="3649639"/>
+              <a:off x="6066470" y="2209169"/>
+              <a:ext cx="0" cy="3404141"/>
             </a:xfrm>
             <a:custGeom>
               <a:avLst/>
               <a:pathLst>
-                <a:path w="0" h="3649639">
+                <a:path w="0" h="3404141">
                   <a:moveTo>
-                    <a:pt x="0" y="3649639"/>
+                    <a:pt x="0" y="3404141"/>
                   </a:moveTo>
                   <a:lnTo>
                     <a:pt x="0" y="0"/>
@@ -2935,7 +2935,7 @@
                 </a:path>
               </a:pathLst>
             </a:custGeom>
-            <a:ln w="13550" cap="flat">
+            <a:ln w="17246" cap="flat">
               <a:solidFill>
                 <a:srgbClr val="EBEBEB">
                   <a:alpha val="100000"/>
@@ -2959,15 +2959,15 @@
           </p:nvSpPr>
           <p:spPr>
             <a:xfrm>
-              <a:off x="7819515" y="2073503"/>
-              <a:ext cx="0" cy="3649639"/>
+              <a:off x="7812512" y="2209169"/>
+              <a:ext cx="0" cy="3404141"/>
             </a:xfrm>
             <a:custGeom>
               <a:avLst/>
               <a:pathLst>
-                <a:path w="0" h="3649639">
+                <a:path w="0" h="3404141">
                   <a:moveTo>
-                    <a:pt x="0" y="3649639"/>
+                    <a:pt x="0" y="3404141"/>
                   </a:moveTo>
                   <a:lnTo>
                     <a:pt x="0" y="0"/>
@@ -2978,7 +2978,7 @@
                 </a:path>
               </a:pathLst>
             </a:custGeom>
-            <a:ln w="13550" cap="flat">
+            <a:ln w="17246" cap="flat">
               <a:solidFill>
                 <a:srgbClr val="EBEBEB">
                   <a:alpha val="100000"/>
@@ -3002,537 +3002,537 @@
           </p:nvSpPr>
           <p:spPr>
             <a:xfrm>
-              <a:off x="817517" y="2073503"/>
-              <a:ext cx="7370972" cy="3432151"/>
+              <a:off x="915645" y="2209169"/>
+              <a:ext cx="7260303" cy="3201282"/>
             </a:xfrm>
             <a:custGeom>
               <a:avLst/>
               <a:pathLst>
-                <a:path w="7370972" h="3432151">
+                <a:path w="7260303" h="3201282">
                   <a:moveTo>
-                    <a:pt x="1327421" y="0"/>
+                    <a:pt x="1307491" y="0"/>
                   </a:moveTo>
                   <a:lnTo>
-                    <a:pt x="1393151" y="156622"/>
-                  </a:lnTo>
-                  <a:lnTo>
-                    <a:pt x="1470785" y="331866"/>
-                  </a:lnTo>
-                  <a:lnTo>
-                    <a:pt x="1548419" y="497881"/>
-                  </a:lnTo>
-                  <a:lnTo>
-                    <a:pt x="1626053" y="655151"/>
-                  </a:lnTo>
-                  <a:lnTo>
-                    <a:pt x="1703687" y="804137"/>
-                  </a:lnTo>
-                  <a:lnTo>
-                    <a:pt x="1781321" y="945277"/>
-                  </a:lnTo>
-                  <a:lnTo>
-                    <a:pt x="1858955" y="1078982"/>
-                  </a:lnTo>
-                  <a:lnTo>
-                    <a:pt x="1936589" y="1205644"/>
-                  </a:lnTo>
-                  <a:lnTo>
-                    <a:pt x="2014223" y="1325635"/>
-                  </a:lnTo>
-                  <a:lnTo>
-                    <a:pt x="2091857" y="1439306"/>
-                  </a:lnTo>
-                  <a:lnTo>
-                    <a:pt x="2169491" y="1546990"/>
-                  </a:lnTo>
-                  <a:lnTo>
-                    <a:pt x="2247125" y="1649002"/>
-                  </a:lnTo>
-                  <a:lnTo>
-                    <a:pt x="2324759" y="1745641"/>
-                  </a:lnTo>
-                  <a:lnTo>
-                    <a:pt x="2402393" y="1837190"/>
-                  </a:lnTo>
-                  <a:lnTo>
-                    <a:pt x="2480027" y="1923916"/>
-                  </a:lnTo>
-                  <a:lnTo>
-                    <a:pt x="2557661" y="2006075"/>
-                  </a:lnTo>
-                  <a:lnTo>
-                    <a:pt x="2635295" y="2083906"/>
-                  </a:lnTo>
-                  <a:lnTo>
-                    <a:pt x="2712930" y="2157638"/>
-                  </a:lnTo>
-                  <a:lnTo>
-                    <a:pt x="2790564" y="2227486"/>
-                  </a:lnTo>
-                  <a:lnTo>
-                    <a:pt x="2868198" y="2293655"/>
-                  </a:lnTo>
-                  <a:lnTo>
-                    <a:pt x="2945832" y="2356339"/>
-                  </a:lnTo>
-                  <a:lnTo>
-                    <a:pt x="3023466" y="2415722"/>
-                  </a:lnTo>
-                  <a:lnTo>
-                    <a:pt x="3101100" y="2471976"/>
-                  </a:lnTo>
-                  <a:lnTo>
-                    <a:pt x="3178734" y="2525268"/>
-                  </a:lnTo>
-                  <a:lnTo>
-                    <a:pt x="3256368" y="2575752"/>
-                  </a:lnTo>
-                  <a:lnTo>
-                    <a:pt x="3334002" y="2623578"/>
-                  </a:lnTo>
-                  <a:lnTo>
-                    <a:pt x="3411636" y="2658117"/>
-                  </a:lnTo>
-                  <a:lnTo>
-                    <a:pt x="3489270" y="2669690"/>
-                  </a:lnTo>
-                  <a:lnTo>
-                    <a:pt x="3566904" y="2681101"/>
-                  </a:lnTo>
-                  <a:lnTo>
-                    <a:pt x="3644538" y="2692352"/>
-                  </a:lnTo>
-                  <a:lnTo>
-                    <a:pt x="3722172" y="2703446"/>
-                  </a:lnTo>
-                  <a:lnTo>
-                    <a:pt x="3799806" y="2714383"/>
-                  </a:lnTo>
-                  <a:lnTo>
-                    <a:pt x="3877440" y="2725168"/>
-                  </a:lnTo>
-                  <a:lnTo>
-                    <a:pt x="3955074" y="2735801"/>
-                  </a:lnTo>
-                  <a:lnTo>
-                    <a:pt x="4032708" y="2746285"/>
-                  </a:lnTo>
-                  <a:lnTo>
-                    <a:pt x="4110342" y="2756623"/>
-                  </a:lnTo>
-                  <a:lnTo>
-                    <a:pt x="4187976" y="2766815"/>
-                  </a:lnTo>
-                  <a:lnTo>
-                    <a:pt x="4265610" y="2776864"/>
-                  </a:lnTo>
-                  <a:lnTo>
-                    <a:pt x="4343244" y="2786773"/>
-                  </a:lnTo>
-                  <a:lnTo>
-                    <a:pt x="4420879" y="2796543"/>
-                  </a:lnTo>
-                  <a:lnTo>
-                    <a:pt x="4498513" y="2806176"/>
-                  </a:lnTo>
-                  <a:lnTo>
-                    <a:pt x="4576147" y="2815673"/>
-                  </a:lnTo>
-                  <a:lnTo>
-                    <a:pt x="4653781" y="2825038"/>
-                  </a:lnTo>
-                  <a:lnTo>
-                    <a:pt x="4731415" y="2834271"/>
-                  </a:lnTo>
-                  <a:lnTo>
-                    <a:pt x="4809049" y="2843375"/>
-                  </a:lnTo>
-                  <a:lnTo>
-                    <a:pt x="4886683" y="2852352"/>
-                  </a:lnTo>
-                  <a:lnTo>
-                    <a:pt x="4964317" y="2861202"/>
-                  </a:lnTo>
-                  <a:lnTo>
-                    <a:pt x="5041951" y="2869929"/>
-                  </a:lnTo>
-                  <a:lnTo>
-                    <a:pt x="5119585" y="2878533"/>
-                  </a:lnTo>
-                  <a:lnTo>
-                    <a:pt x="5197219" y="2887016"/>
-                  </a:lnTo>
-                  <a:lnTo>
-                    <a:pt x="5274853" y="2895381"/>
-                  </a:lnTo>
-                  <a:lnTo>
-                    <a:pt x="5352487" y="2903628"/>
-                  </a:lnTo>
-                  <a:lnTo>
-                    <a:pt x="5430121" y="2911760"/>
-                  </a:lnTo>
-                  <a:lnTo>
-                    <a:pt x="5507755" y="2919778"/>
-                  </a:lnTo>
-                  <a:lnTo>
-                    <a:pt x="5585389" y="2927683"/>
-                  </a:lnTo>
-                  <a:lnTo>
-                    <a:pt x="5663023" y="2935478"/>
-                  </a:lnTo>
-                  <a:lnTo>
-                    <a:pt x="5740657" y="2943163"/>
-                  </a:lnTo>
-                  <a:lnTo>
-                    <a:pt x="5818291" y="2950741"/>
-                  </a:lnTo>
-                  <a:lnTo>
-                    <a:pt x="5895925" y="2958212"/>
-                  </a:lnTo>
-                  <a:lnTo>
-                    <a:pt x="5973559" y="2965578"/>
-                  </a:lnTo>
-                  <a:lnTo>
-                    <a:pt x="6051193" y="2972842"/>
-                  </a:lnTo>
-                  <a:lnTo>
-                    <a:pt x="6128827" y="2980003"/>
-                  </a:lnTo>
-                  <a:lnTo>
-                    <a:pt x="6206462" y="2987065"/>
-                  </a:lnTo>
-                  <a:lnTo>
-                    <a:pt x="6284096" y="2994027"/>
-                  </a:lnTo>
-                  <a:lnTo>
-                    <a:pt x="6361730" y="3000891"/>
-                  </a:lnTo>
-                  <a:lnTo>
-                    <a:pt x="6439364" y="3007660"/>
-                  </a:lnTo>
-                  <a:lnTo>
-                    <a:pt x="6516998" y="3014333"/>
-                  </a:lnTo>
-                  <a:lnTo>
-                    <a:pt x="6594632" y="3020913"/>
-                  </a:lnTo>
-                  <a:lnTo>
-                    <a:pt x="6672266" y="3027401"/>
-                  </a:lnTo>
-                  <a:lnTo>
-                    <a:pt x="6749900" y="3033798"/>
-                  </a:lnTo>
-                  <a:lnTo>
-                    <a:pt x="6827534" y="3040105"/>
-                  </a:lnTo>
-                  <a:lnTo>
-                    <a:pt x="6905168" y="3046323"/>
-                  </a:lnTo>
-                  <a:lnTo>
-                    <a:pt x="6982802" y="3052455"/>
-                  </a:lnTo>
-                  <a:lnTo>
-                    <a:pt x="7060436" y="3058501"/>
-                  </a:lnTo>
-                  <a:lnTo>
-                    <a:pt x="7138070" y="3064461"/>
-                  </a:lnTo>
-                  <a:lnTo>
-                    <a:pt x="7215704" y="3070339"/>
-                  </a:lnTo>
-                  <a:lnTo>
-                    <a:pt x="7293338" y="3076134"/>
-                  </a:lnTo>
-                  <a:lnTo>
-                    <a:pt x="7370972" y="3081847"/>
-                  </a:lnTo>
-                  <a:lnTo>
-                    <a:pt x="7370972" y="3432151"/>
-                  </a:lnTo>
-                  <a:lnTo>
-                    <a:pt x="7293338" y="3429282"/>
-                  </a:lnTo>
-                  <a:lnTo>
-                    <a:pt x="7215704" y="3426254"/>
-                  </a:lnTo>
-                  <a:lnTo>
-                    <a:pt x="7138070" y="3423057"/>
-                  </a:lnTo>
-                  <a:lnTo>
-                    <a:pt x="7060436" y="3419683"/>
-                  </a:lnTo>
-                  <a:lnTo>
-                    <a:pt x="6982802" y="3416121"/>
-                  </a:lnTo>
-                  <a:lnTo>
-                    <a:pt x="6905168" y="3412361"/>
-                  </a:lnTo>
-                  <a:lnTo>
-                    <a:pt x="6827534" y="3408392"/>
-                  </a:lnTo>
-                  <a:lnTo>
-                    <a:pt x="6749900" y="3404202"/>
-                  </a:lnTo>
-                  <a:lnTo>
-                    <a:pt x="6672266" y="3399779"/>
-                  </a:lnTo>
-                  <a:lnTo>
-                    <a:pt x="6594632" y="3395111"/>
-                  </a:lnTo>
-                  <a:lnTo>
-                    <a:pt x="6516998" y="3390183"/>
-                  </a:lnTo>
-                  <a:lnTo>
-                    <a:pt x="6439364" y="3384980"/>
-                  </a:lnTo>
-                  <a:lnTo>
-                    <a:pt x="6361730" y="3379489"/>
-                  </a:lnTo>
-                  <a:lnTo>
-                    <a:pt x="6284096" y="3373692"/>
-                  </a:lnTo>
-                  <a:lnTo>
-                    <a:pt x="6206462" y="3367573"/>
-                  </a:lnTo>
-                  <a:lnTo>
-                    <a:pt x="6128827" y="3361114"/>
-                  </a:lnTo>
-                  <a:lnTo>
-                    <a:pt x="6051193" y="3354296"/>
-                  </a:lnTo>
-                  <a:lnTo>
-                    <a:pt x="5973559" y="3347098"/>
-                  </a:lnTo>
-                  <a:lnTo>
-                    <a:pt x="5895925" y="3339501"/>
-                  </a:lnTo>
-                  <a:lnTo>
-                    <a:pt x="5818291" y="3331481"/>
-                  </a:lnTo>
-                  <a:lnTo>
-                    <a:pt x="5740657" y="3323015"/>
-                  </a:lnTo>
-                  <a:lnTo>
-                    <a:pt x="5663023" y="3314078"/>
-                  </a:lnTo>
-                  <a:lnTo>
-                    <a:pt x="5585389" y="3304644"/>
-                  </a:lnTo>
-                  <a:lnTo>
-                    <a:pt x="5507755" y="3294686"/>
-                  </a:lnTo>
-                  <a:lnTo>
-                    <a:pt x="5430121" y="3284174"/>
-                  </a:lnTo>
-                  <a:lnTo>
-                    <a:pt x="5352487" y="3273078"/>
-                  </a:lnTo>
-                  <a:lnTo>
-                    <a:pt x="5274853" y="3261365"/>
-                  </a:lnTo>
-                  <a:lnTo>
-                    <a:pt x="5197219" y="3249001"/>
-                  </a:lnTo>
-                  <a:lnTo>
-                    <a:pt x="5119585" y="3235949"/>
-                  </a:lnTo>
-                  <a:lnTo>
-                    <a:pt x="5041951" y="3222171"/>
-                  </a:lnTo>
-                  <a:lnTo>
-                    <a:pt x="4964317" y="3207628"/>
-                  </a:lnTo>
-                  <a:lnTo>
-                    <a:pt x="4886683" y="3192275"/>
-                  </a:lnTo>
-                  <a:lnTo>
-                    <a:pt x="4809049" y="3176070"/>
-                  </a:lnTo>
-                  <a:lnTo>
-                    <a:pt x="4731415" y="3158963"/>
-                  </a:lnTo>
-                  <a:lnTo>
-                    <a:pt x="4653781" y="3140905"/>
-                  </a:lnTo>
-                  <a:lnTo>
-                    <a:pt x="4576147" y="3121843"/>
-                  </a:lnTo>
-                  <a:lnTo>
-                    <a:pt x="4498513" y="3101721"/>
-                  </a:lnTo>
-                  <a:lnTo>
-                    <a:pt x="4420879" y="3080480"/>
-                  </a:lnTo>
-                  <a:lnTo>
-                    <a:pt x="4343244" y="3058058"/>
-                  </a:lnTo>
-                  <a:lnTo>
-                    <a:pt x="4265610" y="3034390"/>
-                  </a:lnTo>
-                  <a:lnTo>
-                    <a:pt x="4187976" y="3009406"/>
-                  </a:lnTo>
-                  <a:lnTo>
-                    <a:pt x="4110342" y="2983033"/>
-                  </a:lnTo>
-                  <a:lnTo>
-                    <a:pt x="4032708" y="2955193"/>
-                  </a:lnTo>
-                  <a:lnTo>
-                    <a:pt x="3955074" y="2925805"/>
-                  </a:lnTo>
-                  <a:lnTo>
-                    <a:pt x="3877440" y="2894784"/>
-                  </a:lnTo>
-                  <a:lnTo>
-                    <a:pt x="3799806" y="2862037"/>
-                  </a:lnTo>
-                  <a:lnTo>
-                    <a:pt x="3722172" y="2827470"/>
-                  </a:lnTo>
-                  <a:lnTo>
-                    <a:pt x="3644538" y="2790981"/>
-                  </a:lnTo>
-                  <a:lnTo>
-                    <a:pt x="3566904" y="2752463"/>
-                  </a:lnTo>
-                  <a:lnTo>
-                    <a:pt x="3489270" y="2711804"/>
-                  </a:lnTo>
-                  <a:lnTo>
-                    <a:pt x="3411636" y="2668884"/>
-                  </a:lnTo>
-                  <a:lnTo>
-                    <a:pt x="3334002" y="2646379"/>
-                  </a:lnTo>
-                  <a:lnTo>
-                    <a:pt x="3256368" y="2634475"/>
-                  </a:lnTo>
-                  <a:lnTo>
-                    <a:pt x="3178734" y="2622401"/>
-                  </a:lnTo>
-                  <a:lnTo>
-                    <a:pt x="3101100" y="2610156"/>
-                  </a:lnTo>
-                  <a:lnTo>
-                    <a:pt x="3023466" y="2597736"/>
-                  </a:lnTo>
-                  <a:lnTo>
-                    <a:pt x="2945832" y="2585140"/>
-                  </a:lnTo>
-                  <a:lnTo>
-                    <a:pt x="2868198" y="2572365"/>
-                  </a:lnTo>
-                  <a:lnTo>
-                    <a:pt x="2790564" y="2559408"/>
-                  </a:lnTo>
-                  <a:lnTo>
-                    <a:pt x="2712930" y="2546267"/>
-                  </a:lnTo>
-                  <a:lnTo>
-                    <a:pt x="2635295" y="2532939"/>
-                  </a:lnTo>
-                  <a:lnTo>
-                    <a:pt x="2557661" y="2519422"/>
-                  </a:lnTo>
-                  <a:lnTo>
-                    <a:pt x="2480027" y="2505712"/>
-                  </a:lnTo>
-                  <a:lnTo>
-                    <a:pt x="2402393" y="2491808"/>
-                  </a:lnTo>
-                  <a:lnTo>
-                    <a:pt x="2324759" y="2477706"/>
-                  </a:lnTo>
-                  <a:lnTo>
-                    <a:pt x="2247125" y="2463403"/>
-                  </a:lnTo>
-                  <a:lnTo>
-                    <a:pt x="2169491" y="2448897"/>
-                  </a:lnTo>
-                  <a:lnTo>
-                    <a:pt x="2091857" y="2434185"/>
-                  </a:lnTo>
-                  <a:lnTo>
-                    <a:pt x="2014223" y="2419264"/>
-                  </a:lnTo>
-                  <a:lnTo>
-                    <a:pt x="1936589" y="2404131"/>
-                  </a:lnTo>
-                  <a:lnTo>
-                    <a:pt x="1858955" y="2388782"/>
-                  </a:lnTo>
-                  <a:lnTo>
-                    <a:pt x="1781321" y="2373215"/>
-                  </a:lnTo>
-                  <a:lnTo>
-                    <a:pt x="1703687" y="2357427"/>
-                  </a:lnTo>
-                  <a:lnTo>
-                    <a:pt x="1626053" y="2341415"/>
-                  </a:lnTo>
-                  <a:lnTo>
-                    <a:pt x="1548419" y="2325175"/>
-                  </a:lnTo>
-                  <a:lnTo>
-                    <a:pt x="1470785" y="2308704"/>
-                  </a:lnTo>
-                  <a:lnTo>
-                    <a:pt x="1393151" y="2291998"/>
-                  </a:lnTo>
-                  <a:lnTo>
-                    <a:pt x="1315517" y="2275056"/>
-                  </a:lnTo>
-                  <a:lnTo>
-                    <a:pt x="1237883" y="2257872"/>
-                  </a:lnTo>
-                  <a:lnTo>
-                    <a:pt x="1160249" y="2240444"/>
-                  </a:lnTo>
-                  <a:lnTo>
-                    <a:pt x="1082615" y="2222769"/>
-                  </a:lnTo>
-                  <a:lnTo>
-                    <a:pt x="1004981" y="2204842"/>
-                  </a:lnTo>
-                  <a:lnTo>
-                    <a:pt x="927346" y="2186660"/>
-                  </a:lnTo>
-                  <a:lnTo>
-                    <a:pt x="849712" y="2168220"/>
-                  </a:lnTo>
-                  <a:lnTo>
-                    <a:pt x="772078" y="2149517"/>
-                  </a:lnTo>
-                  <a:lnTo>
-                    <a:pt x="694444" y="2130549"/>
-                  </a:lnTo>
-                  <a:lnTo>
-                    <a:pt x="616810" y="2111311"/>
-                  </a:lnTo>
-                  <a:lnTo>
-                    <a:pt x="539176" y="2091800"/>
-                  </a:lnTo>
-                  <a:lnTo>
-                    <a:pt x="461542" y="2072011"/>
-                  </a:lnTo>
-                  <a:lnTo>
-                    <a:pt x="383908" y="2051941"/>
-                  </a:lnTo>
-                  <a:lnTo>
-                    <a:pt x="306274" y="2031585"/>
-                  </a:lnTo>
-                  <a:lnTo>
-                    <a:pt x="228640" y="2010940"/>
-                  </a:lnTo>
-                  <a:lnTo>
-                    <a:pt x="151006" y="1990002"/>
-                  </a:lnTo>
-                  <a:lnTo>
-                    <a:pt x="73372" y="1968766"/>
-                  </a:lnTo>
-                  <a:lnTo>
-                    <a:pt x="0" y="1948410"/>
+                    <a:pt x="1372234" y="146086"/>
+                  </a:lnTo>
+                  <a:lnTo>
+                    <a:pt x="1448702" y="309543"/>
+                  </a:lnTo>
+                  <a:lnTo>
+                    <a:pt x="1525171" y="464390"/>
+                  </a:lnTo>
+                  <a:lnTo>
+                    <a:pt x="1601639" y="611081"/>
+                  </a:lnTo>
+                  <a:lnTo>
+                    <a:pt x="1678107" y="750046"/>
+                  </a:lnTo>
+                  <a:lnTo>
+                    <a:pt x="1754576" y="881691"/>
+                  </a:lnTo>
+                  <a:lnTo>
+                    <a:pt x="1831044" y="1006403"/>
+                  </a:lnTo>
+                  <a:lnTo>
+                    <a:pt x="1907513" y="1124545"/>
+                  </a:lnTo>
+                  <a:lnTo>
+                    <a:pt x="1983981" y="1236465"/>
+                  </a:lnTo>
+                  <a:lnTo>
+                    <a:pt x="2060450" y="1342490"/>
+                  </a:lnTo>
+                  <a:lnTo>
+                    <a:pt x="2136918" y="1442930"/>
+                  </a:lnTo>
+                  <a:lnTo>
+                    <a:pt x="2213386" y="1538080"/>
+                  </a:lnTo>
+                  <a:lnTo>
+                    <a:pt x="2289855" y="1628218"/>
+                  </a:lnTo>
+                  <a:lnTo>
+                    <a:pt x="2366323" y="1713609"/>
+                  </a:lnTo>
+                  <a:lnTo>
+                    <a:pt x="2442792" y="1794502"/>
+                  </a:lnTo>
+                  <a:lnTo>
+                    <a:pt x="2519260" y="1871134"/>
+                  </a:lnTo>
+                  <a:lnTo>
+                    <a:pt x="2595729" y="1943729"/>
+                  </a:lnTo>
+                  <a:lnTo>
+                    <a:pt x="2672197" y="2012502"/>
+                  </a:lnTo>
+                  <a:lnTo>
+                    <a:pt x="2748666" y="2077651"/>
+                  </a:lnTo>
+                  <a:lnTo>
+                    <a:pt x="2825134" y="2139370"/>
+                  </a:lnTo>
+                  <a:lnTo>
+                    <a:pt x="2901602" y="2197837"/>
+                  </a:lnTo>
+                  <a:lnTo>
+                    <a:pt x="2978071" y="2253225"/>
+                  </a:lnTo>
+                  <a:lnTo>
+                    <a:pt x="3054539" y="2305695"/>
+                  </a:lnTo>
+                  <a:lnTo>
+                    <a:pt x="3131008" y="2355402"/>
+                  </a:lnTo>
+                  <a:lnTo>
+                    <a:pt x="3207476" y="2402491"/>
+                  </a:lnTo>
+                  <a:lnTo>
+                    <a:pt x="3283945" y="2447099"/>
+                  </a:lnTo>
+                  <a:lnTo>
+                    <a:pt x="3360413" y="2479315"/>
+                  </a:lnTo>
+                  <a:lnTo>
+                    <a:pt x="3436881" y="2490110"/>
+                  </a:lnTo>
+                  <a:lnTo>
+                    <a:pt x="3513350" y="2500753"/>
+                  </a:lnTo>
+                  <a:lnTo>
+                    <a:pt x="3589818" y="2511248"/>
+                  </a:lnTo>
+                  <a:lnTo>
+                    <a:pt x="3666287" y="2521595"/>
+                  </a:lnTo>
+                  <a:lnTo>
+                    <a:pt x="3742755" y="2531797"/>
+                  </a:lnTo>
+                  <a:lnTo>
+                    <a:pt x="3819224" y="2541856"/>
+                  </a:lnTo>
+                  <a:lnTo>
+                    <a:pt x="3895692" y="2551774"/>
+                  </a:lnTo>
+                  <a:lnTo>
+                    <a:pt x="3972160" y="2561553"/>
+                  </a:lnTo>
+                  <a:lnTo>
+                    <a:pt x="4048629" y="2571195"/>
+                  </a:lnTo>
+                  <a:lnTo>
+                    <a:pt x="4125097" y="2580701"/>
+                  </a:lnTo>
+                  <a:lnTo>
+                    <a:pt x="4201566" y="2590075"/>
+                  </a:lnTo>
+                  <a:lnTo>
+                    <a:pt x="4278034" y="2599317"/>
+                  </a:lnTo>
+                  <a:lnTo>
+                    <a:pt x="4354503" y="2608430"/>
+                  </a:lnTo>
+                  <a:lnTo>
+                    <a:pt x="4430971" y="2617414"/>
+                  </a:lnTo>
+                  <a:lnTo>
+                    <a:pt x="4507439" y="2626273"/>
+                  </a:lnTo>
+                  <a:lnTo>
+                    <a:pt x="4583908" y="2635008"/>
+                  </a:lnTo>
+                  <a:lnTo>
+                    <a:pt x="4660376" y="2643620"/>
+                  </a:lnTo>
+                  <a:lnTo>
+                    <a:pt x="4736845" y="2652112"/>
+                  </a:lnTo>
+                  <a:lnTo>
+                    <a:pt x="4813313" y="2660484"/>
+                  </a:lnTo>
+                  <a:lnTo>
+                    <a:pt x="4889782" y="2668740"/>
+                  </a:lnTo>
+                  <a:lnTo>
+                    <a:pt x="4966250" y="2676879"/>
+                  </a:lnTo>
+                  <a:lnTo>
+                    <a:pt x="5042719" y="2684904"/>
+                  </a:lnTo>
+                  <a:lnTo>
+                    <a:pt x="5119187" y="2692817"/>
+                  </a:lnTo>
+                  <a:lnTo>
+                    <a:pt x="5195655" y="2700619"/>
+                  </a:lnTo>
+                  <a:lnTo>
+                    <a:pt x="5272124" y="2708312"/>
+                  </a:lnTo>
+                  <a:lnTo>
+                    <a:pt x="5348592" y="2715897"/>
+                  </a:lnTo>
+                  <a:lnTo>
+                    <a:pt x="5425061" y="2723375"/>
+                  </a:lnTo>
+                  <a:lnTo>
+                    <a:pt x="5501529" y="2730749"/>
+                  </a:lnTo>
+                  <a:lnTo>
+                    <a:pt x="5577998" y="2738019"/>
+                  </a:lnTo>
+                  <a:lnTo>
+                    <a:pt x="5654466" y="2745187"/>
+                  </a:lnTo>
+                  <a:lnTo>
+                    <a:pt x="5730934" y="2752255"/>
+                  </a:lnTo>
+                  <a:lnTo>
+                    <a:pt x="5807403" y="2759224"/>
+                  </a:lnTo>
+                  <a:lnTo>
+                    <a:pt x="5883871" y="2766095"/>
+                  </a:lnTo>
+                  <a:lnTo>
+                    <a:pt x="5960340" y="2772870"/>
+                  </a:lnTo>
+                  <a:lnTo>
+                    <a:pt x="6036808" y="2779549"/>
+                  </a:lnTo>
+                  <a:lnTo>
+                    <a:pt x="6113277" y="2786136"/>
+                  </a:lnTo>
+                  <a:lnTo>
+                    <a:pt x="6189745" y="2792630"/>
+                  </a:lnTo>
+                  <a:lnTo>
+                    <a:pt x="6266213" y="2799032"/>
+                  </a:lnTo>
+                  <a:lnTo>
+                    <a:pt x="6342682" y="2805345"/>
+                  </a:lnTo>
+                  <a:lnTo>
+                    <a:pt x="6419150" y="2811570"/>
+                  </a:lnTo>
+                  <a:lnTo>
+                    <a:pt x="6495619" y="2817707"/>
+                  </a:lnTo>
+                  <a:lnTo>
+                    <a:pt x="6572087" y="2823759"/>
+                  </a:lnTo>
+                  <a:lnTo>
+                    <a:pt x="6648556" y="2829725"/>
+                  </a:lnTo>
+                  <a:lnTo>
+                    <a:pt x="6725024" y="2835608"/>
+                  </a:lnTo>
+                  <a:lnTo>
+                    <a:pt x="6801492" y="2841408"/>
+                  </a:lnTo>
+                  <a:lnTo>
+                    <a:pt x="6877961" y="2847127"/>
+                  </a:lnTo>
+                  <a:lnTo>
+                    <a:pt x="6954429" y="2852766"/>
+                  </a:lnTo>
+                  <a:lnTo>
+                    <a:pt x="7030898" y="2858326"/>
+                  </a:lnTo>
+                  <a:lnTo>
+                    <a:pt x="7107366" y="2863808"/>
+                  </a:lnTo>
+                  <a:lnTo>
+                    <a:pt x="7183835" y="2869213"/>
+                  </a:lnTo>
+                  <a:lnTo>
+                    <a:pt x="7260303" y="2874543"/>
+                  </a:lnTo>
+                  <a:lnTo>
+                    <a:pt x="7260303" y="3201282"/>
+                  </a:lnTo>
+                  <a:lnTo>
+                    <a:pt x="7183835" y="3198607"/>
+                  </a:lnTo>
+                  <a:lnTo>
+                    <a:pt x="7107366" y="3195782"/>
+                  </a:lnTo>
+                  <a:lnTo>
+                    <a:pt x="7030898" y="3192801"/>
+                  </a:lnTo>
+                  <a:lnTo>
+                    <a:pt x="6954429" y="3189653"/>
+                  </a:lnTo>
+                  <a:lnTo>
+                    <a:pt x="6877961" y="3186331"/>
+                  </a:lnTo>
+                  <a:lnTo>
+                    <a:pt x="6801492" y="3182824"/>
+                  </a:lnTo>
+                  <a:lnTo>
+                    <a:pt x="6725024" y="3179122"/>
+                  </a:lnTo>
+                  <a:lnTo>
+                    <a:pt x="6648556" y="3175214"/>
+                  </a:lnTo>
+                  <a:lnTo>
+                    <a:pt x="6572087" y="3171089"/>
+                  </a:lnTo>
+                  <a:lnTo>
+                    <a:pt x="6495619" y="3166734"/>
+                  </a:lnTo>
+                  <a:lnTo>
+                    <a:pt x="6419150" y="3162137"/>
+                  </a:lnTo>
+                  <a:lnTo>
+                    <a:pt x="6342682" y="3157285"/>
+                  </a:lnTo>
+                  <a:lnTo>
+                    <a:pt x="6266213" y="3152163"/>
+                  </a:lnTo>
+                  <a:lnTo>
+                    <a:pt x="6189745" y="3146756"/>
+                  </a:lnTo>
+                  <a:lnTo>
+                    <a:pt x="6113277" y="3141049"/>
+                  </a:lnTo>
+                  <a:lnTo>
+                    <a:pt x="6036808" y="3135024"/>
+                  </a:lnTo>
+                  <a:lnTo>
+                    <a:pt x="5960340" y="3128665"/>
+                  </a:lnTo>
+                  <a:lnTo>
+                    <a:pt x="5883871" y="3121951"/>
+                  </a:lnTo>
+                  <a:lnTo>
+                    <a:pt x="5807403" y="3114865"/>
+                  </a:lnTo>
+                  <a:lnTo>
+                    <a:pt x="5730934" y="3107384"/>
+                  </a:lnTo>
+                  <a:lnTo>
+                    <a:pt x="5654466" y="3099488"/>
+                  </a:lnTo>
+                  <a:lnTo>
+                    <a:pt x="5577998" y="3091152"/>
+                  </a:lnTo>
+                  <a:lnTo>
+                    <a:pt x="5501529" y="3082353"/>
+                  </a:lnTo>
+                  <a:lnTo>
+                    <a:pt x="5425061" y="3073065"/>
+                  </a:lnTo>
+                  <a:lnTo>
+                    <a:pt x="5348592" y="3063260"/>
+                  </a:lnTo>
+                  <a:lnTo>
+                    <a:pt x="5272124" y="3052910"/>
+                  </a:lnTo>
+                  <a:lnTo>
+                    <a:pt x="5195655" y="3041985"/>
+                  </a:lnTo>
+                  <a:lnTo>
+                    <a:pt x="5119187" y="3030452"/>
+                  </a:lnTo>
+                  <a:lnTo>
+                    <a:pt x="5042719" y="3018278"/>
+                  </a:lnTo>
+                  <a:lnTo>
+                    <a:pt x="4966250" y="3005428"/>
+                  </a:lnTo>
+                  <a:lnTo>
+                    <a:pt x="4889782" y="2991862"/>
+                  </a:lnTo>
+                  <a:lnTo>
+                    <a:pt x="4813313" y="2977543"/>
+                  </a:lnTo>
+                  <a:lnTo>
+                    <a:pt x="4736845" y="2962427"/>
+                  </a:lnTo>
+                  <a:lnTo>
+                    <a:pt x="4660376" y="2946471"/>
+                  </a:lnTo>
+                  <a:lnTo>
+                    <a:pt x="4583908" y="2929628"/>
+                  </a:lnTo>
+                  <a:lnTo>
+                    <a:pt x="4507439" y="2911848"/>
+                  </a:lnTo>
+                  <a:lnTo>
+                    <a:pt x="4430971" y="2893079"/>
+                  </a:lnTo>
+                  <a:lnTo>
+                    <a:pt x="4354503" y="2873268"/>
+                  </a:lnTo>
+                  <a:lnTo>
+                    <a:pt x="4278034" y="2852354"/>
+                  </a:lnTo>
+                  <a:lnTo>
+                    <a:pt x="4201566" y="2830278"/>
+                  </a:lnTo>
+                  <a:lnTo>
+                    <a:pt x="4125097" y="2806974"/>
+                  </a:lnTo>
+                  <a:lnTo>
+                    <a:pt x="4048629" y="2782375"/>
+                  </a:lnTo>
+                  <a:lnTo>
+                    <a:pt x="3972160" y="2756408"/>
+                  </a:lnTo>
+                  <a:lnTo>
+                    <a:pt x="3895692" y="2728997"/>
+                  </a:lnTo>
+                  <a:lnTo>
+                    <a:pt x="3819224" y="2700062"/>
+                  </a:lnTo>
+                  <a:lnTo>
+                    <a:pt x="3742755" y="2669519"/>
+                  </a:lnTo>
+                  <a:lnTo>
+                    <a:pt x="3666287" y="2637277"/>
+                  </a:lnTo>
+                  <a:lnTo>
+                    <a:pt x="3589818" y="2603242"/>
+                  </a:lnTo>
+                  <a:lnTo>
+                    <a:pt x="3513350" y="2567315"/>
+                  </a:lnTo>
+                  <a:lnTo>
+                    <a:pt x="3436881" y="2529391"/>
+                  </a:lnTo>
+                  <a:lnTo>
+                    <a:pt x="3360413" y="2489358"/>
+                  </a:lnTo>
+                  <a:lnTo>
+                    <a:pt x="3283945" y="2468367"/>
+                  </a:lnTo>
+                  <a:lnTo>
+                    <a:pt x="3207476" y="2457263"/>
+                  </a:lnTo>
+                  <a:lnTo>
+                    <a:pt x="3131008" y="2446002"/>
+                  </a:lnTo>
+                  <a:lnTo>
+                    <a:pt x="3054539" y="2434580"/>
+                  </a:lnTo>
+                  <a:lnTo>
+                    <a:pt x="2978071" y="2422996"/>
+                  </a:lnTo>
+                  <a:lnTo>
+                    <a:pt x="2901602" y="2411247"/>
+                  </a:lnTo>
+                  <a:lnTo>
+                    <a:pt x="2825134" y="2399331"/>
+                  </a:lnTo>
+                  <a:lnTo>
+                    <a:pt x="2748666" y="2387246"/>
+                  </a:lnTo>
+                  <a:lnTo>
+                    <a:pt x="2672197" y="2374989"/>
+                  </a:lnTo>
+                  <a:lnTo>
+                    <a:pt x="2595729" y="2362558"/>
+                  </a:lnTo>
+                  <a:lnTo>
+                    <a:pt x="2519260" y="2349950"/>
+                  </a:lnTo>
+                  <a:lnTo>
+                    <a:pt x="2442792" y="2337162"/>
+                  </a:lnTo>
+                  <a:lnTo>
+                    <a:pt x="2366323" y="2324193"/>
+                  </a:lnTo>
+                  <a:lnTo>
+                    <a:pt x="2289855" y="2311040"/>
+                  </a:lnTo>
+                  <a:lnTo>
+                    <a:pt x="2213386" y="2297699"/>
+                  </a:lnTo>
+                  <a:lnTo>
+                    <a:pt x="2136918" y="2284169"/>
+                  </a:lnTo>
+                  <a:lnTo>
+                    <a:pt x="2060450" y="2270447"/>
+                  </a:lnTo>
+                  <a:lnTo>
+                    <a:pt x="1983981" y="2256529"/>
+                  </a:lnTo>
+                  <a:lnTo>
+                    <a:pt x="1907513" y="2242414"/>
+                  </a:lnTo>
+                  <a:lnTo>
+                    <a:pt x="1831044" y="2228098"/>
+                  </a:lnTo>
+                  <a:lnTo>
+                    <a:pt x="1754576" y="2213578"/>
+                  </a:lnTo>
+                  <a:lnTo>
+                    <a:pt x="1678107" y="2198852"/>
+                  </a:lnTo>
+                  <a:lnTo>
+                    <a:pt x="1601639" y="2183916"/>
+                  </a:lnTo>
+                  <a:lnTo>
+                    <a:pt x="1525171" y="2168769"/>
+                  </a:lnTo>
+                  <a:lnTo>
+                    <a:pt x="1448702" y="2153406"/>
+                  </a:lnTo>
+                  <a:lnTo>
+                    <a:pt x="1372234" y="2137824"/>
+                  </a:lnTo>
+                  <a:lnTo>
+                    <a:pt x="1295765" y="2122021"/>
+                  </a:lnTo>
+                  <a:lnTo>
+                    <a:pt x="1219297" y="2105993"/>
+                  </a:lnTo>
+                  <a:lnTo>
+                    <a:pt x="1142828" y="2089738"/>
+                  </a:lnTo>
+                  <a:lnTo>
+                    <a:pt x="1066360" y="2073251"/>
+                  </a:lnTo>
+                  <a:lnTo>
+                    <a:pt x="989892" y="2056530"/>
+                  </a:lnTo>
+                  <a:lnTo>
+                    <a:pt x="913423" y="2039572"/>
+                  </a:lnTo>
+                  <a:lnTo>
+                    <a:pt x="836955" y="2022372"/>
+                  </a:lnTo>
+                  <a:lnTo>
+                    <a:pt x="760486" y="2004927"/>
+                  </a:lnTo>
+                  <a:lnTo>
+                    <a:pt x="684018" y="1987235"/>
+                  </a:lnTo>
+                  <a:lnTo>
+                    <a:pt x="607549" y="1969291"/>
+                  </a:lnTo>
+                  <a:lnTo>
+                    <a:pt x="531081" y="1951092"/>
+                  </a:lnTo>
+                  <a:lnTo>
+                    <a:pt x="454613" y="1932634"/>
+                  </a:lnTo>
+                  <a:lnTo>
+                    <a:pt x="378144" y="1913914"/>
+                  </a:lnTo>
+                  <a:lnTo>
+                    <a:pt x="301676" y="1894928"/>
+                  </a:lnTo>
+                  <a:lnTo>
+                    <a:pt x="225207" y="1875672"/>
+                  </a:lnTo>
+                  <a:lnTo>
+                    <a:pt x="148739" y="1856142"/>
+                  </a:lnTo>
+                  <a:lnTo>
+                    <a:pt x="72270" y="1836334"/>
+                  </a:lnTo>
+                  <a:lnTo>
+                    <a:pt x="0" y="1817348"/>
                   </a:lnTo>
                   <a:close/>
                 </a:path>
@@ -3558,249 +3558,249 @@
           </p:nvSpPr>
           <p:spPr>
             <a:xfrm>
-              <a:off x="2144939" y="2073503"/>
-              <a:ext cx="6043551" cy="3081847"/>
+              <a:off x="2223136" y="2209169"/>
+              <a:ext cx="5952812" cy="2874543"/>
             </a:xfrm>
             <a:custGeom>
               <a:avLst/>
               <a:pathLst>
-                <a:path w="6043551" h="3081847">
+                <a:path w="5952812" h="2874543">
                   <a:moveTo>
                     <a:pt x="0" y="0"/>
                   </a:moveTo>
                   <a:lnTo>
-                    <a:pt x="65729" y="156622"/>
-                  </a:lnTo>
-                  <a:lnTo>
-                    <a:pt x="143363" y="331866"/>
-                  </a:lnTo>
-                  <a:lnTo>
-                    <a:pt x="220997" y="497881"/>
-                  </a:lnTo>
-                  <a:lnTo>
-                    <a:pt x="298631" y="655151"/>
-                  </a:lnTo>
-                  <a:lnTo>
-                    <a:pt x="376265" y="804137"/>
-                  </a:lnTo>
-                  <a:lnTo>
-                    <a:pt x="453899" y="945277"/>
-                  </a:lnTo>
-                  <a:lnTo>
-                    <a:pt x="531533" y="1078982"/>
-                  </a:lnTo>
-                  <a:lnTo>
-                    <a:pt x="609167" y="1205644"/>
-                  </a:lnTo>
-                  <a:lnTo>
-                    <a:pt x="686801" y="1325635"/>
-                  </a:lnTo>
-                  <a:lnTo>
-                    <a:pt x="764436" y="1439306"/>
-                  </a:lnTo>
-                  <a:lnTo>
-                    <a:pt x="842070" y="1546990"/>
-                  </a:lnTo>
-                  <a:lnTo>
-                    <a:pt x="919704" y="1649002"/>
-                  </a:lnTo>
-                  <a:lnTo>
-                    <a:pt x="997338" y="1745641"/>
-                  </a:lnTo>
-                  <a:lnTo>
-                    <a:pt x="1074972" y="1837190"/>
-                  </a:lnTo>
-                  <a:lnTo>
-                    <a:pt x="1152606" y="1923916"/>
-                  </a:lnTo>
-                  <a:lnTo>
-                    <a:pt x="1230240" y="2006075"/>
-                  </a:lnTo>
-                  <a:lnTo>
-                    <a:pt x="1307874" y="2083906"/>
-                  </a:lnTo>
-                  <a:lnTo>
-                    <a:pt x="1385508" y="2157638"/>
-                  </a:lnTo>
-                  <a:lnTo>
-                    <a:pt x="1463142" y="2227486"/>
-                  </a:lnTo>
-                  <a:lnTo>
-                    <a:pt x="1540776" y="2293655"/>
-                  </a:lnTo>
-                  <a:lnTo>
-                    <a:pt x="1618410" y="2356339"/>
-                  </a:lnTo>
-                  <a:lnTo>
-                    <a:pt x="1696044" y="2415722"/>
-                  </a:lnTo>
-                  <a:lnTo>
-                    <a:pt x="1773678" y="2471976"/>
-                  </a:lnTo>
-                  <a:lnTo>
-                    <a:pt x="1851312" y="2525268"/>
-                  </a:lnTo>
-                  <a:lnTo>
-                    <a:pt x="1928946" y="2575752"/>
-                  </a:lnTo>
-                  <a:lnTo>
-                    <a:pt x="2006580" y="2623578"/>
-                  </a:lnTo>
-                  <a:lnTo>
-                    <a:pt x="2084214" y="2658117"/>
-                  </a:lnTo>
-                  <a:lnTo>
-                    <a:pt x="2161848" y="2669690"/>
-                  </a:lnTo>
-                  <a:lnTo>
-                    <a:pt x="2239482" y="2681101"/>
-                  </a:lnTo>
-                  <a:lnTo>
-                    <a:pt x="2317116" y="2692352"/>
-                  </a:lnTo>
-                  <a:lnTo>
-                    <a:pt x="2394750" y="2703446"/>
-                  </a:lnTo>
-                  <a:lnTo>
-                    <a:pt x="2472384" y="2714383"/>
-                  </a:lnTo>
-                  <a:lnTo>
-                    <a:pt x="2550019" y="2725168"/>
-                  </a:lnTo>
-                  <a:lnTo>
-                    <a:pt x="2627653" y="2735801"/>
-                  </a:lnTo>
-                  <a:lnTo>
-                    <a:pt x="2705287" y="2746285"/>
-                  </a:lnTo>
-                  <a:lnTo>
-                    <a:pt x="2782921" y="2756623"/>
-                  </a:lnTo>
-                  <a:lnTo>
-                    <a:pt x="2860555" y="2766815"/>
-                  </a:lnTo>
-                  <a:lnTo>
-                    <a:pt x="2938189" y="2776864"/>
-                  </a:lnTo>
-                  <a:lnTo>
-                    <a:pt x="3015823" y="2786773"/>
-                  </a:lnTo>
-                  <a:lnTo>
-                    <a:pt x="3093457" y="2796543"/>
-                  </a:lnTo>
-                  <a:lnTo>
-                    <a:pt x="3171091" y="2806176"/>
-                  </a:lnTo>
-                  <a:lnTo>
-                    <a:pt x="3248725" y="2815673"/>
-                  </a:lnTo>
-                  <a:lnTo>
-                    <a:pt x="3326359" y="2825038"/>
-                  </a:lnTo>
-                  <a:lnTo>
-                    <a:pt x="3403993" y="2834271"/>
-                  </a:lnTo>
-                  <a:lnTo>
-                    <a:pt x="3481627" y="2843375"/>
-                  </a:lnTo>
-                  <a:lnTo>
-                    <a:pt x="3559261" y="2852352"/>
-                  </a:lnTo>
-                  <a:lnTo>
-                    <a:pt x="3636895" y="2861202"/>
-                  </a:lnTo>
-                  <a:lnTo>
-                    <a:pt x="3714529" y="2869929"/>
-                  </a:lnTo>
-                  <a:lnTo>
-                    <a:pt x="3792163" y="2878533"/>
-                  </a:lnTo>
-                  <a:lnTo>
-                    <a:pt x="3869797" y="2887016"/>
-                  </a:lnTo>
-                  <a:lnTo>
-                    <a:pt x="3947431" y="2895381"/>
-                  </a:lnTo>
-                  <a:lnTo>
-                    <a:pt x="4025065" y="2903628"/>
-                  </a:lnTo>
-                  <a:lnTo>
-                    <a:pt x="4102699" y="2911760"/>
-                  </a:lnTo>
-                  <a:lnTo>
-                    <a:pt x="4180333" y="2919778"/>
-                  </a:lnTo>
-                  <a:lnTo>
-                    <a:pt x="4257968" y="2927683"/>
-                  </a:lnTo>
-                  <a:lnTo>
-                    <a:pt x="4335602" y="2935478"/>
-                  </a:lnTo>
-                  <a:lnTo>
-                    <a:pt x="4413236" y="2943163"/>
-                  </a:lnTo>
-                  <a:lnTo>
-                    <a:pt x="4490870" y="2950741"/>
-                  </a:lnTo>
-                  <a:lnTo>
-                    <a:pt x="4568504" y="2958212"/>
-                  </a:lnTo>
-                  <a:lnTo>
-                    <a:pt x="4646138" y="2965578"/>
-                  </a:lnTo>
-                  <a:lnTo>
-                    <a:pt x="4723772" y="2972842"/>
-                  </a:lnTo>
-                  <a:lnTo>
-                    <a:pt x="4801406" y="2980003"/>
-                  </a:lnTo>
-                  <a:lnTo>
-                    <a:pt x="4879040" y="2987065"/>
-                  </a:lnTo>
-                  <a:lnTo>
-                    <a:pt x="4956674" y="2994027"/>
-                  </a:lnTo>
-                  <a:lnTo>
-                    <a:pt x="5034308" y="3000891"/>
-                  </a:lnTo>
-                  <a:lnTo>
-                    <a:pt x="5111942" y="3007660"/>
-                  </a:lnTo>
-                  <a:lnTo>
-                    <a:pt x="5189576" y="3014333"/>
-                  </a:lnTo>
-                  <a:lnTo>
-                    <a:pt x="5267210" y="3020913"/>
-                  </a:lnTo>
-                  <a:lnTo>
-                    <a:pt x="5344844" y="3027401"/>
-                  </a:lnTo>
-                  <a:lnTo>
-                    <a:pt x="5422478" y="3033798"/>
-                  </a:lnTo>
-                  <a:lnTo>
-                    <a:pt x="5500112" y="3040105"/>
-                  </a:lnTo>
-                  <a:lnTo>
-                    <a:pt x="5577746" y="3046323"/>
-                  </a:lnTo>
-                  <a:lnTo>
-                    <a:pt x="5655380" y="3052455"/>
-                  </a:lnTo>
-                  <a:lnTo>
-                    <a:pt x="5733014" y="3058501"/>
-                  </a:lnTo>
-                  <a:lnTo>
-                    <a:pt x="5810648" y="3064461"/>
-                  </a:lnTo>
-                  <a:lnTo>
-                    <a:pt x="5888282" y="3070339"/>
-                  </a:lnTo>
-                  <a:lnTo>
-                    <a:pt x="5965917" y="3076134"/>
-                  </a:lnTo>
-                  <a:lnTo>
-                    <a:pt x="6043551" y="3081847"/>
+                    <a:pt x="64742" y="146086"/>
+                  </a:lnTo>
+                  <a:lnTo>
+                    <a:pt x="141211" y="309543"/>
+                  </a:lnTo>
+                  <a:lnTo>
+                    <a:pt x="217679" y="464390"/>
+                  </a:lnTo>
+                  <a:lnTo>
+                    <a:pt x="294148" y="611081"/>
+                  </a:lnTo>
+                  <a:lnTo>
+                    <a:pt x="370616" y="750046"/>
+                  </a:lnTo>
+                  <a:lnTo>
+                    <a:pt x="447084" y="881691"/>
+                  </a:lnTo>
+                  <a:lnTo>
+                    <a:pt x="523553" y="1006403"/>
+                  </a:lnTo>
+                  <a:lnTo>
+                    <a:pt x="600021" y="1124545"/>
+                  </a:lnTo>
+                  <a:lnTo>
+                    <a:pt x="676490" y="1236465"/>
+                  </a:lnTo>
+                  <a:lnTo>
+                    <a:pt x="752958" y="1342490"/>
+                  </a:lnTo>
+                  <a:lnTo>
+                    <a:pt x="829427" y="1442930"/>
+                  </a:lnTo>
+                  <a:lnTo>
+                    <a:pt x="905895" y="1538080"/>
+                  </a:lnTo>
+                  <a:lnTo>
+                    <a:pt x="982363" y="1628218"/>
+                  </a:lnTo>
+                  <a:lnTo>
+                    <a:pt x="1058832" y="1713609"/>
+                  </a:lnTo>
+                  <a:lnTo>
+                    <a:pt x="1135300" y="1794502"/>
+                  </a:lnTo>
+                  <a:lnTo>
+                    <a:pt x="1211769" y="1871134"/>
+                  </a:lnTo>
+                  <a:lnTo>
+                    <a:pt x="1288237" y="1943729"/>
+                  </a:lnTo>
+                  <a:lnTo>
+                    <a:pt x="1364706" y="2012502"/>
+                  </a:lnTo>
+                  <a:lnTo>
+                    <a:pt x="1441174" y="2077651"/>
+                  </a:lnTo>
+                  <a:lnTo>
+                    <a:pt x="1517642" y="2139370"/>
+                  </a:lnTo>
+                  <a:lnTo>
+                    <a:pt x="1594111" y="2197837"/>
+                  </a:lnTo>
+                  <a:lnTo>
+                    <a:pt x="1670579" y="2253225"/>
+                  </a:lnTo>
+                  <a:lnTo>
+                    <a:pt x="1747048" y="2305695"/>
+                  </a:lnTo>
+                  <a:lnTo>
+                    <a:pt x="1823516" y="2355402"/>
+                  </a:lnTo>
+                  <a:lnTo>
+                    <a:pt x="1899985" y="2402491"/>
+                  </a:lnTo>
+                  <a:lnTo>
+                    <a:pt x="1976453" y="2447099"/>
+                  </a:lnTo>
+                  <a:lnTo>
+                    <a:pt x="2052921" y="2479315"/>
+                  </a:lnTo>
+                  <a:lnTo>
+                    <a:pt x="2129390" y="2490110"/>
+                  </a:lnTo>
+                  <a:lnTo>
+                    <a:pt x="2205858" y="2500753"/>
+                  </a:lnTo>
+                  <a:lnTo>
+                    <a:pt x="2282327" y="2511248"/>
+                  </a:lnTo>
+                  <a:lnTo>
+                    <a:pt x="2358795" y="2521595"/>
+                  </a:lnTo>
+                  <a:lnTo>
+                    <a:pt x="2435264" y="2531797"/>
+                  </a:lnTo>
+                  <a:lnTo>
+                    <a:pt x="2511732" y="2541856"/>
+                  </a:lnTo>
+                  <a:lnTo>
+                    <a:pt x="2588201" y="2551774"/>
+                  </a:lnTo>
+                  <a:lnTo>
+                    <a:pt x="2664669" y="2561553"/>
+                  </a:lnTo>
+                  <a:lnTo>
+                    <a:pt x="2741137" y="2571195"/>
+                  </a:lnTo>
+                  <a:lnTo>
+                    <a:pt x="2817606" y="2580701"/>
+                  </a:lnTo>
+                  <a:lnTo>
+                    <a:pt x="2894074" y="2590075"/>
+                  </a:lnTo>
+                  <a:lnTo>
+                    <a:pt x="2970543" y="2599317"/>
+                  </a:lnTo>
+                  <a:lnTo>
+                    <a:pt x="3047011" y="2608430"/>
+                  </a:lnTo>
+                  <a:lnTo>
+                    <a:pt x="3123480" y="2617414"/>
+                  </a:lnTo>
+                  <a:lnTo>
+                    <a:pt x="3199948" y="2626273"/>
+                  </a:lnTo>
+                  <a:lnTo>
+                    <a:pt x="3276416" y="2635008"/>
+                  </a:lnTo>
+                  <a:lnTo>
+                    <a:pt x="3352885" y="2643620"/>
+                  </a:lnTo>
+                  <a:lnTo>
+                    <a:pt x="3429353" y="2652112"/>
+                  </a:lnTo>
+                  <a:lnTo>
+                    <a:pt x="3505822" y="2660484"/>
+                  </a:lnTo>
+                  <a:lnTo>
+                    <a:pt x="3582290" y="2668740"/>
+                  </a:lnTo>
+                  <a:lnTo>
+                    <a:pt x="3658759" y="2676879"/>
+                  </a:lnTo>
+                  <a:lnTo>
+                    <a:pt x="3735227" y="2684904"/>
+                  </a:lnTo>
+                  <a:lnTo>
+                    <a:pt x="3811695" y="2692817"/>
+                  </a:lnTo>
+                  <a:lnTo>
+                    <a:pt x="3888164" y="2700619"/>
+                  </a:lnTo>
+                  <a:lnTo>
+                    <a:pt x="3964632" y="2708312"/>
+                  </a:lnTo>
+                  <a:lnTo>
+                    <a:pt x="4041101" y="2715897"/>
+                  </a:lnTo>
+                  <a:lnTo>
+                    <a:pt x="4117569" y="2723375"/>
+                  </a:lnTo>
+                  <a:lnTo>
+                    <a:pt x="4194038" y="2730749"/>
+                  </a:lnTo>
+                  <a:lnTo>
+                    <a:pt x="4270506" y="2738019"/>
+                  </a:lnTo>
+                  <a:lnTo>
+                    <a:pt x="4346974" y="2745187"/>
+                  </a:lnTo>
+                  <a:lnTo>
+                    <a:pt x="4423443" y="2752255"/>
+                  </a:lnTo>
+                  <a:lnTo>
+                    <a:pt x="4499911" y="2759224"/>
+                  </a:lnTo>
+                  <a:lnTo>
+                    <a:pt x="4576380" y="2766095"/>
+                  </a:lnTo>
+                  <a:lnTo>
+                    <a:pt x="4652848" y="2772870"/>
+                  </a:lnTo>
+                  <a:lnTo>
+                    <a:pt x="4729317" y="2779549"/>
+                  </a:lnTo>
+                  <a:lnTo>
+                    <a:pt x="4805785" y="2786136"/>
+                  </a:lnTo>
+                  <a:lnTo>
+                    <a:pt x="4882254" y="2792630"/>
+                  </a:lnTo>
+                  <a:lnTo>
+                    <a:pt x="4958722" y="2799032"/>
+                  </a:lnTo>
+                  <a:lnTo>
+                    <a:pt x="5035190" y="2805345"/>
+                  </a:lnTo>
+                  <a:lnTo>
+                    <a:pt x="5111659" y="2811570"/>
+                  </a:lnTo>
+                  <a:lnTo>
+                    <a:pt x="5188127" y="2817707"/>
+                  </a:lnTo>
+                  <a:lnTo>
+                    <a:pt x="5264596" y="2823759"/>
+                  </a:lnTo>
+                  <a:lnTo>
+                    <a:pt x="5341064" y="2829725"/>
+                  </a:lnTo>
+                  <a:lnTo>
+                    <a:pt x="5417533" y="2835608"/>
+                  </a:lnTo>
+                  <a:lnTo>
+                    <a:pt x="5494001" y="2841408"/>
+                  </a:lnTo>
+                  <a:lnTo>
+                    <a:pt x="5570469" y="2847127"/>
+                  </a:lnTo>
+                  <a:lnTo>
+                    <a:pt x="5646938" y="2852766"/>
+                  </a:lnTo>
+                  <a:lnTo>
+                    <a:pt x="5723406" y="2858326"/>
+                  </a:lnTo>
+                  <a:lnTo>
+                    <a:pt x="5799875" y="2863808"/>
+                  </a:lnTo>
+                  <a:lnTo>
+                    <a:pt x="5876343" y="2869213"/>
+                  </a:lnTo>
+                  <a:lnTo>
+                    <a:pt x="5952812" y="2874543"/>
                   </a:lnTo>
                 </a:path>
               </a:pathLst>
@@ -3820,297 +3820,297 @@
           </p:nvSpPr>
           <p:spPr>
             <a:xfrm>
-              <a:off x="817517" y="4021913"/>
-              <a:ext cx="7370972" cy="1483740"/>
+              <a:off x="915645" y="4026517"/>
+              <a:ext cx="7260303" cy="1383934"/>
             </a:xfrm>
             <a:custGeom>
               <a:avLst/>
               <a:pathLst>
-                <a:path w="7370972" h="1483740">
+                <a:path w="7260303" h="1383934">
                   <a:moveTo>
-                    <a:pt x="7370972" y="1483740"/>
+                    <a:pt x="7260303" y="1383934"/>
                   </a:moveTo>
                   <a:lnTo>
-                    <a:pt x="7293338" y="1480871"/>
-                  </a:lnTo>
-                  <a:lnTo>
-                    <a:pt x="7215704" y="1477843"/>
-                  </a:lnTo>
-                  <a:lnTo>
-                    <a:pt x="7138070" y="1474646"/>
-                  </a:lnTo>
-                  <a:lnTo>
-                    <a:pt x="7060436" y="1471272"/>
-                  </a:lnTo>
-                  <a:lnTo>
-                    <a:pt x="6982802" y="1467710"/>
-                  </a:lnTo>
-                  <a:lnTo>
-                    <a:pt x="6905168" y="1463950"/>
-                  </a:lnTo>
-                  <a:lnTo>
-                    <a:pt x="6827534" y="1459981"/>
-                  </a:lnTo>
-                  <a:lnTo>
-                    <a:pt x="6749900" y="1455791"/>
-                  </a:lnTo>
-                  <a:lnTo>
-                    <a:pt x="6672266" y="1451369"/>
-                  </a:lnTo>
-                  <a:lnTo>
-                    <a:pt x="6594632" y="1446700"/>
-                  </a:lnTo>
-                  <a:lnTo>
-                    <a:pt x="6516998" y="1441772"/>
-                  </a:lnTo>
-                  <a:lnTo>
-                    <a:pt x="6439364" y="1436570"/>
-                  </a:lnTo>
-                  <a:lnTo>
-                    <a:pt x="6361730" y="1431078"/>
-                  </a:lnTo>
-                  <a:lnTo>
-                    <a:pt x="6284096" y="1425282"/>
-                  </a:lnTo>
-                  <a:lnTo>
-                    <a:pt x="6206462" y="1419163"/>
-                  </a:lnTo>
-                  <a:lnTo>
-                    <a:pt x="6128827" y="1412703"/>
-                  </a:lnTo>
-                  <a:lnTo>
-                    <a:pt x="6051193" y="1405885"/>
-                  </a:lnTo>
-                  <a:lnTo>
-                    <a:pt x="5973559" y="1398688"/>
-                  </a:lnTo>
-                  <a:lnTo>
-                    <a:pt x="5895925" y="1391090"/>
-                  </a:lnTo>
-                  <a:lnTo>
-                    <a:pt x="5818291" y="1383070"/>
-                  </a:lnTo>
-                  <a:lnTo>
-                    <a:pt x="5740657" y="1374604"/>
-                  </a:lnTo>
-                  <a:lnTo>
-                    <a:pt x="5663023" y="1365667"/>
-                  </a:lnTo>
-                  <a:lnTo>
-                    <a:pt x="5585389" y="1356234"/>
-                  </a:lnTo>
-                  <a:lnTo>
-                    <a:pt x="5507755" y="1346276"/>
-                  </a:lnTo>
-                  <a:lnTo>
-                    <a:pt x="5430121" y="1335764"/>
-                  </a:lnTo>
-                  <a:lnTo>
-                    <a:pt x="5352487" y="1324668"/>
-                  </a:lnTo>
-                  <a:lnTo>
-                    <a:pt x="5274853" y="1312954"/>
-                  </a:lnTo>
-                  <a:lnTo>
-                    <a:pt x="5197219" y="1300590"/>
-                  </a:lnTo>
-                  <a:lnTo>
-                    <a:pt x="5119585" y="1287538"/>
-                  </a:lnTo>
-                  <a:lnTo>
-                    <a:pt x="5041951" y="1273760"/>
-                  </a:lnTo>
-                  <a:lnTo>
-                    <a:pt x="4964317" y="1259217"/>
-                  </a:lnTo>
-                  <a:lnTo>
-                    <a:pt x="4886683" y="1243865"/>
-                  </a:lnTo>
-                  <a:lnTo>
-                    <a:pt x="4809049" y="1227659"/>
-                  </a:lnTo>
-                  <a:lnTo>
-                    <a:pt x="4731415" y="1210552"/>
-                  </a:lnTo>
-                  <a:lnTo>
-                    <a:pt x="4653781" y="1192494"/>
-                  </a:lnTo>
-                  <a:lnTo>
-                    <a:pt x="4576147" y="1173432"/>
-                  </a:lnTo>
-                  <a:lnTo>
-                    <a:pt x="4498513" y="1153310"/>
-                  </a:lnTo>
-                  <a:lnTo>
-                    <a:pt x="4420879" y="1132069"/>
-                  </a:lnTo>
-                  <a:lnTo>
-                    <a:pt x="4343244" y="1109648"/>
-                  </a:lnTo>
-                  <a:lnTo>
-                    <a:pt x="4265610" y="1085980"/>
-                  </a:lnTo>
-                  <a:lnTo>
-                    <a:pt x="4187976" y="1060995"/>
-                  </a:lnTo>
-                  <a:lnTo>
-                    <a:pt x="4110342" y="1034622"/>
-                  </a:lnTo>
-                  <a:lnTo>
-                    <a:pt x="4032708" y="1006782"/>
-                  </a:lnTo>
-                  <a:lnTo>
-                    <a:pt x="3955074" y="977395"/>
-                  </a:lnTo>
-                  <a:lnTo>
-                    <a:pt x="3877440" y="946373"/>
-                  </a:lnTo>
-                  <a:lnTo>
-                    <a:pt x="3799806" y="913627"/>
-                  </a:lnTo>
-                  <a:lnTo>
-                    <a:pt x="3722172" y="879060"/>
-                  </a:lnTo>
-                  <a:lnTo>
-                    <a:pt x="3644538" y="842571"/>
-                  </a:lnTo>
-                  <a:lnTo>
-                    <a:pt x="3566904" y="804053"/>
-                  </a:lnTo>
-                  <a:lnTo>
-                    <a:pt x="3489270" y="763393"/>
-                  </a:lnTo>
-                  <a:lnTo>
-                    <a:pt x="3411636" y="720473"/>
-                  </a:lnTo>
-                  <a:lnTo>
-                    <a:pt x="3334002" y="697969"/>
-                  </a:lnTo>
-                  <a:lnTo>
-                    <a:pt x="3256368" y="686064"/>
-                  </a:lnTo>
-                  <a:lnTo>
-                    <a:pt x="3178734" y="673990"/>
-                  </a:lnTo>
-                  <a:lnTo>
-                    <a:pt x="3101100" y="661745"/>
-                  </a:lnTo>
-                  <a:lnTo>
-                    <a:pt x="3023466" y="649325"/>
-                  </a:lnTo>
-                  <a:lnTo>
-                    <a:pt x="2945832" y="636729"/>
-                  </a:lnTo>
-                  <a:lnTo>
-                    <a:pt x="2868198" y="623954"/>
-                  </a:lnTo>
-                  <a:lnTo>
-                    <a:pt x="2790564" y="610997"/>
-                  </a:lnTo>
-                  <a:lnTo>
-                    <a:pt x="2712930" y="597856"/>
-                  </a:lnTo>
-                  <a:lnTo>
-                    <a:pt x="2635295" y="584528"/>
-                  </a:lnTo>
-                  <a:lnTo>
-                    <a:pt x="2557661" y="571011"/>
-                  </a:lnTo>
-                  <a:lnTo>
-                    <a:pt x="2480027" y="557302"/>
-                  </a:lnTo>
-                  <a:lnTo>
-                    <a:pt x="2402393" y="543397"/>
-                  </a:lnTo>
-                  <a:lnTo>
-                    <a:pt x="2324759" y="529295"/>
-                  </a:lnTo>
-                  <a:lnTo>
-                    <a:pt x="2247125" y="514993"/>
-                  </a:lnTo>
-                  <a:lnTo>
-                    <a:pt x="2169491" y="500487"/>
-                  </a:lnTo>
-                  <a:lnTo>
-                    <a:pt x="2091857" y="485775"/>
-                  </a:lnTo>
-                  <a:lnTo>
-                    <a:pt x="2014223" y="470853"/>
-                  </a:lnTo>
-                  <a:lnTo>
-                    <a:pt x="1936589" y="455720"/>
-                  </a:lnTo>
-                  <a:lnTo>
-                    <a:pt x="1858955" y="440371"/>
-                  </a:lnTo>
-                  <a:lnTo>
-                    <a:pt x="1781321" y="424805"/>
-                  </a:lnTo>
-                  <a:lnTo>
-                    <a:pt x="1703687" y="409017"/>
-                  </a:lnTo>
-                  <a:lnTo>
-                    <a:pt x="1626053" y="393004"/>
-                  </a:lnTo>
-                  <a:lnTo>
-                    <a:pt x="1548419" y="376764"/>
-                  </a:lnTo>
-                  <a:lnTo>
-                    <a:pt x="1470785" y="360293"/>
-                  </a:lnTo>
-                  <a:lnTo>
-                    <a:pt x="1393151" y="343588"/>
-                  </a:lnTo>
-                  <a:lnTo>
-                    <a:pt x="1315517" y="326645"/>
-                  </a:lnTo>
-                  <a:lnTo>
-                    <a:pt x="1237883" y="309462"/>
-                  </a:lnTo>
-                  <a:lnTo>
-                    <a:pt x="1160249" y="292034"/>
-                  </a:lnTo>
-                  <a:lnTo>
-                    <a:pt x="1082615" y="274358"/>
-                  </a:lnTo>
-                  <a:lnTo>
-                    <a:pt x="1004981" y="256431"/>
-                  </a:lnTo>
-                  <a:lnTo>
-                    <a:pt x="927346" y="238249"/>
-                  </a:lnTo>
-                  <a:lnTo>
-                    <a:pt x="849712" y="219809"/>
-                  </a:lnTo>
-                  <a:lnTo>
-                    <a:pt x="772078" y="201107"/>
-                  </a:lnTo>
-                  <a:lnTo>
-                    <a:pt x="694444" y="182138"/>
-                  </a:lnTo>
-                  <a:lnTo>
-                    <a:pt x="616810" y="162901"/>
-                  </a:lnTo>
-                  <a:lnTo>
-                    <a:pt x="539176" y="143389"/>
-                  </a:lnTo>
-                  <a:lnTo>
-                    <a:pt x="461542" y="123600"/>
-                  </a:lnTo>
-                  <a:lnTo>
-                    <a:pt x="383908" y="103530"/>
-                  </a:lnTo>
-                  <a:lnTo>
-                    <a:pt x="306274" y="83175"/>
-                  </a:lnTo>
-                  <a:lnTo>
-                    <a:pt x="228640" y="62530"/>
-                  </a:lnTo>
-                  <a:lnTo>
-                    <a:pt x="151006" y="41591"/>
-                  </a:lnTo>
-                  <a:lnTo>
-                    <a:pt x="73372" y="20355"/>
+                    <a:pt x="7183835" y="1381258"/>
+                  </a:lnTo>
+                  <a:lnTo>
+                    <a:pt x="7107366" y="1378434"/>
+                  </a:lnTo>
+                  <a:lnTo>
+                    <a:pt x="7030898" y="1375452"/>
+                  </a:lnTo>
+                  <a:lnTo>
+                    <a:pt x="6954429" y="1372305"/>
+                  </a:lnTo>
+                  <a:lnTo>
+                    <a:pt x="6877961" y="1368983"/>
+                  </a:lnTo>
+                  <a:lnTo>
+                    <a:pt x="6801492" y="1365476"/>
+                  </a:lnTo>
+                  <a:lnTo>
+                    <a:pt x="6725024" y="1361773"/>
+                  </a:lnTo>
+                  <a:lnTo>
+                    <a:pt x="6648556" y="1357866"/>
+                  </a:lnTo>
+                  <a:lnTo>
+                    <a:pt x="6572087" y="1353740"/>
+                  </a:lnTo>
+                  <a:lnTo>
+                    <a:pt x="6495619" y="1349386"/>
+                  </a:lnTo>
+                  <a:lnTo>
+                    <a:pt x="6419150" y="1344789"/>
+                  </a:lnTo>
+                  <a:lnTo>
+                    <a:pt x="6342682" y="1339937"/>
+                  </a:lnTo>
+                  <a:lnTo>
+                    <a:pt x="6266213" y="1334815"/>
+                  </a:lnTo>
+                  <a:lnTo>
+                    <a:pt x="6189745" y="1329408"/>
+                  </a:lnTo>
+                  <a:lnTo>
+                    <a:pt x="6113277" y="1323701"/>
+                  </a:lnTo>
+                  <a:lnTo>
+                    <a:pt x="6036808" y="1317676"/>
+                  </a:lnTo>
+                  <a:lnTo>
+                    <a:pt x="5960340" y="1311316"/>
+                  </a:lnTo>
+                  <a:lnTo>
+                    <a:pt x="5883871" y="1304603"/>
+                  </a:lnTo>
+                  <a:lnTo>
+                    <a:pt x="5807403" y="1297516"/>
+                  </a:lnTo>
+                  <a:lnTo>
+                    <a:pt x="5730934" y="1290036"/>
+                  </a:lnTo>
+                  <a:lnTo>
+                    <a:pt x="5654466" y="1282139"/>
+                  </a:lnTo>
+                  <a:lnTo>
+                    <a:pt x="5577998" y="1273804"/>
+                  </a:lnTo>
+                  <a:lnTo>
+                    <a:pt x="5501529" y="1265005"/>
+                  </a:lnTo>
+                  <a:lnTo>
+                    <a:pt x="5425061" y="1255716"/>
+                  </a:lnTo>
+                  <a:lnTo>
+                    <a:pt x="5348592" y="1245912"/>
+                  </a:lnTo>
+                  <a:lnTo>
+                    <a:pt x="5272124" y="1235562"/>
+                  </a:lnTo>
+                  <a:lnTo>
+                    <a:pt x="5195655" y="1224637"/>
+                  </a:lnTo>
+                  <a:lnTo>
+                    <a:pt x="5119187" y="1213104"/>
+                  </a:lnTo>
+                  <a:lnTo>
+                    <a:pt x="5042719" y="1200930"/>
+                  </a:lnTo>
+                  <a:lnTo>
+                    <a:pt x="4966250" y="1188079"/>
+                  </a:lnTo>
+                  <a:lnTo>
+                    <a:pt x="4889782" y="1174514"/>
+                  </a:lnTo>
+                  <a:lnTo>
+                    <a:pt x="4813313" y="1160194"/>
+                  </a:lnTo>
+                  <a:lnTo>
+                    <a:pt x="4736845" y="1145079"/>
+                  </a:lnTo>
+                  <a:lnTo>
+                    <a:pt x="4660376" y="1129123"/>
+                  </a:lnTo>
+                  <a:lnTo>
+                    <a:pt x="4583908" y="1112279"/>
+                  </a:lnTo>
+                  <a:lnTo>
+                    <a:pt x="4507439" y="1094499"/>
+                  </a:lnTo>
+                  <a:lnTo>
+                    <a:pt x="4430971" y="1075731"/>
+                  </a:lnTo>
+                  <a:lnTo>
+                    <a:pt x="4354503" y="1055919"/>
+                  </a:lnTo>
+                  <a:lnTo>
+                    <a:pt x="4278034" y="1035006"/>
+                  </a:lnTo>
+                  <a:lnTo>
+                    <a:pt x="4201566" y="1012930"/>
+                  </a:lnTo>
+                  <a:lnTo>
+                    <a:pt x="4125097" y="989626"/>
+                  </a:lnTo>
+                  <a:lnTo>
+                    <a:pt x="4048629" y="965027"/>
+                  </a:lnTo>
+                  <a:lnTo>
+                    <a:pt x="3972160" y="939060"/>
+                  </a:lnTo>
+                  <a:lnTo>
+                    <a:pt x="3895692" y="911649"/>
+                  </a:lnTo>
+                  <a:lnTo>
+                    <a:pt x="3819224" y="882714"/>
+                  </a:lnTo>
+                  <a:lnTo>
+                    <a:pt x="3742755" y="852170"/>
+                  </a:lnTo>
+                  <a:lnTo>
+                    <a:pt x="3666287" y="819928"/>
+                  </a:lnTo>
+                  <a:lnTo>
+                    <a:pt x="3589818" y="785894"/>
+                  </a:lnTo>
+                  <a:lnTo>
+                    <a:pt x="3513350" y="749967"/>
+                  </a:lnTo>
+                  <a:lnTo>
+                    <a:pt x="3436881" y="712043"/>
+                  </a:lnTo>
+                  <a:lnTo>
+                    <a:pt x="3360413" y="672010"/>
+                  </a:lnTo>
+                  <a:lnTo>
+                    <a:pt x="3283945" y="651019"/>
+                  </a:lnTo>
+                  <a:lnTo>
+                    <a:pt x="3207476" y="639915"/>
+                  </a:lnTo>
+                  <a:lnTo>
+                    <a:pt x="3131008" y="628654"/>
+                  </a:lnTo>
+                  <a:lnTo>
+                    <a:pt x="3054539" y="617232"/>
+                  </a:lnTo>
+                  <a:lnTo>
+                    <a:pt x="2978071" y="605648"/>
+                  </a:lnTo>
+                  <a:lnTo>
+                    <a:pt x="2901602" y="593899"/>
+                  </a:lnTo>
+                  <a:lnTo>
+                    <a:pt x="2825134" y="581983"/>
+                  </a:lnTo>
+                  <a:lnTo>
+                    <a:pt x="2748666" y="569898"/>
+                  </a:lnTo>
+                  <a:lnTo>
+                    <a:pt x="2672197" y="557641"/>
+                  </a:lnTo>
+                  <a:lnTo>
+                    <a:pt x="2595729" y="545209"/>
+                  </a:lnTo>
+                  <a:lnTo>
+                    <a:pt x="2519260" y="532601"/>
+                  </a:lnTo>
+                  <a:lnTo>
+                    <a:pt x="2442792" y="519814"/>
+                  </a:lnTo>
+                  <a:lnTo>
+                    <a:pt x="2366323" y="506845"/>
+                  </a:lnTo>
+                  <a:lnTo>
+                    <a:pt x="2289855" y="493691"/>
+                  </a:lnTo>
+                  <a:lnTo>
+                    <a:pt x="2213386" y="480351"/>
+                  </a:lnTo>
+                  <a:lnTo>
+                    <a:pt x="2136918" y="466821"/>
+                  </a:lnTo>
+                  <a:lnTo>
+                    <a:pt x="2060450" y="453098"/>
+                  </a:lnTo>
+                  <a:lnTo>
+                    <a:pt x="1983981" y="439181"/>
+                  </a:lnTo>
+                  <a:lnTo>
+                    <a:pt x="1907513" y="425065"/>
+                  </a:lnTo>
+                  <a:lnTo>
+                    <a:pt x="1831044" y="410749"/>
+                  </a:lnTo>
+                  <a:lnTo>
+                    <a:pt x="1754576" y="396230"/>
+                  </a:lnTo>
+                  <a:lnTo>
+                    <a:pt x="1678107" y="381504"/>
+                  </a:lnTo>
+                  <a:lnTo>
+                    <a:pt x="1601639" y="366568"/>
+                  </a:lnTo>
+                  <a:lnTo>
+                    <a:pt x="1525171" y="351420"/>
+                  </a:lnTo>
+                  <a:lnTo>
+                    <a:pt x="1448702" y="336057"/>
+                  </a:lnTo>
+                  <a:lnTo>
+                    <a:pt x="1372234" y="320476"/>
+                  </a:lnTo>
+                  <a:lnTo>
+                    <a:pt x="1295765" y="304673"/>
+                  </a:lnTo>
+                  <a:lnTo>
+                    <a:pt x="1219297" y="288645"/>
+                  </a:lnTo>
+                  <a:lnTo>
+                    <a:pt x="1142828" y="272390"/>
+                  </a:lnTo>
+                  <a:lnTo>
+                    <a:pt x="1066360" y="255903"/>
+                  </a:lnTo>
+                  <a:lnTo>
+                    <a:pt x="989892" y="239182"/>
+                  </a:lnTo>
+                  <a:lnTo>
+                    <a:pt x="913423" y="222223"/>
+                  </a:lnTo>
+                  <a:lnTo>
+                    <a:pt x="836955" y="205023"/>
+                  </a:lnTo>
+                  <a:lnTo>
+                    <a:pt x="760486" y="187579"/>
+                  </a:lnTo>
+                  <a:lnTo>
+                    <a:pt x="684018" y="169887"/>
+                  </a:lnTo>
+                  <a:lnTo>
+                    <a:pt x="607549" y="151943"/>
+                  </a:lnTo>
+                  <a:lnTo>
+                    <a:pt x="531081" y="133744"/>
+                  </a:lnTo>
+                  <a:lnTo>
+                    <a:pt x="454613" y="115286"/>
+                  </a:lnTo>
+                  <a:lnTo>
+                    <a:pt x="378144" y="96566"/>
+                  </a:lnTo>
+                  <a:lnTo>
+                    <a:pt x="301676" y="77580"/>
+                  </a:lnTo>
+                  <a:lnTo>
+                    <a:pt x="225207" y="58323"/>
+                  </a:lnTo>
+                  <a:lnTo>
+                    <a:pt x="148739" y="38794"/>
+                  </a:lnTo>
+                  <a:lnTo>
+                    <a:pt x="72270" y="18986"/>
                   </a:lnTo>
                   <a:lnTo>
                     <a:pt x="0" y="0"/>
@@ -4133,297 +4133,297 @@
           </p:nvSpPr>
           <p:spPr>
             <a:xfrm>
-              <a:off x="938035" y="2073503"/>
-              <a:ext cx="7250454" cy="3339745"/>
+              <a:off x="1034353" y="2209169"/>
+              <a:ext cx="7141594" cy="3115093"/>
             </a:xfrm>
             <a:custGeom>
               <a:avLst/>
               <a:pathLst>
-                <a:path w="7250454" h="3339745">
+                <a:path w="7141594" h="3115093">
                   <a:moveTo>
                     <a:pt x="0" y="0"/>
                   </a:moveTo>
                   <a:lnTo>
-                    <a:pt x="30488" y="46838"/>
-                  </a:lnTo>
-                  <a:lnTo>
-                    <a:pt x="108122" y="162104"/>
-                  </a:lnTo>
-                  <a:lnTo>
-                    <a:pt x="185756" y="273504"/>
-                  </a:lnTo>
-                  <a:lnTo>
-                    <a:pt x="263390" y="381168"/>
-                  </a:lnTo>
-                  <a:lnTo>
-                    <a:pt x="341024" y="485221"/>
-                  </a:lnTo>
-                  <a:lnTo>
-                    <a:pt x="418658" y="585785"/>
-                  </a:lnTo>
-                  <a:lnTo>
-                    <a:pt x="496292" y="682976"/>
-                  </a:lnTo>
-                  <a:lnTo>
-                    <a:pt x="573926" y="776907"/>
-                  </a:lnTo>
-                  <a:lnTo>
-                    <a:pt x="651560" y="867688"/>
-                  </a:lnTo>
-                  <a:lnTo>
-                    <a:pt x="729194" y="955425"/>
-                  </a:lnTo>
-                  <a:lnTo>
-                    <a:pt x="806828" y="1040219"/>
-                  </a:lnTo>
-                  <a:lnTo>
-                    <a:pt x="884462" y="1122169"/>
-                  </a:lnTo>
-                  <a:lnTo>
-                    <a:pt x="962096" y="1201371"/>
-                  </a:lnTo>
-                  <a:lnTo>
-                    <a:pt x="1039731" y="1277917"/>
-                  </a:lnTo>
-                  <a:lnTo>
-                    <a:pt x="1117365" y="1351895"/>
-                  </a:lnTo>
-                  <a:lnTo>
-                    <a:pt x="1194999" y="1423393"/>
-                  </a:lnTo>
-                  <a:lnTo>
-                    <a:pt x="1272633" y="1492492"/>
-                  </a:lnTo>
-                  <a:lnTo>
-                    <a:pt x="1350267" y="1559274"/>
-                  </a:lnTo>
-                  <a:lnTo>
-                    <a:pt x="1427901" y="1623816"/>
-                  </a:lnTo>
-                  <a:lnTo>
-                    <a:pt x="1505535" y="1686194"/>
-                  </a:lnTo>
-                  <a:lnTo>
-                    <a:pt x="1583169" y="1746480"/>
-                  </a:lnTo>
-                  <a:lnTo>
-                    <a:pt x="1660803" y="1804744"/>
-                  </a:lnTo>
-                  <a:lnTo>
-                    <a:pt x="1738437" y="1861054"/>
-                  </a:lnTo>
-                  <a:lnTo>
-                    <a:pt x="1816071" y="1915475"/>
-                  </a:lnTo>
-                  <a:lnTo>
-                    <a:pt x="1893705" y="1968071"/>
-                  </a:lnTo>
-                  <a:lnTo>
-                    <a:pt x="1971339" y="2018904"/>
-                  </a:lnTo>
-                  <a:lnTo>
-                    <a:pt x="2048973" y="2068031"/>
-                  </a:lnTo>
-                  <a:lnTo>
-                    <a:pt x="2126607" y="2115511"/>
-                  </a:lnTo>
-                  <a:lnTo>
-                    <a:pt x="2204241" y="2161398"/>
-                  </a:lnTo>
-                  <a:lnTo>
-                    <a:pt x="2281875" y="2205747"/>
-                  </a:lnTo>
-                  <a:lnTo>
-                    <a:pt x="2359509" y="2248608"/>
-                  </a:lnTo>
-                  <a:lnTo>
-                    <a:pt x="2437143" y="2290032"/>
-                  </a:lnTo>
-                  <a:lnTo>
-                    <a:pt x="2514777" y="2330066"/>
-                  </a:lnTo>
-                  <a:lnTo>
-                    <a:pt x="2592411" y="2368758"/>
-                  </a:lnTo>
-                  <a:lnTo>
-                    <a:pt x="2670045" y="2406152"/>
-                  </a:lnTo>
-                  <a:lnTo>
-                    <a:pt x="2747680" y="2442292"/>
-                  </a:lnTo>
-                  <a:lnTo>
-                    <a:pt x="2825314" y="2477220"/>
-                  </a:lnTo>
-                  <a:lnTo>
-                    <a:pt x="2902948" y="2510977"/>
-                  </a:lnTo>
-                  <a:lnTo>
-                    <a:pt x="2980582" y="2543601"/>
-                  </a:lnTo>
-                  <a:lnTo>
-                    <a:pt x="3058216" y="2575131"/>
-                  </a:lnTo>
-                  <a:lnTo>
-                    <a:pt x="3135850" y="2605604"/>
-                  </a:lnTo>
-                  <a:lnTo>
-                    <a:pt x="3213484" y="2635055"/>
-                  </a:lnTo>
-                  <a:lnTo>
-                    <a:pt x="3291118" y="2663518"/>
-                  </a:lnTo>
-                  <a:lnTo>
-                    <a:pt x="3368752" y="2691027"/>
-                  </a:lnTo>
-                  <a:lnTo>
-                    <a:pt x="3446386" y="2717613"/>
-                  </a:lnTo>
-                  <a:lnTo>
-                    <a:pt x="3524020" y="2743307"/>
-                  </a:lnTo>
-                  <a:lnTo>
-                    <a:pt x="3601654" y="2768140"/>
-                  </a:lnTo>
-                  <a:lnTo>
-                    <a:pt x="3679288" y="2792140"/>
-                  </a:lnTo>
-                  <a:lnTo>
-                    <a:pt x="3756922" y="2815334"/>
-                  </a:lnTo>
-                  <a:lnTo>
-                    <a:pt x="3834556" y="2837751"/>
-                  </a:lnTo>
-                  <a:lnTo>
-                    <a:pt x="3912190" y="2859417"/>
-                  </a:lnTo>
-                  <a:lnTo>
-                    <a:pt x="3989824" y="2880355"/>
-                  </a:lnTo>
-                  <a:lnTo>
-                    <a:pt x="4067458" y="2900592"/>
-                  </a:lnTo>
-                  <a:lnTo>
-                    <a:pt x="4145092" y="2920149"/>
-                  </a:lnTo>
-                  <a:lnTo>
-                    <a:pt x="4222726" y="2939051"/>
-                  </a:lnTo>
-                  <a:lnTo>
-                    <a:pt x="4300360" y="2957319"/>
-                  </a:lnTo>
-                  <a:lnTo>
-                    <a:pt x="4377994" y="2974974"/>
-                  </a:lnTo>
-                  <a:lnTo>
-                    <a:pt x="4455629" y="2992037"/>
-                  </a:lnTo>
-                  <a:lnTo>
-                    <a:pt x="4533263" y="3008528"/>
-                  </a:lnTo>
-                  <a:lnTo>
-                    <a:pt x="4610897" y="3024466"/>
-                  </a:lnTo>
-                  <a:lnTo>
-                    <a:pt x="4688531" y="3039869"/>
-                  </a:lnTo>
-                  <a:lnTo>
-                    <a:pt x="4766165" y="3054755"/>
-                  </a:lnTo>
-                  <a:lnTo>
-                    <a:pt x="4843799" y="3069143"/>
-                  </a:lnTo>
-                  <a:lnTo>
-                    <a:pt x="4921433" y="3083048"/>
-                  </a:lnTo>
-                  <a:lnTo>
-                    <a:pt x="4999067" y="3096486"/>
-                  </a:lnTo>
-                  <a:lnTo>
-                    <a:pt x="5076701" y="3109474"/>
-                  </a:lnTo>
-                  <a:lnTo>
-                    <a:pt x="5154335" y="3122026"/>
-                  </a:lnTo>
-                  <a:lnTo>
-                    <a:pt x="5231969" y="3134157"/>
-                  </a:lnTo>
-                  <a:lnTo>
-                    <a:pt x="5309603" y="3145882"/>
-                  </a:lnTo>
-                  <a:lnTo>
-                    <a:pt x="5387237" y="3157213"/>
-                  </a:lnTo>
-                  <a:lnTo>
-                    <a:pt x="5464871" y="3168164"/>
-                  </a:lnTo>
-                  <a:lnTo>
-                    <a:pt x="5542505" y="3178748"/>
-                  </a:lnTo>
-                  <a:lnTo>
-                    <a:pt x="5620139" y="3188977"/>
-                  </a:lnTo>
-                  <a:lnTo>
-                    <a:pt x="5697773" y="3198863"/>
-                  </a:lnTo>
-                  <a:lnTo>
-                    <a:pt x="5775407" y="3208417"/>
-                  </a:lnTo>
-                  <a:lnTo>
-                    <a:pt x="5853041" y="3217651"/>
-                  </a:lnTo>
-                  <a:lnTo>
-                    <a:pt x="5930675" y="3226575"/>
-                  </a:lnTo>
-                  <a:lnTo>
-                    <a:pt x="6008309" y="3235200"/>
-                  </a:lnTo>
-                  <a:lnTo>
-                    <a:pt x="6085943" y="3243536"/>
-                  </a:lnTo>
-                  <a:lnTo>
-                    <a:pt x="6163577" y="3251592"/>
-                  </a:lnTo>
-                  <a:lnTo>
-                    <a:pt x="6241212" y="3259378"/>
-                  </a:lnTo>
-                  <a:lnTo>
-                    <a:pt x="6318846" y="3266903"/>
-                  </a:lnTo>
-                  <a:lnTo>
-                    <a:pt x="6396480" y="3274175"/>
-                  </a:lnTo>
-                  <a:lnTo>
-                    <a:pt x="6474114" y="3281204"/>
-                  </a:lnTo>
-                  <a:lnTo>
-                    <a:pt x="6551748" y="3287997"/>
-                  </a:lnTo>
-                  <a:lnTo>
-                    <a:pt x="6629382" y="3294562"/>
-                  </a:lnTo>
-                  <a:lnTo>
-                    <a:pt x="6707016" y="3300906"/>
-                  </a:lnTo>
-                  <a:lnTo>
-                    <a:pt x="6784650" y="3307038"/>
-                  </a:lnTo>
-                  <a:lnTo>
-                    <a:pt x="6862284" y="3312965"/>
-                  </a:lnTo>
-                  <a:lnTo>
-                    <a:pt x="6939918" y="3318692"/>
-                  </a:lnTo>
-                  <a:lnTo>
-                    <a:pt x="7017552" y="3324228"/>
-                  </a:lnTo>
-                  <a:lnTo>
-                    <a:pt x="7095186" y="3329578"/>
-                  </a:lnTo>
-                  <a:lnTo>
-                    <a:pt x="7172820" y="3334748"/>
-                  </a:lnTo>
-                  <a:lnTo>
-                    <a:pt x="7250454" y="3339745"/>
+                    <a:pt x="30030" y="43687"/>
+                  </a:lnTo>
+                  <a:lnTo>
+                    <a:pt x="106499" y="151199"/>
+                  </a:lnTo>
+                  <a:lnTo>
+                    <a:pt x="182967" y="255106"/>
+                  </a:lnTo>
+                  <a:lnTo>
+                    <a:pt x="259435" y="355528"/>
+                  </a:lnTo>
+                  <a:lnTo>
+                    <a:pt x="335904" y="452582"/>
+                  </a:lnTo>
+                  <a:lnTo>
+                    <a:pt x="412372" y="546381"/>
+                  </a:lnTo>
+                  <a:lnTo>
+                    <a:pt x="488841" y="637035"/>
+                  </a:lnTo>
+                  <a:lnTo>
+                    <a:pt x="565309" y="724647"/>
+                  </a:lnTo>
+                  <a:lnTo>
+                    <a:pt x="641778" y="809322"/>
+                  </a:lnTo>
+                  <a:lnTo>
+                    <a:pt x="718246" y="891157"/>
+                  </a:lnTo>
+                  <a:lnTo>
+                    <a:pt x="794715" y="970247"/>
+                  </a:lnTo>
+                  <a:lnTo>
+                    <a:pt x="871183" y="1046685"/>
+                  </a:lnTo>
+                  <a:lnTo>
+                    <a:pt x="947651" y="1120559"/>
+                  </a:lnTo>
+                  <a:lnTo>
+                    <a:pt x="1024120" y="1191956"/>
+                  </a:lnTo>
+                  <a:lnTo>
+                    <a:pt x="1100588" y="1260958"/>
+                  </a:lnTo>
+                  <a:lnTo>
+                    <a:pt x="1177057" y="1327646"/>
+                  </a:lnTo>
+                  <a:lnTo>
+                    <a:pt x="1253525" y="1392098"/>
+                  </a:lnTo>
+                  <a:lnTo>
+                    <a:pt x="1329994" y="1454387"/>
+                  </a:lnTo>
+                  <a:lnTo>
+                    <a:pt x="1406462" y="1514588"/>
+                  </a:lnTo>
+                  <a:lnTo>
+                    <a:pt x="1482930" y="1572770"/>
+                  </a:lnTo>
+                  <a:lnTo>
+                    <a:pt x="1559399" y="1629001"/>
+                  </a:lnTo>
+                  <a:lnTo>
+                    <a:pt x="1635867" y="1683345"/>
+                  </a:lnTo>
+                  <a:lnTo>
+                    <a:pt x="1712336" y="1735867"/>
+                  </a:lnTo>
+                  <a:lnTo>
+                    <a:pt x="1788804" y="1786628"/>
+                  </a:lnTo>
+                  <a:lnTo>
+                    <a:pt x="1865273" y="1835686"/>
+                  </a:lnTo>
+                  <a:lnTo>
+                    <a:pt x="1941741" y="1883099"/>
+                  </a:lnTo>
+                  <a:lnTo>
+                    <a:pt x="2018209" y="1928922"/>
+                  </a:lnTo>
+                  <a:lnTo>
+                    <a:pt x="2094678" y="1973208"/>
+                  </a:lnTo>
+                  <a:lnTo>
+                    <a:pt x="2171146" y="2016009"/>
+                  </a:lnTo>
+                  <a:lnTo>
+                    <a:pt x="2247615" y="2057374"/>
+                  </a:lnTo>
+                  <a:lnTo>
+                    <a:pt x="2324083" y="2097352"/>
+                  </a:lnTo>
+                  <a:lnTo>
+                    <a:pt x="2400552" y="2135990"/>
+                  </a:lnTo>
+                  <a:lnTo>
+                    <a:pt x="2477020" y="2173331"/>
+                  </a:lnTo>
+                  <a:lnTo>
+                    <a:pt x="2553488" y="2209420"/>
+                  </a:lnTo>
+                  <a:lnTo>
+                    <a:pt x="2629957" y="2244299"/>
+                  </a:lnTo>
+                  <a:lnTo>
+                    <a:pt x="2706425" y="2278008"/>
+                  </a:lnTo>
+                  <a:lnTo>
+                    <a:pt x="2782894" y="2310587"/>
+                  </a:lnTo>
+                  <a:lnTo>
+                    <a:pt x="2859362" y="2342072"/>
+                  </a:lnTo>
+                  <a:lnTo>
+                    <a:pt x="2935831" y="2372502"/>
+                  </a:lnTo>
+                  <a:lnTo>
+                    <a:pt x="3012299" y="2401912"/>
+                  </a:lnTo>
+                  <a:lnTo>
+                    <a:pt x="3088768" y="2430335"/>
+                  </a:lnTo>
+                  <a:lnTo>
+                    <a:pt x="3165236" y="2457805"/>
+                  </a:lnTo>
+                  <a:lnTo>
+                    <a:pt x="3241704" y="2484353"/>
+                  </a:lnTo>
+                  <a:lnTo>
+                    <a:pt x="3318173" y="2510011"/>
+                  </a:lnTo>
+                  <a:lnTo>
+                    <a:pt x="3394641" y="2534809"/>
+                  </a:lnTo>
+                  <a:lnTo>
+                    <a:pt x="3471110" y="2558775"/>
+                  </a:lnTo>
+                  <a:lnTo>
+                    <a:pt x="3547578" y="2581937"/>
+                  </a:lnTo>
+                  <a:lnTo>
+                    <a:pt x="3624047" y="2604323"/>
+                  </a:lnTo>
+                  <a:lnTo>
+                    <a:pt x="3700515" y="2625957"/>
+                  </a:lnTo>
+                  <a:lnTo>
+                    <a:pt x="3776983" y="2646866"/>
+                  </a:lnTo>
+                  <a:lnTo>
+                    <a:pt x="3853452" y="2667074"/>
+                  </a:lnTo>
+                  <a:lnTo>
+                    <a:pt x="3929920" y="2686604"/>
+                  </a:lnTo>
+                  <a:lnTo>
+                    <a:pt x="4006389" y="2705479"/>
+                  </a:lnTo>
+                  <a:lnTo>
+                    <a:pt x="4082857" y="2723721"/>
+                  </a:lnTo>
+                  <a:lnTo>
+                    <a:pt x="4159326" y="2741352"/>
+                  </a:lnTo>
+                  <a:lnTo>
+                    <a:pt x="4235794" y="2758391"/>
+                  </a:lnTo>
+                  <a:lnTo>
+                    <a:pt x="4312262" y="2774858"/>
+                  </a:lnTo>
+                  <a:lnTo>
+                    <a:pt x="4388731" y="2790774"/>
+                  </a:lnTo>
+                  <a:lnTo>
+                    <a:pt x="4465199" y="2806155"/>
+                  </a:lnTo>
+                  <a:lnTo>
+                    <a:pt x="4541668" y="2821021"/>
+                  </a:lnTo>
+                  <a:lnTo>
+                    <a:pt x="4618136" y="2835388"/>
+                  </a:lnTo>
+                  <a:lnTo>
+                    <a:pt x="4694605" y="2849273"/>
+                  </a:lnTo>
+                  <a:lnTo>
+                    <a:pt x="4771073" y="2862693"/>
+                  </a:lnTo>
+                  <a:lnTo>
+                    <a:pt x="4847541" y="2875662"/>
+                  </a:lnTo>
+                  <a:lnTo>
+                    <a:pt x="4924010" y="2888197"/>
+                  </a:lnTo>
+                  <a:lnTo>
+                    <a:pt x="5000478" y="2900311"/>
+                  </a:lnTo>
+                  <a:lnTo>
+                    <a:pt x="5076947" y="2912019"/>
+                  </a:lnTo>
+                  <a:lnTo>
+                    <a:pt x="5153415" y="2923334"/>
+                  </a:lnTo>
+                  <a:lnTo>
+                    <a:pt x="5229884" y="2934270"/>
+                  </a:lnTo>
+                  <a:lnTo>
+                    <a:pt x="5306352" y="2944839"/>
+                  </a:lnTo>
+                  <a:lnTo>
+                    <a:pt x="5382821" y="2955053"/>
+                  </a:lnTo>
+                  <a:lnTo>
+                    <a:pt x="5459289" y="2964925"/>
+                  </a:lnTo>
+                  <a:lnTo>
+                    <a:pt x="5535757" y="2974466"/>
+                  </a:lnTo>
+                  <a:lnTo>
+                    <a:pt x="5612226" y="2983687"/>
+                  </a:lnTo>
+                  <a:lnTo>
+                    <a:pt x="5688694" y="2992599"/>
+                  </a:lnTo>
+                  <a:lnTo>
+                    <a:pt x="5765163" y="3001212"/>
+                  </a:lnTo>
+                  <a:lnTo>
+                    <a:pt x="5841631" y="3009536"/>
+                  </a:lnTo>
+                  <a:lnTo>
+                    <a:pt x="5918100" y="3017580"/>
+                  </a:lnTo>
+                  <a:lnTo>
+                    <a:pt x="5994568" y="3025355"/>
+                  </a:lnTo>
+                  <a:lnTo>
+                    <a:pt x="6071036" y="3032869"/>
+                  </a:lnTo>
+                  <a:lnTo>
+                    <a:pt x="6147505" y="3040132"/>
+                  </a:lnTo>
+                  <a:lnTo>
+                    <a:pt x="6223973" y="3047150"/>
+                  </a:lnTo>
+                  <a:lnTo>
+                    <a:pt x="6300442" y="3053933"/>
+                  </a:lnTo>
+                  <a:lnTo>
+                    <a:pt x="6376910" y="3060489"/>
+                  </a:lnTo>
+                  <a:lnTo>
+                    <a:pt x="6453379" y="3066825"/>
+                  </a:lnTo>
+                  <a:lnTo>
+                    <a:pt x="6529847" y="3072949"/>
+                  </a:lnTo>
+                  <a:lnTo>
+                    <a:pt x="6606315" y="3078867"/>
+                  </a:lnTo>
+                  <a:lnTo>
+                    <a:pt x="6682784" y="3084586"/>
+                  </a:lnTo>
+                  <a:lnTo>
+                    <a:pt x="6759252" y="3090114"/>
+                  </a:lnTo>
+                  <a:lnTo>
+                    <a:pt x="6835721" y="3095456"/>
+                  </a:lnTo>
+                  <a:lnTo>
+                    <a:pt x="6912189" y="3100619"/>
+                  </a:lnTo>
+                  <a:lnTo>
+                    <a:pt x="6988658" y="3105609"/>
+                  </a:lnTo>
+                  <a:lnTo>
+                    <a:pt x="7065126" y="3110432"/>
+                  </a:lnTo>
+                  <a:lnTo>
+                    <a:pt x="7141594" y="3115093"/>
                   </a:lnTo>
                 </a:path>
               </a:pathLst>
@@ -4452,21 +4452,21 @@
           </p:nvSpPr>
           <p:spPr>
             <a:xfrm>
-              <a:off x="817517" y="4727786"/>
-              <a:ext cx="7799693" cy="0"/>
+              <a:off x="915645" y="4684908"/>
+              <a:ext cx="7682587" cy="0"/>
             </a:xfrm>
             <a:custGeom>
               <a:avLst/>
               <a:pathLst>
-                <a:path w="7799693" h="0">
+                <a:path w="7682587" h="0">
                   <a:moveTo>
                     <a:pt x="0" y="0"/>
                   </a:moveTo>
                   <a:lnTo>
-                    <a:pt x="7799693" y="0"/>
-                  </a:lnTo>
-                  <a:lnTo>
-                    <a:pt x="7799693" y="0"/>
+                    <a:pt x="7682587" y="0"/>
+                  </a:lnTo>
+                  <a:lnTo>
+                    <a:pt x="7682587" y="0"/>
                   </a:lnTo>
                 </a:path>
               </a:pathLst>
@@ -4495,15 +4495,15 @@
           </p:nvSpPr>
           <p:spPr>
             <a:xfrm>
-              <a:off x="4203673" y="2073503"/>
-              <a:ext cx="0" cy="3649639"/>
+              <a:off x="4250960" y="2209169"/>
+              <a:ext cx="0" cy="3404141"/>
             </a:xfrm>
             <a:custGeom>
               <a:avLst/>
               <a:pathLst>
-                <a:path w="0" h="3649639">
+                <a:path w="0" h="3404141">
                   <a:moveTo>
-                    <a:pt x="0" y="3649639"/>
+                    <a:pt x="0" y="3404141"/>
                   </a:moveTo>
                   <a:lnTo>
                     <a:pt x="0" y="0"/>
@@ -4538,8 +4538,8 @@
           </p:nvSpPr>
           <p:spPr>
             <a:xfrm>
-              <a:off x="692708" y="5517199"/>
-              <a:ext cx="62179" cy="80101"/>
+              <a:off x="756929" y="5407599"/>
+              <a:ext cx="79004" cy="101955"/>
             </a:xfrm>
             <a:prstGeom prst="rect">
               <a:avLst/>
@@ -4552,7 +4552,7 @@
             <a:p>
               <a:pPr algn="l" marL="0" marR="0" indent="0">
                 <a:lnSpc>
-                  <a:spcPts val="880"/>
+                  <a:spcPts val="1120"/>
                 </a:lnSpc>
                 <a:spcBef>
                   <a:spcPts val="0"/>
@@ -4562,7 +4562,7 @@
                 </a:spcAft>
               </a:pPr>
               <a:r>
-                <a:rPr sz="880">
+                <a:rPr sz="1120">
                   <a:solidFill>
                     <a:srgbClr val="4D4D4D">
                       <a:alpha val="100000"/>
@@ -4584,8 +4584,8 @@
           </p:nvSpPr>
           <p:spPr>
             <a:xfrm>
-              <a:off x="692708" y="4687735"/>
-              <a:ext cx="62179" cy="80101"/>
+              <a:off x="756929" y="4633931"/>
+              <a:ext cx="79004" cy="101955"/>
             </a:xfrm>
             <a:prstGeom prst="rect">
               <a:avLst/>
@@ -4598,7 +4598,7 @@
             <a:p>
               <a:pPr algn="l" marL="0" marR="0" indent="0">
                 <a:lnSpc>
-                  <a:spcPts val="880"/>
+                  <a:spcPts val="1120"/>
                 </a:lnSpc>
                 <a:spcBef>
                   <a:spcPts val="0"/>
@@ -4608,7 +4608,7 @@
                 </a:spcAft>
               </a:pPr>
               <a:r>
-                <a:rPr sz="880">
+                <a:rPr sz="1120">
                   <a:solidFill>
                     <a:srgbClr val="4D4D4D">
                       <a:alpha val="100000"/>
@@ -4630,8 +4630,8 @@
           </p:nvSpPr>
           <p:spPr>
             <a:xfrm>
-              <a:off x="692708" y="3858272"/>
-              <a:ext cx="62179" cy="80101"/>
+              <a:off x="756929" y="3860262"/>
+              <a:ext cx="79004" cy="101955"/>
             </a:xfrm>
             <a:prstGeom prst="rect">
               <a:avLst/>
@@ -4644,7 +4644,7 @@
             <a:p>
               <a:pPr algn="l" marL="0" marR="0" indent="0">
                 <a:lnSpc>
-                  <a:spcPts val="880"/>
+                  <a:spcPts val="1120"/>
                 </a:lnSpc>
                 <a:spcBef>
                   <a:spcPts val="0"/>
@@ -4654,7 +4654,7 @@
                 </a:spcAft>
               </a:pPr>
               <a:r>
-                <a:rPr sz="880">
+                <a:rPr sz="1120">
                   <a:solidFill>
                     <a:srgbClr val="4D4D4D">
                       <a:alpha val="100000"/>
@@ -4676,8 +4676,8 @@
           </p:nvSpPr>
           <p:spPr>
             <a:xfrm>
-              <a:off x="692708" y="3028808"/>
-              <a:ext cx="62179" cy="80101"/>
+              <a:off x="756929" y="3086593"/>
+              <a:ext cx="79004" cy="101955"/>
             </a:xfrm>
             <a:prstGeom prst="rect">
               <a:avLst/>
@@ -4690,7 +4690,7 @@
             <a:p>
               <a:pPr algn="l" marL="0" marR="0" indent="0">
                 <a:lnSpc>
-                  <a:spcPts val="880"/>
+                  <a:spcPts val="1120"/>
                 </a:lnSpc>
                 <a:spcBef>
                   <a:spcPts val="0"/>
@@ -4700,7 +4700,7 @@
                 </a:spcAft>
               </a:pPr>
               <a:r>
-                <a:rPr sz="880">
+                <a:rPr sz="1120">
                   <a:solidFill>
                     <a:srgbClr val="4D4D4D">
                       <a:alpha val="100000"/>
@@ -4722,8 +4722,8 @@
           </p:nvSpPr>
           <p:spPr>
             <a:xfrm>
-              <a:off x="692708" y="2199345"/>
-              <a:ext cx="62179" cy="80101"/>
+              <a:off x="756929" y="2312925"/>
+              <a:ext cx="79004" cy="101955"/>
             </a:xfrm>
             <a:prstGeom prst="rect">
               <a:avLst/>
@@ -4736,7 +4736,7 @@
             <a:p>
               <a:pPr algn="l" marL="0" marR="0" indent="0">
                 <a:lnSpc>
-                  <a:spcPts val="880"/>
+                  <a:spcPts val="1120"/>
                 </a:lnSpc>
                 <a:spcBef>
                   <a:spcPts val="0"/>
@@ -4746,7 +4746,7 @@
                 </a:spcAft>
               </a:pPr>
               <a:r>
-                <a:rPr sz="880">
+                <a:rPr sz="1120">
                   <a:solidFill>
                     <a:srgbClr val="4D4D4D">
                       <a:alpha val="100000"/>
@@ -4768,8 +4768,8 @@
           </p:nvSpPr>
           <p:spPr>
             <a:xfrm>
-              <a:off x="2423864" y="5785772"/>
-              <a:ext cx="155356" cy="80101"/>
+              <a:off x="2475630" y="5693022"/>
+              <a:ext cx="197510" cy="101955"/>
             </a:xfrm>
             <a:prstGeom prst="rect">
               <a:avLst/>
@@ -4782,7 +4782,7 @@
             <a:p>
               <a:pPr algn="l" marL="0" marR="0" indent="0">
                 <a:lnSpc>
-                  <a:spcPts val="880"/>
+                  <a:spcPts val="1120"/>
                 </a:lnSpc>
                 <a:spcBef>
                   <a:spcPts val="0"/>
@@ -4792,7 +4792,7 @@
                 </a:spcAft>
               </a:pPr>
               <a:r>
-                <a:rPr sz="880">
+                <a:rPr sz="1120">
                   <a:solidFill>
                     <a:srgbClr val="4D4D4D">
                       <a:alpha val="100000"/>
@@ -4814,8 +4814,8 @@
           </p:nvSpPr>
           <p:spPr>
             <a:xfrm>
-              <a:off x="4196521" y="5785772"/>
-              <a:ext cx="155356" cy="80101"/>
+              <a:off x="4221672" y="5693022"/>
+              <a:ext cx="197510" cy="101955"/>
             </a:xfrm>
             <a:prstGeom prst="rect">
               <a:avLst/>
@@ -4828,7 +4828,7 @@
             <a:p>
               <a:pPr algn="l" marL="0" marR="0" indent="0">
                 <a:lnSpc>
-                  <a:spcPts val="880"/>
+                  <a:spcPts val="1120"/>
                 </a:lnSpc>
                 <a:spcBef>
                   <a:spcPts val="0"/>
@@ -4838,7 +4838,7 @@
                 </a:spcAft>
               </a:pPr>
               <a:r>
-                <a:rPr sz="880">
+                <a:rPr sz="1120">
                   <a:solidFill>
                     <a:srgbClr val="4D4D4D">
                       <a:alpha val="100000"/>
@@ -4860,8 +4860,8 @@
           </p:nvSpPr>
           <p:spPr>
             <a:xfrm>
-              <a:off x="5969179" y="5785772"/>
-              <a:ext cx="155356" cy="80101"/>
+              <a:off x="5967715" y="5693022"/>
+              <a:ext cx="197510" cy="101955"/>
             </a:xfrm>
             <a:prstGeom prst="rect">
               <a:avLst/>
@@ -4874,7 +4874,7 @@
             <a:p>
               <a:pPr algn="l" marL="0" marR="0" indent="0">
                 <a:lnSpc>
-                  <a:spcPts val="880"/>
+                  <a:spcPts val="1120"/>
                 </a:lnSpc>
                 <a:spcBef>
                   <a:spcPts val="0"/>
@@ -4884,7 +4884,7 @@
                 </a:spcAft>
               </a:pPr>
               <a:r>
-                <a:rPr sz="880">
+                <a:rPr sz="1120">
                   <a:solidFill>
                     <a:srgbClr val="4D4D4D">
                       <a:alpha val="100000"/>
@@ -4906,8 +4906,8 @@
           </p:nvSpPr>
           <p:spPr>
             <a:xfrm>
-              <a:off x="7741836" y="5785772"/>
-              <a:ext cx="155356" cy="80101"/>
+              <a:off x="7713757" y="5693022"/>
+              <a:ext cx="197510" cy="101955"/>
             </a:xfrm>
             <a:prstGeom prst="rect">
               <a:avLst/>
@@ -4920,7 +4920,7 @@
             <a:p>
               <a:pPr algn="l" marL="0" marR="0" indent="0">
                 <a:lnSpc>
-                  <a:spcPts val="880"/>
+                  <a:spcPts val="1120"/>
                 </a:lnSpc>
                 <a:spcBef>
                   <a:spcPts val="0"/>
@@ -4930,7 +4930,7 @@
                 </a:spcAft>
               </a:pPr>
               <a:r>
-                <a:rPr sz="880">
+                <a:rPr sz="1120">
                   <a:solidFill>
                     <a:srgbClr val="4D4D4D">
                       <a:alpha val="100000"/>
@@ -4952,8 +4952,8 @@
           </p:nvSpPr>
           <p:spPr>
             <a:xfrm>
-              <a:off x="3879271" y="5925448"/>
-              <a:ext cx="1676186" cy="100218"/>
+              <a:off x="3690153" y="5870717"/>
+              <a:ext cx="2133569" cy="127558"/>
             </a:xfrm>
             <a:prstGeom prst="rect">
               <a:avLst/>
@@ -4966,7 +4966,7 @@
             <a:p>
               <a:pPr algn="l" marL="0" marR="0" indent="0">
                 <a:lnSpc>
-                  <a:spcPts val="1100"/>
+                  <a:spcPts val="1400"/>
                 </a:lnSpc>
                 <a:spcBef>
                   <a:spcPts val="0"/>
@@ -4976,7 +4976,7 @@
                 </a:spcAft>
               </a:pPr>
               <a:r>
-                <a:rPr sz="1100">
+                <a:rPr sz="1400">
                   <a:solidFill>
                     <a:srgbClr val="000000">
                       <a:alpha val="100000"/>
@@ -4998,8 +4998,8 @@
           </p:nvSpPr>
           <p:spPr>
             <a:xfrm rot="-5400000">
-              <a:off x="68446" y="3848213"/>
-              <a:ext cx="1016904" cy="100218"/>
+              <a:off x="-37527" y="3847460"/>
+              <a:ext cx="1294150" cy="127558"/>
             </a:xfrm>
             <a:prstGeom prst="rect">
               <a:avLst/>
@@ -5012,7 +5012,7 @@
             <a:p>
               <a:pPr algn="l" marL="0" marR="0" indent="0">
                 <a:lnSpc>
-                  <a:spcPts val="1100"/>
+                  <a:spcPts val="1400"/>
                 </a:lnSpc>
                 <a:spcBef>
                   <a:spcPts val="0"/>
@@ -5022,7 +5022,7 @@
                 </a:spcAft>
               </a:pPr>
               <a:r>
-                <a:rPr sz="1100">
+                <a:rPr sz="1400">
                   <a:solidFill>
                     <a:srgbClr val="000000">
                       <a:alpha val="100000"/>
@@ -5044,8 +5044,8 @@
           </p:nvSpPr>
           <p:spPr>
             <a:xfrm>
-              <a:off x="817517" y="1896563"/>
-              <a:ext cx="4233214" cy="82021"/>
+              <a:off x="915645" y="1977589"/>
+              <a:ext cx="5645871" cy="109362"/>
             </a:xfrm>
             <a:prstGeom prst="rect">
               <a:avLst/>
@@ -5058,7 +5058,7 @@
             <a:p>
               <a:pPr algn="l" marL="0" marR="0" indent="0">
                 <a:lnSpc>
-                  <a:spcPts val="900"/>
+                  <a:spcPts val="1200"/>
                 </a:lnSpc>
                 <a:spcBef>
                   <a:spcPts val="0"/>
@@ -5068,7 +5068,7 @@
                 </a:spcAft>
               </a:pPr>
               <a:r>
-                <a:rPr sz="900">
+                <a:rPr sz="1200">
                   <a:solidFill>
                     <a:srgbClr val="404040">
                       <a:alpha val="100000"/>
@@ -5090,8 +5090,8 @@
           </p:nvSpPr>
           <p:spPr>
             <a:xfrm>
-              <a:off x="817517" y="1669789"/>
-              <a:ext cx="2681569" cy="120152"/>
+              <a:off x="915645" y="1688767"/>
+              <a:ext cx="3413729" cy="153070"/>
             </a:xfrm>
             <a:prstGeom prst="rect">
               <a:avLst/>
@@ -5104,7 +5104,7 @@
             <a:p>
               <a:pPr algn="l" marL="0" marR="0" indent="0">
                 <a:lnSpc>
-                  <a:spcPts val="1320"/>
+                  <a:spcPts val="1680"/>
                 </a:lnSpc>
                 <a:spcBef>
                   <a:spcPts val="0"/>
@@ -5114,7 +5114,7 @@
                 </a:spcAft>
               </a:pPr>
               <a:r>
-                <a:rPr sz="1320">
+                <a:rPr sz="1680">
                   <a:solidFill>
                     <a:srgbClr val="000000">
                       <a:alpha val="100000"/>
